--- a/docs/Diagrama_de_contenidos.pptx
+++ b/docs/Diagrama_de_contenidos.pptx
@@ -13,8 +13,8 @@
 </file>
 
 <file path=ppt/slideLayouts/slideLayout1.xml><?xml version="1.0" encoding="utf-8"?>
-<p:sldLayout xmlns:a="http://schemas.openxmlformats.org/drawingml/2006/main" xmlns:p="http://schemas.openxmlformats.org/presentationml/2006/main" xmlns:r="http://schemas.openxmlformats.org/officeDocument/2006/relationships" xmlns:p14="http://schemas.microsoft.com/office/powerpoint/2010/main" xmlns:p15="http://schemas.microsoft.com/office/powerpoint/2012/main" xmlns:mc="http://schemas.openxmlformats.org/markup-compatibility/2006" type="blank" preserve="1">
-  <p:cSld name="Imagen con título">
+<p:sldLayout xmlns:a="http://schemas.openxmlformats.org/drawingml/2006/main" xmlns:p="http://schemas.openxmlformats.org/presentationml/2006/main" xmlns:r="http://schemas.openxmlformats.org/officeDocument/2006/relationships" xmlns:p14="http://schemas.microsoft.com/office/powerpoint/2010/main" xmlns:p15="http://schemas.microsoft.com/office/powerpoint/2012/main" xmlns:mc="http://schemas.openxmlformats.org/markup-compatibility/2006" type="titleOnly" preserve="1">
+  <p:cSld name="Solo el título">
     <p:bg>
       <p:bgPr>
         <a:solidFill>
@@ -48,8 +48,8 @@
         </p:nvSpPr>
         <p:spPr>
           <a:xfrm>
-            <a:off x="839880" y="457200"/>
-            <a:ext cx="3930480" cy="1598400"/>
+            <a:off x="838080" y="365040"/>
+            <a:ext cx="10513440" cy="1323360"/>
           </a:xfrm>
           <a:prstGeom prst="rect">
             <a:avLst/>
@@ -60,7 +60,7 @@
           </a:ln>
         </p:spPr>
         <p:txBody>
-          <a:bodyPr lIns="91440" rIns="91440" tIns="45720" bIns="45720" anchor="b">
+          <a:bodyPr lIns="91440" rIns="91440" tIns="45720" bIns="45720" anchor="ctr">
             <a:noAutofit/>
           </a:bodyPr>
           <a:p>
@@ -74,7 +74,7 @@
               </a:tabLst>
             </a:pPr>
             <a:r>
-              <a:rPr b="0" lang="es-ES" sz="3200" strike="noStrike" u="none">
+              <a:rPr b="0" lang="es-ES" sz="4400" strike="noStrike" u="none">
                 <a:solidFill>
                   <a:schemeClr val="dk1"/>
                 </a:solidFill>
@@ -84,7 +84,7 @@
               </a:rPr>
               <a:t>Haga clic para modificar el estilo de título del patrón</a:t>
             </a:r>
-            <a:endParaRPr b="0" lang="es-ES" sz="3200" strike="noStrike" u="none">
+            <a:endParaRPr b="0" lang="es-ES" sz="4400" strike="noStrike" u="none">
               <a:solidFill>
                 <a:srgbClr val="000000"/>
               </a:solidFill>
@@ -102,13 +102,13 @@
             <a:spLocks noGrp="1"/>
           </p:cNvSpPr>
           <p:nvPr>
-            <p:ph type="body"/>
+            <p:ph type="dt" idx="1"/>
           </p:nvPr>
         </p:nvSpPr>
         <p:spPr>
           <a:xfrm>
-            <a:off x="5183280" y="987480"/>
-            <a:ext cx="6170400" cy="4871880"/>
+            <a:off x="838080" y="6356520"/>
+            <a:ext cx="2741040" cy="362880"/>
           </a:xfrm>
           <a:prstGeom prst="rect">
             <a:avLst/>
@@ -119,252 +119,60 @@
           </a:ln>
         </p:spPr>
         <p:txBody>
-          <a:bodyPr lIns="90000" rIns="90000" tIns="45000" bIns="45000" anchor="t">
+          <a:bodyPr lIns="91440" rIns="91440" tIns="45720" bIns="45720" anchor="ctr">
             <a:noAutofit/>
           </a:bodyPr>
-          <a:p>
-            <a:pPr marL="432000" indent="-324000">
-              <a:lnSpc>
-                <a:spcPct val="90000"/>
-              </a:lnSpc>
-              <a:spcBef>
-                <a:spcPts val="1417"/>
-              </a:spcBef>
-              <a:buClr>
-                <a:srgbClr val="000000"/>
-              </a:buClr>
-              <a:buSzPct val="45000"/>
-              <a:buFont typeface="Wingdings" charset="2"/>
-              <a:buChar char=""/>
-            </a:pPr>
-            <a:r>
-              <a:rPr b="0" lang="es-ES" sz="3200" strike="noStrike" u="none">
-                <a:solidFill>
-                  <a:schemeClr val="dk1"/>
-                </a:solidFill>
-                <a:effectLst/>
-                <a:uFillTx/>
-                <a:latin typeface="Calibri"/>
-              </a:rPr>
-              <a:t>Pulse para editar el formato de texto del esquema</a:t>
-            </a:r>
-            <a:endParaRPr b="0" lang="es-ES" sz="3200" strike="noStrike" u="none">
-              <a:solidFill>
-                <a:srgbClr val="000000"/>
-              </a:solidFill>
-              <a:effectLst/>
-              <a:uFillTx/>
-              <a:latin typeface="Arial"/>
-            </a:endParaRPr>
-          </a:p>
-          <a:p>
-            <a:pPr lvl="1" marL="864000" indent="-324000">
-              <a:lnSpc>
-                <a:spcPct val="90000"/>
-              </a:lnSpc>
-              <a:spcBef>
-                <a:spcPts val="1134"/>
-              </a:spcBef>
-              <a:buClr>
-                <a:srgbClr val="000000"/>
-              </a:buClr>
-              <a:buSzPct val="75000"/>
-              <a:buFont typeface="Symbol" charset="2"/>
-              <a:buChar char=""/>
-            </a:pPr>
-            <a:r>
-              <a:rPr b="0" lang="es-ES" sz="3200" strike="noStrike" u="none">
-                <a:solidFill>
-                  <a:schemeClr val="dk1"/>
-                </a:solidFill>
-                <a:effectLst/>
-                <a:uFillTx/>
-                <a:latin typeface="Calibri"/>
-              </a:rPr>
-              <a:t>Segundo nivel del esquema</a:t>
-            </a:r>
-            <a:endParaRPr b="0" lang="es-ES" sz="3200" strike="noStrike" u="none">
-              <a:solidFill>
-                <a:srgbClr val="000000"/>
-              </a:solidFill>
-              <a:effectLst/>
-              <a:uFillTx/>
-              <a:latin typeface="Arial"/>
-            </a:endParaRPr>
-          </a:p>
-          <a:p>
-            <a:pPr lvl="2" marL="1296000" indent="-288000">
-              <a:lnSpc>
-                <a:spcPct val="90000"/>
-              </a:lnSpc>
-              <a:spcBef>
-                <a:spcPts val="850"/>
-              </a:spcBef>
-              <a:buClr>
-                <a:srgbClr val="000000"/>
-              </a:buClr>
-              <a:buSzPct val="45000"/>
-              <a:buFont typeface="Wingdings" charset="2"/>
-              <a:buChar char=""/>
-            </a:pPr>
-            <a:r>
-              <a:rPr b="0" lang="es-ES" sz="3200" strike="noStrike" u="none">
-                <a:solidFill>
-                  <a:schemeClr val="dk1"/>
-                </a:solidFill>
-                <a:effectLst/>
-                <a:uFillTx/>
-                <a:latin typeface="Calibri"/>
-              </a:rPr>
-              <a:t>Tercer nivel del esquema</a:t>
-            </a:r>
-            <a:endParaRPr b="0" lang="es-ES" sz="3200" strike="noStrike" u="none">
-              <a:solidFill>
-                <a:srgbClr val="000000"/>
-              </a:solidFill>
-              <a:effectLst/>
-              <a:uFillTx/>
-              <a:latin typeface="Arial"/>
-            </a:endParaRPr>
-          </a:p>
-          <a:p>
-            <a:pPr lvl="3" marL="1728000" indent="-216000">
-              <a:lnSpc>
-                <a:spcPct val="90000"/>
-              </a:lnSpc>
-              <a:spcBef>
-                <a:spcPts val="567"/>
-              </a:spcBef>
-              <a:buClr>
-                <a:srgbClr val="000000"/>
-              </a:buClr>
-              <a:buSzPct val="75000"/>
-              <a:buFont typeface="Symbol" charset="2"/>
-              <a:buChar char=""/>
-            </a:pPr>
-            <a:r>
-              <a:rPr b="0" lang="es-ES" sz="3200" strike="noStrike" u="none">
-                <a:solidFill>
-                  <a:schemeClr val="dk1"/>
-                </a:solidFill>
-                <a:effectLst/>
-                <a:uFillTx/>
-                <a:latin typeface="Calibri"/>
-              </a:rPr>
-              <a:t>Cuarto nivel del esquema</a:t>
-            </a:r>
-            <a:endParaRPr b="0" lang="es-ES" sz="3200" strike="noStrike" u="none">
-              <a:solidFill>
-                <a:srgbClr val="000000"/>
-              </a:solidFill>
-              <a:effectLst/>
-              <a:uFillTx/>
-              <a:latin typeface="Arial"/>
-            </a:endParaRPr>
-          </a:p>
-          <a:p>
-            <a:pPr lvl="4" marL="2160000" indent="-216000">
-              <a:lnSpc>
-                <a:spcPct val="90000"/>
-              </a:lnSpc>
-              <a:spcBef>
-                <a:spcPts val="283"/>
-              </a:spcBef>
-              <a:buClr>
-                <a:srgbClr val="000000"/>
-              </a:buClr>
-              <a:buSzPct val="45000"/>
-              <a:buFont typeface="Wingdings" charset="2"/>
-              <a:buChar char=""/>
-            </a:pPr>
-            <a:r>
-              <a:rPr b="0" lang="es-ES" sz="3200" strike="noStrike" u="none">
-                <a:solidFill>
-                  <a:schemeClr val="dk1"/>
-                </a:solidFill>
-                <a:effectLst/>
-                <a:uFillTx/>
-                <a:latin typeface="Calibri"/>
-              </a:rPr>
-              <a:t>Quinto nivel del esquema</a:t>
-            </a:r>
-            <a:endParaRPr b="0" lang="es-ES" sz="3200" strike="noStrike" u="none">
-              <a:solidFill>
-                <a:srgbClr val="000000"/>
-              </a:solidFill>
-              <a:effectLst/>
-              <a:uFillTx/>
-              <a:latin typeface="Arial"/>
-            </a:endParaRPr>
-          </a:p>
-          <a:p>
-            <a:pPr lvl="5" marL="2592000" indent="-216000">
-              <a:lnSpc>
-                <a:spcPct val="90000"/>
-              </a:lnSpc>
-              <a:spcBef>
-                <a:spcPts val="283"/>
-              </a:spcBef>
-              <a:buClr>
-                <a:srgbClr val="000000"/>
-              </a:buClr>
-              <a:buSzPct val="45000"/>
-              <a:buFont typeface="Wingdings" charset="2"/>
-              <a:buChar char=""/>
-            </a:pPr>
-            <a:r>
-              <a:rPr b="0" lang="es-ES" sz="3200" strike="noStrike" u="none">
-                <a:solidFill>
-                  <a:schemeClr val="dk1"/>
-                </a:solidFill>
-                <a:effectLst/>
-                <a:uFillTx/>
-                <a:latin typeface="Calibri"/>
-              </a:rPr>
-              <a:t>Sexto nivel del esquema</a:t>
-            </a:r>
-            <a:endParaRPr b="0" lang="es-ES" sz="3200" strike="noStrike" u="none">
-              <a:solidFill>
-                <a:srgbClr val="000000"/>
-              </a:solidFill>
-              <a:effectLst/>
-              <a:uFillTx/>
-              <a:latin typeface="Arial"/>
-            </a:endParaRPr>
-          </a:p>
-          <a:p>
-            <a:pPr lvl="6" marL="3024000" indent="-216000">
-              <a:lnSpc>
-                <a:spcPct val="90000"/>
-              </a:lnSpc>
-              <a:spcBef>
-                <a:spcPts val="283"/>
-              </a:spcBef>
-              <a:buClr>
-                <a:srgbClr val="000000"/>
-              </a:buClr>
-              <a:buSzPct val="45000"/>
-              <a:buFont typeface="Wingdings" charset="2"/>
-              <a:buChar char=""/>
-            </a:pPr>
-            <a:r>
-              <a:rPr b="0" lang="es-ES" sz="3200" strike="noStrike" u="none">
-                <a:solidFill>
-                  <a:schemeClr val="dk1"/>
-                </a:solidFill>
-                <a:effectLst/>
-                <a:uFillTx/>
-                <a:latin typeface="Calibri"/>
-              </a:rPr>
-              <a:t>Séptimo nivel del esquema</a:t>
-            </a:r>
-            <a:endParaRPr b="0" lang="es-ES" sz="3200" strike="noStrike" u="none">
-              <a:solidFill>
-                <a:srgbClr val="000000"/>
-              </a:solidFill>
-              <a:effectLst/>
-              <a:uFillTx/>
-              <a:latin typeface="Arial"/>
+          <a:lstStyle>
+            <a:lvl1pPr indent="0" defTabSz="914400">
+              <a:lnSpc>
+                <a:spcPct val="100000"/>
+              </a:lnSpc>
+              <a:buNone/>
+              <a:tabLst>
+                <a:tab algn="l" pos="0"/>
+              </a:tabLst>
+              <a:defRPr b="0" lang="en-GB" sz="1200" strike="noStrike" u="none">
+                <a:solidFill>
+                  <a:schemeClr val="dk1">
+                    <a:tint val="75000"/>
+                  </a:schemeClr>
+                </a:solidFill>
+                <a:effectLst/>
+                <a:uFillTx/>
+                <a:latin typeface="Calibri"/>
+              </a:defRPr>
+            </a:lvl1pPr>
+          </a:lstStyle>
+          <a:p>
+            <a:pPr indent="0" defTabSz="914400">
+              <a:lnSpc>
+                <a:spcPct val="100000"/>
+              </a:lnSpc>
+              <a:buNone/>
+              <a:tabLst>
+                <a:tab algn="l" pos="0"/>
+              </a:tabLst>
+            </a:pPr>
+            <a:r>
+              <a:rPr b="0" lang="en-GB" sz="1200" strike="noStrike" u="none">
+                <a:solidFill>
+                  <a:schemeClr val="dk1">
+                    <a:tint val="75000"/>
+                  </a:schemeClr>
+                </a:solidFill>
+                <a:effectLst/>
+                <a:uFillTx/>
+                <a:latin typeface="Calibri"/>
+              </a:rPr>
+              <a:t>&lt;fecha/hora&gt;</a:t>
+            </a:r>
+            <a:endParaRPr b="0" lang="es-ES" sz="1200" strike="noStrike" u="none">
+              <a:solidFill>
+                <a:srgbClr val="000000"/>
+              </a:solidFill>
+              <a:effectLst/>
+              <a:uFillTx/>
+              <a:latin typeface="Times New Roman"/>
             </a:endParaRPr>
           </a:p>
         </p:txBody>
@@ -376,13 +184,13 @@
             <a:spLocks noGrp="1"/>
           </p:cNvSpPr>
           <p:nvPr>
-            <p:ph type="body"/>
+            <p:ph type="ftr" idx="2"/>
           </p:nvPr>
         </p:nvSpPr>
         <p:spPr>
           <a:xfrm>
-            <a:off x="839880" y="2057400"/>
-            <a:ext cx="3930480" cy="3809880"/>
+            <a:off x="4038480" y="6356520"/>
+            <a:ext cx="4112640" cy="362880"/>
           </a:xfrm>
           <a:prstGeom prst="rect">
             <a:avLst/>
@@ -393,40 +201,56 @@
           </a:ln>
         </p:spPr>
         <p:txBody>
-          <a:bodyPr lIns="91440" rIns="91440" tIns="45720" bIns="45720" anchor="t">
+          <a:bodyPr lIns="91440" rIns="91440" tIns="45720" bIns="45720" anchor="ctr">
             <a:noAutofit/>
           </a:bodyPr>
-          <a:p>
-            <a:pPr indent="0" defTabSz="914400">
-              <a:lnSpc>
-                <a:spcPct val="90000"/>
-              </a:lnSpc>
-              <a:spcBef>
-                <a:spcPts val="1001"/>
-              </a:spcBef>
-              <a:buNone/>
-              <a:tabLst>
-                <a:tab algn="l" pos="0"/>
-              </a:tabLst>
-            </a:pPr>
-            <a:r>
-              <a:rPr b="0" lang="es-ES" sz="1600" strike="noStrike" u="none">
-                <a:solidFill>
-                  <a:schemeClr val="dk1"/>
-                </a:solidFill>
-                <a:effectLst/>
-                <a:uFillTx/>
-                <a:latin typeface="Calibri"/>
-              </a:rPr>
-              <a:t>Haga clic para modificar los estilos de texto del patrón</a:t>
-            </a:r>
-            <a:endParaRPr b="0" lang="es-ES" sz="1600" strike="noStrike" u="none">
-              <a:solidFill>
-                <a:srgbClr val="000000"/>
-              </a:solidFill>
-              <a:effectLst/>
-              <a:uFillTx/>
-              <a:latin typeface="Arial"/>
+          <a:lstStyle>
+            <a:lvl1pPr indent="0" algn="ctr">
+              <a:lnSpc>
+                <a:spcPct val="100000"/>
+              </a:lnSpc>
+              <a:buNone/>
+              <a:tabLst>
+                <a:tab algn="l" pos="0"/>
+              </a:tabLst>
+              <a:defRPr b="0" lang="es-ES" sz="1400" strike="noStrike" u="none">
+                <a:solidFill>
+                  <a:srgbClr val="000000"/>
+                </a:solidFill>
+                <a:effectLst/>
+                <a:uFillTx/>
+                <a:latin typeface="Times New Roman"/>
+              </a:defRPr>
+            </a:lvl1pPr>
+          </a:lstStyle>
+          <a:p>
+            <a:pPr indent="0" algn="ctr">
+              <a:lnSpc>
+                <a:spcPct val="100000"/>
+              </a:lnSpc>
+              <a:buNone/>
+              <a:tabLst>
+                <a:tab algn="l" pos="0"/>
+              </a:tabLst>
+            </a:pPr>
+            <a:r>
+              <a:rPr b="0" lang="es-ES" sz="1400" strike="noStrike" u="none">
+                <a:solidFill>
+                  <a:srgbClr val="000000"/>
+                </a:solidFill>
+                <a:effectLst/>
+                <a:uFillTx/>
+                <a:latin typeface="Times New Roman"/>
+              </a:rPr>
+              <a:t>&lt;pie de página&gt;</a:t>
+            </a:r>
+            <a:endParaRPr b="0" lang="es-ES" sz="1400" strike="noStrike" u="none">
+              <a:solidFill>
+                <a:srgbClr val="000000"/>
+              </a:solidFill>
+              <a:effectLst/>
+              <a:uFillTx/>
+              <a:latin typeface="Times New Roman"/>
             </a:endParaRPr>
           </a:p>
         </p:txBody>
@@ -438,173 +262,13 @@
             <a:spLocks noGrp="1"/>
           </p:cNvSpPr>
           <p:nvPr>
-            <p:ph type="dt" idx="1"/>
-          </p:nvPr>
-        </p:nvSpPr>
-        <p:spPr>
-          <a:xfrm>
-            <a:off x="838080" y="6356520"/>
-            <a:ext cx="2741400" cy="363240"/>
-          </a:xfrm>
-          <a:prstGeom prst="rect">
-            <a:avLst/>
-          </a:prstGeom>
-          <a:noFill/>
-          <a:ln w="0">
-            <a:noFill/>
-          </a:ln>
-        </p:spPr>
-        <p:txBody>
-          <a:bodyPr lIns="91440" rIns="91440" tIns="45720" bIns="45720" anchor="ctr">
-            <a:noAutofit/>
-          </a:bodyPr>
-          <a:lstStyle>
-            <a:lvl1pPr indent="0" defTabSz="914400">
-              <a:lnSpc>
-                <a:spcPct val="100000"/>
-              </a:lnSpc>
-              <a:buNone/>
-              <a:tabLst>
-                <a:tab algn="l" pos="0"/>
-              </a:tabLst>
-              <a:defRPr b="0" lang="en-GB" sz="1200" strike="noStrike" u="none">
-                <a:solidFill>
-                  <a:schemeClr val="dk1">
-                    <a:tint val="75000"/>
-                  </a:schemeClr>
-                </a:solidFill>
-                <a:effectLst/>
-                <a:uFillTx/>
-                <a:latin typeface="Calibri"/>
-              </a:defRPr>
-            </a:lvl1pPr>
-          </a:lstStyle>
-          <a:p>
-            <a:pPr indent="0" defTabSz="914400">
-              <a:lnSpc>
-                <a:spcPct val="100000"/>
-              </a:lnSpc>
-              <a:buNone/>
-              <a:tabLst>
-                <a:tab algn="l" pos="0"/>
-              </a:tabLst>
-            </a:pPr>
-            <a:r>
-              <a:rPr b="0" lang="en-GB" sz="1200" strike="noStrike" u="none">
-                <a:solidFill>
-                  <a:schemeClr val="dk1">
-                    <a:tint val="75000"/>
-                  </a:schemeClr>
-                </a:solidFill>
-                <a:effectLst/>
-                <a:uFillTx/>
-                <a:latin typeface="Calibri"/>
-              </a:rPr>
-              <a:t> </a:t>
-            </a:r>
-            <a:endParaRPr b="0" lang="es-ES" sz="1200" strike="noStrike" u="none">
-              <a:solidFill>
-                <a:srgbClr val="000000"/>
-              </a:solidFill>
-              <a:effectLst/>
-              <a:uFillTx/>
-              <a:latin typeface="Times New Roman"/>
-            </a:endParaRPr>
-          </a:p>
-        </p:txBody>
-      </p:sp>
-      <p:sp>
-        <p:nvSpPr>
-          <p:cNvPr id="4" name="PlaceHolder 5"/>
-          <p:cNvSpPr>
-            <a:spLocks noGrp="1"/>
-          </p:cNvSpPr>
-          <p:nvPr>
-            <p:ph type="ftr" idx="2"/>
-          </p:nvPr>
-        </p:nvSpPr>
-        <p:spPr>
-          <a:xfrm>
-            <a:off x="4038480" y="6356520"/>
-            <a:ext cx="4113000" cy="363240"/>
-          </a:xfrm>
-          <a:prstGeom prst="rect">
-            <a:avLst/>
-          </a:prstGeom>
-          <a:noFill/>
-          <a:ln w="0">
-            <a:noFill/>
-          </a:ln>
-        </p:spPr>
-        <p:txBody>
-          <a:bodyPr lIns="91440" rIns="91440" tIns="45720" bIns="45720" anchor="ctr">
-            <a:noAutofit/>
-          </a:bodyPr>
-          <a:lstStyle>
-            <a:lvl1pPr indent="0" algn="ctr">
-              <a:lnSpc>
-                <a:spcPct val="100000"/>
-              </a:lnSpc>
-              <a:buNone/>
-              <a:tabLst>
-                <a:tab algn="l" pos="0"/>
-              </a:tabLst>
-              <a:defRPr b="0" lang="es-ES" sz="1400" strike="noStrike" u="none">
-                <a:solidFill>
-                  <a:srgbClr val="000000"/>
-                </a:solidFill>
-                <a:effectLst/>
-                <a:uFillTx/>
-                <a:latin typeface="Times New Roman"/>
-              </a:defRPr>
-            </a:lvl1pPr>
-          </a:lstStyle>
-          <a:p>
-            <a:pPr indent="0" algn="ctr">
-              <a:lnSpc>
-                <a:spcPct val="100000"/>
-              </a:lnSpc>
-              <a:buNone/>
-              <a:tabLst>
-                <a:tab algn="l" pos="0"/>
-              </a:tabLst>
-            </a:pPr>
-            <a:r>
-              <a:rPr b="0" lang="es-ES" sz="1400" strike="noStrike" u="none">
-                <a:solidFill>
-                  <a:srgbClr val="000000"/>
-                </a:solidFill>
-                <a:effectLst/>
-                <a:uFillTx/>
-                <a:latin typeface="Times New Roman"/>
-              </a:rPr>
-              <a:t> </a:t>
-            </a:r>
-            <a:endParaRPr b="0" lang="es-ES" sz="1400" strike="noStrike" u="none">
-              <a:solidFill>
-                <a:srgbClr val="000000"/>
-              </a:solidFill>
-              <a:effectLst/>
-              <a:uFillTx/>
-              <a:latin typeface="Times New Roman"/>
-            </a:endParaRPr>
-          </a:p>
-        </p:txBody>
-      </p:sp>
-      <p:sp>
-        <p:nvSpPr>
-          <p:cNvPr id="5" name="PlaceHolder 6"/>
-          <p:cNvSpPr>
-            <a:spLocks noGrp="1"/>
-          </p:cNvSpPr>
-          <p:nvPr>
             <p:ph type="sldNum" idx="3"/>
           </p:nvPr>
         </p:nvSpPr>
         <p:spPr>
           <a:xfrm>
             <a:off x="8610480" y="6356520"/>
-            <a:ext cx="2741400" cy="363240"/>
+            <a:ext cx="2741040" cy="362880"/>
           </a:xfrm>
           <a:prstGeom prst="rect">
             <a:avLst/>
@@ -649,7 +313,7 @@
                 <a:tab algn="l" pos="0"/>
               </a:tabLst>
             </a:pPr>
-            <a:fld id="{CE1AE3CA-DD92-4AC2-AC33-163999FD6A85}" type="slidenum">
+            <a:fld id="{DF088368-ED64-4AD6-8304-5C38C3FBBE66}" type="slidenum">
               <a:rPr b="0" lang="en-GB" sz="1200" strike="noStrike" u="none">
                 <a:solidFill>
                   <a:schemeClr val="dk1">
@@ -660,7 +324,7 @@
                 <a:uFillTx/>
                 <a:latin typeface="Calibri"/>
               </a:rPr>
-              <a:t>1</a:t>
+              <a:t>&lt;número&gt;</a:t>
             </a:fld>
             <a:endParaRPr b="0" lang="es-ES" sz="1200" strike="noStrike" u="none">
               <a:solidFill>
@@ -679,6 +343,1586 @@
 </file>
 
 <file path=ppt/slideLayouts/slideLayout10.xml><?xml version="1.0" encoding="utf-8"?>
+<p:sldLayout xmlns:a="http://schemas.openxmlformats.org/drawingml/2006/main" xmlns:p="http://schemas.openxmlformats.org/presentationml/2006/main" xmlns:r="http://schemas.openxmlformats.org/officeDocument/2006/relationships" xmlns:p14="http://schemas.microsoft.com/office/powerpoint/2010/main" xmlns:p15="http://schemas.microsoft.com/office/powerpoint/2012/main" xmlns:mc="http://schemas.openxmlformats.org/markup-compatibility/2006" type="twoObj" preserve="1">
+  <p:cSld name="Dos objetos">
+    <p:bg>
+      <p:bgPr>
+        <a:solidFill>
+          <a:srgbClr val="ffffff"/>
+        </a:solidFill>
+      </p:bgPr>
+    </p:bg>
+    <p:spTree>
+      <p:nvGrpSpPr>
+        <p:cNvPr id="1" name=""/>
+        <p:cNvGrpSpPr/>
+        <p:nvPr/>
+      </p:nvGrpSpPr>
+      <p:grpSpPr>
+        <a:xfrm>
+          <a:off x="0" y="0"/>
+          <a:ext cx="0" cy="0"/>
+          <a:chOff x="0" y="0"/>
+          <a:chExt cx="0" cy="0"/>
+        </a:xfrm>
+      </p:grpSpPr>
+      <p:sp>
+        <p:nvSpPr>
+          <p:cNvPr id="45" name="PlaceHolder 1"/>
+          <p:cNvSpPr>
+            <a:spLocks noGrp="1"/>
+          </p:cNvSpPr>
+          <p:nvPr>
+            <p:ph type="title"/>
+          </p:nvPr>
+        </p:nvSpPr>
+        <p:spPr>
+          <a:xfrm>
+            <a:off x="838080" y="365040"/>
+            <a:ext cx="10513440" cy="1323360"/>
+          </a:xfrm>
+          <a:prstGeom prst="rect">
+            <a:avLst/>
+          </a:prstGeom>
+          <a:noFill/>
+          <a:ln w="0">
+            <a:noFill/>
+          </a:ln>
+        </p:spPr>
+        <p:txBody>
+          <a:bodyPr lIns="91440" rIns="91440" tIns="45720" bIns="45720" anchor="ctr">
+            <a:noAutofit/>
+          </a:bodyPr>
+          <a:p>
+            <a:pPr indent="0" defTabSz="914400">
+              <a:lnSpc>
+                <a:spcPct val="90000"/>
+              </a:lnSpc>
+              <a:buNone/>
+              <a:tabLst>
+                <a:tab algn="l" pos="0"/>
+              </a:tabLst>
+            </a:pPr>
+            <a:r>
+              <a:rPr b="0" lang="es-ES" sz="4400" strike="noStrike" u="none">
+                <a:solidFill>
+                  <a:schemeClr val="dk1"/>
+                </a:solidFill>
+                <a:effectLst/>
+                <a:uFillTx/>
+                <a:latin typeface="Calibri Light"/>
+              </a:rPr>
+              <a:t>Haga clic para modificar el estilo de título del patrón</a:t>
+            </a:r>
+            <a:endParaRPr b="0" lang="es-ES" sz="4400" strike="noStrike" u="none">
+              <a:solidFill>
+                <a:srgbClr val="000000"/>
+              </a:solidFill>
+              <a:effectLst/>
+              <a:uFillTx/>
+              <a:latin typeface="Arial"/>
+            </a:endParaRPr>
+          </a:p>
+        </p:txBody>
+      </p:sp>
+      <p:sp>
+        <p:nvSpPr>
+          <p:cNvPr id="46" name="PlaceHolder 2"/>
+          <p:cNvSpPr>
+            <a:spLocks noGrp="1"/>
+          </p:cNvSpPr>
+          <p:nvPr>
+            <p:ph type="body"/>
+          </p:nvPr>
+        </p:nvSpPr>
+        <p:spPr>
+          <a:xfrm>
+            <a:off x="838080" y="1825560"/>
+            <a:ext cx="5179320" cy="4349160"/>
+          </a:xfrm>
+          <a:prstGeom prst="rect">
+            <a:avLst/>
+          </a:prstGeom>
+          <a:noFill/>
+          <a:ln w="0">
+            <a:noFill/>
+          </a:ln>
+        </p:spPr>
+        <p:txBody>
+          <a:bodyPr lIns="91440" rIns="91440" tIns="45720" bIns="45720" anchor="t">
+            <a:noAutofit/>
+          </a:bodyPr>
+          <a:p>
+            <a:pPr marL="228600" indent="-228600" defTabSz="914400">
+              <a:lnSpc>
+                <a:spcPct val="90000"/>
+              </a:lnSpc>
+              <a:spcBef>
+                <a:spcPts val="1001"/>
+              </a:spcBef>
+              <a:buClr>
+                <a:srgbClr val="000000"/>
+              </a:buClr>
+              <a:buFont typeface="Arial"/>
+              <a:buChar char="•"/>
+            </a:pPr>
+            <a:r>
+              <a:rPr b="0" lang="es-ES" sz="2800" strike="noStrike" u="none">
+                <a:solidFill>
+                  <a:schemeClr val="dk1"/>
+                </a:solidFill>
+                <a:effectLst/>
+                <a:uFillTx/>
+                <a:latin typeface="Calibri"/>
+              </a:rPr>
+              <a:t>Haga clic para modificar los estilos de texto del patrón</a:t>
+            </a:r>
+            <a:endParaRPr b="0" lang="es-ES" sz="2800" strike="noStrike" u="none">
+              <a:solidFill>
+                <a:srgbClr val="000000"/>
+              </a:solidFill>
+              <a:effectLst/>
+              <a:uFillTx/>
+              <a:latin typeface="Arial"/>
+            </a:endParaRPr>
+          </a:p>
+          <a:p>
+            <a:pPr lvl="1" marL="685800" indent="-228600" defTabSz="914400">
+              <a:lnSpc>
+                <a:spcPct val="90000"/>
+              </a:lnSpc>
+              <a:spcBef>
+                <a:spcPts val="499"/>
+              </a:spcBef>
+              <a:buClr>
+                <a:srgbClr val="000000"/>
+              </a:buClr>
+              <a:buFont typeface="Arial"/>
+              <a:buChar char="•"/>
+            </a:pPr>
+            <a:r>
+              <a:rPr b="0" lang="es-ES" sz="2400" strike="noStrike" u="none">
+                <a:solidFill>
+                  <a:schemeClr val="dk1"/>
+                </a:solidFill>
+                <a:effectLst/>
+                <a:uFillTx/>
+                <a:latin typeface="Calibri"/>
+              </a:rPr>
+              <a:t>Segundo nivel</a:t>
+            </a:r>
+            <a:endParaRPr b="0" lang="es-ES" sz="2400" strike="noStrike" u="none">
+              <a:solidFill>
+                <a:srgbClr val="000000"/>
+              </a:solidFill>
+              <a:effectLst/>
+              <a:uFillTx/>
+              <a:latin typeface="Arial"/>
+            </a:endParaRPr>
+          </a:p>
+          <a:p>
+            <a:pPr lvl="2" marL="1143000" indent="-228600" defTabSz="914400">
+              <a:lnSpc>
+                <a:spcPct val="90000"/>
+              </a:lnSpc>
+              <a:spcBef>
+                <a:spcPts val="499"/>
+              </a:spcBef>
+              <a:buClr>
+                <a:srgbClr val="000000"/>
+              </a:buClr>
+              <a:buFont typeface="Arial"/>
+              <a:buChar char="•"/>
+            </a:pPr>
+            <a:r>
+              <a:rPr b="0" lang="es-ES" sz="2000" strike="noStrike" u="none">
+                <a:solidFill>
+                  <a:schemeClr val="dk1"/>
+                </a:solidFill>
+                <a:effectLst/>
+                <a:uFillTx/>
+                <a:latin typeface="Calibri"/>
+              </a:rPr>
+              <a:t>Tercer nivel</a:t>
+            </a:r>
+            <a:endParaRPr b="0" lang="es-ES" sz="2000" strike="noStrike" u="none">
+              <a:solidFill>
+                <a:srgbClr val="000000"/>
+              </a:solidFill>
+              <a:effectLst/>
+              <a:uFillTx/>
+              <a:latin typeface="Arial"/>
+            </a:endParaRPr>
+          </a:p>
+          <a:p>
+            <a:pPr lvl="3" marL="1600200" indent="-228600" defTabSz="914400">
+              <a:lnSpc>
+                <a:spcPct val="90000"/>
+              </a:lnSpc>
+              <a:spcBef>
+                <a:spcPts val="499"/>
+              </a:spcBef>
+              <a:buClr>
+                <a:srgbClr val="000000"/>
+              </a:buClr>
+              <a:buFont typeface="Arial"/>
+              <a:buChar char="•"/>
+            </a:pPr>
+            <a:r>
+              <a:rPr b="0" lang="es-ES" sz="1800" strike="noStrike" u="none">
+                <a:solidFill>
+                  <a:schemeClr val="dk1"/>
+                </a:solidFill>
+                <a:effectLst/>
+                <a:uFillTx/>
+                <a:latin typeface="Calibri"/>
+              </a:rPr>
+              <a:t>Cuarto nivel</a:t>
+            </a:r>
+            <a:endParaRPr b="0" lang="es-ES" sz="1800" strike="noStrike" u="none">
+              <a:solidFill>
+                <a:srgbClr val="000000"/>
+              </a:solidFill>
+              <a:effectLst/>
+              <a:uFillTx/>
+              <a:latin typeface="Arial"/>
+            </a:endParaRPr>
+          </a:p>
+          <a:p>
+            <a:pPr lvl="4" marL="2057400" indent="-228600" defTabSz="914400">
+              <a:lnSpc>
+                <a:spcPct val="90000"/>
+              </a:lnSpc>
+              <a:spcBef>
+                <a:spcPts val="499"/>
+              </a:spcBef>
+              <a:buClr>
+                <a:srgbClr val="000000"/>
+              </a:buClr>
+              <a:buFont typeface="Arial"/>
+              <a:buChar char="•"/>
+            </a:pPr>
+            <a:r>
+              <a:rPr b="0" lang="es-ES" sz="1800" strike="noStrike" u="none">
+                <a:solidFill>
+                  <a:schemeClr val="dk1"/>
+                </a:solidFill>
+                <a:effectLst/>
+                <a:uFillTx/>
+                <a:latin typeface="Calibri"/>
+              </a:rPr>
+              <a:t>Quinto nivel</a:t>
+            </a:r>
+            <a:endParaRPr b="0" lang="es-ES" sz="1800" strike="noStrike" u="none">
+              <a:solidFill>
+                <a:srgbClr val="000000"/>
+              </a:solidFill>
+              <a:effectLst/>
+              <a:uFillTx/>
+              <a:latin typeface="Arial"/>
+            </a:endParaRPr>
+          </a:p>
+        </p:txBody>
+      </p:sp>
+      <p:sp>
+        <p:nvSpPr>
+          <p:cNvPr id="47" name="PlaceHolder 3"/>
+          <p:cNvSpPr>
+            <a:spLocks noGrp="1"/>
+          </p:cNvSpPr>
+          <p:nvPr>
+            <p:ph type="body"/>
+          </p:nvPr>
+        </p:nvSpPr>
+        <p:spPr>
+          <a:xfrm>
+            <a:off x="6172200" y="1825560"/>
+            <a:ext cx="5179320" cy="4349160"/>
+          </a:xfrm>
+          <a:prstGeom prst="rect">
+            <a:avLst/>
+          </a:prstGeom>
+          <a:noFill/>
+          <a:ln w="0">
+            <a:noFill/>
+          </a:ln>
+        </p:spPr>
+        <p:txBody>
+          <a:bodyPr lIns="91440" rIns="91440" tIns="45720" bIns="45720" anchor="t">
+            <a:noAutofit/>
+          </a:bodyPr>
+          <a:p>
+            <a:pPr marL="228600" indent="-228600" defTabSz="914400">
+              <a:lnSpc>
+                <a:spcPct val="90000"/>
+              </a:lnSpc>
+              <a:spcBef>
+                <a:spcPts val="1001"/>
+              </a:spcBef>
+              <a:buClr>
+                <a:srgbClr val="000000"/>
+              </a:buClr>
+              <a:buFont typeface="Arial"/>
+              <a:buChar char="•"/>
+            </a:pPr>
+            <a:r>
+              <a:rPr b="0" lang="es-ES" sz="2800" strike="noStrike" u="none">
+                <a:solidFill>
+                  <a:schemeClr val="dk1"/>
+                </a:solidFill>
+                <a:effectLst/>
+                <a:uFillTx/>
+                <a:latin typeface="Calibri"/>
+              </a:rPr>
+              <a:t>Haga clic para modificar los estilos de texto del patrón</a:t>
+            </a:r>
+            <a:endParaRPr b="0" lang="es-ES" sz="2800" strike="noStrike" u="none">
+              <a:solidFill>
+                <a:srgbClr val="000000"/>
+              </a:solidFill>
+              <a:effectLst/>
+              <a:uFillTx/>
+              <a:latin typeface="Arial"/>
+            </a:endParaRPr>
+          </a:p>
+          <a:p>
+            <a:pPr lvl="1" marL="685800" indent="-228600" defTabSz="914400">
+              <a:lnSpc>
+                <a:spcPct val="90000"/>
+              </a:lnSpc>
+              <a:spcBef>
+                <a:spcPts val="499"/>
+              </a:spcBef>
+              <a:buClr>
+                <a:srgbClr val="000000"/>
+              </a:buClr>
+              <a:buFont typeface="Arial"/>
+              <a:buChar char="•"/>
+            </a:pPr>
+            <a:r>
+              <a:rPr b="0" lang="es-ES" sz="2400" strike="noStrike" u="none">
+                <a:solidFill>
+                  <a:schemeClr val="dk1"/>
+                </a:solidFill>
+                <a:effectLst/>
+                <a:uFillTx/>
+                <a:latin typeface="Calibri"/>
+              </a:rPr>
+              <a:t>Segundo nivel</a:t>
+            </a:r>
+            <a:endParaRPr b="0" lang="es-ES" sz="2400" strike="noStrike" u="none">
+              <a:solidFill>
+                <a:srgbClr val="000000"/>
+              </a:solidFill>
+              <a:effectLst/>
+              <a:uFillTx/>
+              <a:latin typeface="Arial"/>
+            </a:endParaRPr>
+          </a:p>
+          <a:p>
+            <a:pPr lvl="2" marL="1143000" indent="-228600" defTabSz="914400">
+              <a:lnSpc>
+                <a:spcPct val="90000"/>
+              </a:lnSpc>
+              <a:spcBef>
+                <a:spcPts val="499"/>
+              </a:spcBef>
+              <a:buClr>
+                <a:srgbClr val="000000"/>
+              </a:buClr>
+              <a:buFont typeface="Arial"/>
+              <a:buChar char="•"/>
+            </a:pPr>
+            <a:r>
+              <a:rPr b="0" lang="es-ES" sz="2000" strike="noStrike" u="none">
+                <a:solidFill>
+                  <a:schemeClr val="dk1"/>
+                </a:solidFill>
+                <a:effectLst/>
+                <a:uFillTx/>
+                <a:latin typeface="Calibri"/>
+              </a:rPr>
+              <a:t>Tercer nivel</a:t>
+            </a:r>
+            <a:endParaRPr b="0" lang="es-ES" sz="2000" strike="noStrike" u="none">
+              <a:solidFill>
+                <a:srgbClr val="000000"/>
+              </a:solidFill>
+              <a:effectLst/>
+              <a:uFillTx/>
+              <a:latin typeface="Arial"/>
+            </a:endParaRPr>
+          </a:p>
+          <a:p>
+            <a:pPr lvl="3" marL="1600200" indent="-228600" defTabSz="914400">
+              <a:lnSpc>
+                <a:spcPct val="90000"/>
+              </a:lnSpc>
+              <a:spcBef>
+                <a:spcPts val="499"/>
+              </a:spcBef>
+              <a:buClr>
+                <a:srgbClr val="000000"/>
+              </a:buClr>
+              <a:buFont typeface="Arial"/>
+              <a:buChar char="•"/>
+            </a:pPr>
+            <a:r>
+              <a:rPr b="0" lang="es-ES" sz="1800" strike="noStrike" u="none">
+                <a:solidFill>
+                  <a:schemeClr val="dk1"/>
+                </a:solidFill>
+                <a:effectLst/>
+                <a:uFillTx/>
+                <a:latin typeface="Calibri"/>
+              </a:rPr>
+              <a:t>Cuarto nivel</a:t>
+            </a:r>
+            <a:endParaRPr b="0" lang="es-ES" sz="1800" strike="noStrike" u="none">
+              <a:solidFill>
+                <a:srgbClr val="000000"/>
+              </a:solidFill>
+              <a:effectLst/>
+              <a:uFillTx/>
+              <a:latin typeface="Arial"/>
+            </a:endParaRPr>
+          </a:p>
+          <a:p>
+            <a:pPr lvl="4" marL="2057400" indent="-228600" defTabSz="914400">
+              <a:lnSpc>
+                <a:spcPct val="90000"/>
+              </a:lnSpc>
+              <a:spcBef>
+                <a:spcPts val="499"/>
+              </a:spcBef>
+              <a:buClr>
+                <a:srgbClr val="000000"/>
+              </a:buClr>
+              <a:buFont typeface="Arial"/>
+              <a:buChar char="•"/>
+            </a:pPr>
+            <a:r>
+              <a:rPr b="0" lang="es-ES" sz="1800" strike="noStrike" u="none">
+                <a:solidFill>
+                  <a:schemeClr val="dk1"/>
+                </a:solidFill>
+                <a:effectLst/>
+                <a:uFillTx/>
+                <a:latin typeface="Calibri"/>
+              </a:rPr>
+              <a:t>Quinto nivel</a:t>
+            </a:r>
+            <a:endParaRPr b="0" lang="es-ES" sz="1800" strike="noStrike" u="none">
+              <a:solidFill>
+                <a:srgbClr val="000000"/>
+              </a:solidFill>
+              <a:effectLst/>
+              <a:uFillTx/>
+              <a:latin typeface="Arial"/>
+            </a:endParaRPr>
+          </a:p>
+        </p:txBody>
+      </p:sp>
+      <p:sp>
+        <p:nvSpPr>
+          <p:cNvPr id="48" name="PlaceHolder 4"/>
+          <p:cNvSpPr>
+            <a:spLocks noGrp="1"/>
+          </p:cNvSpPr>
+          <p:nvPr>
+            <p:ph type="dt" idx="28"/>
+          </p:nvPr>
+        </p:nvSpPr>
+        <p:spPr>
+          <a:xfrm>
+            <a:off x="838080" y="6356520"/>
+            <a:ext cx="2741040" cy="362880"/>
+          </a:xfrm>
+          <a:prstGeom prst="rect">
+            <a:avLst/>
+          </a:prstGeom>
+          <a:noFill/>
+          <a:ln w="0">
+            <a:noFill/>
+          </a:ln>
+        </p:spPr>
+        <p:txBody>
+          <a:bodyPr lIns="91440" rIns="91440" tIns="45720" bIns="45720" anchor="ctr">
+            <a:noAutofit/>
+          </a:bodyPr>
+          <a:lstStyle>
+            <a:lvl1pPr indent="0" defTabSz="914400">
+              <a:lnSpc>
+                <a:spcPct val="100000"/>
+              </a:lnSpc>
+              <a:buNone/>
+              <a:tabLst>
+                <a:tab algn="l" pos="0"/>
+              </a:tabLst>
+              <a:defRPr b="0" lang="en-GB" sz="1200" strike="noStrike" u="none">
+                <a:solidFill>
+                  <a:schemeClr val="dk1">
+                    <a:tint val="75000"/>
+                  </a:schemeClr>
+                </a:solidFill>
+                <a:effectLst/>
+                <a:uFillTx/>
+                <a:latin typeface="Calibri"/>
+              </a:defRPr>
+            </a:lvl1pPr>
+          </a:lstStyle>
+          <a:p>
+            <a:pPr indent="0" defTabSz="914400">
+              <a:lnSpc>
+                <a:spcPct val="100000"/>
+              </a:lnSpc>
+              <a:buNone/>
+              <a:tabLst>
+                <a:tab algn="l" pos="0"/>
+              </a:tabLst>
+            </a:pPr>
+            <a:r>
+              <a:rPr b="0" lang="en-GB" sz="1200" strike="noStrike" u="none">
+                <a:solidFill>
+                  <a:schemeClr val="dk1">
+                    <a:tint val="75000"/>
+                  </a:schemeClr>
+                </a:solidFill>
+                <a:effectLst/>
+                <a:uFillTx/>
+                <a:latin typeface="Calibri"/>
+              </a:rPr>
+              <a:t>&lt;fecha/hora&gt;</a:t>
+            </a:r>
+            <a:endParaRPr b="0" lang="es-ES" sz="1200" strike="noStrike" u="none">
+              <a:solidFill>
+                <a:srgbClr val="000000"/>
+              </a:solidFill>
+              <a:effectLst/>
+              <a:uFillTx/>
+              <a:latin typeface="Times New Roman"/>
+            </a:endParaRPr>
+          </a:p>
+        </p:txBody>
+      </p:sp>
+      <p:sp>
+        <p:nvSpPr>
+          <p:cNvPr id="49" name="PlaceHolder 5"/>
+          <p:cNvSpPr>
+            <a:spLocks noGrp="1"/>
+          </p:cNvSpPr>
+          <p:nvPr>
+            <p:ph type="ftr" idx="29"/>
+          </p:nvPr>
+        </p:nvSpPr>
+        <p:spPr>
+          <a:xfrm>
+            <a:off x="4038480" y="6356520"/>
+            <a:ext cx="4112640" cy="362880"/>
+          </a:xfrm>
+          <a:prstGeom prst="rect">
+            <a:avLst/>
+          </a:prstGeom>
+          <a:noFill/>
+          <a:ln w="0">
+            <a:noFill/>
+          </a:ln>
+        </p:spPr>
+        <p:txBody>
+          <a:bodyPr lIns="91440" rIns="91440" tIns="45720" bIns="45720" anchor="ctr">
+            <a:noAutofit/>
+          </a:bodyPr>
+          <a:lstStyle>
+            <a:lvl1pPr indent="0" algn="ctr">
+              <a:lnSpc>
+                <a:spcPct val="100000"/>
+              </a:lnSpc>
+              <a:buNone/>
+              <a:tabLst>
+                <a:tab algn="l" pos="0"/>
+              </a:tabLst>
+              <a:defRPr b="0" lang="es-ES" sz="1400" strike="noStrike" u="none">
+                <a:solidFill>
+                  <a:srgbClr val="000000"/>
+                </a:solidFill>
+                <a:effectLst/>
+                <a:uFillTx/>
+                <a:latin typeface="Times New Roman"/>
+              </a:defRPr>
+            </a:lvl1pPr>
+          </a:lstStyle>
+          <a:p>
+            <a:pPr indent="0" algn="ctr">
+              <a:lnSpc>
+                <a:spcPct val="100000"/>
+              </a:lnSpc>
+              <a:buNone/>
+              <a:tabLst>
+                <a:tab algn="l" pos="0"/>
+              </a:tabLst>
+            </a:pPr>
+            <a:r>
+              <a:rPr b="0" lang="es-ES" sz="1400" strike="noStrike" u="none">
+                <a:solidFill>
+                  <a:srgbClr val="000000"/>
+                </a:solidFill>
+                <a:effectLst/>
+                <a:uFillTx/>
+                <a:latin typeface="Times New Roman"/>
+              </a:rPr>
+              <a:t>&lt;pie de página&gt;</a:t>
+            </a:r>
+            <a:endParaRPr b="0" lang="es-ES" sz="1400" strike="noStrike" u="none">
+              <a:solidFill>
+                <a:srgbClr val="000000"/>
+              </a:solidFill>
+              <a:effectLst/>
+              <a:uFillTx/>
+              <a:latin typeface="Times New Roman"/>
+            </a:endParaRPr>
+          </a:p>
+        </p:txBody>
+      </p:sp>
+      <p:sp>
+        <p:nvSpPr>
+          <p:cNvPr id="50" name="PlaceHolder 6"/>
+          <p:cNvSpPr>
+            <a:spLocks noGrp="1"/>
+          </p:cNvSpPr>
+          <p:nvPr>
+            <p:ph type="sldNum" idx="30"/>
+          </p:nvPr>
+        </p:nvSpPr>
+        <p:spPr>
+          <a:xfrm>
+            <a:off x="8610480" y="6356520"/>
+            <a:ext cx="2741040" cy="362880"/>
+          </a:xfrm>
+          <a:prstGeom prst="rect">
+            <a:avLst/>
+          </a:prstGeom>
+          <a:noFill/>
+          <a:ln w="0">
+            <a:noFill/>
+          </a:ln>
+        </p:spPr>
+        <p:txBody>
+          <a:bodyPr lIns="91440" rIns="91440" tIns="45720" bIns="45720" anchor="ctr">
+            <a:noAutofit/>
+          </a:bodyPr>
+          <a:lstStyle>
+            <a:lvl1pPr indent="0" algn="r" defTabSz="914400">
+              <a:lnSpc>
+                <a:spcPct val="100000"/>
+              </a:lnSpc>
+              <a:buNone/>
+              <a:tabLst>
+                <a:tab algn="l" pos="0"/>
+              </a:tabLst>
+              <a:defRPr b="0" lang="en-GB" sz="1200" strike="noStrike" u="none">
+                <a:solidFill>
+                  <a:schemeClr val="dk1">
+                    <a:tint val="75000"/>
+                  </a:schemeClr>
+                </a:solidFill>
+                <a:effectLst/>
+                <a:uFillTx/>
+                <a:latin typeface="Calibri"/>
+              </a:defRPr>
+            </a:lvl1pPr>
+          </a:lstStyle>
+          <a:p>
+            <a:pPr indent="0" algn="r" defTabSz="914400">
+              <a:lnSpc>
+                <a:spcPct val="100000"/>
+              </a:lnSpc>
+              <a:buNone/>
+              <a:tabLst>
+                <a:tab algn="l" pos="0"/>
+              </a:tabLst>
+            </a:pPr>
+            <a:fld id="{6662B734-280C-4FDF-BF2D-F41D1734E14A}" type="slidenum">
+              <a:rPr b="0" lang="en-GB" sz="1200" strike="noStrike" u="none">
+                <a:solidFill>
+                  <a:schemeClr val="dk1">
+                    <a:tint val="75000"/>
+                  </a:schemeClr>
+                </a:solidFill>
+                <a:effectLst/>
+                <a:uFillTx/>
+                <a:latin typeface="Calibri"/>
+              </a:rPr>
+              <a:t>&lt;número&gt;</a:t>
+            </a:fld>
+            <a:endParaRPr b="0" lang="es-ES" sz="1200" strike="noStrike" u="none">
+              <a:solidFill>
+                <a:srgbClr val="000000"/>
+              </a:solidFill>
+              <a:effectLst/>
+              <a:uFillTx/>
+              <a:latin typeface="Times New Roman"/>
+            </a:endParaRPr>
+          </a:p>
+        </p:txBody>
+      </p:sp>
+    </p:spTree>
+  </p:cSld>
+</p:sldLayout>
+</file>
+
+<file path=ppt/slideLayouts/slideLayout11.xml><?xml version="1.0" encoding="utf-8"?>
+<p:sldLayout xmlns:a="http://schemas.openxmlformats.org/drawingml/2006/main" xmlns:p="http://schemas.openxmlformats.org/presentationml/2006/main" xmlns:r="http://schemas.openxmlformats.org/officeDocument/2006/relationships" xmlns:p14="http://schemas.microsoft.com/office/powerpoint/2010/main" xmlns:p15="http://schemas.microsoft.com/office/powerpoint/2012/main" xmlns:mc="http://schemas.openxmlformats.org/markup-compatibility/2006" type="blank" preserve="1">
+  <p:cSld name="Comparación">
+    <p:bg>
+      <p:bgPr>
+        <a:solidFill>
+          <a:srgbClr val="ffffff"/>
+        </a:solidFill>
+      </p:bgPr>
+    </p:bg>
+    <p:spTree>
+      <p:nvGrpSpPr>
+        <p:cNvPr id="1" name=""/>
+        <p:cNvGrpSpPr/>
+        <p:nvPr/>
+      </p:nvGrpSpPr>
+      <p:grpSpPr>
+        <a:xfrm>
+          <a:off x="0" y="0"/>
+          <a:ext cx="0" cy="0"/>
+          <a:chOff x="0" y="0"/>
+          <a:chExt cx="0" cy="0"/>
+        </a:xfrm>
+      </p:grpSpPr>
+      <p:sp>
+        <p:nvSpPr>
+          <p:cNvPr id="51" name="PlaceHolder 1"/>
+          <p:cNvSpPr>
+            <a:spLocks noGrp="1"/>
+          </p:cNvSpPr>
+          <p:nvPr>
+            <p:ph type="title"/>
+          </p:nvPr>
+        </p:nvSpPr>
+        <p:spPr>
+          <a:xfrm>
+            <a:off x="839880" y="365040"/>
+            <a:ext cx="10513440" cy="1323360"/>
+          </a:xfrm>
+          <a:prstGeom prst="rect">
+            <a:avLst/>
+          </a:prstGeom>
+          <a:noFill/>
+          <a:ln w="0">
+            <a:noFill/>
+          </a:ln>
+        </p:spPr>
+        <p:txBody>
+          <a:bodyPr lIns="91440" rIns="91440" tIns="45720" bIns="45720" anchor="ctr">
+            <a:noAutofit/>
+          </a:bodyPr>
+          <a:p>
+            <a:pPr indent="0" defTabSz="914400">
+              <a:lnSpc>
+                <a:spcPct val="90000"/>
+              </a:lnSpc>
+              <a:buNone/>
+              <a:tabLst>
+                <a:tab algn="l" pos="0"/>
+              </a:tabLst>
+            </a:pPr>
+            <a:r>
+              <a:rPr b="0" lang="es-ES" sz="4400" strike="noStrike" u="none">
+                <a:solidFill>
+                  <a:schemeClr val="dk1"/>
+                </a:solidFill>
+                <a:effectLst/>
+                <a:uFillTx/>
+                <a:latin typeface="Calibri Light"/>
+              </a:rPr>
+              <a:t>Haga clic para modificar el estilo de título del patrón</a:t>
+            </a:r>
+            <a:endParaRPr b="0" lang="es-ES" sz="4400" strike="noStrike" u="none">
+              <a:solidFill>
+                <a:srgbClr val="000000"/>
+              </a:solidFill>
+              <a:effectLst/>
+              <a:uFillTx/>
+              <a:latin typeface="Arial"/>
+            </a:endParaRPr>
+          </a:p>
+        </p:txBody>
+      </p:sp>
+      <p:sp>
+        <p:nvSpPr>
+          <p:cNvPr id="52" name="PlaceHolder 2"/>
+          <p:cNvSpPr>
+            <a:spLocks noGrp="1"/>
+          </p:cNvSpPr>
+          <p:nvPr>
+            <p:ph type="body"/>
+          </p:nvPr>
+        </p:nvSpPr>
+        <p:spPr>
+          <a:xfrm>
+            <a:off x="839880" y="1681200"/>
+            <a:ext cx="5155560" cy="821880"/>
+          </a:xfrm>
+          <a:prstGeom prst="rect">
+            <a:avLst/>
+          </a:prstGeom>
+          <a:noFill/>
+          <a:ln w="0">
+            <a:noFill/>
+          </a:ln>
+        </p:spPr>
+        <p:txBody>
+          <a:bodyPr lIns="91440" rIns="91440" tIns="45720" bIns="45720" anchor="b">
+            <a:noAutofit/>
+          </a:bodyPr>
+          <a:p>
+            <a:pPr indent="0" defTabSz="914400">
+              <a:lnSpc>
+                <a:spcPct val="90000"/>
+              </a:lnSpc>
+              <a:spcBef>
+                <a:spcPts val="1001"/>
+              </a:spcBef>
+              <a:buNone/>
+              <a:tabLst>
+                <a:tab algn="l" pos="0"/>
+              </a:tabLst>
+            </a:pPr>
+            <a:r>
+              <a:rPr b="1" lang="es-ES" sz="2400" strike="noStrike" u="none">
+                <a:solidFill>
+                  <a:schemeClr val="dk1"/>
+                </a:solidFill>
+                <a:effectLst/>
+                <a:uFillTx/>
+                <a:latin typeface="Calibri"/>
+              </a:rPr>
+              <a:t>Haga clic para modificar los estilos de texto del patrón</a:t>
+            </a:r>
+            <a:endParaRPr b="0" lang="es-ES" sz="2400" strike="noStrike" u="none">
+              <a:solidFill>
+                <a:srgbClr val="000000"/>
+              </a:solidFill>
+              <a:effectLst/>
+              <a:uFillTx/>
+              <a:latin typeface="Arial"/>
+            </a:endParaRPr>
+          </a:p>
+        </p:txBody>
+      </p:sp>
+      <p:sp>
+        <p:nvSpPr>
+          <p:cNvPr id="53" name="PlaceHolder 3"/>
+          <p:cNvSpPr>
+            <a:spLocks noGrp="1"/>
+          </p:cNvSpPr>
+          <p:nvPr>
+            <p:ph type="body"/>
+          </p:nvPr>
+        </p:nvSpPr>
+        <p:spPr>
+          <a:xfrm>
+            <a:off x="839880" y="2505240"/>
+            <a:ext cx="5155560" cy="3682440"/>
+          </a:xfrm>
+          <a:prstGeom prst="rect">
+            <a:avLst/>
+          </a:prstGeom>
+          <a:noFill/>
+          <a:ln w="0">
+            <a:noFill/>
+          </a:ln>
+        </p:spPr>
+        <p:txBody>
+          <a:bodyPr lIns="91440" rIns="91440" tIns="45720" bIns="45720" anchor="t">
+            <a:noAutofit/>
+          </a:bodyPr>
+          <a:p>
+            <a:pPr marL="228600" indent="-228600" defTabSz="914400">
+              <a:lnSpc>
+                <a:spcPct val="90000"/>
+              </a:lnSpc>
+              <a:spcBef>
+                <a:spcPts val="1001"/>
+              </a:spcBef>
+              <a:buClr>
+                <a:srgbClr val="000000"/>
+              </a:buClr>
+              <a:buFont typeface="Arial"/>
+              <a:buChar char="•"/>
+            </a:pPr>
+            <a:r>
+              <a:rPr b="0" lang="es-ES" sz="2800" strike="noStrike" u="none">
+                <a:solidFill>
+                  <a:schemeClr val="dk1"/>
+                </a:solidFill>
+                <a:effectLst/>
+                <a:uFillTx/>
+                <a:latin typeface="Calibri"/>
+              </a:rPr>
+              <a:t>Haga clic para modificar los estilos de texto del patrón</a:t>
+            </a:r>
+            <a:endParaRPr b="0" lang="es-ES" sz="2800" strike="noStrike" u="none">
+              <a:solidFill>
+                <a:srgbClr val="000000"/>
+              </a:solidFill>
+              <a:effectLst/>
+              <a:uFillTx/>
+              <a:latin typeface="Arial"/>
+            </a:endParaRPr>
+          </a:p>
+          <a:p>
+            <a:pPr lvl="1" marL="685800" indent="-228600" defTabSz="914400">
+              <a:lnSpc>
+                <a:spcPct val="90000"/>
+              </a:lnSpc>
+              <a:spcBef>
+                <a:spcPts val="499"/>
+              </a:spcBef>
+              <a:buClr>
+                <a:srgbClr val="000000"/>
+              </a:buClr>
+              <a:buFont typeface="Arial"/>
+              <a:buChar char="•"/>
+            </a:pPr>
+            <a:r>
+              <a:rPr b="0" lang="es-ES" sz="2400" strike="noStrike" u="none">
+                <a:solidFill>
+                  <a:schemeClr val="dk1"/>
+                </a:solidFill>
+                <a:effectLst/>
+                <a:uFillTx/>
+                <a:latin typeface="Calibri"/>
+              </a:rPr>
+              <a:t>Segundo nivel</a:t>
+            </a:r>
+            <a:endParaRPr b="0" lang="es-ES" sz="2400" strike="noStrike" u="none">
+              <a:solidFill>
+                <a:srgbClr val="000000"/>
+              </a:solidFill>
+              <a:effectLst/>
+              <a:uFillTx/>
+              <a:latin typeface="Arial"/>
+            </a:endParaRPr>
+          </a:p>
+          <a:p>
+            <a:pPr lvl="2" marL="1143000" indent="-228600" defTabSz="914400">
+              <a:lnSpc>
+                <a:spcPct val="90000"/>
+              </a:lnSpc>
+              <a:spcBef>
+                <a:spcPts val="499"/>
+              </a:spcBef>
+              <a:buClr>
+                <a:srgbClr val="000000"/>
+              </a:buClr>
+              <a:buFont typeface="Arial"/>
+              <a:buChar char="•"/>
+            </a:pPr>
+            <a:r>
+              <a:rPr b="0" lang="es-ES" sz="2000" strike="noStrike" u="none">
+                <a:solidFill>
+                  <a:schemeClr val="dk1"/>
+                </a:solidFill>
+                <a:effectLst/>
+                <a:uFillTx/>
+                <a:latin typeface="Calibri"/>
+              </a:rPr>
+              <a:t>Tercer nivel</a:t>
+            </a:r>
+            <a:endParaRPr b="0" lang="es-ES" sz="2000" strike="noStrike" u="none">
+              <a:solidFill>
+                <a:srgbClr val="000000"/>
+              </a:solidFill>
+              <a:effectLst/>
+              <a:uFillTx/>
+              <a:latin typeface="Arial"/>
+            </a:endParaRPr>
+          </a:p>
+          <a:p>
+            <a:pPr lvl="3" marL="1600200" indent="-228600" defTabSz="914400">
+              <a:lnSpc>
+                <a:spcPct val="90000"/>
+              </a:lnSpc>
+              <a:spcBef>
+                <a:spcPts val="499"/>
+              </a:spcBef>
+              <a:buClr>
+                <a:srgbClr val="000000"/>
+              </a:buClr>
+              <a:buFont typeface="Arial"/>
+              <a:buChar char="•"/>
+            </a:pPr>
+            <a:r>
+              <a:rPr b="0" lang="es-ES" sz="1800" strike="noStrike" u="none">
+                <a:solidFill>
+                  <a:schemeClr val="dk1"/>
+                </a:solidFill>
+                <a:effectLst/>
+                <a:uFillTx/>
+                <a:latin typeface="Calibri"/>
+              </a:rPr>
+              <a:t>Cuarto nivel</a:t>
+            </a:r>
+            <a:endParaRPr b="0" lang="es-ES" sz="1800" strike="noStrike" u="none">
+              <a:solidFill>
+                <a:srgbClr val="000000"/>
+              </a:solidFill>
+              <a:effectLst/>
+              <a:uFillTx/>
+              <a:latin typeface="Arial"/>
+            </a:endParaRPr>
+          </a:p>
+          <a:p>
+            <a:pPr lvl="4" marL="2057400" indent="-228600" defTabSz="914400">
+              <a:lnSpc>
+                <a:spcPct val="90000"/>
+              </a:lnSpc>
+              <a:spcBef>
+                <a:spcPts val="499"/>
+              </a:spcBef>
+              <a:buClr>
+                <a:srgbClr val="000000"/>
+              </a:buClr>
+              <a:buFont typeface="Arial"/>
+              <a:buChar char="•"/>
+            </a:pPr>
+            <a:r>
+              <a:rPr b="0" lang="es-ES" sz="1800" strike="noStrike" u="none">
+                <a:solidFill>
+                  <a:schemeClr val="dk1"/>
+                </a:solidFill>
+                <a:effectLst/>
+                <a:uFillTx/>
+                <a:latin typeface="Calibri"/>
+              </a:rPr>
+              <a:t>Quinto nivel</a:t>
+            </a:r>
+            <a:endParaRPr b="0" lang="es-ES" sz="1800" strike="noStrike" u="none">
+              <a:solidFill>
+                <a:srgbClr val="000000"/>
+              </a:solidFill>
+              <a:effectLst/>
+              <a:uFillTx/>
+              <a:latin typeface="Arial"/>
+            </a:endParaRPr>
+          </a:p>
+        </p:txBody>
+      </p:sp>
+      <p:sp>
+        <p:nvSpPr>
+          <p:cNvPr id="54" name="PlaceHolder 4"/>
+          <p:cNvSpPr>
+            <a:spLocks noGrp="1"/>
+          </p:cNvSpPr>
+          <p:nvPr>
+            <p:ph type="body"/>
+          </p:nvPr>
+        </p:nvSpPr>
+        <p:spPr>
+          <a:xfrm>
+            <a:off x="6172200" y="1681200"/>
+            <a:ext cx="5181120" cy="821880"/>
+          </a:xfrm>
+          <a:prstGeom prst="rect">
+            <a:avLst/>
+          </a:prstGeom>
+          <a:noFill/>
+          <a:ln w="0">
+            <a:noFill/>
+          </a:ln>
+        </p:spPr>
+        <p:txBody>
+          <a:bodyPr lIns="91440" rIns="91440" tIns="45720" bIns="45720" anchor="b">
+            <a:noAutofit/>
+          </a:bodyPr>
+          <a:p>
+            <a:pPr indent="0" defTabSz="914400">
+              <a:lnSpc>
+                <a:spcPct val="90000"/>
+              </a:lnSpc>
+              <a:spcBef>
+                <a:spcPts val="1001"/>
+              </a:spcBef>
+              <a:buNone/>
+              <a:tabLst>
+                <a:tab algn="l" pos="0"/>
+              </a:tabLst>
+            </a:pPr>
+            <a:r>
+              <a:rPr b="1" lang="es-ES" sz="2400" strike="noStrike" u="none">
+                <a:solidFill>
+                  <a:schemeClr val="dk1"/>
+                </a:solidFill>
+                <a:effectLst/>
+                <a:uFillTx/>
+                <a:latin typeface="Calibri"/>
+              </a:rPr>
+              <a:t>Haga clic para modificar los estilos de texto del patrón</a:t>
+            </a:r>
+            <a:endParaRPr b="0" lang="es-ES" sz="2400" strike="noStrike" u="none">
+              <a:solidFill>
+                <a:srgbClr val="000000"/>
+              </a:solidFill>
+              <a:effectLst/>
+              <a:uFillTx/>
+              <a:latin typeface="Arial"/>
+            </a:endParaRPr>
+          </a:p>
+        </p:txBody>
+      </p:sp>
+      <p:sp>
+        <p:nvSpPr>
+          <p:cNvPr id="55" name="PlaceHolder 5"/>
+          <p:cNvSpPr>
+            <a:spLocks noGrp="1"/>
+          </p:cNvSpPr>
+          <p:nvPr>
+            <p:ph type="body"/>
+          </p:nvPr>
+        </p:nvSpPr>
+        <p:spPr>
+          <a:xfrm>
+            <a:off x="6172200" y="2505240"/>
+            <a:ext cx="5181120" cy="3682440"/>
+          </a:xfrm>
+          <a:prstGeom prst="rect">
+            <a:avLst/>
+          </a:prstGeom>
+          <a:noFill/>
+          <a:ln w="0">
+            <a:noFill/>
+          </a:ln>
+        </p:spPr>
+        <p:txBody>
+          <a:bodyPr lIns="91440" rIns="91440" tIns="45720" bIns="45720" anchor="t">
+            <a:noAutofit/>
+          </a:bodyPr>
+          <a:p>
+            <a:pPr marL="228600" indent="-228600" defTabSz="914400">
+              <a:lnSpc>
+                <a:spcPct val="90000"/>
+              </a:lnSpc>
+              <a:spcBef>
+                <a:spcPts val="1001"/>
+              </a:spcBef>
+              <a:buClr>
+                <a:srgbClr val="000000"/>
+              </a:buClr>
+              <a:buFont typeface="Arial"/>
+              <a:buChar char="•"/>
+            </a:pPr>
+            <a:r>
+              <a:rPr b="0" lang="es-ES" sz="2800" strike="noStrike" u="none">
+                <a:solidFill>
+                  <a:schemeClr val="dk1"/>
+                </a:solidFill>
+                <a:effectLst/>
+                <a:uFillTx/>
+                <a:latin typeface="Calibri"/>
+              </a:rPr>
+              <a:t>Haga clic para modificar los estilos de texto del patrón</a:t>
+            </a:r>
+            <a:endParaRPr b="0" lang="es-ES" sz="2800" strike="noStrike" u="none">
+              <a:solidFill>
+                <a:srgbClr val="000000"/>
+              </a:solidFill>
+              <a:effectLst/>
+              <a:uFillTx/>
+              <a:latin typeface="Arial"/>
+            </a:endParaRPr>
+          </a:p>
+          <a:p>
+            <a:pPr lvl="1" marL="685800" indent="-228600" defTabSz="914400">
+              <a:lnSpc>
+                <a:spcPct val="90000"/>
+              </a:lnSpc>
+              <a:spcBef>
+                <a:spcPts val="499"/>
+              </a:spcBef>
+              <a:buClr>
+                <a:srgbClr val="000000"/>
+              </a:buClr>
+              <a:buFont typeface="Arial"/>
+              <a:buChar char="•"/>
+            </a:pPr>
+            <a:r>
+              <a:rPr b="0" lang="es-ES" sz="2400" strike="noStrike" u="none">
+                <a:solidFill>
+                  <a:schemeClr val="dk1"/>
+                </a:solidFill>
+                <a:effectLst/>
+                <a:uFillTx/>
+                <a:latin typeface="Calibri"/>
+              </a:rPr>
+              <a:t>Segundo nivel</a:t>
+            </a:r>
+            <a:endParaRPr b="0" lang="es-ES" sz="2400" strike="noStrike" u="none">
+              <a:solidFill>
+                <a:srgbClr val="000000"/>
+              </a:solidFill>
+              <a:effectLst/>
+              <a:uFillTx/>
+              <a:latin typeface="Arial"/>
+            </a:endParaRPr>
+          </a:p>
+          <a:p>
+            <a:pPr lvl="2" marL="1143000" indent="-228600" defTabSz="914400">
+              <a:lnSpc>
+                <a:spcPct val="90000"/>
+              </a:lnSpc>
+              <a:spcBef>
+                <a:spcPts val="499"/>
+              </a:spcBef>
+              <a:buClr>
+                <a:srgbClr val="000000"/>
+              </a:buClr>
+              <a:buFont typeface="Arial"/>
+              <a:buChar char="•"/>
+            </a:pPr>
+            <a:r>
+              <a:rPr b="0" lang="es-ES" sz="2000" strike="noStrike" u="none">
+                <a:solidFill>
+                  <a:schemeClr val="dk1"/>
+                </a:solidFill>
+                <a:effectLst/>
+                <a:uFillTx/>
+                <a:latin typeface="Calibri"/>
+              </a:rPr>
+              <a:t>Tercer nivel</a:t>
+            </a:r>
+            <a:endParaRPr b="0" lang="es-ES" sz="2000" strike="noStrike" u="none">
+              <a:solidFill>
+                <a:srgbClr val="000000"/>
+              </a:solidFill>
+              <a:effectLst/>
+              <a:uFillTx/>
+              <a:latin typeface="Arial"/>
+            </a:endParaRPr>
+          </a:p>
+          <a:p>
+            <a:pPr lvl="3" marL="1600200" indent="-228600" defTabSz="914400">
+              <a:lnSpc>
+                <a:spcPct val="90000"/>
+              </a:lnSpc>
+              <a:spcBef>
+                <a:spcPts val="499"/>
+              </a:spcBef>
+              <a:buClr>
+                <a:srgbClr val="000000"/>
+              </a:buClr>
+              <a:buFont typeface="Arial"/>
+              <a:buChar char="•"/>
+            </a:pPr>
+            <a:r>
+              <a:rPr b="0" lang="es-ES" sz="1800" strike="noStrike" u="none">
+                <a:solidFill>
+                  <a:schemeClr val="dk1"/>
+                </a:solidFill>
+                <a:effectLst/>
+                <a:uFillTx/>
+                <a:latin typeface="Calibri"/>
+              </a:rPr>
+              <a:t>Cuarto nivel</a:t>
+            </a:r>
+            <a:endParaRPr b="0" lang="es-ES" sz="1800" strike="noStrike" u="none">
+              <a:solidFill>
+                <a:srgbClr val="000000"/>
+              </a:solidFill>
+              <a:effectLst/>
+              <a:uFillTx/>
+              <a:latin typeface="Arial"/>
+            </a:endParaRPr>
+          </a:p>
+          <a:p>
+            <a:pPr lvl="4" marL="2057400" indent="-228600" defTabSz="914400">
+              <a:lnSpc>
+                <a:spcPct val="90000"/>
+              </a:lnSpc>
+              <a:spcBef>
+                <a:spcPts val="499"/>
+              </a:spcBef>
+              <a:buClr>
+                <a:srgbClr val="000000"/>
+              </a:buClr>
+              <a:buFont typeface="Arial"/>
+              <a:buChar char="•"/>
+            </a:pPr>
+            <a:r>
+              <a:rPr b="0" lang="es-ES" sz="1800" strike="noStrike" u="none">
+                <a:solidFill>
+                  <a:schemeClr val="dk1"/>
+                </a:solidFill>
+                <a:effectLst/>
+                <a:uFillTx/>
+                <a:latin typeface="Calibri"/>
+              </a:rPr>
+              <a:t>Quinto nivel</a:t>
+            </a:r>
+            <a:endParaRPr b="0" lang="es-ES" sz="1800" strike="noStrike" u="none">
+              <a:solidFill>
+                <a:srgbClr val="000000"/>
+              </a:solidFill>
+              <a:effectLst/>
+              <a:uFillTx/>
+              <a:latin typeface="Arial"/>
+            </a:endParaRPr>
+          </a:p>
+        </p:txBody>
+      </p:sp>
+      <p:sp>
+        <p:nvSpPr>
+          <p:cNvPr id="56" name="PlaceHolder 6"/>
+          <p:cNvSpPr>
+            <a:spLocks noGrp="1"/>
+          </p:cNvSpPr>
+          <p:nvPr>
+            <p:ph type="dt" idx="31"/>
+          </p:nvPr>
+        </p:nvSpPr>
+        <p:spPr>
+          <a:xfrm>
+            <a:off x="838080" y="6356520"/>
+            <a:ext cx="2741040" cy="362880"/>
+          </a:xfrm>
+          <a:prstGeom prst="rect">
+            <a:avLst/>
+          </a:prstGeom>
+          <a:noFill/>
+          <a:ln w="0">
+            <a:noFill/>
+          </a:ln>
+        </p:spPr>
+        <p:txBody>
+          <a:bodyPr lIns="91440" rIns="91440" tIns="45720" bIns="45720" anchor="ctr">
+            <a:noAutofit/>
+          </a:bodyPr>
+          <a:lstStyle>
+            <a:lvl1pPr indent="0" defTabSz="914400">
+              <a:lnSpc>
+                <a:spcPct val="100000"/>
+              </a:lnSpc>
+              <a:buNone/>
+              <a:tabLst>
+                <a:tab algn="l" pos="0"/>
+              </a:tabLst>
+              <a:defRPr b="0" lang="en-GB" sz="1200" strike="noStrike" u="none">
+                <a:solidFill>
+                  <a:schemeClr val="dk1">
+                    <a:tint val="75000"/>
+                  </a:schemeClr>
+                </a:solidFill>
+                <a:effectLst/>
+                <a:uFillTx/>
+                <a:latin typeface="Calibri"/>
+              </a:defRPr>
+            </a:lvl1pPr>
+          </a:lstStyle>
+          <a:p>
+            <a:pPr indent="0" defTabSz="914400">
+              <a:lnSpc>
+                <a:spcPct val="100000"/>
+              </a:lnSpc>
+              <a:buNone/>
+              <a:tabLst>
+                <a:tab algn="l" pos="0"/>
+              </a:tabLst>
+            </a:pPr>
+            <a:r>
+              <a:rPr b="0" lang="en-GB" sz="1200" strike="noStrike" u="none">
+                <a:solidFill>
+                  <a:schemeClr val="dk1">
+                    <a:tint val="75000"/>
+                  </a:schemeClr>
+                </a:solidFill>
+                <a:effectLst/>
+                <a:uFillTx/>
+                <a:latin typeface="Calibri"/>
+              </a:rPr>
+              <a:t>&lt;fecha/hora&gt;</a:t>
+            </a:r>
+            <a:endParaRPr b="0" lang="es-ES" sz="1200" strike="noStrike" u="none">
+              <a:solidFill>
+                <a:srgbClr val="000000"/>
+              </a:solidFill>
+              <a:effectLst/>
+              <a:uFillTx/>
+              <a:latin typeface="Times New Roman"/>
+            </a:endParaRPr>
+          </a:p>
+        </p:txBody>
+      </p:sp>
+      <p:sp>
+        <p:nvSpPr>
+          <p:cNvPr id="57" name="PlaceHolder 7"/>
+          <p:cNvSpPr>
+            <a:spLocks noGrp="1"/>
+          </p:cNvSpPr>
+          <p:nvPr>
+            <p:ph type="ftr" idx="32"/>
+          </p:nvPr>
+        </p:nvSpPr>
+        <p:spPr>
+          <a:xfrm>
+            <a:off x="4038480" y="6356520"/>
+            <a:ext cx="4112640" cy="362880"/>
+          </a:xfrm>
+          <a:prstGeom prst="rect">
+            <a:avLst/>
+          </a:prstGeom>
+          <a:noFill/>
+          <a:ln w="0">
+            <a:noFill/>
+          </a:ln>
+        </p:spPr>
+        <p:txBody>
+          <a:bodyPr lIns="91440" rIns="91440" tIns="45720" bIns="45720" anchor="ctr">
+            <a:noAutofit/>
+          </a:bodyPr>
+          <a:lstStyle>
+            <a:lvl1pPr indent="0" algn="ctr">
+              <a:lnSpc>
+                <a:spcPct val="100000"/>
+              </a:lnSpc>
+              <a:buNone/>
+              <a:tabLst>
+                <a:tab algn="l" pos="0"/>
+              </a:tabLst>
+              <a:defRPr b="0" lang="es-ES" sz="1400" strike="noStrike" u="none">
+                <a:solidFill>
+                  <a:srgbClr val="000000"/>
+                </a:solidFill>
+                <a:effectLst/>
+                <a:uFillTx/>
+                <a:latin typeface="Times New Roman"/>
+              </a:defRPr>
+            </a:lvl1pPr>
+          </a:lstStyle>
+          <a:p>
+            <a:pPr indent="0" algn="ctr">
+              <a:lnSpc>
+                <a:spcPct val="100000"/>
+              </a:lnSpc>
+              <a:buNone/>
+              <a:tabLst>
+                <a:tab algn="l" pos="0"/>
+              </a:tabLst>
+            </a:pPr>
+            <a:r>
+              <a:rPr b="0" lang="es-ES" sz="1400" strike="noStrike" u="none">
+                <a:solidFill>
+                  <a:srgbClr val="000000"/>
+                </a:solidFill>
+                <a:effectLst/>
+                <a:uFillTx/>
+                <a:latin typeface="Times New Roman"/>
+              </a:rPr>
+              <a:t>&lt;pie de página&gt;</a:t>
+            </a:r>
+            <a:endParaRPr b="0" lang="es-ES" sz="1400" strike="noStrike" u="none">
+              <a:solidFill>
+                <a:srgbClr val="000000"/>
+              </a:solidFill>
+              <a:effectLst/>
+              <a:uFillTx/>
+              <a:latin typeface="Times New Roman"/>
+            </a:endParaRPr>
+          </a:p>
+        </p:txBody>
+      </p:sp>
+      <p:sp>
+        <p:nvSpPr>
+          <p:cNvPr id="58" name="PlaceHolder 8"/>
+          <p:cNvSpPr>
+            <a:spLocks noGrp="1"/>
+          </p:cNvSpPr>
+          <p:nvPr>
+            <p:ph type="sldNum" idx="33"/>
+          </p:nvPr>
+        </p:nvSpPr>
+        <p:spPr>
+          <a:xfrm>
+            <a:off x="8610480" y="6356520"/>
+            <a:ext cx="2741040" cy="362880"/>
+          </a:xfrm>
+          <a:prstGeom prst="rect">
+            <a:avLst/>
+          </a:prstGeom>
+          <a:noFill/>
+          <a:ln w="0">
+            <a:noFill/>
+          </a:ln>
+        </p:spPr>
+        <p:txBody>
+          <a:bodyPr lIns="91440" rIns="91440" tIns="45720" bIns="45720" anchor="ctr">
+            <a:noAutofit/>
+          </a:bodyPr>
+          <a:lstStyle>
+            <a:lvl1pPr indent="0" algn="r" defTabSz="914400">
+              <a:lnSpc>
+                <a:spcPct val="100000"/>
+              </a:lnSpc>
+              <a:buNone/>
+              <a:tabLst>
+                <a:tab algn="l" pos="0"/>
+              </a:tabLst>
+              <a:defRPr b="0" lang="en-GB" sz="1200" strike="noStrike" u="none">
+                <a:solidFill>
+                  <a:schemeClr val="dk1">
+                    <a:tint val="75000"/>
+                  </a:schemeClr>
+                </a:solidFill>
+                <a:effectLst/>
+                <a:uFillTx/>
+                <a:latin typeface="Calibri"/>
+              </a:defRPr>
+            </a:lvl1pPr>
+          </a:lstStyle>
+          <a:p>
+            <a:pPr indent="0" algn="r" defTabSz="914400">
+              <a:lnSpc>
+                <a:spcPct val="100000"/>
+              </a:lnSpc>
+              <a:buNone/>
+              <a:tabLst>
+                <a:tab algn="l" pos="0"/>
+              </a:tabLst>
+            </a:pPr>
+            <a:fld id="{96F49FC8-98EA-4414-9F0F-FC27ABBA1635}" type="slidenum">
+              <a:rPr b="0" lang="en-GB" sz="1200" strike="noStrike" u="none">
+                <a:solidFill>
+                  <a:schemeClr val="dk1">
+                    <a:tint val="75000"/>
+                  </a:schemeClr>
+                </a:solidFill>
+                <a:effectLst/>
+                <a:uFillTx/>
+                <a:latin typeface="Calibri"/>
+              </a:rPr>
+              <a:t>&lt;número&gt;</a:t>
+            </a:fld>
+            <a:endParaRPr b="0" lang="es-ES" sz="1200" strike="noStrike" u="none">
+              <a:solidFill>
+                <a:srgbClr val="000000"/>
+              </a:solidFill>
+              <a:effectLst/>
+              <a:uFillTx/>
+              <a:latin typeface="Times New Roman"/>
+            </a:endParaRPr>
+          </a:p>
+        </p:txBody>
+      </p:sp>
+    </p:spTree>
+  </p:cSld>
+</p:sldLayout>
+</file>
+
+<file path=ppt/slideLayouts/slideLayout2.xml><?xml version="1.0" encoding="utf-8"?>
 <p:sldLayout xmlns:a="http://schemas.openxmlformats.org/drawingml/2006/main" xmlns:p="http://schemas.openxmlformats.org/presentationml/2006/main" xmlns:r="http://schemas.openxmlformats.org/officeDocument/2006/relationships" xmlns:p14="http://schemas.microsoft.com/office/powerpoint/2010/main" xmlns:p15="http://schemas.microsoft.com/office/powerpoint/2012/main" xmlns:mc="http://schemas.openxmlformats.org/markup-compatibility/2006" type="blank" preserve="1">
   <p:cSld name="En blanco">
     <p:bg>
@@ -704,18 +1948,18 @@
       </p:grpSpPr>
       <p:sp>
         <p:nvSpPr>
-          <p:cNvPr id="48" name="PlaceHolder 1"/>
+          <p:cNvPr id="4" name="PlaceHolder 1"/>
           <p:cNvSpPr>
             <a:spLocks noGrp="1"/>
           </p:cNvSpPr>
           <p:nvPr>
-            <p:ph type="dt" idx="28"/>
+            <p:ph type="dt" idx="4"/>
           </p:nvPr>
         </p:nvSpPr>
         <p:spPr>
           <a:xfrm>
             <a:off x="838080" y="6356520"/>
-            <a:ext cx="2741400" cy="363240"/>
+            <a:ext cx="2741040" cy="362880"/>
           </a:xfrm>
           <a:prstGeom prst="rect">
             <a:avLst/>
@@ -786,18 +2030,18 @@
       </p:sp>
       <p:sp>
         <p:nvSpPr>
-          <p:cNvPr id="49" name="PlaceHolder 2"/>
+          <p:cNvPr id="5" name="PlaceHolder 2"/>
           <p:cNvSpPr>
             <a:spLocks noGrp="1"/>
           </p:cNvSpPr>
           <p:nvPr>
-            <p:ph type="ftr" idx="29"/>
+            <p:ph type="ftr" idx="5"/>
           </p:nvPr>
         </p:nvSpPr>
         <p:spPr>
           <a:xfrm>
             <a:off x="4038480" y="6356520"/>
-            <a:ext cx="4113000" cy="363240"/>
+            <a:ext cx="4112640" cy="362880"/>
           </a:xfrm>
           <a:prstGeom prst="rect">
             <a:avLst/>
@@ -864,18 +2108,18 @@
       </p:sp>
       <p:sp>
         <p:nvSpPr>
-          <p:cNvPr id="50" name="PlaceHolder 3"/>
+          <p:cNvPr id="6" name="PlaceHolder 3"/>
           <p:cNvSpPr>
             <a:spLocks noGrp="1"/>
           </p:cNvSpPr>
           <p:nvPr>
-            <p:ph type="sldNum" idx="30"/>
+            <p:ph type="sldNum" idx="6"/>
           </p:nvPr>
         </p:nvSpPr>
         <p:spPr>
           <a:xfrm>
             <a:off x="8610480" y="6356520"/>
-            <a:ext cx="2741400" cy="363240"/>
+            <a:ext cx="2741040" cy="362880"/>
           </a:xfrm>
           <a:prstGeom prst="rect">
             <a:avLst/>
@@ -920,7 +2164,7 @@
                 <a:tab algn="l" pos="0"/>
               </a:tabLst>
             </a:pPr>
-            <a:fld id="{43147E12-A6BB-41DC-8EB0-A6F87FA3A9E9}" type="slidenum">
+            <a:fld id="{2F113924-B8C6-4971-B611-2B9AAD9CEB88}" type="slidenum">
               <a:rPr b="0" lang="en-GB" sz="1200" strike="noStrike" u="none">
                 <a:solidFill>
                   <a:schemeClr val="dk1">
@@ -946,7 +2190,7 @@
       </p:sp>
       <p:sp>
         <p:nvSpPr>
-          <p:cNvPr id="51" name="PlaceHolder 4"/>
+          <p:cNvPr id="7" name="PlaceHolder 4"/>
           <p:cNvSpPr>
             <a:spLocks noGrp="1"/>
           </p:cNvSpPr>
@@ -957,7 +2201,7 @@
         <p:spPr>
           <a:xfrm>
             <a:off x="609480" y="273600"/>
-            <a:ext cx="10971360" cy="1143720"/>
+            <a:ext cx="10971000" cy="1143360"/>
           </a:xfrm>
           <a:prstGeom prst="rect">
             <a:avLst/>
@@ -1005,7 +2249,7 @@
       </p:sp>
       <p:sp>
         <p:nvSpPr>
-          <p:cNvPr id="52" name="PlaceHolder 5"/>
+          <p:cNvPr id="8" name="PlaceHolder 5"/>
           <p:cNvSpPr>
             <a:spLocks noGrp="1"/>
           </p:cNvSpPr>
@@ -1016,7 +2260,7 @@
         <p:spPr>
           <a:xfrm>
             <a:off x="609480" y="1604520"/>
-            <a:ext cx="10971360" cy="3976200"/>
+            <a:ext cx="10971000" cy="3975840"/>
           </a:xfrm>
           <a:prstGeom prst="rect">
             <a:avLst/>
@@ -1282,7 +2526,7 @@
 </p:sldLayout>
 </file>
 
-<file path=ppt/slideLayouts/slideLayout11.xml><?xml version="1.0" encoding="utf-8"?>
+<file path=ppt/slideLayouts/slideLayout3.xml><?xml version="1.0" encoding="utf-8"?>
 <p:sldLayout xmlns:a="http://schemas.openxmlformats.org/drawingml/2006/main" xmlns:p="http://schemas.openxmlformats.org/presentationml/2006/main" xmlns:r="http://schemas.openxmlformats.org/officeDocument/2006/relationships" xmlns:p14="http://schemas.microsoft.com/office/powerpoint/2010/main" xmlns:p15="http://schemas.microsoft.com/office/powerpoint/2012/main" xmlns:mc="http://schemas.openxmlformats.org/markup-compatibility/2006" type="blank" preserve="1">
   <p:cSld name="Contenido con título">
     <p:bg>
@@ -1308,7 +2552,7 @@
       </p:grpSpPr>
       <p:sp>
         <p:nvSpPr>
-          <p:cNvPr id="53" name="PlaceHolder 1"/>
+          <p:cNvPr id="9" name="PlaceHolder 1"/>
           <p:cNvSpPr>
             <a:spLocks noGrp="1"/>
           </p:cNvSpPr>
@@ -1319,7 +2563,7 @@
         <p:spPr>
           <a:xfrm>
             <a:off x="839880" y="457200"/>
-            <a:ext cx="3930480" cy="1598400"/>
+            <a:ext cx="3930120" cy="1598040"/>
           </a:xfrm>
           <a:prstGeom prst="rect">
             <a:avLst/>
@@ -1367,7 +2611,7 @@
       </p:sp>
       <p:sp>
         <p:nvSpPr>
-          <p:cNvPr id="54" name="PlaceHolder 2"/>
+          <p:cNvPr id="10" name="PlaceHolder 2"/>
           <p:cNvSpPr>
             <a:spLocks noGrp="1"/>
           </p:cNvSpPr>
@@ -1378,7 +2622,7 @@
         <p:spPr>
           <a:xfrm>
             <a:off x="5183280" y="987480"/>
-            <a:ext cx="6170400" cy="4871880"/>
+            <a:ext cx="6170040" cy="4871520"/>
           </a:xfrm>
           <a:prstGeom prst="rect">
             <a:avLst/>
@@ -1566,7 +2810,7 @@
       </p:sp>
       <p:sp>
         <p:nvSpPr>
-          <p:cNvPr id="55" name="PlaceHolder 3"/>
+          <p:cNvPr id="11" name="PlaceHolder 3"/>
           <p:cNvSpPr>
             <a:spLocks noGrp="1"/>
           </p:cNvSpPr>
@@ -1577,7 +2821,7 @@
         <p:spPr>
           <a:xfrm>
             <a:off x="839880" y="2057400"/>
-            <a:ext cx="3930480" cy="3809880"/>
+            <a:ext cx="3930120" cy="3809520"/>
           </a:xfrm>
           <a:prstGeom prst="rect">
             <a:avLst/>
@@ -1628,866 +2872,7 @@
       </p:sp>
       <p:sp>
         <p:nvSpPr>
-          <p:cNvPr id="56" name="PlaceHolder 4"/>
-          <p:cNvSpPr>
-            <a:spLocks noGrp="1"/>
-          </p:cNvSpPr>
-          <p:nvPr>
-            <p:ph type="dt" idx="31"/>
-          </p:nvPr>
-        </p:nvSpPr>
-        <p:spPr>
-          <a:xfrm>
-            <a:off x="838080" y="6356520"/>
-            <a:ext cx="2741400" cy="363240"/>
-          </a:xfrm>
-          <a:prstGeom prst="rect">
-            <a:avLst/>
-          </a:prstGeom>
-          <a:noFill/>
-          <a:ln w="0">
-            <a:noFill/>
-          </a:ln>
-        </p:spPr>
-        <p:txBody>
-          <a:bodyPr lIns="91440" rIns="91440" tIns="45720" bIns="45720" anchor="ctr">
-            <a:noAutofit/>
-          </a:bodyPr>
-          <a:lstStyle>
-            <a:lvl1pPr indent="0" defTabSz="914400">
-              <a:lnSpc>
-                <a:spcPct val="100000"/>
-              </a:lnSpc>
-              <a:buNone/>
-              <a:tabLst>
-                <a:tab algn="l" pos="0"/>
-              </a:tabLst>
-              <a:defRPr b="0" lang="en-GB" sz="1200" strike="noStrike" u="none">
-                <a:solidFill>
-                  <a:schemeClr val="dk1">
-                    <a:tint val="75000"/>
-                  </a:schemeClr>
-                </a:solidFill>
-                <a:effectLst/>
-                <a:uFillTx/>
-                <a:latin typeface="Calibri"/>
-              </a:defRPr>
-            </a:lvl1pPr>
-          </a:lstStyle>
-          <a:p>
-            <a:pPr indent="0" defTabSz="914400">
-              <a:lnSpc>
-                <a:spcPct val="100000"/>
-              </a:lnSpc>
-              <a:buNone/>
-              <a:tabLst>
-                <a:tab algn="l" pos="0"/>
-              </a:tabLst>
-            </a:pPr>
-            <a:r>
-              <a:rPr b="0" lang="en-GB" sz="1200" strike="noStrike" u="none">
-                <a:solidFill>
-                  <a:schemeClr val="dk1">
-                    <a:tint val="75000"/>
-                  </a:schemeClr>
-                </a:solidFill>
-                <a:effectLst/>
-                <a:uFillTx/>
-                <a:latin typeface="Calibri"/>
-              </a:rPr>
-              <a:t>&lt;fecha/hora&gt;</a:t>
-            </a:r>
-            <a:endParaRPr b="0" lang="es-ES" sz="1200" strike="noStrike" u="none">
-              <a:solidFill>
-                <a:srgbClr val="000000"/>
-              </a:solidFill>
-              <a:effectLst/>
-              <a:uFillTx/>
-              <a:latin typeface="Times New Roman"/>
-            </a:endParaRPr>
-          </a:p>
-        </p:txBody>
-      </p:sp>
-      <p:sp>
-        <p:nvSpPr>
-          <p:cNvPr id="57" name="PlaceHolder 5"/>
-          <p:cNvSpPr>
-            <a:spLocks noGrp="1"/>
-          </p:cNvSpPr>
-          <p:nvPr>
-            <p:ph type="ftr" idx="32"/>
-          </p:nvPr>
-        </p:nvSpPr>
-        <p:spPr>
-          <a:xfrm>
-            <a:off x="4038480" y="6356520"/>
-            <a:ext cx="4113000" cy="363240"/>
-          </a:xfrm>
-          <a:prstGeom prst="rect">
-            <a:avLst/>
-          </a:prstGeom>
-          <a:noFill/>
-          <a:ln w="0">
-            <a:noFill/>
-          </a:ln>
-        </p:spPr>
-        <p:txBody>
-          <a:bodyPr lIns="91440" rIns="91440" tIns="45720" bIns="45720" anchor="ctr">
-            <a:noAutofit/>
-          </a:bodyPr>
-          <a:lstStyle>
-            <a:lvl1pPr indent="0" algn="ctr">
-              <a:lnSpc>
-                <a:spcPct val="100000"/>
-              </a:lnSpc>
-              <a:buNone/>
-              <a:tabLst>
-                <a:tab algn="l" pos="0"/>
-              </a:tabLst>
-              <a:defRPr b="0" lang="es-ES" sz="1400" strike="noStrike" u="none">
-                <a:solidFill>
-                  <a:srgbClr val="000000"/>
-                </a:solidFill>
-                <a:effectLst/>
-                <a:uFillTx/>
-                <a:latin typeface="Times New Roman"/>
-              </a:defRPr>
-            </a:lvl1pPr>
-          </a:lstStyle>
-          <a:p>
-            <a:pPr indent="0" algn="ctr">
-              <a:lnSpc>
-                <a:spcPct val="100000"/>
-              </a:lnSpc>
-              <a:buNone/>
-              <a:tabLst>
-                <a:tab algn="l" pos="0"/>
-              </a:tabLst>
-            </a:pPr>
-            <a:r>
-              <a:rPr b="0" lang="es-ES" sz="1400" strike="noStrike" u="none">
-                <a:solidFill>
-                  <a:srgbClr val="000000"/>
-                </a:solidFill>
-                <a:effectLst/>
-                <a:uFillTx/>
-                <a:latin typeface="Times New Roman"/>
-              </a:rPr>
-              <a:t>&lt;pie de página&gt;</a:t>
-            </a:r>
-            <a:endParaRPr b="0" lang="es-ES" sz="1400" strike="noStrike" u="none">
-              <a:solidFill>
-                <a:srgbClr val="000000"/>
-              </a:solidFill>
-              <a:effectLst/>
-              <a:uFillTx/>
-              <a:latin typeface="Times New Roman"/>
-            </a:endParaRPr>
-          </a:p>
-        </p:txBody>
-      </p:sp>
-      <p:sp>
-        <p:nvSpPr>
-          <p:cNvPr id="58" name="PlaceHolder 6"/>
-          <p:cNvSpPr>
-            <a:spLocks noGrp="1"/>
-          </p:cNvSpPr>
-          <p:nvPr>
-            <p:ph type="sldNum" idx="33"/>
-          </p:nvPr>
-        </p:nvSpPr>
-        <p:spPr>
-          <a:xfrm>
-            <a:off x="8610480" y="6356520"/>
-            <a:ext cx="2741400" cy="363240"/>
-          </a:xfrm>
-          <a:prstGeom prst="rect">
-            <a:avLst/>
-          </a:prstGeom>
-          <a:noFill/>
-          <a:ln w="0">
-            <a:noFill/>
-          </a:ln>
-        </p:spPr>
-        <p:txBody>
-          <a:bodyPr lIns="91440" rIns="91440" tIns="45720" bIns="45720" anchor="ctr">
-            <a:noAutofit/>
-          </a:bodyPr>
-          <a:lstStyle>
-            <a:lvl1pPr indent="0" algn="r" defTabSz="914400">
-              <a:lnSpc>
-                <a:spcPct val="100000"/>
-              </a:lnSpc>
-              <a:buNone/>
-              <a:tabLst>
-                <a:tab algn="l" pos="0"/>
-              </a:tabLst>
-              <a:defRPr b="0" lang="en-GB" sz="1200" strike="noStrike" u="none">
-                <a:solidFill>
-                  <a:schemeClr val="dk1">
-                    <a:tint val="75000"/>
-                  </a:schemeClr>
-                </a:solidFill>
-                <a:effectLst/>
-                <a:uFillTx/>
-                <a:latin typeface="Calibri"/>
-              </a:defRPr>
-            </a:lvl1pPr>
-          </a:lstStyle>
-          <a:p>
-            <a:pPr indent="0" algn="r" defTabSz="914400">
-              <a:lnSpc>
-                <a:spcPct val="100000"/>
-              </a:lnSpc>
-              <a:buNone/>
-              <a:tabLst>
-                <a:tab algn="l" pos="0"/>
-              </a:tabLst>
-            </a:pPr>
-            <a:fld id="{B3813916-306B-4B1C-835A-1CD16D9A4DE7}" type="slidenum">
-              <a:rPr b="0" lang="en-GB" sz="1200" strike="noStrike" u="none">
-                <a:solidFill>
-                  <a:schemeClr val="dk1">
-                    <a:tint val="75000"/>
-                  </a:schemeClr>
-                </a:solidFill>
-                <a:effectLst/>
-                <a:uFillTx/>
-                <a:latin typeface="Calibri"/>
-              </a:rPr>
-              <a:t>&lt;número&gt;</a:t>
-            </a:fld>
-            <a:endParaRPr b="0" lang="es-ES" sz="1200" strike="noStrike" u="none">
-              <a:solidFill>
-                <a:srgbClr val="000000"/>
-              </a:solidFill>
-              <a:effectLst/>
-              <a:uFillTx/>
-              <a:latin typeface="Times New Roman"/>
-            </a:endParaRPr>
-          </a:p>
-        </p:txBody>
-      </p:sp>
-    </p:spTree>
-  </p:cSld>
-</p:sldLayout>
-</file>
-
-<file path=ppt/slideLayouts/slideLayout2.xml><?xml version="1.0" encoding="utf-8"?>
-<p:sldLayout xmlns:a="http://schemas.openxmlformats.org/drawingml/2006/main" xmlns:p="http://schemas.openxmlformats.org/presentationml/2006/main" xmlns:r="http://schemas.openxmlformats.org/officeDocument/2006/relationships" xmlns:p14="http://schemas.microsoft.com/office/powerpoint/2010/main" xmlns:p15="http://schemas.microsoft.com/office/powerpoint/2012/main" xmlns:mc="http://schemas.openxmlformats.org/markup-compatibility/2006" type="title" preserve="1">
-  <p:cSld name="Diapositiva de título">
-    <p:bg>
-      <p:bgPr>
-        <a:solidFill>
-          <a:srgbClr val="ffffff"/>
-        </a:solidFill>
-      </p:bgPr>
-    </p:bg>
-    <p:spTree>
-      <p:nvGrpSpPr>
-        <p:cNvPr id="1" name=""/>
-        <p:cNvGrpSpPr/>
-        <p:nvPr/>
-      </p:nvGrpSpPr>
-      <p:grpSpPr>
-        <a:xfrm>
-          <a:off x="0" y="0"/>
-          <a:ext cx="0" cy="0"/>
-          <a:chOff x="0" y="0"/>
-          <a:chExt cx="0" cy="0"/>
-        </a:xfrm>
-      </p:grpSpPr>
-      <p:sp>
-        <p:nvSpPr>
-          <p:cNvPr id="6" name="PlaceHolder 1"/>
-          <p:cNvSpPr>
-            <a:spLocks noGrp="1"/>
-          </p:cNvSpPr>
-          <p:nvPr>
-            <p:ph type="title"/>
-          </p:nvPr>
-        </p:nvSpPr>
-        <p:spPr>
-          <a:xfrm>
-            <a:off x="1523880" y="1122480"/>
-            <a:ext cx="9142200" cy="2385720"/>
-          </a:xfrm>
-          <a:prstGeom prst="rect">
-            <a:avLst/>
-          </a:prstGeom>
-          <a:noFill/>
-          <a:ln w="0">
-            <a:noFill/>
-          </a:ln>
-        </p:spPr>
-        <p:txBody>
-          <a:bodyPr lIns="91440" rIns="91440" tIns="45720" bIns="45720" anchor="b">
-            <a:noAutofit/>
-          </a:bodyPr>
-          <a:p>
-            <a:pPr indent="0" algn="ctr" defTabSz="914400">
-              <a:lnSpc>
-                <a:spcPct val="90000"/>
-              </a:lnSpc>
-              <a:buNone/>
-              <a:tabLst>
-                <a:tab algn="l" pos="0"/>
-              </a:tabLst>
-            </a:pPr>
-            <a:r>
-              <a:rPr b="0" lang="es-ES" sz="6000" strike="noStrike" u="none">
-                <a:solidFill>
-                  <a:schemeClr val="dk1"/>
-                </a:solidFill>
-                <a:effectLst/>
-                <a:uFillTx/>
-                <a:latin typeface="Calibri Light"/>
-              </a:rPr>
-              <a:t>Haga clic para modificar el estilo de título del patrón</a:t>
-            </a:r>
-            <a:endParaRPr b="0" lang="es-ES" sz="6000" strike="noStrike" u="none">
-              <a:solidFill>
-                <a:srgbClr val="000000"/>
-              </a:solidFill>
-              <a:effectLst/>
-              <a:uFillTx/>
-              <a:latin typeface="Arial"/>
-            </a:endParaRPr>
-          </a:p>
-        </p:txBody>
-      </p:sp>
-      <p:sp>
-        <p:nvSpPr>
-          <p:cNvPr id="7" name="PlaceHolder 2"/>
-          <p:cNvSpPr>
-            <a:spLocks noGrp="1"/>
-          </p:cNvSpPr>
-          <p:nvPr>
-            <p:ph type="dt" idx="4"/>
-          </p:nvPr>
-        </p:nvSpPr>
-        <p:spPr>
-          <a:xfrm>
-            <a:off x="838080" y="6356520"/>
-            <a:ext cx="2741400" cy="363240"/>
-          </a:xfrm>
-          <a:prstGeom prst="rect">
-            <a:avLst/>
-          </a:prstGeom>
-          <a:noFill/>
-          <a:ln w="0">
-            <a:noFill/>
-          </a:ln>
-        </p:spPr>
-        <p:txBody>
-          <a:bodyPr lIns="91440" rIns="91440" tIns="45720" bIns="45720" anchor="ctr">
-            <a:noAutofit/>
-          </a:bodyPr>
-          <a:lstStyle>
-            <a:lvl1pPr indent="0" defTabSz="914400">
-              <a:lnSpc>
-                <a:spcPct val="100000"/>
-              </a:lnSpc>
-              <a:buNone/>
-              <a:tabLst>
-                <a:tab algn="l" pos="0"/>
-              </a:tabLst>
-              <a:defRPr b="0" lang="en-GB" sz="1200" strike="noStrike" u="none">
-                <a:solidFill>
-                  <a:schemeClr val="dk1">
-                    <a:tint val="75000"/>
-                  </a:schemeClr>
-                </a:solidFill>
-                <a:effectLst/>
-                <a:uFillTx/>
-                <a:latin typeface="Calibri"/>
-              </a:defRPr>
-            </a:lvl1pPr>
-          </a:lstStyle>
-          <a:p>
-            <a:pPr indent="0" defTabSz="914400">
-              <a:lnSpc>
-                <a:spcPct val="100000"/>
-              </a:lnSpc>
-              <a:buNone/>
-              <a:tabLst>
-                <a:tab algn="l" pos="0"/>
-              </a:tabLst>
-            </a:pPr>
-            <a:r>
-              <a:rPr b="0" lang="en-GB" sz="1200" strike="noStrike" u="none">
-                <a:solidFill>
-                  <a:schemeClr val="dk1">
-                    <a:tint val="75000"/>
-                  </a:schemeClr>
-                </a:solidFill>
-                <a:effectLst/>
-                <a:uFillTx/>
-                <a:latin typeface="Calibri"/>
-              </a:rPr>
-              <a:t> </a:t>
-            </a:r>
-            <a:endParaRPr b="0" lang="es-ES" sz="1200" strike="noStrike" u="none">
-              <a:solidFill>
-                <a:srgbClr val="000000"/>
-              </a:solidFill>
-              <a:effectLst/>
-              <a:uFillTx/>
-              <a:latin typeface="Times New Roman"/>
-            </a:endParaRPr>
-          </a:p>
-        </p:txBody>
-      </p:sp>
-      <p:sp>
-        <p:nvSpPr>
-          <p:cNvPr id="8" name="PlaceHolder 3"/>
-          <p:cNvSpPr>
-            <a:spLocks noGrp="1"/>
-          </p:cNvSpPr>
-          <p:nvPr>
-            <p:ph type="ftr" idx="5"/>
-          </p:nvPr>
-        </p:nvSpPr>
-        <p:spPr>
-          <a:xfrm>
-            <a:off x="4038480" y="6356520"/>
-            <a:ext cx="4113000" cy="363240"/>
-          </a:xfrm>
-          <a:prstGeom prst="rect">
-            <a:avLst/>
-          </a:prstGeom>
-          <a:noFill/>
-          <a:ln w="0">
-            <a:noFill/>
-          </a:ln>
-        </p:spPr>
-        <p:txBody>
-          <a:bodyPr lIns="91440" rIns="91440" tIns="45720" bIns="45720" anchor="ctr">
-            <a:noAutofit/>
-          </a:bodyPr>
-          <a:lstStyle>
-            <a:lvl1pPr indent="0" algn="ctr">
-              <a:lnSpc>
-                <a:spcPct val="100000"/>
-              </a:lnSpc>
-              <a:buNone/>
-              <a:tabLst>
-                <a:tab algn="l" pos="0"/>
-              </a:tabLst>
-              <a:defRPr b="0" lang="es-ES" sz="1400" strike="noStrike" u="none">
-                <a:solidFill>
-                  <a:srgbClr val="000000"/>
-                </a:solidFill>
-                <a:effectLst/>
-                <a:uFillTx/>
-                <a:latin typeface="Times New Roman"/>
-              </a:defRPr>
-            </a:lvl1pPr>
-          </a:lstStyle>
-          <a:p>
-            <a:pPr indent="0" algn="ctr">
-              <a:lnSpc>
-                <a:spcPct val="100000"/>
-              </a:lnSpc>
-              <a:buNone/>
-              <a:tabLst>
-                <a:tab algn="l" pos="0"/>
-              </a:tabLst>
-            </a:pPr>
-            <a:r>
-              <a:rPr b="0" lang="es-ES" sz="1400" strike="noStrike" u="none">
-                <a:solidFill>
-                  <a:srgbClr val="000000"/>
-                </a:solidFill>
-                <a:effectLst/>
-                <a:uFillTx/>
-                <a:latin typeface="Times New Roman"/>
-              </a:rPr>
-              <a:t> </a:t>
-            </a:r>
-            <a:endParaRPr b="0" lang="es-ES" sz="1400" strike="noStrike" u="none">
-              <a:solidFill>
-                <a:srgbClr val="000000"/>
-              </a:solidFill>
-              <a:effectLst/>
-              <a:uFillTx/>
-              <a:latin typeface="Times New Roman"/>
-            </a:endParaRPr>
-          </a:p>
-        </p:txBody>
-      </p:sp>
-      <p:sp>
-        <p:nvSpPr>
-          <p:cNvPr id="9" name="PlaceHolder 4"/>
-          <p:cNvSpPr>
-            <a:spLocks noGrp="1"/>
-          </p:cNvSpPr>
-          <p:nvPr>
-            <p:ph type="sldNum" idx="6"/>
-          </p:nvPr>
-        </p:nvSpPr>
-        <p:spPr>
-          <a:xfrm>
-            <a:off x="8610480" y="6356520"/>
-            <a:ext cx="2741400" cy="363240"/>
-          </a:xfrm>
-          <a:prstGeom prst="rect">
-            <a:avLst/>
-          </a:prstGeom>
-          <a:noFill/>
-          <a:ln w="0">
-            <a:noFill/>
-          </a:ln>
-        </p:spPr>
-        <p:txBody>
-          <a:bodyPr lIns="91440" rIns="91440" tIns="45720" bIns="45720" anchor="ctr">
-            <a:noAutofit/>
-          </a:bodyPr>
-          <a:lstStyle>
-            <a:lvl1pPr indent="0" algn="r" defTabSz="914400">
-              <a:lnSpc>
-                <a:spcPct val="100000"/>
-              </a:lnSpc>
-              <a:buNone/>
-              <a:tabLst>
-                <a:tab algn="l" pos="0"/>
-              </a:tabLst>
-              <a:defRPr b="0" lang="en-GB" sz="1200" strike="noStrike" u="none">
-                <a:solidFill>
-                  <a:schemeClr val="dk1">
-                    <a:tint val="75000"/>
-                  </a:schemeClr>
-                </a:solidFill>
-                <a:effectLst/>
-                <a:uFillTx/>
-                <a:latin typeface="Calibri"/>
-              </a:defRPr>
-            </a:lvl1pPr>
-          </a:lstStyle>
-          <a:p>
-            <a:pPr indent="0" algn="r" defTabSz="914400">
-              <a:lnSpc>
-                <a:spcPct val="100000"/>
-              </a:lnSpc>
-              <a:buNone/>
-              <a:tabLst>
-                <a:tab algn="l" pos="0"/>
-              </a:tabLst>
-            </a:pPr>
-            <a:fld id="{1A000460-E77F-4342-B7D4-AA6BC65124EE}" type="slidenum">
-              <a:rPr b="0" lang="en-GB" sz="1200" strike="noStrike" u="none">
-                <a:solidFill>
-                  <a:schemeClr val="dk1">
-                    <a:tint val="75000"/>
-                  </a:schemeClr>
-                </a:solidFill>
-                <a:effectLst/>
-                <a:uFillTx/>
-                <a:latin typeface="Calibri"/>
-              </a:rPr>
-              <a:t>1</a:t>
-            </a:fld>
-            <a:endParaRPr b="0" lang="es-ES" sz="1200" strike="noStrike" u="none">
-              <a:solidFill>
-                <a:srgbClr val="000000"/>
-              </a:solidFill>
-              <a:effectLst/>
-              <a:uFillTx/>
-              <a:latin typeface="Times New Roman"/>
-            </a:endParaRPr>
-          </a:p>
-        </p:txBody>
-      </p:sp>
-    </p:spTree>
-  </p:cSld>
-</p:sldLayout>
-</file>
-
-<file path=ppt/slideLayouts/slideLayout3.xml><?xml version="1.0" encoding="utf-8"?>
-<p:sldLayout xmlns:a="http://schemas.openxmlformats.org/drawingml/2006/main" xmlns:p="http://schemas.openxmlformats.org/presentationml/2006/main" xmlns:r="http://schemas.openxmlformats.org/officeDocument/2006/relationships" xmlns:p14="http://schemas.microsoft.com/office/powerpoint/2010/main" xmlns:p15="http://schemas.microsoft.com/office/powerpoint/2012/main" xmlns:mc="http://schemas.openxmlformats.org/markup-compatibility/2006" type="vertTx" preserve="1">
-  <p:cSld name="Título y texto vertical">
-    <p:bg>
-      <p:bgPr>
-        <a:solidFill>
-          <a:srgbClr val="ffffff"/>
-        </a:solidFill>
-      </p:bgPr>
-    </p:bg>
-    <p:spTree>
-      <p:nvGrpSpPr>
-        <p:cNvPr id="1" name=""/>
-        <p:cNvGrpSpPr/>
-        <p:nvPr/>
-      </p:nvGrpSpPr>
-      <p:grpSpPr>
-        <a:xfrm>
-          <a:off x="0" y="0"/>
-          <a:ext cx="0" cy="0"/>
-          <a:chOff x="0" y="0"/>
-          <a:chExt cx="0" cy="0"/>
-        </a:xfrm>
-      </p:grpSpPr>
-      <p:sp>
-        <p:nvSpPr>
-          <p:cNvPr id="10" name="PlaceHolder 1"/>
-          <p:cNvSpPr>
-            <a:spLocks noGrp="1"/>
-          </p:cNvSpPr>
-          <p:nvPr>
-            <p:ph type="title"/>
-          </p:nvPr>
-        </p:nvSpPr>
-        <p:spPr>
-          <a:xfrm>
-            <a:off x="838080" y="365040"/>
-            <a:ext cx="10513800" cy="1323720"/>
-          </a:xfrm>
-          <a:prstGeom prst="rect">
-            <a:avLst/>
-          </a:prstGeom>
-          <a:noFill/>
-          <a:ln w="0">
-            <a:noFill/>
-          </a:ln>
-        </p:spPr>
-        <p:txBody>
-          <a:bodyPr lIns="91440" rIns="91440" tIns="45720" bIns="45720" anchor="ctr">
-            <a:noAutofit/>
-          </a:bodyPr>
-          <a:p>
-            <a:pPr indent="0" defTabSz="914400">
-              <a:lnSpc>
-                <a:spcPct val="90000"/>
-              </a:lnSpc>
-              <a:buNone/>
-              <a:tabLst>
-                <a:tab algn="l" pos="0"/>
-              </a:tabLst>
-            </a:pPr>
-            <a:r>
-              <a:rPr b="0" lang="es-ES" sz="4400" strike="noStrike" u="none">
-                <a:solidFill>
-                  <a:schemeClr val="dk1"/>
-                </a:solidFill>
-                <a:effectLst/>
-                <a:uFillTx/>
-                <a:latin typeface="Calibri Light"/>
-              </a:rPr>
-              <a:t>Haga clic para modificar el estilo de título del patrón</a:t>
-            </a:r>
-            <a:endParaRPr b="0" lang="es-ES" sz="4400" strike="noStrike" u="none">
-              <a:solidFill>
-                <a:srgbClr val="000000"/>
-              </a:solidFill>
-              <a:effectLst/>
-              <a:uFillTx/>
-              <a:latin typeface="Arial"/>
-            </a:endParaRPr>
-          </a:p>
-        </p:txBody>
-      </p:sp>
-      <p:sp>
-        <p:nvSpPr>
-          <p:cNvPr id="11" name="PlaceHolder 2"/>
-          <p:cNvSpPr>
-            <a:spLocks noGrp="1"/>
-          </p:cNvSpPr>
-          <p:nvPr>
-            <p:ph type="body"/>
-          </p:nvPr>
-        </p:nvSpPr>
-        <p:spPr>
-          <a:xfrm>
-            <a:off x="838080" y="1825560"/>
-            <a:ext cx="10513800" cy="4349520"/>
-          </a:xfrm>
-          <a:prstGeom prst="rect">
-            <a:avLst/>
-          </a:prstGeom>
-          <a:noFill/>
-          <a:ln w="0">
-            <a:noFill/>
-          </a:ln>
-        </p:spPr>
-        <p:txBody>
-          <a:bodyPr lIns="91440" rIns="91440" tIns="45720" bIns="45720" anchor="t" vert="eaVert">
-            <a:noAutofit/>
-          </a:bodyPr>
-          <a:p>
-            <a:pPr marL="228600" indent="-228600" defTabSz="914400">
-              <a:lnSpc>
-                <a:spcPct val="90000"/>
-              </a:lnSpc>
-              <a:spcBef>
-                <a:spcPts val="1001"/>
-              </a:spcBef>
-              <a:buClr>
-                <a:srgbClr val="000000"/>
-              </a:buClr>
-              <a:buFont typeface="Arial"/>
-              <a:buChar char="•"/>
-            </a:pPr>
-            <a:r>
-              <a:rPr b="0" lang="es-ES" sz="2800" strike="noStrike" u="none">
-                <a:solidFill>
-                  <a:schemeClr val="dk1"/>
-                </a:solidFill>
-                <a:effectLst/>
-                <a:uFillTx/>
-                <a:latin typeface="Calibri"/>
-              </a:rPr>
-              <a:t>Haga clic para modificar los estilos de texto del patrón</a:t>
-            </a:r>
-            <a:endParaRPr b="0" lang="es-ES" sz="2800" strike="noStrike" u="none">
-              <a:solidFill>
-                <a:srgbClr val="000000"/>
-              </a:solidFill>
-              <a:effectLst/>
-              <a:uFillTx/>
-              <a:latin typeface="Arial"/>
-            </a:endParaRPr>
-          </a:p>
-          <a:p>
-            <a:pPr lvl="1" marL="685800" indent="-228600" defTabSz="914400">
-              <a:lnSpc>
-                <a:spcPct val="90000"/>
-              </a:lnSpc>
-              <a:spcBef>
-                <a:spcPts val="499"/>
-              </a:spcBef>
-              <a:buClr>
-                <a:srgbClr val="000000"/>
-              </a:buClr>
-              <a:buFont typeface="Arial"/>
-              <a:buChar char="•"/>
-            </a:pPr>
-            <a:r>
-              <a:rPr b="0" lang="es-ES" sz="2400" strike="noStrike" u="none">
-                <a:solidFill>
-                  <a:schemeClr val="dk1"/>
-                </a:solidFill>
-                <a:effectLst/>
-                <a:uFillTx/>
-                <a:latin typeface="Calibri"/>
-              </a:rPr>
-              <a:t>Segundo nivel</a:t>
-            </a:r>
-            <a:endParaRPr b="0" lang="es-ES" sz="2400" strike="noStrike" u="none">
-              <a:solidFill>
-                <a:srgbClr val="000000"/>
-              </a:solidFill>
-              <a:effectLst/>
-              <a:uFillTx/>
-              <a:latin typeface="Arial"/>
-            </a:endParaRPr>
-          </a:p>
-          <a:p>
-            <a:pPr lvl="2" marL="1143000" indent="-228600" defTabSz="914400">
-              <a:lnSpc>
-                <a:spcPct val="90000"/>
-              </a:lnSpc>
-              <a:spcBef>
-                <a:spcPts val="499"/>
-              </a:spcBef>
-              <a:buClr>
-                <a:srgbClr val="000000"/>
-              </a:buClr>
-              <a:buFont typeface="Arial"/>
-              <a:buChar char="•"/>
-            </a:pPr>
-            <a:r>
-              <a:rPr b="0" lang="es-ES" sz="2000" strike="noStrike" u="none">
-                <a:solidFill>
-                  <a:schemeClr val="dk1"/>
-                </a:solidFill>
-                <a:effectLst/>
-                <a:uFillTx/>
-                <a:latin typeface="Calibri"/>
-              </a:rPr>
-              <a:t>Tercer nivel</a:t>
-            </a:r>
-            <a:endParaRPr b="0" lang="es-ES" sz="2000" strike="noStrike" u="none">
-              <a:solidFill>
-                <a:srgbClr val="000000"/>
-              </a:solidFill>
-              <a:effectLst/>
-              <a:uFillTx/>
-              <a:latin typeface="Arial"/>
-            </a:endParaRPr>
-          </a:p>
-          <a:p>
-            <a:pPr lvl="3" marL="1600200" indent="-228600" defTabSz="914400">
-              <a:lnSpc>
-                <a:spcPct val="90000"/>
-              </a:lnSpc>
-              <a:spcBef>
-                <a:spcPts val="499"/>
-              </a:spcBef>
-              <a:buClr>
-                <a:srgbClr val="000000"/>
-              </a:buClr>
-              <a:buFont typeface="Arial"/>
-              <a:buChar char="•"/>
-            </a:pPr>
-            <a:r>
-              <a:rPr b="0" lang="es-ES" sz="1800" strike="noStrike" u="none">
-                <a:solidFill>
-                  <a:schemeClr val="dk1"/>
-                </a:solidFill>
-                <a:effectLst/>
-                <a:uFillTx/>
-                <a:latin typeface="Calibri"/>
-              </a:rPr>
-              <a:t>Cuarto nivel</a:t>
-            </a:r>
-            <a:endParaRPr b="0" lang="es-ES" sz="1800" strike="noStrike" u="none">
-              <a:solidFill>
-                <a:srgbClr val="000000"/>
-              </a:solidFill>
-              <a:effectLst/>
-              <a:uFillTx/>
-              <a:latin typeface="Arial"/>
-            </a:endParaRPr>
-          </a:p>
-          <a:p>
-            <a:pPr lvl="4" marL="2057400" indent="-228600" defTabSz="914400">
-              <a:lnSpc>
-                <a:spcPct val="90000"/>
-              </a:lnSpc>
-              <a:spcBef>
-                <a:spcPts val="499"/>
-              </a:spcBef>
-              <a:buClr>
-                <a:srgbClr val="000000"/>
-              </a:buClr>
-              <a:buFont typeface="Arial"/>
-              <a:buChar char="•"/>
-            </a:pPr>
-            <a:r>
-              <a:rPr b="0" lang="es-ES" sz="1800" strike="noStrike" u="none">
-                <a:solidFill>
-                  <a:schemeClr val="dk1"/>
-                </a:solidFill>
-                <a:effectLst/>
-                <a:uFillTx/>
-                <a:latin typeface="Calibri"/>
-              </a:rPr>
-              <a:t>Quinto nivel</a:t>
-            </a:r>
-            <a:endParaRPr b="0" lang="es-ES" sz="1800" strike="noStrike" u="none">
-              <a:solidFill>
-                <a:srgbClr val="000000"/>
-              </a:solidFill>
-              <a:effectLst/>
-              <a:uFillTx/>
-              <a:latin typeface="Arial"/>
-            </a:endParaRPr>
-          </a:p>
-        </p:txBody>
-      </p:sp>
-      <p:sp>
-        <p:nvSpPr>
-          <p:cNvPr id="12" name="PlaceHolder 3"/>
+          <p:cNvPr id="12" name="PlaceHolder 4"/>
           <p:cNvSpPr>
             <a:spLocks noGrp="1"/>
           </p:cNvSpPr>
@@ -2498,7 +2883,7 @@
         <p:spPr>
           <a:xfrm>
             <a:off x="838080" y="6356520"/>
-            <a:ext cx="2741400" cy="363240"/>
+            <a:ext cx="2741040" cy="362880"/>
           </a:xfrm>
           <a:prstGeom prst="rect">
             <a:avLst/>
@@ -2554,7 +2939,7 @@
                 <a:uFillTx/>
                 <a:latin typeface="Calibri"/>
               </a:rPr>
-              <a:t> </a:t>
+              <a:t>&lt;fecha/hora&gt;</a:t>
             </a:r>
             <a:endParaRPr b="0" lang="es-ES" sz="1200" strike="noStrike" u="none">
               <a:solidFill>
@@ -2569,7 +2954,7 @@
       </p:sp>
       <p:sp>
         <p:nvSpPr>
-          <p:cNvPr id="13" name="PlaceHolder 4"/>
+          <p:cNvPr id="13" name="PlaceHolder 5"/>
           <p:cNvSpPr>
             <a:spLocks noGrp="1"/>
           </p:cNvSpPr>
@@ -2580,7 +2965,7 @@
         <p:spPr>
           <a:xfrm>
             <a:off x="4038480" y="6356520"/>
-            <a:ext cx="4113000" cy="363240"/>
+            <a:ext cx="4112640" cy="362880"/>
           </a:xfrm>
           <a:prstGeom prst="rect">
             <a:avLst/>
@@ -2647,7 +3032,7 @@
       </p:sp>
       <p:sp>
         <p:nvSpPr>
-          <p:cNvPr id="14" name="PlaceHolder 5"/>
+          <p:cNvPr id="14" name="PlaceHolder 6"/>
           <p:cNvSpPr>
             <a:spLocks noGrp="1"/>
           </p:cNvSpPr>
@@ -2658,7 +3043,7 @@
         <p:spPr>
           <a:xfrm>
             <a:off x="8610480" y="6356520"/>
-            <a:ext cx="2741400" cy="363240"/>
+            <a:ext cx="2741040" cy="362880"/>
           </a:xfrm>
           <a:prstGeom prst="rect">
             <a:avLst/>
@@ -2703,7 +3088,7 @@
                 <a:tab algn="l" pos="0"/>
               </a:tabLst>
             </a:pPr>
-            <a:fld id="{1A6BDF54-55F6-4436-BF47-7B0A825D851A}" type="slidenum">
+            <a:fld id="{F751533C-5E91-40E1-A00E-83DA72A07758}" type="slidenum">
               <a:rPr b="0" lang="en-GB" sz="1200" strike="noStrike" u="none">
                 <a:solidFill>
                   <a:schemeClr val="dk1">
@@ -2733,8 +3118,8 @@
 </file>
 
 <file path=ppt/slideLayouts/slideLayout4.xml><?xml version="1.0" encoding="utf-8"?>
-<p:sldLayout xmlns:a="http://schemas.openxmlformats.org/drawingml/2006/main" xmlns:p="http://schemas.openxmlformats.org/presentationml/2006/main" xmlns:r="http://schemas.openxmlformats.org/officeDocument/2006/relationships" xmlns:p14="http://schemas.microsoft.com/office/powerpoint/2010/main" xmlns:p15="http://schemas.microsoft.com/office/powerpoint/2012/main" xmlns:mc="http://schemas.openxmlformats.org/markup-compatibility/2006" type="vertTitleAndTx" preserve="1">
-  <p:cSld name="Título vertical y texto">
+<p:sldLayout xmlns:a="http://schemas.openxmlformats.org/drawingml/2006/main" xmlns:p="http://schemas.openxmlformats.org/presentationml/2006/main" xmlns:r="http://schemas.openxmlformats.org/officeDocument/2006/relationships" xmlns:p14="http://schemas.microsoft.com/office/powerpoint/2010/main" xmlns:p15="http://schemas.microsoft.com/office/powerpoint/2012/main" xmlns:mc="http://schemas.openxmlformats.org/markup-compatibility/2006" type="blank" preserve="1">
+  <p:cSld name="Imagen con título">
     <p:bg>
       <p:bgPr>
         <a:solidFill>
@@ -2768,8 +3153,8 @@
         </p:nvSpPr>
         <p:spPr>
           <a:xfrm>
-            <a:off x="8724960" y="365040"/>
-            <a:ext cx="2627280" cy="5810040"/>
+            <a:off x="839880" y="457200"/>
+            <a:ext cx="3930120" cy="1598040"/>
           </a:xfrm>
           <a:prstGeom prst="rect">
             <a:avLst/>
@@ -2780,7 +3165,7 @@
           </a:ln>
         </p:spPr>
         <p:txBody>
-          <a:bodyPr lIns="91440" rIns="91440" tIns="45720" bIns="45720" anchor="ctr" vert="eaVert">
+          <a:bodyPr lIns="91440" rIns="91440" tIns="45720" bIns="45720" anchor="b">
             <a:noAutofit/>
           </a:bodyPr>
           <a:p>
@@ -2794,7 +3179,7 @@
               </a:tabLst>
             </a:pPr>
             <a:r>
-              <a:rPr b="0" lang="es-ES" sz="4400" strike="noStrike" u="none">
+              <a:rPr b="0" lang="es-ES" sz="3200" strike="noStrike" u="none">
                 <a:solidFill>
                   <a:schemeClr val="dk1"/>
                 </a:solidFill>
@@ -2804,7 +3189,7 @@
               </a:rPr>
               <a:t>Haga clic para modificar el estilo de título del patrón</a:t>
             </a:r>
-            <a:endParaRPr b="0" lang="es-ES" sz="4400" strike="noStrike" u="none">
+            <a:endParaRPr b="0" lang="es-ES" sz="3200" strike="noStrike" u="none">
               <a:solidFill>
                 <a:srgbClr val="000000"/>
               </a:solidFill>
@@ -2827,8 +3212,8 @@
         </p:nvSpPr>
         <p:spPr>
           <a:xfrm>
-            <a:off x="838080" y="365040"/>
-            <a:ext cx="7732440" cy="5810040"/>
+            <a:off x="5183280" y="987480"/>
+            <a:ext cx="6170040" cy="4871520"/>
           </a:xfrm>
           <a:prstGeom prst="rect">
             <a:avLst/>
@@ -2839,25 +3224,26 @@
           </a:ln>
         </p:spPr>
         <p:txBody>
-          <a:bodyPr lIns="91440" rIns="91440" tIns="45720" bIns="45720" anchor="t" vert="eaVert">
+          <a:bodyPr lIns="90000" rIns="90000" tIns="45000" bIns="45000" anchor="t">
             <a:noAutofit/>
           </a:bodyPr>
           <a:p>
-            <a:pPr marL="228600" indent="-228600" defTabSz="914400">
+            <a:pPr marL="432000" indent="-324000">
               <a:lnSpc>
                 <a:spcPct val="90000"/>
               </a:lnSpc>
               <a:spcBef>
-                <a:spcPts val="1001"/>
+                <a:spcPts val="1417"/>
               </a:spcBef>
               <a:buClr>
                 <a:srgbClr val="000000"/>
               </a:buClr>
-              <a:buFont typeface="Arial"/>
-              <a:buChar char="•"/>
-            </a:pPr>
-            <a:r>
-              <a:rPr b="0" lang="es-ES" sz="2800" strike="noStrike" u="none">
+              <a:buSzPct val="45000"/>
+              <a:buFont typeface="Wingdings" charset="2"/>
+              <a:buChar char=""/>
+            </a:pPr>
+            <a:r>
+              <a:rPr b="0" lang="es-ES" sz="3200" strike="noStrike" u="none">
                 <a:solidFill>
                   <a:schemeClr val="dk1"/>
                 </a:solidFill>
@@ -2865,33 +3251,34 @@
                 <a:uFillTx/>
                 <a:latin typeface="Calibri"/>
               </a:rPr>
-              <a:t>Haga clic para modificar los estilos de texto del patrón</a:t>
-            </a:r>
-            <a:endParaRPr b="0" lang="es-ES" sz="2800" strike="noStrike" u="none">
-              <a:solidFill>
-                <a:srgbClr val="000000"/>
-              </a:solidFill>
-              <a:effectLst/>
-              <a:uFillTx/>
-              <a:latin typeface="Arial"/>
-            </a:endParaRPr>
-          </a:p>
-          <a:p>
-            <a:pPr lvl="1" marL="685800" indent="-228600" defTabSz="914400">
+              <a:t>Pulse para editar el formato de texto del esquema</a:t>
+            </a:r>
+            <a:endParaRPr b="0" lang="es-ES" sz="3200" strike="noStrike" u="none">
+              <a:solidFill>
+                <a:srgbClr val="000000"/>
+              </a:solidFill>
+              <a:effectLst/>
+              <a:uFillTx/>
+              <a:latin typeface="Arial"/>
+            </a:endParaRPr>
+          </a:p>
+          <a:p>
+            <a:pPr lvl="1" marL="864000" indent="-324000">
               <a:lnSpc>
                 <a:spcPct val="90000"/>
               </a:lnSpc>
               <a:spcBef>
-                <a:spcPts val="499"/>
+                <a:spcPts val="1134"/>
               </a:spcBef>
               <a:buClr>
                 <a:srgbClr val="000000"/>
               </a:buClr>
-              <a:buFont typeface="Arial"/>
-              <a:buChar char="•"/>
-            </a:pPr>
-            <a:r>
-              <a:rPr b="0" lang="es-ES" sz="2400" strike="noStrike" u="none">
+              <a:buSzPct val="75000"/>
+              <a:buFont typeface="Symbol" charset="2"/>
+              <a:buChar char=""/>
+            </a:pPr>
+            <a:r>
+              <a:rPr b="0" lang="es-ES" sz="3200" strike="noStrike" u="none">
                 <a:solidFill>
                   <a:schemeClr val="dk1"/>
                 </a:solidFill>
@@ -2899,33 +3286,34 @@
                 <a:uFillTx/>
                 <a:latin typeface="Calibri"/>
               </a:rPr>
-              <a:t>Segundo nivel</a:t>
-            </a:r>
-            <a:endParaRPr b="0" lang="es-ES" sz="2400" strike="noStrike" u="none">
-              <a:solidFill>
-                <a:srgbClr val="000000"/>
-              </a:solidFill>
-              <a:effectLst/>
-              <a:uFillTx/>
-              <a:latin typeface="Arial"/>
-            </a:endParaRPr>
-          </a:p>
-          <a:p>
-            <a:pPr lvl="2" marL="1143000" indent="-228600" defTabSz="914400">
+              <a:t>Segundo nivel del esquema</a:t>
+            </a:r>
+            <a:endParaRPr b="0" lang="es-ES" sz="3200" strike="noStrike" u="none">
+              <a:solidFill>
+                <a:srgbClr val="000000"/>
+              </a:solidFill>
+              <a:effectLst/>
+              <a:uFillTx/>
+              <a:latin typeface="Arial"/>
+            </a:endParaRPr>
+          </a:p>
+          <a:p>
+            <a:pPr lvl="2" marL="1296000" indent="-288000">
               <a:lnSpc>
                 <a:spcPct val="90000"/>
               </a:lnSpc>
               <a:spcBef>
-                <a:spcPts val="499"/>
+                <a:spcPts val="850"/>
               </a:spcBef>
               <a:buClr>
                 <a:srgbClr val="000000"/>
               </a:buClr>
-              <a:buFont typeface="Arial"/>
-              <a:buChar char="•"/>
-            </a:pPr>
-            <a:r>
-              <a:rPr b="0" lang="es-ES" sz="2000" strike="noStrike" u="none">
+              <a:buSzPct val="45000"/>
+              <a:buFont typeface="Wingdings" charset="2"/>
+              <a:buChar char=""/>
+            </a:pPr>
+            <a:r>
+              <a:rPr b="0" lang="es-ES" sz="3200" strike="noStrike" u="none">
                 <a:solidFill>
                   <a:schemeClr val="dk1"/>
                 </a:solidFill>
@@ -2933,33 +3321,34 @@
                 <a:uFillTx/>
                 <a:latin typeface="Calibri"/>
               </a:rPr>
-              <a:t>Tercer nivel</a:t>
-            </a:r>
-            <a:endParaRPr b="0" lang="es-ES" sz="2000" strike="noStrike" u="none">
-              <a:solidFill>
-                <a:srgbClr val="000000"/>
-              </a:solidFill>
-              <a:effectLst/>
-              <a:uFillTx/>
-              <a:latin typeface="Arial"/>
-            </a:endParaRPr>
-          </a:p>
-          <a:p>
-            <a:pPr lvl="3" marL="1600200" indent="-228600" defTabSz="914400">
+              <a:t>Tercer nivel del esquema</a:t>
+            </a:r>
+            <a:endParaRPr b="0" lang="es-ES" sz="3200" strike="noStrike" u="none">
+              <a:solidFill>
+                <a:srgbClr val="000000"/>
+              </a:solidFill>
+              <a:effectLst/>
+              <a:uFillTx/>
+              <a:latin typeface="Arial"/>
+            </a:endParaRPr>
+          </a:p>
+          <a:p>
+            <a:pPr lvl="3" marL="1728000" indent="-216000">
               <a:lnSpc>
                 <a:spcPct val="90000"/>
               </a:lnSpc>
               <a:spcBef>
-                <a:spcPts val="499"/>
+                <a:spcPts val="567"/>
               </a:spcBef>
               <a:buClr>
                 <a:srgbClr val="000000"/>
               </a:buClr>
-              <a:buFont typeface="Arial"/>
-              <a:buChar char="•"/>
-            </a:pPr>
-            <a:r>
-              <a:rPr b="0" lang="es-ES" sz="1800" strike="noStrike" u="none">
+              <a:buSzPct val="75000"/>
+              <a:buFont typeface="Symbol" charset="2"/>
+              <a:buChar char=""/>
+            </a:pPr>
+            <a:r>
+              <a:rPr b="0" lang="es-ES" sz="3200" strike="noStrike" u="none">
                 <a:solidFill>
                   <a:schemeClr val="dk1"/>
                 </a:solidFill>
@@ -2967,33 +3356,34 @@
                 <a:uFillTx/>
                 <a:latin typeface="Calibri"/>
               </a:rPr>
-              <a:t>Cuarto nivel</a:t>
-            </a:r>
-            <a:endParaRPr b="0" lang="es-ES" sz="1800" strike="noStrike" u="none">
-              <a:solidFill>
-                <a:srgbClr val="000000"/>
-              </a:solidFill>
-              <a:effectLst/>
-              <a:uFillTx/>
-              <a:latin typeface="Arial"/>
-            </a:endParaRPr>
-          </a:p>
-          <a:p>
-            <a:pPr lvl="4" marL="2057400" indent="-228600" defTabSz="914400">
+              <a:t>Cuarto nivel del esquema</a:t>
+            </a:r>
+            <a:endParaRPr b="0" lang="es-ES" sz="3200" strike="noStrike" u="none">
+              <a:solidFill>
+                <a:srgbClr val="000000"/>
+              </a:solidFill>
+              <a:effectLst/>
+              <a:uFillTx/>
+              <a:latin typeface="Arial"/>
+            </a:endParaRPr>
+          </a:p>
+          <a:p>
+            <a:pPr lvl="4" marL="2160000" indent="-216000">
               <a:lnSpc>
                 <a:spcPct val="90000"/>
               </a:lnSpc>
               <a:spcBef>
-                <a:spcPts val="499"/>
+                <a:spcPts val="283"/>
               </a:spcBef>
               <a:buClr>
                 <a:srgbClr val="000000"/>
               </a:buClr>
-              <a:buFont typeface="Arial"/>
-              <a:buChar char="•"/>
-            </a:pPr>
-            <a:r>
-              <a:rPr b="0" lang="es-ES" sz="1800" strike="noStrike" u="none">
+              <a:buSzPct val="45000"/>
+              <a:buFont typeface="Wingdings" charset="2"/>
+              <a:buChar char=""/>
+            </a:pPr>
+            <a:r>
+              <a:rPr b="0" lang="es-ES" sz="3200" strike="noStrike" u="none">
                 <a:solidFill>
                   <a:schemeClr val="dk1"/>
                 </a:solidFill>
@@ -3001,9 +3391,79 @@
                 <a:uFillTx/>
                 <a:latin typeface="Calibri"/>
               </a:rPr>
-              <a:t>Quinto nivel</a:t>
-            </a:r>
-            <a:endParaRPr b="0" lang="es-ES" sz="1800" strike="noStrike" u="none">
+              <a:t>Quinto nivel del esquema</a:t>
+            </a:r>
+            <a:endParaRPr b="0" lang="es-ES" sz="3200" strike="noStrike" u="none">
+              <a:solidFill>
+                <a:srgbClr val="000000"/>
+              </a:solidFill>
+              <a:effectLst/>
+              <a:uFillTx/>
+              <a:latin typeface="Arial"/>
+            </a:endParaRPr>
+          </a:p>
+          <a:p>
+            <a:pPr lvl="5" marL="2592000" indent="-216000">
+              <a:lnSpc>
+                <a:spcPct val="90000"/>
+              </a:lnSpc>
+              <a:spcBef>
+                <a:spcPts val="283"/>
+              </a:spcBef>
+              <a:buClr>
+                <a:srgbClr val="000000"/>
+              </a:buClr>
+              <a:buSzPct val="45000"/>
+              <a:buFont typeface="Wingdings" charset="2"/>
+              <a:buChar char=""/>
+            </a:pPr>
+            <a:r>
+              <a:rPr b="0" lang="es-ES" sz="3200" strike="noStrike" u="none">
+                <a:solidFill>
+                  <a:schemeClr val="dk1"/>
+                </a:solidFill>
+                <a:effectLst/>
+                <a:uFillTx/>
+                <a:latin typeface="Calibri"/>
+              </a:rPr>
+              <a:t>Sexto nivel del esquema</a:t>
+            </a:r>
+            <a:endParaRPr b="0" lang="es-ES" sz="3200" strike="noStrike" u="none">
+              <a:solidFill>
+                <a:srgbClr val="000000"/>
+              </a:solidFill>
+              <a:effectLst/>
+              <a:uFillTx/>
+              <a:latin typeface="Arial"/>
+            </a:endParaRPr>
+          </a:p>
+          <a:p>
+            <a:pPr lvl="6" marL="3024000" indent="-216000">
+              <a:lnSpc>
+                <a:spcPct val="90000"/>
+              </a:lnSpc>
+              <a:spcBef>
+                <a:spcPts val="283"/>
+              </a:spcBef>
+              <a:buClr>
+                <a:srgbClr val="000000"/>
+              </a:buClr>
+              <a:buSzPct val="45000"/>
+              <a:buFont typeface="Wingdings" charset="2"/>
+              <a:buChar char=""/>
+            </a:pPr>
+            <a:r>
+              <a:rPr b="0" lang="es-ES" sz="3200" strike="noStrike" u="none">
+                <a:solidFill>
+                  <a:schemeClr val="dk1"/>
+                </a:solidFill>
+                <a:effectLst/>
+                <a:uFillTx/>
+                <a:latin typeface="Calibri"/>
+              </a:rPr>
+              <a:t>Séptimo nivel del esquema</a:t>
+            </a:r>
+            <a:endParaRPr b="0" lang="es-ES" sz="3200" strike="noStrike" u="none">
               <a:solidFill>
                 <a:srgbClr val="000000"/>
               </a:solidFill>
@@ -3021,13 +3481,13 @@
             <a:spLocks noGrp="1"/>
           </p:cNvSpPr>
           <p:nvPr>
-            <p:ph type="dt" idx="10"/>
+            <p:ph type="body"/>
           </p:nvPr>
         </p:nvSpPr>
         <p:spPr>
           <a:xfrm>
-            <a:off x="838080" y="6356520"/>
-            <a:ext cx="2741400" cy="363240"/>
+            <a:off x="839880" y="2057400"/>
+            <a:ext cx="3930120" cy="3809520"/>
           </a:xfrm>
           <a:prstGeom prst="rect">
             <a:avLst/>
@@ -3038,60 +3498,40 @@
           </a:ln>
         </p:spPr>
         <p:txBody>
-          <a:bodyPr lIns="91440" rIns="91440" tIns="45720" bIns="45720" anchor="ctr">
+          <a:bodyPr lIns="91440" rIns="91440" tIns="45720" bIns="45720" anchor="t">
             <a:noAutofit/>
           </a:bodyPr>
-          <a:lstStyle>
-            <a:lvl1pPr indent="0" defTabSz="914400">
-              <a:lnSpc>
-                <a:spcPct val="100000"/>
-              </a:lnSpc>
-              <a:buNone/>
-              <a:tabLst>
-                <a:tab algn="l" pos="0"/>
-              </a:tabLst>
-              <a:defRPr b="0" lang="en-GB" sz="1200" strike="noStrike" u="none">
-                <a:solidFill>
-                  <a:schemeClr val="dk1">
-                    <a:tint val="75000"/>
-                  </a:schemeClr>
-                </a:solidFill>
-                <a:effectLst/>
-                <a:uFillTx/>
-                <a:latin typeface="Calibri"/>
-              </a:defRPr>
-            </a:lvl1pPr>
-          </a:lstStyle>
           <a:p>
             <a:pPr indent="0" defTabSz="914400">
               <a:lnSpc>
-                <a:spcPct val="100000"/>
-              </a:lnSpc>
-              <a:buNone/>
-              <a:tabLst>
-                <a:tab algn="l" pos="0"/>
-              </a:tabLst>
-            </a:pPr>
-            <a:r>
-              <a:rPr b="0" lang="en-GB" sz="1200" strike="noStrike" u="none">
-                <a:solidFill>
-                  <a:schemeClr val="dk1">
-                    <a:tint val="75000"/>
-                  </a:schemeClr>
-                </a:solidFill>
-                <a:effectLst/>
-                <a:uFillTx/>
-                <a:latin typeface="Calibri"/>
-              </a:rPr>
-              <a:t>&lt;fecha/hora&gt;</a:t>
-            </a:r>
-            <a:endParaRPr b="0" lang="es-ES" sz="1200" strike="noStrike" u="none">
-              <a:solidFill>
-                <a:srgbClr val="000000"/>
-              </a:solidFill>
-              <a:effectLst/>
-              <a:uFillTx/>
-              <a:latin typeface="Times New Roman"/>
+                <a:spcPct val="90000"/>
+              </a:lnSpc>
+              <a:spcBef>
+                <a:spcPts val="1001"/>
+              </a:spcBef>
+              <a:buNone/>
+              <a:tabLst>
+                <a:tab algn="l" pos="0"/>
+              </a:tabLst>
+            </a:pPr>
+            <a:r>
+              <a:rPr b="0" lang="es-ES" sz="1600" strike="noStrike" u="none">
+                <a:solidFill>
+                  <a:schemeClr val="dk1"/>
+                </a:solidFill>
+                <a:effectLst/>
+                <a:uFillTx/>
+                <a:latin typeface="Calibri"/>
+              </a:rPr>
+              <a:t>Haga clic para modificar los estilos de texto del patrón</a:t>
+            </a:r>
+            <a:endParaRPr b="0" lang="es-ES" sz="1600" strike="noStrike" u="none">
+              <a:solidFill>
+                <a:srgbClr val="000000"/>
+              </a:solidFill>
+              <a:effectLst/>
+              <a:uFillTx/>
+              <a:latin typeface="Arial"/>
             </a:endParaRPr>
           </a:p>
         </p:txBody>
@@ -3103,13 +3543,13 @@
             <a:spLocks noGrp="1"/>
           </p:cNvSpPr>
           <p:nvPr>
-            <p:ph type="ftr" idx="11"/>
+            <p:ph type="dt" idx="10"/>
           </p:nvPr>
         </p:nvSpPr>
         <p:spPr>
           <a:xfrm>
-            <a:off x="4038480" y="6356520"/>
-            <a:ext cx="4113000" cy="363240"/>
+            <a:off x="838080" y="6356520"/>
+            <a:ext cx="2741040" cy="362880"/>
           </a:xfrm>
           <a:prstGeom prst="rect">
             <a:avLst/>
@@ -3124,46 +3564,50 @@
             <a:noAutofit/>
           </a:bodyPr>
           <a:lstStyle>
-            <a:lvl1pPr indent="0" algn="ctr">
-              <a:lnSpc>
-                <a:spcPct val="100000"/>
-              </a:lnSpc>
-              <a:buNone/>
-              <a:tabLst>
-                <a:tab algn="l" pos="0"/>
-              </a:tabLst>
-              <a:defRPr b="0" lang="es-ES" sz="1400" strike="noStrike" u="none">
-                <a:solidFill>
-                  <a:srgbClr val="000000"/>
-                </a:solidFill>
-                <a:effectLst/>
-                <a:uFillTx/>
-                <a:latin typeface="Times New Roman"/>
+            <a:lvl1pPr indent="0" defTabSz="914400">
+              <a:lnSpc>
+                <a:spcPct val="100000"/>
+              </a:lnSpc>
+              <a:buNone/>
+              <a:tabLst>
+                <a:tab algn="l" pos="0"/>
+              </a:tabLst>
+              <a:defRPr b="0" lang="en-GB" sz="1200" strike="noStrike" u="none">
+                <a:solidFill>
+                  <a:schemeClr val="dk1">
+                    <a:tint val="75000"/>
+                  </a:schemeClr>
+                </a:solidFill>
+                <a:effectLst/>
+                <a:uFillTx/>
+                <a:latin typeface="Calibri"/>
               </a:defRPr>
             </a:lvl1pPr>
           </a:lstStyle>
           <a:p>
-            <a:pPr indent="0" algn="ctr">
-              <a:lnSpc>
-                <a:spcPct val="100000"/>
-              </a:lnSpc>
-              <a:buNone/>
-              <a:tabLst>
-                <a:tab algn="l" pos="0"/>
-              </a:tabLst>
-            </a:pPr>
-            <a:r>
-              <a:rPr b="0" lang="es-ES" sz="1400" strike="noStrike" u="none">
-                <a:solidFill>
-                  <a:srgbClr val="000000"/>
-                </a:solidFill>
-                <a:effectLst/>
-                <a:uFillTx/>
-                <a:latin typeface="Times New Roman"/>
-              </a:rPr>
-              <a:t>&lt;pie de página&gt;</a:t>
-            </a:r>
-            <a:endParaRPr b="0" lang="es-ES" sz="1400" strike="noStrike" u="none">
+            <a:pPr indent="0" defTabSz="914400">
+              <a:lnSpc>
+                <a:spcPct val="100000"/>
+              </a:lnSpc>
+              <a:buNone/>
+              <a:tabLst>
+                <a:tab algn="l" pos="0"/>
+              </a:tabLst>
+            </a:pPr>
+            <a:r>
+              <a:rPr b="0" lang="en-GB" sz="1200" strike="noStrike" u="none">
+                <a:solidFill>
+                  <a:schemeClr val="dk1">
+                    <a:tint val="75000"/>
+                  </a:schemeClr>
+                </a:solidFill>
+                <a:effectLst/>
+                <a:uFillTx/>
+                <a:latin typeface="Calibri"/>
+              </a:rPr>
+              <a:t>&lt;fecha/hora&gt;</a:t>
+            </a:r>
+            <a:endParaRPr b="0" lang="es-ES" sz="1200" strike="noStrike" u="none">
               <a:solidFill>
                 <a:srgbClr val="000000"/>
               </a:solidFill>
@@ -3181,13 +3625,91 @@
             <a:spLocks noGrp="1"/>
           </p:cNvSpPr>
           <p:nvPr>
+            <p:ph type="ftr" idx="11"/>
+          </p:nvPr>
+        </p:nvSpPr>
+        <p:spPr>
+          <a:xfrm>
+            <a:off x="4038480" y="6356520"/>
+            <a:ext cx="4112640" cy="362880"/>
+          </a:xfrm>
+          <a:prstGeom prst="rect">
+            <a:avLst/>
+          </a:prstGeom>
+          <a:noFill/>
+          <a:ln w="0">
+            <a:noFill/>
+          </a:ln>
+        </p:spPr>
+        <p:txBody>
+          <a:bodyPr lIns="91440" rIns="91440" tIns="45720" bIns="45720" anchor="ctr">
+            <a:noAutofit/>
+          </a:bodyPr>
+          <a:lstStyle>
+            <a:lvl1pPr indent="0" algn="ctr">
+              <a:lnSpc>
+                <a:spcPct val="100000"/>
+              </a:lnSpc>
+              <a:buNone/>
+              <a:tabLst>
+                <a:tab algn="l" pos="0"/>
+              </a:tabLst>
+              <a:defRPr b="0" lang="es-ES" sz="1400" strike="noStrike" u="none">
+                <a:solidFill>
+                  <a:srgbClr val="000000"/>
+                </a:solidFill>
+                <a:effectLst/>
+                <a:uFillTx/>
+                <a:latin typeface="Times New Roman"/>
+              </a:defRPr>
+            </a:lvl1pPr>
+          </a:lstStyle>
+          <a:p>
+            <a:pPr indent="0" algn="ctr">
+              <a:lnSpc>
+                <a:spcPct val="100000"/>
+              </a:lnSpc>
+              <a:buNone/>
+              <a:tabLst>
+                <a:tab algn="l" pos="0"/>
+              </a:tabLst>
+            </a:pPr>
+            <a:r>
+              <a:rPr b="0" lang="es-ES" sz="1400" strike="noStrike" u="none">
+                <a:solidFill>
+                  <a:srgbClr val="000000"/>
+                </a:solidFill>
+                <a:effectLst/>
+                <a:uFillTx/>
+                <a:latin typeface="Times New Roman"/>
+              </a:rPr>
+              <a:t>&lt;pie de página&gt;</a:t>
+            </a:r>
+            <a:endParaRPr b="0" lang="es-ES" sz="1400" strike="noStrike" u="none">
+              <a:solidFill>
+                <a:srgbClr val="000000"/>
+              </a:solidFill>
+              <a:effectLst/>
+              <a:uFillTx/>
+              <a:latin typeface="Times New Roman"/>
+            </a:endParaRPr>
+          </a:p>
+        </p:txBody>
+      </p:sp>
+      <p:sp>
+        <p:nvSpPr>
+          <p:cNvPr id="20" name="PlaceHolder 6"/>
+          <p:cNvSpPr>
+            <a:spLocks noGrp="1"/>
+          </p:cNvSpPr>
+          <p:nvPr>
             <p:ph type="sldNum" idx="12"/>
           </p:nvPr>
         </p:nvSpPr>
         <p:spPr>
           <a:xfrm>
             <a:off x="8610480" y="6356520"/>
-            <a:ext cx="2741400" cy="363240"/>
+            <a:ext cx="2741040" cy="362880"/>
           </a:xfrm>
           <a:prstGeom prst="rect">
             <a:avLst/>
@@ -3232,7 +3754,7 @@
                 <a:tab algn="l" pos="0"/>
               </a:tabLst>
             </a:pPr>
-            <a:fld id="{5B0DAFC3-B3C2-4ED5-BCDE-16A19349033D}" type="slidenum">
+            <a:fld id="{F126CE7A-2E6D-47C2-AA65-F6CDEAC03627}" type="slidenum">
               <a:rPr b="0" lang="en-GB" sz="1200" strike="noStrike" u="none">
                 <a:solidFill>
                   <a:schemeClr val="dk1">
@@ -3262,8 +3784,8 @@
 </file>
 
 <file path=ppt/slideLayouts/slideLayout5.xml><?xml version="1.0" encoding="utf-8"?>
-<p:sldLayout xmlns:a="http://schemas.openxmlformats.org/drawingml/2006/main" xmlns:p="http://schemas.openxmlformats.org/presentationml/2006/main" xmlns:r="http://schemas.openxmlformats.org/officeDocument/2006/relationships" xmlns:p14="http://schemas.microsoft.com/office/powerpoint/2010/main" xmlns:p15="http://schemas.microsoft.com/office/powerpoint/2012/main" xmlns:mc="http://schemas.openxmlformats.org/markup-compatibility/2006" type="obj" preserve="1">
-  <p:cSld name="Título y objetos">
+<p:sldLayout xmlns:a="http://schemas.openxmlformats.org/drawingml/2006/main" xmlns:p="http://schemas.openxmlformats.org/presentationml/2006/main" xmlns:r="http://schemas.openxmlformats.org/officeDocument/2006/relationships" xmlns:p14="http://schemas.microsoft.com/office/powerpoint/2010/main" xmlns:p15="http://schemas.microsoft.com/office/powerpoint/2012/main" xmlns:mc="http://schemas.openxmlformats.org/markup-compatibility/2006" type="title" preserve="1">
+  <p:cSld name="Diapositiva de título">
     <p:bg>
       <p:bgPr>
         <a:solidFill>
@@ -3287,7 +3809,7 @@
       </p:grpSpPr>
       <p:sp>
         <p:nvSpPr>
-          <p:cNvPr id="20" name="PlaceHolder 1"/>
+          <p:cNvPr id="21" name="PlaceHolder 1"/>
           <p:cNvSpPr>
             <a:spLocks noGrp="1"/>
           </p:cNvSpPr>
@@ -3297,8 +3819,8 @@
         </p:nvSpPr>
         <p:spPr>
           <a:xfrm>
-            <a:off x="838080" y="365040"/>
-            <a:ext cx="10513800" cy="1323720"/>
+            <a:off x="1523880" y="1122480"/>
+            <a:ext cx="9141840" cy="2385360"/>
           </a:xfrm>
           <a:prstGeom prst="rect">
             <a:avLst/>
@@ -3309,11 +3831,11 @@
           </a:ln>
         </p:spPr>
         <p:txBody>
-          <a:bodyPr lIns="91440" rIns="91440" tIns="45720" bIns="45720" anchor="ctr">
+          <a:bodyPr lIns="91440" rIns="91440" tIns="45720" bIns="45720" anchor="b">
             <a:noAutofit/>
           </a:bodyPr>
           <a:p>
-            <a:pPr indent="0" defTabSz="914400">
+            <a:pPr indent="0" algn="ctr" defTabSz="914400">
               <a:lnSpc>
                 <a:spcPct val="90000"/>
               </a:lnSpc>
@@ -3323,7 +3845,7 @@
               </a:tabLst>
             </a:pPr>
             <a:r>
-              <a:rPr b="0" lang="es-ES" sz="4400" strike="noStrike" u="none">
+              <a:rPr b="0" lang="es-ES" sz="6000" strike="noStrike" u="none">
                 <a:solidFill>
                   <a:schemeClr val="dk1"/>
                 </a:solidFill>
@@ -3333,7 +3855,7 @@
               </a:rPr>
               <a:t>Haga clic para modificar el estilo de título del patrón</a:t>
             </a:r>
-            <a:endParaRPr b="0" lang="es-ES" sz="4400" strike="noStrike" u="none">
+            <a:endParaRPr b="0" lang="es-ES" sz="6000" strike="noStrike" u="none">
               <a:solidFill>
                 <a:srgbClr val="000000"/>
               </a:solidFill>
@@ -3346,206 +3868,7 @@
       </p:sp>
       <p:sp>
         <p:nvSpPr>
-          <p:cNvPr id="21" name="PlaceHolder 2"/>
-          <p:cNvSpPr>
-            <a:spLocks noGrp="1"/>
-          </p:cNvSpPr>
-          <p:nvPr>
-            <p:ph type="body"/>
-          </p:nvPr>
-        </p:nvSpPr>
-        <p:spPr>
-          <a:xfrm>
-            <a:off x="838080" y="1825560"/>
-            <a:ext cx="10513800" cy="4349520"/>
-          </a:xfrm>
-          <a:prstGeom prst="rect">
-            <a:avLst/>
-          </a:prstGeom>
-          <a:noFill/>
-          <a:ln w="0">
-            <a:noFill/>
-          </a:ln>
-        </p:spPr>
-        <p:txBody>
-          <a:bodyPr lIns="91440" rIns="91440" tIns="45720" bIns="45720" anchor="t">
-            <a:noAutofit/>
-          </a:bodyPr>
-          <a:p>
-            <a:pPr marL="228600" indent="-228600" defTabSz="914400">
-              <a:lnSpc>
-                <a:spcPct val="90000"/>
-              </a:lnSpc>
-              <a:spcBef>
-                <a:spcPts val="1001"/>
-              </a:spcBef>
-              <a:buClr>
-                <a:srgbClr val="000000"/>
-              </a:buClr>
-              <a:buFont typeface="Arial"/>
-              <a:buChar char="•"/>
-            </a:pPr>
-            <a:r>
-              <a:rPr b="0" lang="es-ES" sz="2800" strike="noStrike" u="none">
-                <a:solidFill>
-                  <a:schemeClr val="dk1"/>
-                </a:solidFill>
-                <a:effectLst/>
-                <a:uFillTx/>
-                <a:latin typeface="Calibri"/>
-              </a:rPr>
-              <a:t>Haga clic para modificar los estilos de texto del patrón</a:t>
-            </a:r>
-            <a:endParaRPr b="0" lang="es-ES" sz="2800" strike="noStrike" u="none">
-              <a:solidFill>
-                <a:srgbClr val="000000"/>
-              </a:solidFill>
-              <a:effectLst/>
-              <a:uFillTx/>
-              <a:latin typeface="Arial"/>
-            </a:endParaRPr>
-          </a:p>
-          <a:p>
-            <a:pPr lvl="1" marL="685800" indent="-228600" defTabSz="914400">
-              <a:lnSpc>
-                <a:spcPct val="90000"/>
-              </a:lnSpc>
-              <a:spcBef>
-                <a:spcPts val="499"/>
-              </a:spcBef>
-              <a:buClr>
-                <a:srgbClr val="000000"/>
-              </a:buClr>
-              <a:buFont typeface="Arial"/>
-              <a:buChar char="•"/>
-            </a:pPr>
-            <a:r>
-              <a:rPr b="0" lang="es-ES" sz="2400" strike="noStrike" u="none">
-                <a:solidFill>
-                  <a:schemeClr val="dk1"/>
-                </a:solidFill>
-                <a:effectLst/>
-                <a:uFillTx/>
-                <a:latin typeface="Calibri"/>
-              </a:rPr>
-              <a:t>Segundo nivel</a:t>
-            </a:r>
-            <a:endParaRPr b="0" lang="es-ES" sz="2400" strike="noStrike" u="none">
-              <a:solidFill>
-                <a:srgbClr val="000000"/>
-              </a:solidFill>
-              <a:effectLst/>
-              <a:uFillTx/>
-              <a:latin typeface="Arial"/>
-            </a:endParaRPr>
-          </a:p>
-          <a:p>
-            <a:pPr lvl="2" marL="1143000" indent="-228600" defTabSz="914400">
-              <a:lnSpc>
-                <a:spcPct val="90000"/>
-              </a:lnSpc>
-              <a:spcBef>
-                <a:spcPts val="499"/>
-              </a:spcBef>
-              <a:buClr>
-                <a:srgbClr val="000000"/>
-              </a:buClr>
-              <a:buFont typeface="Arial"/>
-              <a:buChar char="•"/>
-            </a:pPr>
-            <a:r>
-              <a:rPr b="0" lang="es-ES" sz="2000" strike="noStrike" u="none">
-                <a:solidFill>
-                  <a:schemeClr val="dk1"/>
-                </a:solidFill>
-                <a:effectLst/>
-                <a:uFillTx/>
-                <a:latin typeface="Calibri"/>
-              </a:rPr>
-              <a:t>Tercer nivel</a:t>
-            </a:r>
-            <a:endParaRPr b="0" lang="es-ES" sz="2000" strike="noStrike" u="none">
-              <a:solidFill>
-                <a:srgbClr val="000000"/>
-              </a:solidFill>
-              <a:effectLst/>
-              <a:uFillTx/>
-              <a:latin typeface="Arial"/>
-            </a:endParaRPr>
-          </a:p>
-          <a:p>
-            <a:pPr lvl="3" marL="1600200" indent="-228600" defTabSz="914400">
-              <a:lnSpc>
-                <a:spcPct val="90000"/>
-              </a:lnSpc>
-              <a:spcBef>
-                <a:spcPts val="499"/>
-              </a:spcBef>
-              <a:buClr>
-                <a:srgbClr val="000000"/>
-              </a:buClr>
-              <a:buFont typeface="Arial"/>
-              <a:buChar char="•"/>
-            </a:pPr>
-            <a:r>
-              <a:rPr b="0" lang="es-ES" sz="1800" strike="noStrike" u="none">
-                <a:solidFill>
-                  <a:schemeClr val="dk1"/>
-                </a:solidFill>
-                <a:effectLst/>
-                <a:uFillTx/>
-                <a:latin typeface="Calibri"/>
-              </a:rPr>
-              <a:t>Cuarto nivel</a:t>
-            </a:r>
-            <a:endParaRPr b="0" lang="es-ES" sz="1800" strike="noStrike" u="none">
-              <a:solidFill>
-                <a:srgbClr val="000000"/>
-              </a:solidFill>
-              <a:effectLst/>
-              <a:uFillTx/>
-              <a:latin typeface="Arial"/>
-            </a:endParaRPr>
-          </a:p>
-          <a:p>
-            <a:pPr lvl="4" marL="2057400" indent="-228600" defTabSz="914400">
-              <a:lnSpc>
-                <a:spcPct val="90000"/>
-              </a:lnSpc>
-              <a:spcBef>
-                <a:spcPts val="499"/>
-              </a:spcBef>
-              <a:buClr>
-                <a:srgbClr val="000000"/>
-              </a:buClr>
-              <a:buFont typeface="Arial"/>
-              <a:buChar char="•"/>
-            </a:pPr>
-            <a:r>
-              <a:rPr b="0" lang="es-ES" sz="1800" strike="noStrike" u="none">
-                <a:solidFill>
-                  <a:schemeClr val="dk1"/>
-                </a:solidFill>
-                <a:effectLst/>
-                <a:uFillTx/>
-                <a:latin typeface="Calibri"/>
-              </a:rPr>
-              <a:t>Quinto nivel</a:t>
-            </a:r>
-            <a:endParaRPr b="0" lang="es-ES" sz="1800" strike="noStrike" u="none">
-              <a:solidFill>
-                <a:srgbClr val="000000"/>
-              </a:solidFill>
-              <a:effectLst/>
-              <a:uFillTx/>
-              <a:latin typeface="Arial"/>
-            </a:endParaRPr>
-          </a:p>
-        </p:txBody>
-      </p:sp>
-      <p:sp>
-        <p:nvSpPr>
-          <p:cNvPr id="22" name="PlaceHolder 3"/>
+          <p:cNvPr id="22" name="PlaceHolder 2"/>
           <p:cNvSpPr>
             <a:spLocks noGrp="1"/>
           </p:cNvSpPr>
@@ -3556,7 +3879,7 @@
         <p:spPr>
           <a:xfrm>
             <a:off x="838080" y="6356520"/>
-            <a:ext cx="2741400" cy="363240"/>
+            <a:ext cx="2741040" cy="362880"/>
           </a:xfrm>
           <a:prstGeom prst="rect">
             <a:avLst/>
@@ -3627,7 +3950,7 @@
       </p:sp>
       <p:sp>
         <p:nvSpPr>
-          <p:cNvPr id="23" name="PlaceHolder 4"/>
+          <p:cNvPr id="23" name="PlaceHolder 3"/>
           <p:cNvSpPr>
             <a:spLocks noGrp="1"/>
           </p:cNvSpPr>
@@ -3638,7 +3961,7 @@
         <p:spPr>
           <a:xfrm>
             <a:off x="4038480" y="6356520"/>
-            <a:ext cx="4113000" cy="363240"/>
+            <a:ext cx="4112640" cy="362880"/>
           </a:xfrm>
           <a:prstGeom prst="rect">
             <a:avLst/>
@@ -3705,7 +4028,7 @@
       </p:sp>
       <p:sp>
         <p:nvSpPr>
-          <p:cNvPr id="24" name="PlaceHolder 5"/>
+          <p:cNvPr id="24" name="PlaceHolder 4"/>
           <p:cNvSpPr>
             <a:spLocks noGrp="1"/>
           </p:cNvSpPr>
@@ -3716,7 +4039,7 @@
         <p:spPr>
           <a:xfrm>
             <a:off x="8610480" y="6356520"/>
-            <a:ext cx="2741400" cy="363240"/>
+            <a:ext cx="2741040" cy="362880"/>
           </a:xfrm>
           <a:prstGeom prst="rect">
             <a:avLst/>
@@ -3761,7 +4084,7 @@
                 <a:tab algn="l" pos="0"/>
               </a:tabLst>
             </a:pPr>
-            <a:fld id="{7351E7A1-434F-4341-9B03-24A8EB14C1B2}" type="slidenum">
+            <a:fld id="{5396E0D0-5227-4702-B483-208B19C73D98}" type="slidenum">
               <a:rPr b="0" lang="en-GB" sz="1200" strike="noStrike" u="none">
                 <a:solidFill>
                   <a:schemeClr val="dk1">
@@ -3791,8 +4114,8 @@
 </file>
 
 <file path=ppt/slideLayouts/slideLayout6.xml><?xml version="1.0" encoding="utf-8"?>
-<p:sldLayout xmlns:a="http://schemas.openxmlformats.org/drawingml/2006/main" xmlns:p="http://schemas.openxmlformats.org/presentationml/2006/main" xmlns:r="http://schemas.openxmlformats.org/officeDocument/2006/relationships" xmlns:p14="http://schemas.microsoft.com/office/powerpoint/2010/main" xmlns:p15="http://schemas.microsoft.com/office/powerpoint/2012/main" xmlns:mc="http://schemas.openxmlformats.org/markup-compatibility/2006" type="blank" preserve="1">
-  <p:cSld name="Encabezado de sección">
+<p:sldLayout xmlns:a="http://schemas.openxmlformats.org/drawingml/2006/main" xmlns:p="http://schemas.openxmlformats.org/presentationml/2006/main" xmlns:r="http://schemas.openxmlformats.org/officeDocument/2006/relationships" xmlns:p14="http://schemas.microsoft.com/office/powerpoint/2010/main" xmlns:p15="http://schemas.microsoft.com/office/powerpoint/2012/main" xmlns:mc="http://schemas.openxmlformats.org/markup-compatibility/2006" type="vertTx" preserve="1">
+  <p:cSld name="Título y texto vertical">
     <p:bg>
       <p:bgPr>
         <a:solidFill>
@@ -3826,8 +4149,8 @@
         </p:nvSpPr>
         <p:spPr>
           <a:xfrm>
-            <a:off x="831960" y="1709640"/>
-            <a:ext cx="10513800" cy="2850840"/>
+            <a:off x="838080" y="365040"/>
+            <a:ext cx="10513440" cy="1323360"/>
           </a:xfrm>
           <a:prstGeom prst="rect">
             <a:avLst/>
@@ -3838,7 +4161,7 @@
           </a:ln>
         </p:spPr>
         <p:txBody>
-          <a:bodyPr lIns="91440" rIns="91440" tIns="45720" bIns="45720" anchor="b">
+          <a:bodyPr lIns="91440" rIns="91440" tIns="45720" bIns="45720" anchor="ctr">
             <a:noAutofit/>
           </a:bodyPr>
           <a:p>
@@ -3852,7 +4175,7 @@
               </a:tabLst>
             </a:pPr>
             <a:r>
-              <a:rPr b="0" lang="es-ES" sz="6000" strike="noStrike" u="none">
+              <a:rPr b="0" lang="es-ES" sz="4400" strike="noStrike" u="none">
                 <a:solidFill>
                   <a:schemeClr val="dk1"/>
                 </a:solidFill>
@@ -3862,7 +4185,7 @@
               </a:rPr>
               <a:t>Haga clic para modificar el estilo de título del patrón</a:t>
             </a:r>
-            <a:endParaRPr b="0" lang="es-ES" sz="6000" strike="noStrike" u="none">
+            <a:endParaRPr b="0" lang="es-ES" sz="4400" strike="noStrike" u="none">
               <a:solidFill>
                 <a:srgbClr val="000000"/>
               </a:solidFill>
@@ -3885,8 +4208,8 @@
         </p:nvSpPr>
         <p:spPr>
           <a:xfrm>
-            <a:off x="831960" y="4589640"/>
-            <a:ext cx="10513800" cy="1498320"/>
+            <a:off x="838080" y="1825560"/>
+            <a:ext cx="10513440" cy="4349160"/>
           </a:xfrm>
           <a:prstGeom prst="rect">
             <a:avLst/>
@@ -3897,36 +4220,171 @@
           </a:ln>
         </p:spPr>
         <p:txBody>
-          <a:bodyPr lIns="91440" rIns="91440" tIns="45720" bIns="45720" anchor="t">
+          <a:bodyPr lIns="91440" rIns="91440" tIns="45720" bIns="45720" anchor="t" vert="eaVert">
             <a:noAutofit/>
           </a:bodyPr>
           <a:p>
-            <a:pPr indent="0" defTabSz="914400">
+            <a:pPr marL="228600" indent="-228600" defTabSz="914400">
               <a:lnSpc>
                 <a:spcPct val="90000"/>
               </a:lnSpc>
               <a:spcBef>
                 <a:spcPts val="1001"/>
               </a:spcBef>
-              <a:buNone/>
-              <a:tabLst>
-                <a:tab algn="l" pos="0"/>
-              </a:tabLst>
+              <a:buClr>
+                <a:srgbClr val="000000"/>
+              </a:buClr>
+              <a:buFont typeface="Arial"/>
+              <a:buChar char="•"/>
+            </a:pPr>
+            <a:r>
+              <a:rPr b="0" lang="es-ES" sz="2800" strike="noStrike" u="none">
+                <a:solidFill>
+                  <a:schemeClr val="dk1"/>
+                </a:solidFill>
+                <a:effectLst/>
+                <a:uFillTx/>
+                <a:latin typeface="Calibri"/>
+              </a:rPr>
+              <a:t>Haga clic para modificar los estilos de texto del patrón</a:t>
+            </a:r>
+            <a:endParaRPr b="0" lang="es-ES" sz="2800" strike="noStrike" u="none">
+              <a:solidFill>
+                <a:srgbClr val="000000"/>
+              </a:solidFill>
+              <a:effectLst/>
+              <a:uFillTx/>
+              <a:latin typeface="Arial"/>
+            </a:endParaRPr>
+          </a:p>
+          <a:p>
+            <a:pPr lvl="1" marL="685800" indent="-228600" defTabSz="914400">
+              <a:lnSpc>
+                <a:spcPct val="90000"/>
+              </a:lnSpc>
+              <a:spcBef>
+                <a:spcPts val="499"/>
+              </a:spcBef>
+              <a:buClr>
+                <a:srgbClr val="000000"/>
+              </a:buClr>
+              <a:buFont typeface="Arial"/>
+              <a:buChar char="•"/>
             </a:pPr>
             <a:r>
               <a:rPr b="0" lang="es-ES" sz="2400" strike="noStrike" u="none">
                 <a:solidFill>
-                  <a:schemeClr val="dk1">
-                    <a:tint val="75000"/>
-                  </a:schemeClr>
-                </a:solidFill>
-                <a:effectLst/>
-                <a:uFillTx/>
-                <a:latin typeface="Calibri"/>
-              </a:rPr>
-              <a:t>Haga clic para modificar los estilos de texto del patrón</a:t>
+                  <a:schemeClr val="dk1"/>
+                </a:solidFill>
+                <a:effectLst/>
+                <a:uFillTx/>
+                <a:latin typeface="Calibri"/>
+              </a:rPr>
+              <a:t>Segundo nivel</a:t>
             </a:r>
             <a:endParaRPr b="0" lang="es-ES" sz="2400" strike="noStrike" u="none">
+              <a:solidFill>
+                <a:srgbClr val="000000"/>
+              </a:solidFill>
+              <a:effectLst/>
+              <a:uFillTx/>
+              <a:latin typeface="Arial"/>
+            </a:endParaRPr>
+          </a:p>
+          <a:p>
+            <a:pPr lvl="2" marL="1143000" indent="-228600" defTabSz="914400">
+              <a:lnSpc>
+                <a:spcPct val="90000"/>
+              </a:lnSpc>
+              <a:spcBef>
+                <a:spcPts val="499"/>
+              </a:spcBef>
+              <a:buClr>
+                <a:srgbClr val="000000"/>
+              </a:buClr>
+              <a:buFont typeface="Arial"/>
+              <a:buChar char="•"/>
+            </a:pPr>
+            <a:r>
+              <a:rPr b="0" lang="es-ES" sz="2000" strike="noStrike" u="none">
+                <a:solidFill>
+                  <a:schemeClr val="dk1"/>
+                </a:solidFill>
+                <a:effectLst/>
+                <a:uFillTx/>
+                <a:latin typeface="Calibri"/>
+              </a:rPr>
+              <a:t>Tercer nivel</a:t>
+            </a:r>
+            <a:endParaRPr b="0" lang="es-ES" sz="2000" strike="noStrike" u="none">
+              <a:solidFill>
+                <a:srgbClr val="000000"/>
+              </a:solidFill>
+              <a:effectLst/>
+              <a:uFillTx/>
+              <a:latin typeface="Arial"/>
+            </a:endParaRPr>
+          </a:p>
+          <a:p>
+            <a:pPr lvl="3" marL="1600200" indent="-228600" defTabSz="914400">
+              <a:lnSpc>
+                <a:spcPct val="90000"/>
+              </a:lnSpc>
+              <a:spcBef>
+                <a:spcPts val="499"/>
+              </a:spcBef>
+              <a:buClr>
+                <a:srgbClr val="000000"/>
+              </a:buClr>
+              <a:buFont typeface="Arial"/>
+              <a:buChar char="•"/>
+            </a:pPr>
+            <a:r>
+              <a:rPr b="0" lang="es-ES" sz="1800" strike="noStrike" u="none">
+                <a:solidFill>
+                  <a:schemeClr val="dk1"/>
+                </a:solidFill>
+                <a:effectLst/>
+                <a:uFillTx/>
+                <a:latin typeface="Calibri"/>
+              </a:rPr>
+              <a:t>Cuarto nivel</a:t>
+            </a:r>
+            <a:endParaRPr b="0" lang="es-ES" sz="1800" strike="noStrike" u="none">
+              <a:solidFill>
+                <a:srgbClr val="000000"/>
+              </a:solidFill>
+              <a:effectLst/>
+              <a:uFillTx/>
+              <a:latin typeface="Arial"/>
+            </a:endParaRPr>
+          </a:p>
+          <a:p>
+            <a:pPr lvl="4" marL="2057400" indent="-228600" defTabSz="914400">
+              <a:lnSpc>
+                <a:spcPct val="90000"/>
+              </a:lnSpc>
+              <a:spcBef>
+                <a:spcPts val="499"/>
+              </a:spcBef>
+              <a:buClr>
+                <a:srgbClr val="000000"/>
+              </a:buClr>
+              <a:buFont typeface="Arial"/>
+              <a:buChar char="•"/>
+            </a:pPr>
+            <a:r>
+              <a:rPr b="0" lang="es-ES" sz="1800" strike="noStrike" u="none">
+                <a:solidFill>
+                  <a:schemeClr val="dk1"/>
+                </a:solidFill>
+                <a:effectLst/>
+                <a:uFillTx/>
+                <a:latin typeface="Calibri"/>
+              </a:rPr>
+              <a:t>Quinto nivel</a:t>
+            </a:r>
+            <a:endParaRPr b="0" lang="es-ES" sz="1800" strike="noStrike" u="none">
               <a:solidFill>
                 <a:srgbClr val="000000"/>
               </a:solidFill>
@@ -3950,7 +4408,7 @@
         <p:spPr>
           <a:xfrm>
             <a:off x="838080" y="6356520"/>
-            <a:ext cx="2741400" cy="363240"/>
+            <a:ext cx="2741040" cy="362880"/>
           </a:xfrm>
           <a:prstGeom prst="rect">
             <a:avLst/>
@@ -4032,7 +4490,7 @@
         <p:spPr>
           <a:xfrm>
             <a:off x="4038480" y="6356520"/>
-            <a:ext cx="4113000" cy="363240"/>
+            <a:ext cx="4112640" cy="362880"/>
           </a:xfrm>
           <a:prstGeom prst="rect">
             <a:avLst/>
@@ -4110,7 +4568,7 @@
         <p:spPr>
           <a:xfrm>
             <a:off x="8610480" y="6356520"/>
-            <a:ext cx="2741400" cy="363240"/>
+            <a:ext cx="2741040" cy="362880"/>
           </a:xfrm>
           <a:prstGeom prst="rect">
             <a:avLst/>
@@ -4155,7 +4613,7 @@
                 <a:tab algn="l" pos="0"/>
               </a:tabLst>
             </a:pPr>
-            <a:fld id="{298F63F9-8DFE-4073-8278-61426440D912}" type="slidenum">
+            <a:fld id="{104F1B70-0E55-41E1-B978-CA6DB3E46AF2}" type="slidenum">
               <a:rPr b="0" lang="en-GB" sz="1200" strike="noStrike" u="none">
                 <a:solidFill>
                   <a:schemeClr val="dk1">
@@ -4185,8 +4643,8 @@
 </file>
 
 <file path=ppt/slideLayouts/slideLayout7.xml><?xml version="1.0" encoding="utf-8"?>
-<p:sldLayout xmlns:a="http://schemas.openxmlformats.org/drawingml/2006/main" xmlns:p="http://schemas.openxmlformats.org/presentationml/2006/main" xmlns:r="http://schemas.openxmlformats.org/officeDocument/2006/relationships" xmlns:p14="http://schemas.microsoft.com/office/powerpoint/2010/main" xmlns:p15="http://schemas.microsoft.com/office/powerpoint/2012/main" xmlns:mc="http://schemas.openxmlformats.org/markup-compatibility/2006" type="twoObj" preserve="1">
-  <p:cSld name="Dos objetos">
+<p:sldLayout xmlns:a="http://schemas.openxmlformats.org/drawingml/2006/main" xmlns:p="http://schemas.openxmlformats.org/presentationml/2006/main" xmlns:r="http://schemas.openxmlformats.org/officeDocument/2006/relationships" xmlns:p14="http://schemas.microsoft.com/office/powerpoint/2010/main" xmlns:p15="http://schemas.microsoft.com/office/powerpoint/2012/main" xmlns:mc="http://schemas.openxmlformats.org/markup-compatibility/2006" type="vertTitleAndTx" preserve="1">
+  <p:cSld name="Título vertical y texto">
     <p:bg>
       <p:bgPr>
         <a:solidFill>
@@ -4220,8 +4678,8 @@
         </p:nvSpPr>
         <p:spPr>
           <a:xfrm>
-            <a:off x="838080" y="365040"/>
-            <a:ext cx="10513800" cy="1323720"/>
+            <a:off x="8724960" y="365040"/>
+            <a:ext cx="2626920" cy="5809680"/>
           </a:xfrm>
           <a:prstGeom prst="rect">
             <a:avLst/>
@@ -4232,7 +4690,7 @@
           </a:ln>
         </p:spPr>
         <p:txBody>
-          <a:bodyPr lIns="91440" rIns="91440" tIns="45720" bIns="45720" anchor="ctr">
+          <a:bodyPr lIns="91440" rIns="91440" tIns="45720" bIns="45720" anchor="ctr" vert="eaVert">
             <a:noAutofit/>
           </a:bodyPr>
           <a:p>
@@ -4279,8 +4737,8 @@
         </p:nvSpPr>
         <p:spPr>
           <a:xfrm>
-            <a:off x="838080" y="1825560"/>
-            <a:ext cx="5179680" cy="4349520"/>
+            <a:off x="838080" y="365040"/>
+            <a:ext cx="7732080" cy="5809680"/>
           </a:xfrm>
           <a:prstGeom prst="rect">
             <a:avLst/>
@@ -4291,7 +4749,7 @@
           </a:ln>
         </p:spPr>
         <p:txBody>
-          <a:bodyPr lIns="91440" rIns="91440" tIns="45720" bIns="45720" anchor="t">
+          <a:bodyPr lIns="91440" rIns="91440" tIns="45720" bIns="45720" anchor="t" vert="eaVert">
             <a:noAutofit/>
           </a:bodyPr>
           <a:p>
@@ -4473,13 +4931,13 @@
             <a:spLocks noGrp="1"/>
           </p:cNvSpPr>
           <p:nvPr>
-            <p:ph type="body"/>
+            <p:ph type="dt" idx="19"/>
           </p:nvPr>
         </p:nvSpPr>
         <p:spPr>
           <a:xfrm>
-            <a:off x="6172200" y="1825560"/>
-            <a:ext cx="5179680" cy="4349520"/>
+            <a:off x="838080" y="6356520"/>
+            <a:ext cx="2741040" cy="362880"/>
           </a:xfrm>
           <a:prstGeom prst="rect">
             <a:avLst/>
@@ -4490,177 +4948,60 @@
           </a:ln>
         </p:spPr>
         <p:txBody>
-          <a:bodyPr lIns="91440" rIns="91440" tIns="45720" bIns="45720" anchor="t">
+          <a:bodyPr lIns="91440" rIns="91440" tIns="45720" bIns="45720" anchor="ctr">
             <a:noAutofit/>
           </a:bodyPr>
-          <a:p>
-            <a:pPr marL="228600" indent="-228600" defTabSz="914400">
-              <a:lnSpc>
-                <a:spcPct val="90000"/>
-              </a:lnSpc>
-              <a:spcBef>
-                <a:spcPts val="1001"/>
-              </a:spcBef>
-              <a:buClr>
-                <a:srgbClr val="000000"/>
-              </a:buClr>
-              <a:buFont typeface="Arial"/>
-              <a:buChar char="•"/>
-            </a:pPr>
-            <a:r>
-              <a:rPr b="0" lang="es-ES" sz="2800" strike="noStrike" u="none">
-                <a:solidFill>
-                  <a:schemeClr val="dk1"/>
-                </a:solidFill>
-                <a:effectLst/>
-                <a:uFillTx/>
-                <a:latin typeface="Calibri"/>
-              </a:rPr>
-              <a:t>Haga clic para modificar los estilos de texto del patrón</a:t>
-            </a:r>
-            <a:endParaRPr b="0" lang="es-ES" sz="2800" strike="noStrike" u="none">
-              <a:solidFill>
-                <a:srgbClr val="000000"/>
-              </a:solidFill>
-              <a:effectLst/>
-              <a:uFillTx/>
-              <a:latin typeface="Arial"/>
-            </a:endParaRPr>
-          </a:p>
-          <a:p>
-            <a:pPr lvl="1" marL="685800" indent="-228600" defTabSz="914400">
-              <a:lnSpc>
-                <a:spcPct val="90000"/>
-              </a:lnSpc>
-              <a:spcBef>
-                <a:spcPts val="499"/>
-              </a:spcBef>
-              <a:buClr>
-                <a:srgbClr val="000000"/>
-              </a:buClr>
-              <a:buFont typeface="Arial"/>
-              <a:buChar char="•"/>
-            </a:pPr>
-            <a:r>
-              <a:rPr b="0" lang="es-ES" sz="2400" strike="noStrike" u="none">
-                <a:solidFill>
-                  <a:schemeClr val="dk1"/>
-                </a:solidFill>
-                <a:effectLst/>
-                <a:uFillTx/>
-                <a:latin typeface="Calibri"/>
-              </a:rPr>
-              <a:t>Segundo nivel</a:t>
-            </a:r>
-            <a:endParaRPr b="0" lang="es-ES" sz="2400" strike="noStrike" u="none">
-              <a:solidFill>
-                <a:srgbClr val="000000"/>
-              </a:solidFill>
-              <a:effectLst/>
-              <a:uFillTx/>
-              <a:latin typeface="Arial"/>
-            </a:endParaRPr>
-          </a:p>
-          <a:p>
-            <a:pPr lvl="2" marL="1143000" indent="-228600" defTabSz="914400">
-              <a:lnSpc>
-                <a:spcPct val="90000"/>
-              </a:lnSpc>
-              <a:spcBef>
-                <a:spcPts val="499"/>
-              </a:spcBef>
-              <a:buClr>
-                <a:srgbClr val="000000"/>
-              </a:buClr>
-              <a:buFont typeface="Arial"/>
-              <a:buChar char="•"/>
-            </a:pPr>
-            <a:r>
-              <a:rPr b="0" lang="es-ES" sz="2000" strike="noStrike" u="none">
-                <a:solidFill>
-                  <a:schemeClr val="dk1"/>
-                </a:solidFill>
-                <a:effectLst/>
-                <a:uFillTx/>
-                <a:latin typeface="Calibri"/>
-              </a:rPr>
-              <a:t>Tercer nivel</a:t>
-            </a:r>
-            <a:endParaRPr b="0" lang="es-ES" sz="2000" strike="noStrike" u="none">
-              <a:solidFill>
-                <a:srgbClr val="000000"/>
-              </a:solidFill>
-              <a:effectLst/>
-              <a:uFillTx/>
-              <a:latin typeface="Arial"/>
-            </a:endParaRPr>
-          </a:p>
-          <a:p>
-            <a:pPr lvl="3" marL="1600200" indent="-228600" defTabSz="914400">
-              <a:lnSpc>
-                <a:spcPct val="90000"/>
-              </a:lnSpc>
-              <a:spcBef>
-                <a:spcPts val="499"/>
-              </a:spcBef>
-              <a:buClr>
-                <a:srgbClr val="000000"/>
-              </a:buClr>
-              <a:buFont typeface="Arial"/>
-              <a:buChar char="•"/>
-            </a:pPr>
-            <a:r>
-              <a:rPr b="0" lang="es-ES" sz="1800" strike="noStrike" u="none">
-                <a:solidFill>
-                  <a:schemeClr val="dk1"/>
-                </a:solidFill>
-                <a:effectLst/>
-                <a:uFillTx/>
-                <a:latin typeface="Calibri"/>
-              </a:rPr>
-              <a:t>Cuarto nivel</a:t>
-            </a:r>
-            <a:endParaRPr b="0" lang="es-ES" sz="1800" strike="noStrike" u="none">
-              <a:solidFill>
-                <a:srgbClr val="000000"/>
-              </a:solidFill>
-              <a:effectLst/>
-              <a:uFillTx/>
-              <a:latin typeface="Arial"/>
-            </a:endParaRPr>
-          </a:p>
-          <a:p>
-            <a:pPr lvl="4" marL="2057400" indent="-228600" defTabSz="914400">
-              <a:lnSpc>
-                <a:spcPct val="90000"/>
-              </a:lnSpc>
-              <a:spcBef>
-                <a:spcPts val="499"/>
-              </a:spcBef>
-              <a:buClr>
-                <a:srgbClr val="000000"/>
-              </a:buClr>
-              <a:buFont typeface="Arial"/>
-              <a:buChar char="•"/>
-            </a:pPr>
-            <a:r>
-              <a:rPr b="0" lang="es-ES" sz="1800" strike="noStrike" u="none">
-                <a:solidFill>
-                  <a:schemeClr val="dk1"/>
-                </a:solidFill>
-                <a:effectLst/>
-                <a:uFillTx/>
-                <a:latin typeface="Calibri"/>
-              </a:rPr>
-              <a:t>Quinto nivel</a:t>
-            </a:r>
-            <a:endParaRPr b="0" lang="es-ES" sz="1800" strike="noStrike" u="none">
-              <a:solidFill>
-                <a:srgbClr val="000000"/>
-              </a:solidFill>
-              <a:effectLst/>
-              <a:uFillTx/>
-              <a:latin typeface="Arial"/>
+          <a:lstStyle>
+            <a:lvl1pPr indent="0" defTabSz="914400">
+              <a:lnSpc>
+                <a:spcPct val="100000"/>
+              </a:lnSpc>
+              <a:buNone/>
+              <a:tabLst>
+                <a:tab algn="l" pos="0"/>
+              </a:tabLst>
+              <a:defRPr b="0" lang="en-GB" sz="1200" strike="noStrike" u="none">
+                <a:solidFill>
+                  <a:schemeClr val="dk1">
+                    <a:tint val="75000"/>
+                  </a:schemeClr>
+                </a:solidFill>
+                <a:effectLst/>
+                <a:uFillTx/>
+                <a:latin typeface="Calibri"/>
+              </a:defRPr>
+            </a:lvl1pPr>
+          </a:lstStyle>
+          <a:p>
+            <a:pPr indent="0" defTabSz="914400">
+              <a:lnSpc>
+                <a:spcPct val="100000"/>
+              </a:lnSpc>
+              <a:buNone/>
+              <a:tabLst>
+                <a:tab algn="l" pos="0"/>
+              </a:tabLst>
+            </a:pPr>
+            <a:r>
+              <a:rPr b="0" lang="en-GB" sz="1200" strike="noStrike" u="none">
+                <a:solidFill>
+                  <a:schemeClr val="dk1">
+                    <a:tint val="75000"/>
+                  </a:schemeClr>
+                </a:solidFill>
+                <a:effectLst/>
+                <a:uFillTx/>
+                <a:latin typeface="Calibri"/>
+              </a:rPr>
+              <a:t>&lt;fecha/hora&gt;</a:t>
+            </a:r>
+            <a:endParaRPr b="0" lang="es-ES" sz="1200" strike="noStrike" u="none">
+              <a:solidFill>
+                <a:srgbClr val="000000"/>
+              </a:solidFill>
+              <a:effectLst/>
+              <a:uFillTx/>
+              <a:latin typeface="Times New Roman"/>
             </a:endParaRPr>
           </a:p>
         </p:txBody>
@@ -4672,13 +5013,13 @@
             <a:spLocks noGrp="1"/>
           </p:cNvSpPr>
           <p:nvPr>
-            <p:ph type="dt" idx="19"/>
+            <p:ph type="ftr" idx="20"/>
           </p:nvPr>
         </p:nvSpPr>
         <p:spPr>
           <a:xfrm>
-            <a:off x="838080" y="6356520"/>
-            <a:ext cx="2741400" cy="363240"/>
+            <a:off x="4038480" y="6356520"/>
+            <a:ext cx="4112640" cy="362880"/>
           </a:xfrm>
           <a:prstGeom prst="rect">
             <a:avLst/>
@@ -4693,50 +5034,46 @@
             <a:noAutofit/>
           </a:bodyPr>
           <a:lstStyle>
-            <a:lvl1pPr indent="0" defTabSz="914400">
-              <a:lnSpc>
-                <a:spcPct val="100000"/>
-              </a:lnSpc>
-              <a:buNone/>
-              <a:tabLst>
-                <a:tab algn="l" pos="0"/>
-              </a:tabLst>
-              <a:defRPr b="0" lang="en-GB" sz="1200" strike="noStrike" u="none">
-                <a:solidFill>
-                  <a:schemeClr val="dk1">
-                    <a:tint val="75000"/>
-                  </a:schemeClr>
-                </a:solidFill>
-                <a:effectLst/>
-                <a:uFillTx/>
-                <a:latin typeface="Calibri"/>
+            <a:lvl1pPr indent="0" algn="ctr">
+              <a:lnSpc>
+                <a:spcPct val="100000"/>
+              </a:lnSpc>
+              <a:buNone/>
+              <a:tabLst>
+                <a:tab algn="l" pos="0"/>
+              </a:tabLst>
+              <a:defRPr b="0" lang="es-ES" sz="1400" strike="noStrike" u="none">
+                <a:solidFill>
+                  <a:srgbClr val="000000"/>
+                </a:solidFill>
+                <a:effectLst/>
+                <a:uFillTx/>
+                <a:latin typeface="Times New Roman"/>
               </a:defRPr>
             </a:lvl1pPr>
           </a:lstStyle>
           <a:p>
-            <a:pPr indent="0" defTabSz="914400">
-              <a:lnSpc>
-                <a:spcPct val="100000"/>
-              </a:lnSpc>
-              <a:buNone/>
-              <a:tabLst>
-                <a:tab algn="l" pos="0"/>
-              </a:tabLst>
-            </a:pPr>
-            <a:r>
-              <a:rPr b="0" lang="en-GB" sz="1200" strike="noStrike" u="none">
-                <a:solidFill>
-                  <a:schemeClr val="dk1">
-                    <a:tint val="75000"/>
-                  </a:schemeClr>
-                </a:solidFill>
-                <a:effectLst/>
-                <a:uFillTx/>
-                <a:latin typeface="Calibri"/>
-              </a:rPr>
-              <a:t>&lt;fecha/hora&gt;</a:t>
-            </a:r>
-            <a:endParaRPr b="0" lang="es-ES" sz="1200" strike="noStrike" u="none">
+            <a:pPr indent="0" algn="ctr">
+              <a:lnSpc>
+                <a:spcPct val="100000"/>
+              </a:lnSpc>
+              <a:buNone/>
+              <a:tabLst>
+                <a:tab algn="l" pos="0"/>
+              </a:tabLst>
+            </a:pPr>
+            <a:r>
+              <a:rPr b="0" lang="es-ES" sz="1400" strike="noStrike" u="none">
+                <a:solidFill>
+                  <a:srgbClr val="000000"/>
+                </a:solidFill>
+                <a:effectLst/>
+                <a:uFillTx/>
+                <a:latin typeface="Times New Roman"/>
+              </a:rPr>
+              <a:t>&lt;pie de página&gt;</a:t>
+            </a:r>
+            <a:endParaRPr b="0" lang="es-ES" sz="1400" strike="noStrike" u="none">
               <a:solidFill>
                 <a:srgbClr val="000000"/>
               </a:solidFill>
@@ -4754,91 +5091,13 @@
             <a:spLocks noGrp="1"/>
           </p:cNvSpPr>
           <p:nvPr>
-            <p:ph type="ftr" idx="20"/>
-          </p:nvPr>
-        </p:nvSpPr>
-        <p:spPr>
-          <a:xfrm>
-            <a:off x="4038480" y="6356520"/>
-            <a:ext cx="4113000" cy="363240"/>
-          </a:xfrm>
-          <a:prstGeom prst="rect">
-            <a:avLst/>
-          </a:prstGeom>
-          <a:noFill/>
-          <a:ln w="0">
-            <a:noFill/>
-          </a:ln>
-        </p:spPr>
-        <p:txBody>
-          <a:bodyPr lIns="91440" rIns="91440" tIns="45720" bIns="45720" anchor="ctr">
-            <a:noAutofit/>
-          </a:bodyPr>
-          <a:lstStyle>
-            <a:lvl1pPr indent="0" algn="ctr">
-              <a:lnSpc>
-                <a:spcPct val="100000"/>
-              </a:lnSpc>
-              <a:buNone/>
-              <a:tabLst>
-                <a:tab algn="l" pos="0"/>
-              </a:tabLst>
-              <a:defRPr b="0" lang="es-ES" sz="1400" strike="noStrike" u="none">
-                <a:solidFill>
-                  <a:srgbClr val="000000"/>
-                </a:solidFill>
-                <a:effectLst/>
-                <a:uFillTx/>
-                <a:latin typeface="Times New Roman"/>
-              </a:defRPr>
-            </a:lvl1pPr>
-          </a:lstStyle>
-          <a:p>
-            <a:pPr indent="0" algn="ctr">
-              <a:lnSpc>
-                <a:spcPct val="100000"/>
-              </a:lnSpc>
-              <a:buNone/>
-              <a:tabLst>
-                <a:tab algn="l" pos="0"/>
-              </a:tabLst>
-            </a:pPr>
-            <a:r>
-              <a:rPr b="0" lang="es-ES" sz="1400" strike="noStrike" u="none">
-                <a:solidFill>
-                  <a:srgbClr val="000000"/>
-                </a:solidFill>
-                <a:effectLst/>
-                <a:uFillTx/>
-                <a:latin typeface="Times New Roman"/>
-              </a:rPr>
-              <a:t>&lt;pie de página&gt;</a:t>
-            </a:r>
-            <a:endParaRPr b="0" lang="es-ES" sz="1400" strike="noStrike" u="none">
-              <a:solidFill>
-                <a:srgbClr val="000000"/>
-              </a:solidFill>
-              <a:effectLst/>
-              <a:uFillTx/>
-              <a:latin typeface="Times New Roman"/>
-            </a:endParaRPr>
-          </a:p>
-        </p:txBody>
-      </p:sp>
-      <p:sp>
-        <p:nvSpPr>
-          <p:cNvPr id="35" name="PlaceHolder 6"/>
-          <p:cNvSpPr>
-            <a:spLocks noGrp="1"/>
-          </p:cNvSpPr>
-          <p:nvPr>
             <p:ph type="sldNum" idx="21"/>
           </p:nvPr>
         </p:nvSpPr>
         <p:spPr>
           <a:xfrm>
             <a:off x="8610480" y="6356520"/>
-            <a:ext cx="2741400" cy="363240"/>
+            <a:ext cx="2741040" cy="362880"/>
           </a:xfrm>
           <a:prstGeom prst="rect">
             <a:avLst/>
@@ -4883,7 +5142,7 @@
                 <a:tab algn="l" pos="0"/>
               </a:tabLst>
             </a:pPr>
-            <a:fld id="{51ABA11F-9DF0-433D-8F29-A9B2A31C2237}" type="slidenum">
+            <a:fld id="{BA410100-7A00-435B-82C9-47F280CAC41C}" type="slidenum">
               <a:rPr b="0" lang="en-GB" sz="1200" strike="noStrike" u="none">
                 <a:solidFill>
                   <a:schemeClr val="dk1">
@@ -4913,8 +5172,8 @@
 </file>
 
 <file path=ppt/slideLayouts/slideLayout8.xml><?xml version="1.0" encoding="utf-8"?>
-<p:sldLayout xmlns:a="http://schemas.openxmlformats.org/drawingml/2006/main" xmlns:p="http://schemas.openxmlformats.org/presentationml/2006/main" xmlns:r="http://schemas.openxmlformats.org/officeDocument/2006/relationships" xmlns:p14="http://schemas.microsoft.com/office/powerpoint/2010/main" xmlns:p15="http://schemas.microsoft.com/office/powerpoint/2012/main" xmlns:mc="http://schemas.openxmlformats.org/markup-compatibility/2006" type="blank" preserve="1">
-  <p:cSld name="Comparación">
+<p:sldLayout xmlns:a="http://schemas.openxmlformats.org/drawingml/2006/main" xmlns:p="http://schemas.openxmlformats.org/presentationml/2006/main" xmlns:r="http://schemas.openxmlformats.org/officeDocument/2006/relationships" xmlns:p14="http://schemas.microsoft.com/office/powerpoint/2010/main" xmlns:p15="http://schemas.microsoft.com/office/powerpoint/2012/main" xmlns:mc="http://schemas.openxmlformats.org/markup-compatibility/2006" type="obj" preserve="1">
+  <p:cSld name="Título y objetos">
     <p:bg>
       <p:bgPr>
         <a:solidFill>
@@ -4938,7 +5197,7 @@
       </p:grpSpPr>
       <p:sp>
         <p:nvSpPr>
-          <p:cNvPr id="36" name="PlaceHolder 1"/>
+          <p:cNvPr id="35" name="PlaceHolder 1"/>
           <p:cNvSpPr>
             <a:spLocks noGrp="1"/>
           </p:cNvSpPr>
@@ -4948,8 +5207,8 @@
         </p:nvSpPr>
         <p:spPr>
           <a:xfrm>
-            <a:off x="839880" y="365040"/>
-            <a:ext cx="10513800" cy="1323720"/>
+            <a:off x="838080" y="365040"/>
+            <a:ext cx="10513440" cy="1323360"/>
           </a:xfrm>
           <a:prstGeom prst="rect">
             <a:avLst/>
@@ -4997,7 +5256,7 @@
       </p:sp>
       <p:sp>
         <p:nvSpPr>
-          <p:cNvPr id="37" name="PlaceHolder 2"/>
+          <p:cNvPr id="36" name="PlaceHolder 2"/>
           <p:cNvSpPr>
             <a:spLocks noGrp="1"/>
           </p:cNvSpPr>
@@ -5007,8 +5266,8 @@
         </p:nvSpPr>
         <p:spPr>
           <a:xfrm>
-            <a:off x="839880" y="1681200"/>
-            <a:ext cx="5155920" cy="822240"/>
+            <a:off x="838080" y="1825560"/>
+            <a:ext cx="10513440" cy="4349160"/>
           </a:xfrm>
           <a:prstGeom prst="rect">
             <a:avLst/>
@@ -5019,24 +5278,25 @@
           </a:ln>
         </p:spPr>
         <p:txBody>
-          <a:bodyPr lIns="91440" rIns="91440" tIns="45720" bIns="45720" anchor="b">
+          <a:bodyPr lIns="91440" rIns="91440" tIns="45720" bIns="45720" anchor="t">
             <a:noAutofit/>
           </a:bodyPr>
           <a:p>
-            <a:pPr indent="0" defTabSz="914400">
+            <a:pPr marL="228600" indent="-228600" defTabSz="914400">
               <a:lnSpc>
                 <a:spcPct val="90000"/>
               </a:lnSpc>
               <a:spcBef>
                 <a:spcPts val="1001"/>
               </a:spcBef>
-              <a:buNone/>
-              <a:tabLst>
-                <a:tab algn="l" pos="0"/>
-              </a:tabLst>
-            </a:pPr>
-            <a:r>
-              <a:rPr b="1" lang="es-ES" sz="2400" strike="noStrike" u="none">
+              <a:buClr>
+                <a:srgbClr val="000000"/>
+              </a:buClr>
+              <a:buFont typeface="Arial"/>
+              <a:buChar char="•"/>
+            </a:pPr>
+            <a:r>
+              <a:rPr b="0" lang="es-ES" sz="2800" strike="noStrike" u="none">
                 <a:solidFill>
                   <a:schemeClr val="dk1"/>
                 </a:solidFill>
@@ -5046,7 +5306,143 @@
               </a:rPr>
               <a:t>Haga clic para modificar los estilos de texto del patrón</a:t>
             </a:r>
+            <a:endParaRPr b="0" lang="es-ES" sz="2800" strike="noStrike" u="none">
+              <a:solidFill>
+                <a:srgbClr val="000000"/>
+              </a:solidFill>
+              <a:effectLst/>
+              <a:uFillTx/>
+              <a:latin typeface="Arial"/>
+            </a:endParaRPr>
+          </a:p>
+          <a:p>
+            <a:pPr lvl="1" marL="685800" indent="-228600" defTabSz="914400">
+              <a:lnSpc>
+                <a:spcPct val="90000"/>
+              </a:lnSpc>
+              <a:spcBef>
+                <a:spcPts val="499"/>
+              </a:spcBef>
+              <a:buClr>
+                <a:srgbClr val="000000"/>
+              </a:buClr>
+              <a:buFont typeface="Arial"/>
+              <a:buChar char="•"/>
+            </a:pPr>
+            <a:r>
+              <a:rPr b="0" lang="es-ES" sz="2400" strike="noStrike" u="none">
+                <a:solidFill>
+                  <a:schemeClr val="dk1"/>
+                </a:solidFill>
+                <a:effectLst/>
+                <a:uFillTx/>
+                <a:latin typeface="Calibri"/>
+              </a:rPr>
+              <a:t>Segundo nivel</a:t>
+            </a:r>
             <a:endParaRPr b="0" lang="es-ES" sz="2400" strike="noStrike" u="none">
+              <a:solidFill>
+                <a:srgbClr val="000000"/>
+              </a:solidFill>
+              <a:effectLst/>
+              <a:uFillTx/>
+              <a:latin typeface="Arial"/>
+            </a:endParaRPr>
+          </a:p>
+          <a:p>
+            <a:pPr lvl="2" marL="1143000" indent="-228600" defTabSz="914400">
+              <a:lnSpc>
+                <a:spcPct val="90000"/>
+              </a:lnSpc>
+              <a:spcBef>
+                <a:spcPts val="499"/>
+              </a:spcBef>
+              <a:buClr>
+                <a:srgbClr val="000000"/>
+              </a:buClr>
+              <a:buFont typeface="Arial"/>
+              <a:buChar char="•"/>
+            </a:pPr>
+            <a:r>
+              <a:rPr b="0" lang="es-ES" sz="2000" strike="noStrike" u="none">
+                <a:solidFill>
+                  <a:schemeClr val="dk1"/>
+                </a:solidFill>
+                <a:effectLst/>
+                <a:uFillTx/>
+                <a:latin typeface="Calibri"/>
+              </a:rPr>
+              <a:t>Tercer nivel</a:t>
+            </a:r>
+            <a:endParaRPr b="0" lang="es-ES" sz="2000" strike="noStrike" u="none">
+              <a:solidFill>
+                <a:srgbClr val="000000"/>
+              </a:solidFill>
+              <a:effectLst/>
+              <a:uFillTx/>
+              <a:latin typeface="Arial"/>
+            </a:endParaRPr>
+          </a:p>
+          <a:p>
+            <a:pPr lvl="3" marL="1600200" indent="-228600" defTabSz="914400">
+              <a:lnSpc>
+                <a:spcPct val="90000"/>
+              </a:lnSpc>
+              <a:spcBef>
+                <a:spcPts val="499"/>
+              </a:spcBef>
+              <a:buClr>
+                <a:srgbClr val="000000"/>
+              </a:buClr>
+              <a:buFont typeface="Arial"/>
+              <a:buChar char="•"/>
+            </a:pPr>
+            <a:r>
+              <a:rPr b="0" lang="es-ES" sz="1800" strike="noStrike" u="none">
+                <a:solidFill>
+                  <a:schemeClr val="dk1"/>
+                </a:solidFill>
+                <a:effectLst/>
+                <a:uFillTx/>
+                <a:latin typeface="Calibri"/>
+              </a:rPr>
+              <a:t>Cuarto nivel</a:t>
+            </a:r>
+            <a:endParaRPr b="0" lang="es-ES" sz="1800" strike="noStrike" u="none">
+              <a:solidFill>
+                <a:srgbClr val="000000"/>
+              </a:solidFill>
+              <a:effectLst/>
+              <a:uFillTx/>
+              <a:latin typeface="Arial"/>
+            </a:endParaRPr>
+          </a:p>
+          <a:p>
+            <a:pPr lvl="4" marL="2057400" indent="-228600" defTabSz="914400">
+              <a:lnSpc>
+                <a:spcPct val="90000"/>
+              </a:lnSpc>
+              <a:spcBef>
+                <a:spcPts val="499"/>
+              </a:spcBef>
+              <a:buClr>
+                <a:srgbClr val="000000"/>
+              </a:buClr>
+              <a:buFont typeface="Arial"/>
+              <a:buChar char="•"/>
+            </a:pPr>
+            <a:r>
+              <a:rPr b="0" lang="es-ES" sz="1800" strike="noStrike" u="none">
+                <a:solidFill>
+                  <a:schemeClr val="dk1"/>
+                </a:solidFill>
+                <a:effectLst/>
+                <a:uFillTx/>
+                <a:latin typeface="Calibri"/>
+              </a:rPr>
+              <a:t>Quinto nivel</a:t>
+            </a:r>
+            <a:endParaRPr b="0" lang="es-ES" sz="1800" strike="noStrike" u="none">
               <a:solidFill>
                 <a:srgbClr val="000000"/>
               </a:solidFill>
@@ -5059,467 +5455,7 @@
       </p:sp>
       <p:sp>
         <p:nvSpPr>
-          <p:cNvPr id="38" name="PlaceHolder 3"/>
-          <p:cNvSpPr>
-            <a:spLocks noGrp="1"/>
-          </p:cNvSpPr>
-          <p:nvPr>
-            <p:ph type="body"/>
-          </p:nvPr>
-        </p:nvSpPr>
-        <p:spPr>
-          <a:xfrm>
-            <a:off x="839880" y="2505240"/>
-            <a:ext cx="5155920" cy="3682800"/>
-          </a:xfrm>
-          <a:prstGeom prst="rect">
-            <a:avLst/>
-          </a:prstGeom>
-          <a:noFill/>
-          <a:ln w="0">
-            <a:noFill/>
-          </a:ln>
-        </p:spPr>
-        <p:txBody>
-          <a:bodyPr lIns="91440" rIns="91440" tIns="45720" bIns="45720" anchor="t">
-            <a:noAutofit/>
-          </a:bodyPr>
-          <a:p>
-            <a:pPr marL="228600" indent="-228600" defTabSz="914400">
-              <a:lnSpc>
-                <a:spcPct val="90000"/>
-              </a:lnSpc>
-              <a:spcBef>
-                <a:spcPts val="1001"/>
-              </a:spcBef>
-              <a:buClr>
-                <a:srgbClr val="000000"/>
-              </a:buClr>
-              <a:buFont typeface="Arial"/>
-              <a:buChar char="•"/>
-            </a:pPr>
-            <a:r>
-              <a:rPr b="0" lang="es-ES" sz="2800" strike="noStrike" u="none">
-                <a:solidFill>
-                  <a:schemeClr val="dk1"/>
-                </a:solidFill>
-                <a:effectLst/>
-                <a:uFillTx/>
-                <a:latin typeface="Calibri"/>
-              </a:rPr>
-              <a:t>Haga clic para modificar los estilos de texto del patrón</a:t>
-            </a:r>
-            <a:endParaRPr b="0" lang="es-ES" sz="2800" strike="noStrike" u="none">
-              <a:solidFill>
-                <a:srgbClr val="000000"/>
-              </a:solidFill>
-              <a:effectLst/>
-              <a:uFillTx/>
-              <a:latin typeface="Arial"/>
-            </a:endParaRPr>
-          </a:p>
-          <a:p>
-            <a:pPr lvl="1" marL="685800" indent="-228600" defTabSz="914400">
-              <a:lnSpc>
-                <a:spcPct val="90000"/>
-              </a:lnSpc>
-              <a:spcBef>
-                <a:spcPts val="499"/>
-              </a:spcBef>
-              <a:buClr>
-                <a:srgbClr val="000000"/>
-              </a:buClr>
-              <a:buFont typeface="Arial"/>
-              <a:buChar char="•"/>
-            </a:pPr>
-            <a:r>
-              <a:rPr b="0" lang="es-ES" sz="2400" strike="noStrike" u="none">
-                <a:solidFill>
-                  <a:schemeClr val="dk1"/>
-                </a:solidFill>
-                <a:effectLst/>
-                <a:uFillTx/>
-                <a:latin typeface="Calibri"/>
-              </a:rPr>
-              <a:t>Segundo nivel</a:t>
-            </a:r>
-            <a:endParaRPr b="0" lang="es-ES" sz="2400" strike="noStrike" u="none">
-              <a:solidFill>
-                <a:srgbClr val="000000"/>
-              </a:solidFill>
-              <a:effectLst/>
-              <a:uFillTx/>
-              <a:latin typeface="Arial"/>
-            </a:endParaRPr>
-          </a:p>
-          <a:p>
-            <a:pPr lvl="2" marL="1143000" indent="-228600" defTabSz="914400">
-              <a:lnSpc>
-                <a:spcPct val="90000"/>
-              </a:lnSpc>
-              <a:spcBef>
-                <a:spcPts val="499"/>
-              </a:spcBef>
-              <a:buClr>
-                <a:srgbClr val="000000"/>
-              </a:buClr>
-              <a:buFont typeface="Arial"/>
-              <a:buChar char="•"/>
-            </a:pPr>
-            <a:r>
-              <a:rPr b="0" lang="es-ES" sz="2000" strike="noStrike" u="none">
-                <a:solidFill>
-                  <a:schemeClr val="dk1"/>
-                </a:solidFill>
-                <a:effectLst/>
-                <a:uFillTx/>
-                <a:latin typeface="Calibri"/>
-              </a:rPr>
-              <a:t>Tercer nivel</a:t>
-            </a:r>
-            <a:endParaRPr b="0" lang="es-ES" sz="2000" strike="noStrike" u="none">
-              <a:solidFill>
-                <a:srgbClr val="000000"/>
-              </a:solidFill>
-              <a:effectLst/>
-              <a:uFillTx/>
-              <a:latin typeface="Arial"/>
-            </a:endParaRPr>
-          </a:p>
-          <a:p>
-            <a:pPr lvl="3" marL="1600200" indent="-228600" defTabSz="914400">
-              <a:lnSpc>
-                <a:spcPct val="90000"/>
-              </a:lnSpc>
-              <a:spcBef>
-                <a:spcPts val="499"/>
-              </a:spcBef>
-              <a:buClr>
-                <a:srgbClr val="000000"/>
-              </a:buClr>
-              <a:buFont typeface="Arial"/>
-              <a:buChar char="•"/>
-            </a:pPr>
-            <a:r>
-              <a:rPr b="0" lang="es-ES" sz="1800" strike="noStrike" u="none">
-                <a:solidFill>
-                  <a:schemeClr val="dk1"/>
-                </a:solidFill>
-                <a:effectLst/>
-                <a:uFillTx/>
-                <a:latin typeface="Calibri"/>
-              </a:rPr>
-              <a:t>Cuarto nivel</a:t>
-            </a:r>
-            <a:endParaRPr b="0" lang="es-ES" sz="1800" strike="noStrike" u="none">
-              <a:solidFill>
-                <a:srgbClr val="000000"/>
-              </a:solidFill>
-              <a:effectLst/>
-              <a:uFillTx/>
-              <a:latin typeface="Arial"/>
-            </a:endParaRPr>
-          </a:p>
-          <a:p>
-            <a:pPr lvl="4" marL="2057400" indent="-228600" defTabSz="914400">
-              <a:lnSpc>
-                <a:spcPct val="90000"/>
-              </a:lnSpc>
-              <a:spcBef>
-                <a:spcPts val="499"/>
-              </a:spcBef>
-              <a:buClr>
-                <a:srgbClr val="000000"/>
-              </a:buClr>
-              <a:buFont typeface="Arial"/>
-              <a:buChar char="•"/>
-            </a:pPr>
-            <a:r>
-              <a:rPr b="0" lang="es-ES" sz="1800" strike="noStrike" u="none">
-                <a:solidFill>
-                  <a:schemeClr val="dk1"/>
-                </a:solidFill>
-                <a:effectLst/>
-                <a:uFillTx/>
-                <a:latin typeface="Calibri"/>
-              </a:rPr>
-              <a:t>Quinto nivel</a:t>
-            </a:r>
-            <a:endParaRPr b="0" lang="es-ES" sz="1800" strike="noStrike" u="none">
-              <a:solidFill>
-                <a:srgbClr val="000000"/>
-              </a:solidFill>
-              <a:effectLst/>
-              <a:uFillTx/>
-              <a:latin typeface="Arial"/>
-            </a:endParaRPr>
-          </a:p>
-        </p:txBody>
-      </p:sp>
-      <p:sp>
-        <p:nvSpPr>
-          <p:cNvPr id="39" name="PlaceHolder 4"/>
-          <p:cNvSpPr>
-            <a:spLocks noGrp="1"/>
-          </p:cNvSpPr>
-          <p:nvPr>
-            <p:ph type="body"/>
-          </p:nvPr>
-        </p:nvSpPr>
-        <p:spPr>
-          <a:xfrm>
-            <a:off x="6172200" y="1681200"/>
-            <a:ext cx="5181480" cy="822240"/>
-          </a:xfrm>
-          <a:prstGeom prst="rect">
-            <a:avLst/>
-          </a:prstGeom>
-          <a:noFill/>
-          <a:ln w="0">
-            <a:noFill/>
-          </a:ln>
-        </p:spPr>
-        <p:txBody>
-          <a:bodyPr lIns="91440" rIns="91440" tIns="45720" bIns="45720" anchor="b">
-            <a:noAutofit/>
-          </a:bodyPr>
-          <a:p>
-            <a:pPr indent="0" defTabSz="914400">
-              <a:lnSpc>
-                <a:spcPct val="90000"/>
-              </a:lnSpc>
-              <a:spcBef>
-                <a:spcPts val="1001"/>
-              </a:spcBef>
-              <a:buNone/>
-              <a:tabLst>
-                <a:tab algn="l" pos="0"/>
-              </a:tabLst>
-            </a:pPr>
-            <a:r>
-              <a:rPr b="1" lang="es-ES" sz="2400" strike="noStrike" u="none">
-                <a:solidFill>
-                  <a:schemeClr val="dk1"/>
-                </a:solidFill>
-                <a:effectLst/>
-                <a:uFillTx/>
-                <a:latin typeface="Calibri"/>
-              </a:rPr>
-              <a:t>Haga clic para modificar los estilos de texto del patrón</a:t>
-            </a:r>
-            <a:endParaRPr b="0" lang="es-ES" sz="2400" strike="noStrike" u="none">
-              <a:solidFill>
-                <a:srgbClr val="000000"/>
-              </a:solidFill>
-              <a:effectLst/>
-              <a:uFillTx/>
-              <a:latin typeface="Arial"/>
-            </a:endParaRPr>
-          </a:p>
-        </p:txBody>
-      </p:sp>
-      <p:sp>
-        <p:nvSpPr>
-          <p:cNvPr id="40" name="PlaceHolder 5"/>
-          <p:cNvSpPr>
-            <a:spLocks noGrp="1"/>
-          </p:cNvSpPr>
-          <p:nvPr>
-            <p:ph type="body"/>
-          </p:nvPr>
-        </p:nvSpPr>
-        <p:spPr>
-          <a:xfrm>
-            <a:off x="6172200" y="2505240"/>
-            <a:ext cx="5181480" cy="3682800"/>
-          </a:xfrm>
-          <a:prstGeom prst="rect">
-            <a:avLst/>
-          </a:prstGeom>
-          <a:noFill/>
-          <a:ln w="0">
-            <a:noFill/>
-          </a:ln>
-        </p:spPr>
-        <p:txBody>
-          <a:bodyPr lIns="91440" rIns="91440" tIns="45720" bIns="45720" anchor="t">
-            <a:noAutofit/>
-          </a:bodyPr>
-          <a:p>
-            <a:pPr marL="228600" indent="-228600" defTabSz="914400">
-              <a:lnSpc>
-                <a:spcPct val="90000"/>
-              </a:lnSpc>
-              <a:spcBef>
-                <a:spcPts val="1001"/>
-              </a:spcBef>
-              <a:buClr>
-                <a:srgbClr val="000000"/>
-              </a:buClr>
-              <a:buFont typeface="Arial"/>
-              <a:buChar char="•"/>
-            </a:pPr>
-            <a:r>
-              <a:rPr b="0" lang="es-ES" sz="2800" strike="noStrike" u="none">
-                <a:solidFill>
-                  <a:schemeClr val="dk1"/>
-                </a:solidFill>
-                <a:effectLst/>
-                <a:uFillTx/>
-                <a:latin typeface="Calibri"/>
-              </a:rPr>
-              <a:t>Haga clic para modificar los estilos de texto del patrón</a:t>
-            </a:r>
-            <a:endParaRPr b="0" lang="es-ES" sz="2800" strike="noStrike" u="none">
-              <a:solidFill>
-                <a:srgbClr val="000000"/>
-              </a:solidFill>
-              <a:effectLst/>
-              <a:uFillTx/>
-              <a:latin typeface="Arial"/>
-            </a:endParaRPr>
-          </a:p>
-          <a:p>
-            <a:pPr lvl="1" marL="685800" indent="-228600" defTabSz="914400">
-              <a:lnSpc>
-                <a:spcPct val="90000"/>
-              </a:lnSpc>
-              <a:spcBef>
-                <a:spcPts val="499"/>
-              </a:spcBef>
-              <a:buClr>
-                <a:srgbClr val="000000"/>
-              </a:buClr>
-              <a:buFont typeface="Arial"/>
-              <a:buChar char="•"/>
-            </a:pPr>
-            <a:r>
-              <a:rPr b="0" lang="es-ES" sz="2400" strike="noStrike" u="none">
-                <a:solidFill>
-                  <a:schemeClr val="dk1"/>
-                </a:solidFill>
-                <a:effectLst/>
-                <a:uFillTx/>
-                <a:latin typeface="Calibri"/>
-              </a:rPr>
-              <a:t>Segundo nivel</a:t>
-            </a:r>
-            <a:endParaRPr b="0" lang="es-ES" sz="2400" strike="noStrike" u="none">
-              <a:solidFill>
-                <a:srgbClr val="000000"/>
-              </a:solidFill>
-              <a:effectLst/>
-              <a:uFillTx/>
-              <a:latin typeface="Arial"/>
-            </a:endParaRPr>
-          </a:p>
-          <a:p>
-            <a:pPr lvl="2" marL="1143000" indent="-228600" defTabSz="914400">
-              <a:lnSpc>
-                <a:spcPct val="90000"/>
-              </a:lnSpc>
-              <a:spcBef>
-                <a:spcPts val="499"/>
-              </a:spcBef>
-              <a:buClr>
-                <a:srgbClr val="000000"/>
-              </a:buClr>
-              <a:buFont typeface="Arial"/>
-              <a:buChar char="•"/>
-            </a:pPr>
-            <a:r>
-              <a:rPr b="0" lang="es-ES" sz="2000" strike="noStrike" u="none">
-                <a:solidFill>
-                  <a:schemeClr val="dk1"/>
-                </a:solidFill>
-                <a:effectLst/>
-                <a:uFillTx/>
-                <a:latin typeface="Calibri"/>
-              </a:rPr>
-              <a:t>Tercer nivel</a:t>
-            </a:r>
-            <a:endParaRPr b="0" lang="es-ES" sz="2000" strike="noStrike" u="none">
-              <a:solidFill>
-                <a:srgbClr val="000000"/>
-              </a:solidFill>
-              <a:effectLst/>
-              <a:uFillTx/>
-              <a:latin typeface="Arial"/>
-            </a:endParaRPr>
-          </a:p>
-          <a:p>
-            <a:pPr lvl="3" marL="1600200" indent="-228600" defTabSz="914400">
-              <a:lnSpc>
-                <a:spcPct val="90000"/>
-              </a:lnSpc>
-              <a:spcBef>
-                <a:spcPts val="499"/>
-              </a:spcBef>
-              <a:buClr>
-                <a:srgbClr val="000000"/>
-              </a:buClr>
-              <a:buFont typeface="Arial"/>
-              <a:buChar char="•"/>
-            </a:pPr>
-            <a:r>
-              <a:rPr b="0" lang="es-ES" sz="1800" strike="noStrike" u="none">
-                <a:solidFill>
-                  <a:schemeClr val="dk1"/>
-                </a:solidFill>
-                <a:effectLst/>
-                <a:uFillTx/>
-                <a:latin typeface="Calibri"/>
-              </a:rPr>
-              <a:t>Cuarto nivel</a:t>
-            </a:r>
-            <a:endParaRPr b="0" lang="es-ES" sz="1800" strike="noStrike" u="none">
-              <a:solidFill>
-                <a:srgbClr val="000000"/>
-              </a:solidFill>
-              <a:effectLst/>
-              <a:uFillTx/>
-              <a:latin typeface="Arial"/>
-            </a:endParaRPr>
-          </a:p>
-          <a:p>
-            <a:pPr lvl="4" marL="2057400" indent="-228600" defTabSz="914400">
-              <a:lnSpc>
-                <a:spcPct val="90000"/>
-              </a:lnSpc>
-              <a:spcBef>
-                <a:spcPts val="499"/>
-              </a:spcBef>
-              <a:buClr>
-                <a:srgbClr val="000000"/>
-              </a:buClr>
-              <a:buFont typeface="Arial"/>
-              <a:buChar char="•"/>
-            </a:pPr>
-            <a:r>
-              <a:rPr b="0" lang="es-ES" sz="1800" strike="noStrike" u="none">
-                <a:solidFill>
-                  <a:schemeClr val="dk1"/>
-                </a:solidFill>
-                <a:effectLst/>
-                <a:uFillTx/>
-                <a:latin typeface="Calibri"/>
-              </a:rPr>
-              <a:t>Quinto nivel</a:t>
-            </a:r>
-            <a:endParaRPr b="0" lang="es-ES" sz="1800" strike="noStrike" u="none">
-              <a:solidFill>
-                <a:srgbClr val="000000"/>
-              </a:solidFill>
-              <a:effectLst/>
-              <a:uFillTx/>
-              <a:latin typeface="Arial"/>
-            </a:endParaRPr>
-          </a:p>
-        </p:txBody>
-      </p:sp>
-      <p:sp>
-        <p:nvSpPr>
-          <p:cNvPr id="41" name="PlaceHolder 6"/>
+          <p:cNvPr id="37" name="PlaceHolder 3"/>
           <p:cNvSpPr>
             <a:spLocks noGrp="1"/>
           </p:cNvSpPr>
@@ -5530,7 +5466,7 @@
         <p:spPr>
           <a:xfrm>
             <a:off x="838080" y="6356520"/>
-            <a:ext cx="2741400" cy="363240"/>
+            <a:ext cx="2741040" cy="362880"/>
           </a:xfrm>
           <a:prstGeom prst="rect">
             <a:avLst/>
@@ -5601,7 +5537,7 @@
       </p:sp>
       <p:sp>
         <p:nvSpPr>
-          <p:cNvPr id="42" name="PlaceHolder 7"/>
+          <p:cNvPr id="38" name="PlaceHolder 4"/>
           <p:cNvSpPr>
             <a:spLocks noGrp="1"/>
           </p:cNvSpPr>
@@ -5612,7 +5548,7 @@
         <p:spPr>
           <a:xfrm>
             <a:off x="4038480" y="6356520"/>
-            <a:ext cx="4113000" cy="363240"/>
+            <a:ext cx="4112640" cy="362880"/>
           </a:xfrm>
           <a:prstGeom prst="rect">
             <a:avLst/>
@@ -5679,7 +5615,7 @@
       </p:sp>
       <p:sp>
         <p:nvSpPr>
-          <p:cNvPr id="43" name="PlaceHolder 8"/>
+          <p:cNvPr id="39" name="PlaceHolder 5"/>
           <p:cNvSpPr>
             <a:spLocks noGrp="1"/>
           </p:cNvSpPr>
@@ -5690,7 +5626,7 @@
         <p:spPr>
           <a:xfrm>
             <a:off x="8610480" y="6356520"/>
-            <a:ext cx="2741400" cy="363240"/>
+            <a:ext cx="2741040" cy="362880"/>
           </a:xfrm>
           <a:prstGeom prst="rect">
             <a:avLst/>
@@ -5735,7 +5671,7 @@
                 <a:tab algn="l" pos="0"/>
               </a:tabLst>
             </a:pPr>
-            <a:fld id="{FA371373-B04D-4B94-B0EE-F78086BDA157}" type="slidenum">
+            <a:fld id="{F5CD131D-A592-4718-85D8-1011320ADAD7}" type="slidenum">
               <a:rPr b="0" lang="en-GB" sz="1200" strike="noStrike" u="none">
                 <a:solidFill>
                   <a:schemeClr val="dk1">
@@ -5765,8 +5701,8 @@
 </file>
 
 <file path=ppt/slideLayouts/slideLayout9.xml><?xml version="1.0" encoding="utf-8"?>
-<p:sldLayout xmlns:a="http://schemas.openxmlformats.org/drawingml/2006/main" xmlns:p="http://schemas.openxmlformats.org/presentationml/2006/main" xmlns:r="http://schemas.openxmlformats.org/officeDocument/2006/relationships" xmlns:p14="http://schemas.microsoft.com/office/powerpoint/2010/main" xmlns:p15="http://schemas.microsoft.com/office/powerpoint/2012/main" xmlns:mc="http://schemas.openxmlformats.org/markup-compatibility/2006" type="titleOnly" preserve="1">
-  <p:cSld name="Solo el título">
+<p:sldLayout xmlns:a="http://schemas.openxmlformats.org/drawingml/2006/main" xmlns:p="http://schemas.openxmlformats.org/presentationml/2006/main" xmlns:r="http://schemas.openxmlformats.org/officeDocument/2006/relationships" xmlns:p14="http://schemas.microsoft.com/office/powerpoint/2010/main" xmlns:p15="http://schemas.microsoft.com/office/powerpoint/2012/main" xmlns:mc="http://schemas.openxmlformats.org/markup-compatibility/2006" type="blank" preserve="1">
+  <p:cSld name="Encabezado de sección">
     <p:bg>
       <p:bgPr>
         <a:solidFill>
@@ -5790,7 +5726,7 @@
       </p:grpSpPr>
       <p:sp>
         <p:nvSpPr>
-          <p:cNvPr id="44" name="PlaceHolder 1"/>
+          <p:cNvPr id="40" name="PlaceHolder 1"/>
           <p:cNvSpPr>
             <a:spLocks noGrp="1"/>
           </p:cNvSpPr>
@@ -5800,8 +5736,8 @@
         </p:nvSpPr>
         <p:spPr>
           <a:xfrm>
-            <a:off x="838080" y="365040"/>
-            <a:ext cx="10513800" cy="1323720"/>
+            <a:off x="831960" y="1709640"/>
+            <a:ext cx="10513440" cy="2850480"/>
           </a:xfrm>
           <a:prstGeom prst="rect">
             <a:avLst/>
@@ -5812,7 +5748,7 @@
           </a:ln>
         </p:spPr>
         <p:txBody>
-          <a:bodyPr lIns="91440" rIns="91440" tIns="45720" bIns="45720" anchor="ctr">
+          <a:bodyPr lIns="91440" rIns="91440" tIns="45720" bIns="45720" anchor="b">
             <a:noAutofit/>
           </a:bodyPr>
           <a:p>
@@ -5826,7 +5762,7 @@
               </a:tabLst>
             </a:pPr>
             <a:r>
-              <a:rPr b="0" lang="es-ES" sz="4400" strike="noStrike" u="none">
+              <a:rPr b="0" lang="es-ES" sz="6000" strike="noStrike" u="none">
                 <a:solidFill>
                   <a:schemeClr val="dk1"/>
                 </a:solidFill>
@@ -5836,7 +5772,7 @@
               </a:rPr>
               <a:t>Haga clic para modificar el estilo de título del patrón</a:t>
             </a:r>
-            <a:endParaRPr b="0" lang="es-ES" sz="4400" strike="noStrike" u="none">
+            <a:endParaRPr b="0" lang="es-ES" sz="6000" strike="noStrike" u="none">
               <a:solidFill>
                 <a:srgbClr val="000000"/>
               </a:solidFill>
@@ -5849,7 +5785,71 @@
       </p:sp>
       <p:sp>
         <p:nvSpPr>
-          <p:cNvPr id="45" name="PlaceHolder 2"/>
+          <p:cNvPr id="41" name="PlaceHolder 2"/>
+          <p:cNvSpPr>
+            <a:spLocks noGrp="1"/>
+          </p:cNvSpPr>
+          <p:nvPr>
+            <p:ph type="body"/>
+          </p:nvPr>
+        </p:nvSpPr>
+        <p:spPr>
+          <a:xfrm>
+            <a:off x="831960" y="4589640"/>
+            <a:ext cx="10513440" cy="1497960"/>
+          </a:xfrm>
+          <a:prstGeom prst="rect">
+            <a:avLst/>
+          </a:prstGeom>
+          <a:noFill/>
+          <a:ln w="0">
+            <a:noFill/>
+          </a:ln>
+        </p:spPr>
+        <p:txBody>
+          <a:bodyPr lIns="91440" rIns="91440" tIns="45720" bIns="45720" anchor="t">
+            <a:noAutofit/>
+          </a:bodyPr>
+          <a:p>
+            <a:pPr indent="0" defTabSz="914400">
+              <a:lnSpc>
+                <a:spcPct val="90000"/>
+              </a:lnSpc>
+              <a:spcBef>
+                <a:spcPts val="1001"/>
+              </a:spcBef>
+              <a:buNone/>
+              <a:tabLst>
+                <a:tab algn="l" pos="0"/>
+              </a:tabLst>
+            </a:pPr>
+            <a:r>
+              <a:rPr b="0" lang="es-ES" sz="2400" strike="noStrike" u="none">
+                <a:solidFill>
+                  <a:schemeClr val="dk1">
+                    <a:tint val="75000"/>
+                  </a:schemeClr>
+                </a:solidFill>
+                <a:effectLst/>
+                <a:uFillTx/>
+                <a:latin typeface="Calibri"/>
+              </a:rPr>
+              <a:t>Haga clic para modificar los estilos de texto del patrón</a:t>
+            </a:r>
+            <a:endParaRPr b="0" lang="es-ES" sz="2400" strike="noStrike" u="none">
+              <a:solidFill>
+                <a:srgbClr val="000000"/>
+              </a:solidFill>
+              <a:effectLst/>
+              <a:uFillTx/>
+              <a:latin typeface="Arial"/>
+            </a:endParaRPr>
+          </a:p>
+        </p:txBody>
+      </p:sp>
+      <p:sp>
+        <p:nvSpPr>
+          <p:cNvPr id="42" name="PlaceHolder 3"/>
           <p:cNvSpPr>
             <a:spLocks noGrp="1"/>
           </p:cNvSpPr>
@@ -5860,7 +5860,7 @@
         <p:spPr>
           <a:xfrm>
             <a:off x="838080" y="6356520"/>
-            <a:ext cx="2741400" cy="363240"/>
+            <a:ext cx="2741040" cy="362880"/>
           </a:xfrm>
           <a:prstGeom prst="rect">
             <a:avLst/>
@@ -5931,7 +5931,7 @@
       </p:sp>
       <p:sp>
         <p:nvSpPr>
-          <p:cNvPr id="46" name="PlaceHolder 3"/>
+          <p:cNvPr id="43" name="PlaceHolder 4"/>
           <p:cNvSpPr>
             <a:spLocks noGrp="1"/>
           </p:cNvSpPr>
@@ -5942,7 +5942,7 @@
         <p:spPr>
           <a:xfrm>
             <a:off x="4038480" y="6356520"/>
-            <a:ext cx="4113000" cy="363240"/>
+            <a:ext cx="4112640" cy="362880"/>
           </a:xfrm>
           <a:prstGeom prst="rect">
             <a:avLst/>
@@ -6009,7 +6009,7 @@
       </p:sp>
       <p:sp>
         <p:nvSpPr>
-          <p:cNvPr id="47" name="PlaceHolder 4"/>
+          <p:cNvPr id="44" name="PlaceHolder 5"/>
           <p:cNvSpPr>
             <a:spLocks noGrp="1"/>
           </p:cNvSpPr>
@@ -6020,7 +6020,7 @@
         <p:spPr>
           <a:xfrm>
             <a:off x="8610480" y="6356520"/>
-            <a:ext cx="2741400" cy="363240"/>
+            <a:ext cx="2741040" cy="362880"/>
           </a:xfrm>
           <a:prstGeom prst="rect">
             <a:avLst/>
@@ -6065,7 +6065,7 @@
                 <a:tab algn="l" pos="0"/>
               </a:tabLst>
             </a:pPr>
-            <a:fld id="{07578914-5E8B-4139-A62B-92A53818976E}" type="slidenum">
+            <a:fld id="{A8170D86-5B66-4A2D-9E8B-EF78EF50125F}" type="slidenum">
               <a:rPr b="0" lang="en-GB" sz="1200" strike="noStrike" u="none">
                 <a:solidFill>
                   <a:schemeClr val="dk1">
@@ -6155,8 +6155,8 @@
         </p:nvSpPr>
         <p:spPr>
           <a:xfrm>
-            <a:off x="837000" y="2053440"/>
-            <a:ext cx="1560960" cy="646200"/>
+            <a:off x="837360" y="2700000"/>
+            <a:ext cx="1560600" cy="645840"/>
           </a:xfrm>
           <a:prstGeom prst="round2DiagRect">
             <a:avLst>
@@ -6225,8 +6225,8 @@
         </p:nvSpPr>
         <p:spPr>
           <a:xfrm>
-            <a:off x="2759040" y="613440"/>
-            <a:ext cx="1560960" cy="646200"/>
+            <a:off x="2759400" y="1260000"/>
+            <a:ext cx="1560600" cy="645840"/>
           </a:xfrm>
           <a:prstGeom prst="round2DiagRect">
             <a:avLst>
@@ -6295,8 +6295,8 @@
         </p:nvSpPr>
         <p:spPr>
           <a:xfrm>
-            <a:off x="5040000" y="2053800"/>
-            <a:ext cx="1560960" cy="646200"/>
+            <a:off x="5040360" y="2700360"/>
+            <a:ext cx="1560600" cy="645840"/>
           </a:xfrm>
           <a:prstGeom prst="round2DiagRect">
             <a:avLst>
@@ -6365,8 +6365,8 @@
         </p:nvSpPr>
         <p:spPr>
           <a:xfrm>
-            <a:off x="2759040" y="2773440"/>
-            <a:ext cx="1560960" cy="646200"/>
+            <a:off x="2759400" y="3420000"/>
+            <a:ext cx="1560600" cy="645840"/>
           </a:xfrm>
           <a:prstGeom prst="round2DiagRect">
             <a:avLst>
@@ -6436,7 +6436,7 @@
         <p:spPr>
           <a:xfrm>
             <a:off x="105480" y="175320"/>
-            <a:ext cx="2773440" cy="363960"/>
+            <a:ext cx="2773080" cy="363960"/>
           </a:xfrm>
           <a:prstGeom prst="rect">
             <a:avLst/>
@@ -6495,8 +6495,8 @@
         </p:nvCxnSpPr>
         <p:spPr>
           <a:xfrm flipV="1">
-            <a:off x="1617480" y="936360"/>
-            <a:ext cx="1141920" cy="1117440"/>
+            <a:off x="1617480" y="1582920"/>
+            <a:ext cx="1142280" cy="1117440"/>
           </a:xfrm>
           <a:prstGeom prst="straightConnector1">
             <a:avLst/>
@@ -6520,8 +6520,8 @@
         </p:nvCxnSpPr>
         <p:spPr>
           <a:xfrm flipV="1">
-            <a:off x="4320000" y="1402920"/>
-            <a:ext cx="720360" cy="1693800"/>
+            <a:off x="4320000" y="2049480"/>
+            <a:ext cx="720720" cy="1693800"/>
           </a:xfrm>
           <a:prstGeom prst="straightConnector1">
             <a:avLst/>
@@ -6545,8 +6545,8 @@
         </p:nvCxnSpPr>
         <p:spPr>
           <a:xfrm flipV="1">
-            <a:off x="4320000" y="2376720"/>
-            <a:ext cx="720360" cy="720000"/>
+            <a:off x="4320000" y="3023280"/>
+            <a:ext cx="720720" cy="720000"/>
           </a:xfrm>
           <a:prstGeom prst="straightConnector1">
             <a:avLst/>
@@ -6570,8 +6570,8 @@
         </p:nvCxnSpPr>
         <p:spPr>
           <a:xfrm>
-            <a:off x="1617480" y="2699640"/>
-            <a:ext cx="1141920" cy="397080"/>
+            <a:off x="1617480" y="3345840"/>
+            <a:ext cx="1142280" cy="397440"/>
           </a:xfrm>
           <a:prstGeom prst="straightConnector1">
             <a:avLst/>
@@ -6592,8 +6592,8 @@
         </p:nvSpPr>
         <p:spPr>
           <a:xfrm>
-            <a:off x="4919040" y="4933800"/>
-            <a:ext cx="1560960" cy="646200"/>
+            <a:off x="5040000" y="5040720"/>
+            <a:ext cx="1560600" cy="645840"/>
           </a:xfrm>
           <a:prstGeom prst="round2DiagRect">
             <a:avLst>
@@ -6662,8 +6662,8 @@
         </p:nvSpPr>
         <p:spPr>
           <a:xfrm>
-            <a:off x="5040000" y="3060000"/>
-            <a:ext cx="1560960" cy="646200"/>
+            <a:off x="5040360" y="3706560"/>
+            <a:ext cx="1560600" cy="645840"/>
           </a:xfrm>
           <a:prstGeom prst="round2DiagRect">
             <a:avLst>
@@ -6732,8 +6732,8 @@
         </p:nvSpPr>
         <p:spPr>
           <a:xfrm>
-            <a:off x="5040000" y="1080000"/>
-            <a:ext cx="1560960" cy="646200"/>
+            <a:off x="5040360" y="1726560"/>
+            <a:ext cx="1560600" cy="645840"/>
           </a:xfrm>
           <a:prstGeom prst="round2DiagRect">
             <a:avLst>
@@ -6802,8 +6802,8 @@
         </p:nvSpPr>
         <p:spPr>
           <a:xfrm>
-            <a:off x="7079040" y="2053800"/>
-            <a:ext cx="1560960" cy="646200"/>
+            <a:off x="7079400" y="2700360"/>
+            <a:ext cx="1560600" cy="645840"/>
           </a:xfrm>
           <a:prstGeom prst="round2DiagRect">
             <a:avLst>
@@ -6875,8 +6875,8 @@
         </p:nvCxnSpPr>
         <p:spPr>
           <a:xfrm>
-            <a:off x="6600960" y="2376720"/>
-            <a:ext cx="478440" cy="360"/>
+            <a:off x="6600960" y="3023280"/>
+            <a:ext cx="478800" cy="360"/>
           </a:xfrm>
           <a:prstGeom prst="straightConnector1">
             <a:avLst/>
@@ -6900,8 +6900,8 @@
         </p:nvCxnSpPr>
         <p:spPr>
           <a:xfrm>
-            <a:off x="4320000" y="3096360"/>
-            <a:ext cx="599400" cy="2160720"/>
+            <a:off x="4320000" y="3742920"/>
+            <a:ext cx="720360" cy="1621080"/>
           </a:xfrm>
           <a:prstGeom prst="straightConnector1">
             <a:avLst/>
@@ -6925,8 +6925,8 @@
         </p:nvCxnSpPr>
         <p:spPr>
           <a:xfrm>
-            <a:off x="4320000" y="3096360"/>
-            <a:ext cx="720360" cy="286920"/>
+            <a:off x="4320000" y="3742920"/>
+            <a:ext cx="720720" cy="286920"/>
           </a:xfrm>
           <a:prstGeom prst="straightConnector1">
             <a:avLst/>
@@ -6947,8 +6947,8 @@
         </p:nvSpPr>
         <p:spPr>
           <a:xfrm>
-            <a:off x="7079040" y="3060000"/>
-            <a:ext cx="1560960" cy="646200"/>
+            <a:off x="7079400" y="3706560"/>
+            <a:ext cx="1560600" cy="645840"/>
           </a:xfrm>
           <a:prstGeom prst="round2DiagRect">
             <a:avLst>
@@ -7020,8 +7020,8 @@
         </p:nvCxnSpPr>
         <p:spPr>
           <a:xfrm>
-            <a:off x="8640000" y="5256720"/>
-            <a:ext cx="419400" cy="360"/>
+            <a:off x="8640000" y="5903280"/>
+            <a:ext cx="419760" cy="360"/>
           </a:xfrm>
           <a:prstGeom prst="straightConnector1">
             <a:avLst/>
@@ -7045,8 +7045,8 @@
         </p:nvCxnSpPr>
         <p:spPr>
           <a:xfrm flipV="1">
-            <a:off x="6480000" y="4356720"/>
-            <a:ext cx="599400" cy="900360"/>
+            <a:off x="6600600" y="5003280"/>
+            <a:ext cx="479160" cy="360720"/>
           </a:xfrm>
           <a:prstGeom prst="straightConnector1">
             <a:avLst/>
@@ -7070,8 +7070,8 @@
         </p:nvCxnSpPr>
         <p:spPr>
           <a:xfrm>
-            <a:off x="6600960" y="3382920"/>
-            <a:ext cx="478440" cy="360"/>
+            <a:off x="6600960" y="4029480"/>
+            <a:ext cx="478800" cy="360"/>
           </a:xfrm>
           <a:prstGeom prst="straightConnector1">
             <a:avLst/>
@@ -7092,8 +7092,8 @@
         </p:nvSpPr>
         <p:spPr>
           <a:xfrm>
-            <a:off x="7079040" y="4933800"/>
-            <a:ext cx="1560960" cy="646200"/>
+            <a:off x="7079400" y="5580360"/>
+            <a:ext cx="1560600" cy="645840"/>
           </a:xfrm>
           <a:prstGeom prst="round2DiagRect">
             <a:avLst>
@@ -7162,8 +7162,8 @@
         </p:nvSpPr>
         <p:spPr>
           <a:xfrm>
-            <a:off x="7079040" y="4033800"/>
-            <a:ext cx="1560960" cy="646200"/>
+            <a:off x="7079400" y="4680360"/>
+            <a:ext cx="1560600" cy="645840"/>
           </a:xfrm>
           <a:prstGeom prst="round2DiagRect">
             <a:avLst>
@@ -7232,8 +7232,8 @@
         </p:nvSpPr>
         <p:spPr>
           <a:xfrm>
-            <a:off x="9059040" y="4933800"/>
-            <a:ext cx="1560960" cy="646200"/>
+            <a:off x="9059400" y="5580360"/>
+            <a:ext cx="1560600" cy="645840"/>
           </a:xfrm>
           <a:prstGeom prst="round2DiagRect">
             <a:avLst>
@@ -7305,8 +7305,8 @@
         </p:nvCxnSpPr>
         <p:spPr>
           <a:xfrm>
-            <a:off x="6480000" y="5256720"/>
-            <a:ext cx="599400" cy="360"/>
+            <a:off x="6600600" y="5363640"/>
+            <a:ext cx="479160" cy="540000"/>
           </a:xfrm>
           <a:prstGeom prst="straightConnector1">
             <a:avLst/>
@@ -7327,8 +7327,8 @@
         </p:nvSpPr>
         <p:spPr>
           <a:xfrm>
-            <a:off x="2759040" y="1550160"/>
-            <a:ext cx="1560960" cy="646200"/>
+            <a:off x="2759400" y="2196720"/>
+            <a:ext cx="1560600" cy="645840"/>
           </a:xfrm>
           <a:prstGeom prst="round2DiagRect">
             <a:avLst>
@@ -7400,8 +7400,8 @@
         </p:nvCxnSpPr>
         <p:spPr>
           <a:xfrm>
-            <a:off x="3539520" y="1259640"/>
-            <a:ext cx="360" cy="290880"/>
+            <a:off x="3539520" y="1905840"/>
+            <a:ext cx="360" cy="291240"/>
           </a:xfrm>
           <a:prstGeom prst="straightConnector1">
             <a:avLst/>
@@ -7425,103 +7425,8 @@
         </p:nvCxnSpPr>
         <p:spPr>
           <a:xfrm flipH="1">
-            <a:off x="2397960" y="1873080"/>
-            <a:ext cx="361440" cy="503640"/>
-          </a:xfrm>
-          <a:prstGeom prst="straightConnector1">
-            <a:avLst/>
-          </a:prstGeom>
-          <a:ln w="0">
-            <a:solidFill>
-              <a:srgbClr val="4472c4"/>
-            </a:solidFill>
-            <a:tailEnd len="med" type="triangle" w="med"/>
-          </a:ln>
-        </p:spPr>
-      </p:cxnSp>
-      <p:sp>
-        <p:nvSpPr>
-          <p:cNvPr id="86" name="5 Redondear rectángulo de esquina diagonal 10"/>
-          <p:cNvSpPr/>
-          <p:nvPr/>
-        </p:nvSpPr>
-        <p:spPr>
-          <a:xfrm>
-            <a:off x="7079040" y="5833800"/>
-            <a:ext cx="1560960" cy="646200"/>
-          </a:xfrm>
-          <a:prstGeom prst="round2DiagRect">
-            <a:avLst>
-              <a:gd name="adj1" fmla="val 16667"/>
-              <a:gd name="adj2" fmla="val 0"/>
-            </a:avLst>
-          </a:prstGeom>
-          <a:solidFill>
-            <a:srgbClr val="ffffff"/>
-          </a:solidFill>
-          <a:ln w="28575">
-            <a:solidFill>
-              <a:srgbClr val="000000"/>
-            </a:solidFill>
-          </a:ln>
-        </p:spPr>
-        <p:style>
-          <a:lnRef idx="2">
-            <a:schemeClr val="dk1"/>
-          </a:lnRef>
-          <a:fillRef idx="1">
-            <a:schemeClr val="lt1"/>
-          </a:fillRef>
-          <a:effectRef idx="0">
-            <a:schemeClr val="dk1"/>
-          </a:effectRef>
-          <a:fontRef idx="minor"/>
-        </p:style>
-        <p:txBody>
-          <a:bodyPr lIns="90000" rIns="90000" tIns="45000" bIns="45000" anchor="ctr">
-            <a:noAutofit/>
-          </a:bodyPr>
-          <a:p>
-            <a:pPr algn="ctr" defTabSz="914400">
-              <a:lnSpc>
-                <a:spcPct val="100000"/>
-              </a:lnSpc>
-            </a:pPr>
-            <a:r>
-              <a:rPr b="0" lang="es-ES" sz="1400" strike="noStrike" u="none">
-                <a:solidFill>
-                  <a:srgbClr val="000000"/>
-                </a:solidFill>
-                <a:effectLst/>
-                <a:uFillTx/>
-                <a:latin typeface="Calibri"/>
-              </a:rPr>
-              <a:t>Estadísticas mensuales</a:t>
-            </a:r>
-            <a:endParaRPr b="0" lang="es-ES" sz="1400" strike="noStrike" u="none">
-              <a:solidFill>
-                <a:srgbClr val="000000"/>
-              </a:solidFill>
-              <a:effectLst/>
-              <a:uFillTx/>
-              <a:latin typeface="Arial"/>
-            </a:endParaRPr>
-          </a:p>
-        </p:txBody>
-      </p:sp>
-      <p:cxnSp>
-        <p:nvCxnSpPr>
-          <p:cNvPr id="87" name="Conector recto de flecha 12"/>
-          <p:cNvCxnSpPr>
-            <a:stCxn id="69" idx="3"/>
-            <a:endCxn id="86" idx="1"/>
-          </p:cNvCxnSpPr>
-          <p:nvPr/>
-        </p:nvCxnSpPr>
-        <p:spPr>
-          <a:xfrm>
-            <a:off x="6480000" y="5256720"/>
-            <a:ext cx="599400" cy="900360"/>
+            <a:off x="2397960" y="2519640"/>
+            <a:ext cx="361800" cy="503640"/>
           </a:xfrm>
           <a:prstGeom prst="straightConnector1">
             <a:avLst/>

--- a/docs/Diagrama_de_contenidos.pptx
+++ b/docs/Diagrama_de_contenidos.pptx
@@ -13,8 +13,8 @@
 </file>
 
 <file path=ppt/slideLayouts/slideLayout1.xml><?xml version="1.0" encoding="utf-8"?>
-<p:sldLayout xmlns:a="http://schemas.openxmlformats.org/drawingml/2006/main" xmlns:p="http://schemas.openxmlformats.org/presentationml/2006/main" xmlns:r="http://schemas.openxmlformats.org/officeDocument/2006/relationships" xmlns:p14="http://schemas.microsoft.com/office/powerpoint/2010/main" xmlns:p15="http://schemas.microsoft.com/office/powerpoint/2012/main" xmlns:mc="http://schemas.openxmlformats.org/markup-compatibility/2006" type="titleOnly" preserve="1">
-  <p:cSld name="Solo el título">
+<p:sldLayout xmlns:a="http://schemas.openxmlformats.org/drawingml/2006/main" xmlns:p="http://schemas.openxmlformats.org/presentationml/2006/main" xmlns:r="http://schemas.openxmlformats.org/officeDocument/2006/relationships" xmlns:p14="http://schemas.microsoft.com/office/powerpoint/2010/main" xmlns:p15="http://schemas.microsoft.com/office/powerpoint/2012/main" xmlns:mc="http://schemas.openxmlformats.org/markup-compatibility/2006" type="blank" preserve="1">
+  <p:cSld name="Encabezado de sección">
     <p:bg>
       <p:bgPr>
         <a:solidFill>
@@ -48,8 +48,8 @@
         </p:nvSpPr>
         <p:spPr>
           <a:xfrm>
-            <a:off x="838080" y="365040"/>
-            <a:ext cx="10513440" cy="1323360"/>
+            <a:off x="831960" y="1709640"/>
+            <a:ext cx="10513080" cy="2850120"/>
           </a:xfrm>
           <a:prstGeom prst="rect">
             <a:avLst/>
@@ -60,7 +60,7 @@
           </a:ln>
         </p:spPr>
         <p:txBody>
-          <a:bodyPr lIns="91440" rIns="91440" tIns="45720" bIns="45720" anchor="ctr">
+          <a:bodyPr lIns="91440" rIns="91440" tIns="45720" bIns="45720" anchor="b">
             <a:noAutofit/>
           </a:bodyPr>
           <a:p>
@@ -74,7 +74,7 @@
               </a:tabLst>
             </a:pPr>
             <a:r>
-              <a:rPr b="0" lang="es-ES" sz="4400" strike="noStrike" u="none">
+              <a:rPr b="0" lang="es-ES" sz="6000" strike="noStrike" u="none">
                 <a:solidFill>
                   <a:schemeClr val="dk1"/>
                 </a:solidFill>
@@ -84,7 +84,7 @@
               </a:rPr>
               <a:t>Haga clic para modificar el estilo de título del patrón</a:t>
             </a:r>
-            <a:endParaRPr b="0" lang="es-ES" sz="4400" strike="noStrike" u="none">
+            <a:endParaRPr b="0" lang="es-ES" sz="6000" strike="noStrike" u="none">
               <a:solidFill>
                 <a:srgbClr val="000000"/>
               </a:solidFill>
@@ -102,13 +102,13 @@
             <a:spLocks noGrp="1"/>
           </p:cNvSpPr>
           <p:nvPr>
-            <p:ph type="dt" idx="1"/>
+            <p:ph type="body"/>
           </p:nvPr>
         </p:nvSpPr>
         <p:spPr>
           <a:xfrm>
-            <a:off x="838080" y="6356520"/>
-            <a:ext cx="2741040" cy="362880"/>
+            <a:off x="831960" y="4589640"/>
+            <a:ext cx="10513080" cy="1497600"/>
           </a:xfrm>
           <a:prstGeom prst="rect">
             <a:avLst/>
@@ -119,19 +119,24 @@
           </a:ln>
         </p:spPr>
         <p:txBody>
-          <a:bodyPr lIns="91440" rIns="91440" tIns="45720" bIns="45720" anchor="ctr">
+          <a:bodyPr lIns="91440" rIns="91440" tIns="45720" bIns="45720" anchor="t">
             <a:noAutofit/>
           </a:bodyPr>
-          <a:lstStyle>
-            <a:lvl1pPr indent="0" defTabSz="914400">
-              <a:lnSpc>
-                <a:spcPct val="100000"/>
-              </a:lnSpc>
-              <a:buNone/>
-              <a:tabLst>
-                <a:tab algn="l" pos="0"/>
-              </a:tabLst>
-              <a:defRPr b="0" lang="en-GB" sz="1200" strike="noStrike" u="none">
+          <a:p>
+            <a:pPr indent="0" defTabSz="914400">
+              <a:lnSpc>
+                <a:spcPct val="90000"/>
+              </a:lnSpc>
+              <a:spcBef>
+                <a:spcPts val="1001"/>
+              </a:spcBef>
+              <a:buNone/>
+              <a:tabLst>
+                <a:tab algn="l" pos="0"/>
+              </a:tabLst>
+            </a:pPr>
+            <a:r>
+              <a:rPr b="0" lang="es-ES" sz="2400" strike="noStrike" u="none">
                 <a:solidFill>
                   <a:schemeClr val="dk1">
                     <a:tint val="75000"/>
@@ -140,39 +145,16 @@
                 <a:effectLst/>
                 <a:uFillTx/>
                 <a:latin typeface="Calibri"/>
-              </a:defRPr>
-            </a:lvl1pPr>
-          </a:lstStyle>
-          <a:p>
-            <a:pPr indent="0" defTabSz="914400">
-              <a:lnSpc>
-                <a:spcPct val="100000"/>
-              </a:lnSpc>
-              <a:buNone/>
-              <a:tabLst>
-                <a:tab algn="l" pos="0"/>
-              </a:tabLst>
-            </a:pPr>
-            <a:r>
-              <a:rPr b="0" lang="en-GB" sz="1200" strike="noStrike" u="none">
-                <a:solidFill>
-                  <a:schemeClr val="dk1">
-                    <a:tint val="75000"/>
-                  </a:schemeClr>
-                </a:solidFill>
-                <a:effectLst/>
-                <a:uFillTx/>
-                <a:latin typeface="Calibri"/>
-              </a:rPr>
-              <a:t>&lt;fecha/hora&gt;</a:t>
-            </a:r>
-            <a:endParaRPr b="0" lang="es-ES" sz="1200" strike="noStrike" u="none">
-              <a:solidFill>
-                <a:srgbClr val="000000"/>
-              </a:solidFill>
-              <a:effectLst/>
-              <a:uFillTx/>
-              <a:latin typeface="Times New Roman"/>
+              </a:rPr>
+              <a:t>Haga clic para modificar los estilos de texto del patrón</a:t>
+            </a:r>
+            <a:endParaRPr b="0" lang="es-ES" sz="2400" strike="noStrike" u="none">
+              <a:solidFill>
+                <a:srgbClr val="000000"/>
+              </a:solidFill>
+              <a:effectLst/>
+              <a:uFillTx/>
+              <a:latin typeface="Arial"/>
             </a:endParaRPr>
           </a:p>
         </p:txBody>
@@ -184,13 +166,13 @@
             <a:spLocks noGrp="1"/>
           </p:cNvSpPr>
           <p:nvPr>
-            <p:ph type="ftr" idx="2"/>
+            <p:ph type="dt" idx="1"/>
           </p:nvPr>
         </p:nvSpPr>
         <p:spPr>
           <a:xfrm>
-            <a:off x="4038480" y="6356520"/>
-            <a:ext cx="4112640" cy="362880"/>
+            <a:off x="838080" y="6356520"/>
+            <a:ext cx="2740680" cy="362520"/>
           </a:xfrm>
           <a:prstGeom prst="rect">
             <a:avLst/>
@@ -205,46 +187,50 @@
             <a:noAutofit/>
           </a:bodyPr>
           <a:lstStyle>
-            <a:lvl1pPr indent="0" algn="ctr">
-              <a:lnSpc>
-                <a:spcPct val="100000"/>
-              </a:lnSpc>
-              <a:buNone/>
-              <a:tabLst>
-                <a:tab algn="l" pos="0"/>
-              </a:tabLst>
-              <a:defRPr b="0" lang="es-ES" sz="1400" strike="noStrike" u="none">
-                <a:solidFill>
-                  <a:srgbClr val="000000"/>
-                </a:solidFill>
-                <a:effectLst/>
-                <a:uFillTx/>
-                <a:latin typeface="Times New Roman"/>
+            <a:lvl1pPr indent="0" defTabSz="914400">
+              <a:lnSpc>
+                <a:spcPct val="100000"/>
+              </a:lnSpc>
+              <a:buNone/>
+              <a:tabLst>
+                <a:tab algn="l" pos="0"/>
+              </a:tabLst>
+              <a:defRPr b="0" lang="en-GB" sz="1200" strike="noStrike" u="none">
+                <a:solidFill>
+                  <a:schemeClr val="dk1">
+                    <a:tint val="75000"/>
+                  </a:schemeClr>
+                </a:solidFill>
+                <a:effectLst/>
+                <a:uFillTx/>
+                <a:latin typeface="Calibri"/>
               </a:defRPr>
             </a:lvl1pPr>
           </a:lstStyle>
           <a:p>
-            <a:pPr indent="0" algn="ctr">
-              <a:lnSpc>
-                <a:spcPct val="100000"/>
-              </a:lnSpc>
-              <a:buNone/>
-              <a:tabLst>
-                <a:tab algn="l" pos="0"/>
-              </a:tabLst>
-            </a:pPr>
-            <a:r>
-              <a:rPr b="0" lang="es-ES" sz="1400" strike="noStrike" u="none">
-                <a:solidFill>
-                  <a:srgbClr val="000000"/>
-                </a:solidFill>
-                <a:effectLst/>
-                <a:uFillTx/>
-                <a:latin typeface="Times New Roman"/>
-              </a:rPr>
-              <a:t>&lt;pie de página&gt;</a:t>
-            </a:r>
-            <a:endParaRPr b="0" lang="es-ES" sz="1400" strike="noStrike" u="none">
+            <a:pPr indent="0" defTabSz="914400">
+              <a:lnSpc>
+                <a:spcPct val="100000"/>
+              </a:lnSpc>
+              <a:buNone/>
+              <a:tabLst>
+                <a:tab algn="l" pos="0"/>
+              </a:tabLst>
+            </a:pPr>
+            <a:r>
+              <a:rPr b="0" lang="en-GB" sz="1200" strike="noStrike" u="none">
+                <a:solidFill>
+                  <a:schemeClr val="dk1">
+                    <a:tint val="75000"/>
+                  </a:schemeClr>
+                </a:solidFill>
+                <a:effectLst/>
+                <a:uFillTx/>
+                <a:latin typeface="Calibri"/>
+              </a:rPr>
+              <a:t>&lt;fecha/hora&gt;</a:t>
+            </a:r>
+            <a:endParaRPr b="0" lang="es-ES" sz="1200" strike="noStrike" u="none">
               <a:solidFill>
                 <a:srgbClr val="000000"/>
               </a:solidFill>
@@ -262,13 +248,91 @@
             <a:spLocks noGrp="1"/>
           </p:cNvSpPr>
           <p:nvPr>
+            <p:ph type="ftr" idx="2"/>
+          </p:nvPr>
+        </p:nvSpPr>
+        <p:spPr>
+          <a:xfrm>
+            <a:off x="4038480" y="6356520"/>
+            <a:ext cx="4112280" cy="362520"/>
+          </a:xfrm>
+          <a:prstGeom prst="rect">
+            <a:avLst/>
+          </a:prstGeom>
+          <a:noFill/>
+          <a:ln w="0">
+            <a:noFill/>
+          </a:ln>
+        </p:spPr>
+        <p:txBody>
+          <a:bodyPr lIns="91440" rIns="91440" tIns="45720" bIns="45720" anchor="ctr">
+            <a:noAutofit/>
+          </a:bodyPr>
+          <a:lstStyle>
+            <a:lvl1pPr indent="0" algn="ctr">
+              <a:lnSpc>
+                <a:spcPct val="100000"/>
+              </a:lnSpc>
+              <a:buNone/>
+              <a:tabLst>
+                <a:tab algn="l" pos="0"/>
+              </a:tabLst>
+              <a:defRPr b="0" lang="es-ES" sz="1400" strike="noStrike" u="none">
+                <a:solidFill>
+                  <a:srgbClr val="000000"/>
+                </a:solidFill>
+                <a:effectLst/>
+                <a:uFillTx/>
+                <a:latin typeface="Times New Roman"/>
+              </a:defRPr>
+            </a:lvl1pPr>
+          </a:lstStyle>
+          <a:p>
+            <a:pPr indent="0" algn="ctr">
+              <a:lnSpc>
+                <a:spcPct val="100000"/>
+              </a:lnSpc>
+              <a:buNone/>
+              <a:tabLst>
+                <a:tab algn="l" pos="0"/>
+              </a:tabLst>
+            </a:pPr>
+            <a:r>
+              <a:rPr b="0" lang="es-ES" sz="1400" strike="noStrike" u="none">
+                <a:solidFill>
+                  <a:srgbClr val="000000"/>
+                </a:solidFill>
+                <a:effectLst/>
+                <a:uFillTx/>
+                <a:latin typeface="Times New Roman"/>
+              </a:rPr>
+              <a:t>&lt;pie de página&gt;</a:t>
+            </a:r>
+            <a:endParaRPr b="0" lang="es-ES" sz="1400" strike="noStrike" u="none">
+              <a:solidFill>
+                <a:srgbClr val="000000"/>
+              </a:solidFill>
+              <a:effectLst/>
+              <a:uFillTx/>
+              <a:latin typeface="Times New Roman"/>
+            </a:endParaRPr>
+          </a:p>
+        </p:txBody>
+      </p:sp>
+      <p:sp>
+        <p:nvSpPr>
+          <p:cNvPr id="4" name="PlaceHolder 5"/>
+          <p:cNvSpPr>
+            <a:spLocks noGrp="1"/>
+          </p:cNvSpPr>
+          <p:nvPr>
             <p:ph type="sldNum" idx="3"/>
           </p:nvPr>
         </p:nvSpPr>
         <p:spPr>
           <a:xfrm>
             <a:off x="8610480" y="6356520"/>
-            <a:ext cx="2741040" cy="362880"/>
+            <a:ext cx="2740680" cy="362520"/>
           </a:xfrm>
           <a:prstGeom prst="rect">
             <a:avLst/>
@@ -313,7 +377,7 @@
                 <a:tab algn="l" pos="0"/>
               </a:tabLst>
             </a:pPr>
-            <a:fld id="{DF088368-ED64-4AD6-8304-5C38C3FBBE66}" type="slidenum">
+            <a:fld id="{B60C9058-E06F-4789-B72A-054D9416E219}" type="slidenum">
               <a:rPr b="0" lang="en-GB" sz="1200" strike="noStrike" u="none">
                 <a:solidFill>
                   <a:schemeClr val="dk1">
@@ -343,6 +407,1064 @@
 </file>
 
 <file path=ppt/slideLayouts/slideLayout10.xml><?xml version="1.0" encoding="utf-8"?>
+<p:sldLayout xmlns:a="http://schemas.openxmlformats.org/drawingml/2006/main" xmlns:p="http://schemas.openxmlformats.org/presentationml/2006/main" xmlns:r="http://schemas.openxmlformats.org/officeDocument/2006/relationships" xmlns:p14="http://schemas.microsoft.com/office/powerpoint/2010/main" xmlns:p15="http://schemas.microsoft.com/office/powerpoint/2012/main" xmlns:mc="http://schemas.openxmlformats.org/markup-compatibility/2006" type="vertTitleAndTx" preserve="1">
+  <p:cSld name="Título vertical y texto">
+    <p:bg>
+      <p:bgPr>
+        <a:solidFill>
+          <a:srgbClr val="ffffff"/>
+        </a:solidFill>
+      </p:bgPr>
+    </p:bg>
+    <p:spTree>
+      <p:nvGrpSpPr>
+        <p:cNvPr id="1" name=""/>
+        <p:cNvGrpSpPr/>
+        <p:nvPr/>
+      </p:nvGrpSpPr>
+      <p:grpSpPr>
+        <a:xfrm>
+          <a:off x="0" y="0"/>
+          <a:ext cx="0" cy="0"/>
+          <a:chOff x="0" y="0"/>
+          <a:chExt cx="0" cy="0"/>
+        </a:xfrm>
+      </p:grpSpPr>
+      <p:sp>
+        <p:nvSpPr>
+          <p:cNvPr id="49" name="PlaceHolder 1"/>
+          <p:cNvSpPr>
+            <a:spLocks noGrp="1"/>
+          </p:cNvSpPr>
+          <p:nvPr>
+            <p:ph type="title"/>
+          </p:nvPr>
+        </p:nvSpPr>
+        <p:spPr>
+          <a:xfrm>
+            <a:off x="8724960" y="365040"/>
+            <a:ext cx="2626560" cy="5809320"/>
+          </a:xfrm>
+          <a:prstGeom prst="rect">
+            <a:avLst/>
+          </a:prstGeom>
+          <a:noFill/>
+          <a:ln w="0">
+            <a:noFill/>
+          </a:ln>
+        </p:spPr>
+        <p:txBody>
+          <a:bodyPr lIns="91440" rIns="91440" tIns="45720" bIns="45720" anchor="ctr" vert="eaVert">
+            <a:noAutofit/>
+          </a:bodyPr>
+          <a:p>
+            <a:pPr indent="0" defTabSz="914400">
+              <a:lnSpc>
+                <a:spcPct val="90000"/>
+              </a:lnSpc>
+              <a:buNone/>
+              <a:tabLst>
+                <a:tab algn="l" pos="0"/>
+              </a:tabLst>
+            </a:pPr>
+            <a:r>
+              <a:rPr b="0" lang="es-ES" sz="4400" strike="noStrike" u="none">
+                <a:solidFill>
+                  <a:schemeClr val="dk1"/>
+                </a:solidFill>
+                <a:effectLst/>
+                <a:uFillTx/>
+                <a:latin typeface="Calibri Light"/>
+              </a:rPr>
+              <a:t>Haga clic para modificar el estilo de título del patrón</a:t>
+            </a:r>
+            <a:endParaRPr b="0" lang="es-ES" sz="4400" strike="noStrike" u="none">
+              <a:solidFill>
+                <a:srgbClr val="000000"/>
+              </a:solidFill>
+              <a:effectLst/>
+              <a:uFillTx/>
+              <a:latin typeface="Arial"/>
+            </a:endParaRPr>
+          </a:p>
+        </p:txBody>
+      </p:sp>
+      <p:sp>
+        <p:nvSpPr>
+          <p:cNvPr id="50" name="PlaceHolder 2"/>
+          <p:cNvSpPr>
+            <a:spLocks noGrp="1"/>
+          </p:cNvSpPr>
+          <p:nvPr>
+            <p:ph type="body"/>
+          </p:nvPr>
+        </p:nvSpPr>
+        <p:spPr>
+          <a:xfrm>
+            <a:off x="838080" y="365040"/>
+            <a:ext cx="7731720" cy="5809320"/>
+          </a:xfrm>
+          <a:prstGeom prst="rect">
+            <a:avLst/>
+          </a:prstGeom>
+          <a:noFill/>
+          <a:ln w="0">
+            <a:noFill/>
+          </a:ln>
+        </p:spPr>
+        <p:txBody>
+          <a:bodyPr lIns="91440" rIns="91440" tIns="45720" bIns="45720" anchor="t" vert="eaVert">
+            <a:noAutofit/>
+          </a:bodyPr>
+          <a:p>
+            <a:pPr marL="228600" indent="-228600" defTabSz="914400">
+              <a:lnSpc>
+                <a:spcPct val="90000"/>
+              </a:lnSpc>
+              <a:spcBef>
+                <a:spcPts val="1001"/>
+              </a:spcBef>
+              <a:buClr>
+                <a:srgbClr val="000000"/>
+              </a:buClr>
+              <a:buFont typeface="Arial"/>
+              <a:buChar char="•"/>
+            </a:pPr>
+            <a:r>
+              <a:rPr b="0" lang="es-ES" sz="2800" strike="noStrike" u="none">
+                <a:solidFill>
+                  <a:schemeClr val="dk1"/>
+                </a:solidFill>
+                <a:effectLst/>
+                <a:uFillTx/>
+                <a:latin typeface="Calibri"/>
+              </a:rPr>
+              <a:t>Haga clic para modificar los estilos de texto del patrón</a:t>
+            </a:r>
+            <a:endParaRPr b="0" lang="es-ES" sz="2800" strike="noStrike" u="none">
+              <a:solidFill>
+                <a:srgbClr val="000000"/>
+              </a:solidFill>
+              <a:effectLst/>
+              <a:uFillTx/>
+              <a:latin typeface="Arial"/>
+            </a:endParaRPr>
+          </a:p>
+          <a:p>
+            <a:pPr lvl="1" marL="685800" indent="-228600" defTabSz="914400">
+              <a:lnSpc>
+                <a:spcPct val="90000"/>
+              </a:lnSpc>
+              <a:spcBef>
+                <a:spcPts val="499"/>
+              </a:spcBef>
+              <a:buClr>
+                <a:srgbClr val="000000"/>
+              </a:buClr>
+              <a:buFont typeface="Arial"/>
+              <a:buChar char="•"/>
+            </a:pPr>
+            <a:r>
+              <a:rPr b="0" lang="es-ES" sz="2400" strike="noStrike" u="none">
+                <a:solidFill>
+                  <a:schemeClr val="dk1"/>
+                </a:solidFill>
+                <a:effectLst/>
+                <a:uFillTx/>
+                <a:latin typeface="Calibri"/>
+              </a:rPr>
+              <a:t>Segundo nivel</a:t>
+            </a:r>
+            <a:endParaRPr b="0" lang="es-ES" sz="2400" strike="noStrike" u="none">
+              <a:solidFill>
+                <a:srgbClr val="000000"/>
+              </a:solidFill>
+              <a:effectLst/>
+              <a:uFillTx/>
+              <a:latin typeface="Arial"/>
+            </a:endParaRPr>
+          </a:p>
+          <a:p>
+            <a:pPr lvl="2" marL="1143000" indent="-228600" defTabSz="914400">
+              <a:lnSpc>
+                <a:spcPct val="90000"/>
+              </a:lnSpc>
+              <a:spcBef>
+                <a:spcPts val="499"/>
+              </a:spcBef>
+              <a:buClr>
+                <a:srgbClr val="000000"/>
+              </a:buClr>
+              <a:buFont typeface="Arial"/>
+              <a:buChar char="•"/>
+            </a:pPr>
+            <a:r>
+              <a:rPr b="0" lang="es-ES" sz="2000" strike="noStrike" u="none">
+                <a:solidFill>
+                  <a:schemeClr val="dk1"/>
+                </a:solidFill>
+                <a:effectLst/>
+                <a:uFillTx/>
+                <a:latin typeface="Calibri"/>
+              </a:rPr>
+              <a:t>Tercer nivel</a:t>
+            </a:r>
+            <a:endParaRPr b="0" lang="es-ES" sz="2000" strike="noStrike" u="none">
+              <a:solidFill>
+                <a:srgbClr val="000000"/>
+              </a:solidFill>
+              <a:effectLst/>
+              <a:uFillTx/>
+              <a:latin typeface="Arial"/>
+            </a:endParaRPr>
+          </a:p>
+          <a:p>
+            <a:pPr lvl="3" marL="1600200" indent="-228600" defTabSz="914400">
+              <a:lnSpc>
+                <a:spcPct val="90000"/>
+              </a:lnSpc>
+              <a:spcBef>
+                <a:spcPts val="499"/>
+              </a:spcBef>
+              <a:buClr>
+                <a:srgbClr val="000000"/>
+              </a:buClr>
+              <a:buFont typeface="Arial"/>
+              <a:buChar char="•"/>
+            </a:pPr>
+            <a:r>
+              <a:rPr b="0" lang="es-ES" sz="1800" strike="noStrike" u="none">
+                <a:solidFill>
+                  <a:schemeClr val="dk1"/>
+                </a:solidFill>
+                <a:effectLst/>
+                <a:uFillTx/>
+                <a:latin typeface="Calibri"/>
+              </a:rPr>
+              <a:t>Cuarto nivel</a:t>
+            </a:r>
+            <a:endParaRPr b="0" lang="es-ES" sz="1800" strike="noStrike" u="none">
+              <a:solidFill>
+                <a:srgbClr val="000000"/>
+              </a:solidFill>
+              <a:effectLst/>
+              <a:uFillTx/>
+              <a:latin typeface="Arial"/>
+            </a:endParaRPr>
+          </a:p>
+          <a:p>
+            <a:pPr lvl="4" marL="2057400" indent="-228600" defTabSz="914400">
+              <a:lnSpc>
+                <a:spcPct val="90000"/>
+              </a:lnSpc>
+              <a:spcBef>
+                <a:spcPts val="499"/>
+              </a:spcBef>
+              <a:buClr>
+                <a:srgbClr val="000000"/>
+              </a:buClr>
+              <a:buFont typeface="Arial"/>
+              <a:buChar char="•"/>
+            </a:pPr>
+            <a:r>
+              <a:rPr b="0" lang="es-ES" sz="1800" strike="noStrike" u="none">
+                <a:solidFill>
+                  <a:schemeClr val="dk1"/>
+                </a:solidFill>
+                <a:effectLst/>
+                <a:uFillTx/>
+                <a:latin typeface="Calibri"/>
+              </a:rPr>
+              <a:t>Quinto nivel</a:t>
+            </a:r>
+            <a:endParaRPr b="0" lang="es-ES" sz="1800" strike="noStrike" u="none">
+              <a:solidFill>
+                <a:srgbClr val="000000"/>
+              </a:solidFill>
+              <a:effectLst/>
+              <a:uFillTx/>
+              <a:latin typeface="Arial"/>
+            </a:endParaRPr>
+          </a:p>
+        </p:txBody>
+      </p:sp>
+      <p:sp>
+        <p:nvSpPr>
+          <p:cNvPr id="51" name="PlaceHolder 3"/>
+          <p:cNvSpPr>
+            <a:spLocks noGrp="1"/>
+          </p:cNvSpPr>
+          <p:nvPr>
+            <p:ph type="dt" idx="28"/>
+          </p:nvPr>
+        </p:nvSpPr>
+        <p:spPr>
+          <a:xfrm>
+            <a:off x="838080" y="6356520"/>
+            <a:ext cx="2740680" cy="362520"/>
+          </a:xfrm>
+          <a:prstGeom prst="rect">
+            <a:avLst/>
+          </a:prstGeom>
+          <a:noFill/>
+          <a:ln w="0">
+            <a:noFill/>
+          </a:ln>
+        </p:spPr>
+        <p:txBody>
+          <a:bodyPr lIns="91440" rIns="91440" tIns="45720" bIns="45720" anchor="ctr">
+            <a:noAutofit/>
+          </a:bodyPr>
+          <a:lstStyle>
+            <a:lvl1pPr indent="0" defTabSz="914400">
+              <a:lnSpc>
+                <a:spcPct val="100000"/>
+              </a:lnSpc>
+              <a:buNone/>
+              <a:tabLst>
+                <a:tab algn="l" pos="0"/>
+              </a:tabLst>
+              <a:defRPr b="0" lang="en-GB" sz="1200" strike="noStrike" u="none">
+                <a:solidFill>
+                  <a:schemeClr val="dk1">
+                    <a:tint val="75000"/>
+                  </a:schemeClr>
+                </a:solidFill>
+                <a:effectLst/>
+                <a:uFillTx/>
+                <a:latin typeface="Calibri"/>
+              </a:defRPr>
+            </a:lvl1pPr>
+          </a:lstStyle>
+          <a:p>
+            <a:pPr indent="0" defTabSz="914400">
+              <a:lnSpc>
+                <a:spcPct val="100000"/>
+              </a:lnSpc>
+              <a:buNone/>
+              <a:tabLst>
+                <a:tab algn="l" pos="0"/>
+              </a:tabLst>
+            </a:pPr>
+            <a:r>
+              <a:rPr b="0" lang="en-GB" sz="1200" strike="noStrike" u="none">
+                <a:solidFill>
+                  <a:schemeClr val="dk1">
+                    <a:tint val="75000"/>
+                  </a:schemeClr>
+                </a:solidFill>
+                <a:effectLst/>
+                <a:uFillTx/>
+                <a:latin typeface="Calibri"/>
+              </a:rPr>
+              <a:t>&lt;fecha/hora&gt;</a:t>
+            </a:r>
+            <a:endParaRPr b="0" lang="es-ES" sz="1200" strike="noStrike" u="none">
+              <a:solidFill>
+                <a:srgbClr val="000000"/>
+              </a:solidFill>
+              <a:effectLst/>
+              <a:uFillTx/>
+              <a:latin typeface="Times New Roman"/>
+            </a:endParaRPr>
+          </a:p>
+        </p:txBody>
+      </p:sp>
+      <p:sp>
+        <p:nvSpPr>
+          <p:cNvPr id="52" name="PlaceHolder 4"/>
+          <p:cNvSpPr>
+            <a:spLocks noGrp="1"/>
+          </p:cNvSpPr>
+          <p:nvPr>
+            <p:ph type="ftr" idx="29"/>
+          </p:nvPr>
+        </p:nvSpPr>
+        <p:spPr>
+          <a:xfrm>
+            <a:off x="4038480" y="6356520"/>
+            <a:ext cx="4112280" cy="362520"/>
+          </a:xfrm>
+          <a:prstGeom prst="rect">
+            <a:avLst/>
+          </a:prstGeom>
+          <a:noFill/>
+          <a:ln w="0">
+            <a:noFill/>
+          </a:ln>
+        </p:spPr>
+        <p:txBody>
+          <a:bodyPr lIns="91440" rIns="91440" tIns="45720" bIns="45720" anchor="ctr">
+            <a:noAutofit/>
+          </a:bodyPr>
+          <a:lstStyle>
+            <a:lvl1pPr indent="0" algn="ctr">
+              <a:lnSpc>
+                <a:spcPct val="100000"/>
+              </a:lnSpc>
+              <a:buNone/>
+              <a:tabLst>
+                <a:tab algn="l" pos="0"/>
+              </a:tabLst>
+              <a:defRPr b="0" lang="es-ES" sz="1400" strike="noStrike" u="none">
+                <a:solidFill>
+                  <a:srgbClr val="000000"/>
+                </a:solidFill>
+                <a:effectLst/>
+                <a:uFillTx/>
+                <a:latin typeface="Times New Roman"/>
+              </a:defRPr>
+            </a:lvl1pPr>
+          </a:lstStyle>
+          <a:p>
+            <a:pPr indent="0" algn="ctr">
+              <a:lnSpc>
+                <a:spcPct val="100000"/>
+              </a:lnSpc>
+              <a:buNone/>
+              <a:tabLst>
+                <a:tab algn="l" pos="0"/>
+              </a:tabLst>
+            </a:pPr>
+            <a:r>
+              <a:rPr b="0" lang="es-ES" sz="1400" strike="noStrike" u="none">
+                <a:solidFill>
+                  <a:srgbClr val="000000"/>
+                </a:solidFill>
+                <a:effectLst/>
+                <a:uFillTx/>
+                <a:latin typeface="Times New Roman"/>
+              </a:rPr>
+              <a:t>&lt;pie de página&gt;</a:t>
+            </a:r>
+            <a:endParaRPr b="0" lang="es-ES" sz="1400" strike="noStrike" u="none">
+              <a:solidFill>
+                <a:srgbClr val="000000"/>
+              </a:solidFill>
+              <a:effectLst/>
+              <a:uFillTx/>
+              <a:latin typeface="Times New Roman"/>
+            </a:endParaRPr>
+          </a:p>
+        </p:txBody>
+      </p:sp>
+      <p:sp>
+        <p:nvSpPr>
+          <p:cNvPr id="53" name="PlaceHolder 5"/>
+          <p:cNvSpPr>
+            <a:spLocks noGrp="1"/>
+          </p:cNvSpPr>
+          <p:nvPr>
+            <p:ph type="sldNum" idx="30"/>
+          </p:nvPr>
+        </p:nvSpPr>
+        <p:spPr>
+          <a:xfrm>
+            <a:off x="8610480" y="6356520"/>
+            <a:ext cx="2740680" cy="362520"/>
+          </a:xfrm>
+          <a:prstGeom prst="rect">
+            <a:avLst/>
+          </a:prstGeom>
+          <a:noFill/>
+          <a:ln w="0">
+            <a:noFill/>
+          </a:ln>
+        </p:spPr>
+        <p:txBody>
+          <a:bodyPr lIns="91440" rIns="91440" tIns="45720" bIns="45720" anchor="ctr">
+            <a:noAutofit/>
+          </a:bodyPr>
+          <a:lstStyle>
+            <a:lvl1pPr indent="0" algn="r" defTabSz="914400">
+              <a:lnSpc>
+                <a:spcPct val="100000"/>
+              </a:lnSpc>
+              <a:buNone/>
+              <a:tabLst>
+                <a:tab algn="l" pos="0"/>
+              </a:tabLst>
+              <a:defRPr b="0" lang="en-GB" sz="1200" strike="noStrike" u="none">
+                <a:solidFill>
+                  <a:schemeClr val="dk1">
+                    <a:tint val="75000"/>
+                  </a:schemeClr>
+                </a:solidFill>
+                <a:effectLst/>
+                <a:uFillTx/>
+                <a:latin typeface="Calibri"/>
+              </a:defRPr>
+            </a:lvl1pPr>
+          </a:lstStyle>
+          <a:p>
+            <a:pPr indent="0" algn="r" defTabSz="914400">
+              <a:lnSpc>
+                <a:spcPct val="100000"/>
+              </a:lnSpc>
+              <a:buNone/>
+              <a:tabLst>
+                <a:tab algn="l" pos="0"/>
+              </a:tabLst>
+            </a:pPr>
+            <a:fld id="{8F39EAA4-C315-4B34-A3B5-7252215A9959}" type="slidenum">
+              <a:rPr b="0" lang="en-GB" sz="1200" strike="noStrike" u="none">
+                <a:solidFill>
+                  <a:schemeClr val="dk1">
+                    <a:tint val="75000"/>
+                  </a:schemeClr>
+                </a:solidFill>
+                <a:effectLst/>
+                <a:uFillTx/>
+                <a:latin typeface="Calibri"/>
+              </a:rPr>
+              <a:t>&lt;número&gt;</a:t>
+            </a:fld>
+            <a:endParaRPr b="0" lang="es-ES" sz="1200" strike="noStrike" u="none">
+              <a:solidFill>
+                <a:srgbClr val="000000"/>
+              </a:solidFill>
+              <a:effectLst/>
+              <a:uFillTx/>
+              <a:latin typeface="Times New Roman"/>
+            </a:endParaRPr>
+          </a:p>
+        </p:txBody>
+      </p:sp>
+    </p:spTree>
+  </p:cSld>
+</p:sldLayout>
+</file>
+
+<file path=ppt/slideLayouts/slideLayout11.xml><?xml version="1.0" encoding="utf-8"?>
+<p:sldLayout xmlns:a="http://schemas.openxmlformats.org/drawingml/2006/main" xmlns:p="http://schemas.openxmlformats.org/presentationml/2006/main" xmlns:r="http://schemas.openxmlformats.org/officeDocument/2006/relationships" xmlns:p14="http://schemas.microsoft.com/office/powerpoint/2010/main" xmlns:p15="http://schemas.microsoft.com/office/powerpoint/2012/main" xmlns:mc="http://schemas.openxmlformats.org/markup-compatibility/2006" type="obj" preserve="1">
+  <p:cSld name="Título y objetos">
+    <p:bg>
+      <p:bgPr>
+        <a:solidFill>
+          <a:srgbClr val="ffffff"/>
+        </a:solidFill>
+      </p:bgPr>
+    </p:bg>
+    <p:spTree>
+      <p:nvGrpSpPr>
+        <p:cNvPr id="1" name=""/>
+        <p:cNvGrpSpPr/>
+        <p:nvPr/>
+      </p:nvGrpSpPr>
+      <p:grpSpPr>
+        <a:xfrm>
+          <a:off x="0" y="0"/>
+          <a:ext cx="0" cy="0"/>
+          <a:chOff x="0" y="0"/>
+          <a:chExt cx="0" cy="0"/>
+        </a:xfrm>
+      </p:grpSpPr>
+      <p:sp>
+        <p:nvSpPr>
+          <p:cNvPr id="54" name="PlaceHolder 1"/>
+          <p:cNvSpPr>
+            <a:spLocks noGrp="1"/>
+          </p:cNvSpPr>
+          <p:nvPr>
+            <p:ph type="title"/>
+          </p:nvPr>
+        </p:nvSpPr>
+        <p:spPr>
+          <a:xfrm>
+            <a:off x="838080" y="365040"/>
+            <a:ext cx="10513080" cy="1323000"/>
+          </a:xfrm>
+          <a:prstGeom prst="rect">
+            <a:avLst/>
+          </a:prstGeom>
+          <a:noFill/>
+          <a:ln w="0">
+            <a:noFill/>
+          </a:ln>
+        </p:spPr>
+        <p:txBody>
+          <a:bodyPr lIns="91440" rIns="91440" tIns="45720" bIns="45720" anchor="ctr">
+            <a:noAutofit/>
+          </a:bodyPr>
+          <a:p>
+            <a:pPr indent="0" defTabSz="914400">
+              <a:lnSpc>
+                <a:spcPct val="90000"/>
+              </a:lnSpc>
+              <a:buNone/>
+              <a:tabLst>
+                <a:tab algn="l" pos="0"/>
+              </a:tabLst>
+            </a:pPr>
+            <a:r>
+              <a:rPr b="0" lang="es-ES" sz="4400" strike="noStrike" u="none">
+                <a:solidFill>
+                  <a:schemeClr val="dk1"/>
+                </a:solidFill>
+                <a:effectLst/>
+                <a:uFillTx/>
+                <a:latin typeface="Calibri Light"/>
+              </a:rPr>
+              <a:t>Haga clic para modificar el estilo de título del patrón</a:t>
+            </a:r>
+            <a:endParaRPr b="0" lang="es-ES" sz="4400" strike="noStrike" u="none">
+              <a:solidFill>
+                <a:srgbClr val="000000"/>
+              </a:solidFill>
+              <a:effectLst/>
+              <a:uFillTx/>
+              <a:latin typeface="Arial"/>
+            </a:endParaRPr>
+          </a:p>
+        </p:txBody>
+      </p:sp>
+      <p:sp>
+        <p:nvSpPr>
+          <p:cNvPr id="55" name="PlaceHolder 2"/>
+          <p:cNvSpPr>
+            <a:spLocks noGrp="1"/>
+          </p:cNvSpPr>
+          <p:nvPr>
+            <p:ph type="body"/>
+          </p:nvPr>
+        </p:nvSpPr>
+        <p:spPr>
+          <a:xfrm>
+            <a:off x="838080" y="1825560"/>
+            <a:ext cx="10513080" cy="4348800"/>
+          </a:xfrm>
+          <a:prstGeom prst="rect">
+            <a:avLst/>
+          </a:prstGeom>
+          <a:noFill/>
+          <a:ln w="0">
+            <a:noFill/>
+          </a:ln>
+        </p:spPr>
+        <p:txBody>
+          <a:bodyPr lIns="91440" rIns="91440" tIns="45720" bIns="45720" anchor="t">
+            <a:noAutofit/>
+          </a:bodyPr>
+          <a:p>
+            <a:pPr marL="228600" indent="-228600" defTabSz="914400">
+              <a:lnSpc>
+                <a:spcPct val="90000"/>
+              </a:lnSpc>
+              <a:spcBef>
+                <a:spcPts val="1001"/>
+              </a:spcBef>
+              <a:buClr>
+                <a:srgbClr val="000000"/>
+              </a:buClr>
+              <a:buFont typeface="Arial"/>
+              <a:buChar char="•"/>
+            </a:pPr>
+            <a:r>
+              <a:rPr b="0" lang="es-ES" sz="2800" strike="noStrike" u="none">
+                <a:solidFill>
+                  <a:schemeClr val="dk1"/>
+                </a:solidFill>
+                <a:effectLst/>
+                <a:uFillTx/>
+                <a:latin typeface="Calibri"/>
+              </a:rPr>
+              <a:t>Haga clic para modificar los estilos de texto del patrón</a:t>
+            </a:r>
+            <a:endParaRPr b="0" lang="es-ES" sz="2800" strike="noStrike" u="none">
+              <a:solidFill>
+                <a:srgbClr val="000000"/>
+              </a:solidFill>
+              <a:effectLst/>
+              <a:uFillTx/>
+              <a:latin typeface="Arial"/>
+            </a:endParaRPr>
+          </a:p>
+          <a:p>
+            <a:pPr lvl="1" marL="685800" indent="-228600" defTabSz="914400">
+              <a:lnSpc>
+                <a:spcPct val="90000"/>
+              </a:lnSpc>
+              <a:spcBef>
+                <a:spcPts val="499"/>
+              </a:spcBef>
+              <a:buClr>
+                <a:srgbClr val="000000"/>
+              </a:buClr>
+              <a:buFont typeface="Arial"/>
+              <a:buChar char="•"/>
+            </a:pPr>
+            <a:r>
+              <a:rPr b="0" lang="es-ES" sz="2400" strike="noStrike" u="none">
+                <a:solidFill>
+                  <a:schemeClr val="dk1"/>
+                </a:solidFill>
+                <a:effectLst/>
+                <a:uFillTx/>
+                <a:latin typeface="Calibri"/>
+              </a:rPr>
+              <a:t>Segundo nivel</a:t>
+            </a:r>
+            <a:endParaRPr b="0" lang="es-ES" sz="2400" strike="noStrike" u="none">
+              <a:solidFill>
+                <a:srgbClr val="000000"/>
+              </a:solidFill>
+              <a:effectLst/>
+              <a:uFillTx/>
+              <a:latin typeface="Arial"/>
+            </a:endParaRPr>
+          </a:p>
+          <a:p>
+            <a:pPr lvl="2" marL="1143000" indent="-228600" defTabSz="914400">
+              <a:lnSpc>
+                <a:spcPct val="90000"/>
+              </a:lnSpc>
+              <a:spcBef>
+                <a:spcPts val="499"/>
+              </a:spcBef>
+              <a:buClr>
+                <a:srgbClr val="000000"/>
+              </a:buClr>
+              <a:buFont typeface="Arial"/>
+              <a:buChar char="•"/>
+            </a:pPr>
+            <a:r>
+              <a:rPr b="0" lang="es-ES" sz="2000" strike="noStrike" u="none">
+                <a:solidFill>
+                  <a:schemeClr val="dk1"/>
+                </a:solidFill>
+                <a:effectLst/>
+                <a:uFillTx/>
+                <a:latin typeface="Calibri"/>
+              </a:rPr>
+              <a:t>Tercer nivel</a:t>
+            </a:r>
+            <a:endParaRPr b="0" lang="es-ES" sz="2000" strike="noStrike" u="none">
+              <a:solidFill>
+                <a:srgbClr val="000000"/>
+              </a:solidFill>
+              <a:effectLst/>
+              <a:uFillTx/>
+              <a:latin typeface="Arial"/>
+            </a:endParaRPr>
+          </a:p>
+          <a:p>
+            <a:pPr lvl="3" marL="1600200" indent="-228600" defTabSz="914400">
+              <a:lnSpc>
+                <a:spcPct val="90000"/>
+              </a:lnSpc>
+              <a:spcBef>
+                <a:spcPts val="499"/>
+              </a:spcBef>
+              <a:buClr>
+                <a:srgbClr val="000000"/>
+              </a:buClr>
+              <a:buFont typeface="Arial"/>
+              <a:buChar char="•"/>
+            </a:pPr>
+            <a:r>
+              <a:rPr b="0" lang="es-ES" sz="1800" strike="noStrike" u="none">
+                <a:solidFill>
+                  <a:schemeClr val="dk1"/>
+                </a:solidFill>
+                <a:effectLst/>
+                <a:uFillTx/>
+                <a:latin typeface="Calibri"/>
+              </a:rPr>
+              <a:t>Cuarto nivel</a:t>
+            </a:r>
+            <a:endParaRPr b="0" lang="es-ES" sz="1800" strike="noStrike" u="none">
+              <a:solidFill>
+                <a:srgbClr val="000000"/>
+              </a:solidFill>
+              <a:effectLst/>
+              <a:uFillTx/>
+              <a:latin typeface="Arial"/>
+            </a:endParaRPr>
+          </a:p>
+          <a:p>
+            <a:pPr lvl="4" marL="2057400" indent="-228600" defTabSz="914400">
+              <a:lnSpc>
+                <a:spcPct val="90000"/>
+              </a:lnSpc>
+              <a:spcBef>
+                <a:spcPts val="499"/>
+              </a:spcBef>
+              <a:buClr>
+                <a:srgbClr val="000000"/>
+              </a:buClr>
+              <a:buFont typeface="Arial"/>
+              <a:buChar char="•"/>
+            </a:pPr>
+            <a:r>
+              <a:rPr b="0" lang="es-ES" sz="1800" strike="noStrike" u="none">
+                <a:solidFill>
+                  <a:schemeClr val="dk1"/>
+                </a:solidFill>
+                <a:effectLst/>
+                <a:uFillTx/>
+                <a:latin typeface="Calibri"/>
+              </a:rPr>
+              <a:t>Quinto nivel</a:t>
+            </a:r>
+            <a:endParaRPr b="0" lang="es-ES" sz="1800" strike="noStrike" u="none">
+              <a:solidFill>
+                <a:srgbClr val="000000"/>
+              </a:solidFill>
+              <a:effectLst/>
+              <a:uFillTx/>
+              <a:latin typeface="Arial"/>
+            </a:endParaRPr>
+          </a:p>
+        </p:txBody>
+      </p:sp>
+      <p:sp>
+        <p:nvSpPr>
+          <p:cNvPr id="56" name="PlaceHolder 3"/>
+          <p:cNvSpPr>
+            <a:spLocks noGrp="1"/>
+          </p:cNvSpPr>
+          <p:nvPr>
+            <p:ph type="dt" idx="31"/>
+          </p:nvPr>
+        </p:nvSpPr>
+        <p:spPr>
+          <a:xfrm>
+            <a:off x="838080" y="6356520"/>
+            <a:ext cx="2740680" cy="362520"/>
+          </a:xfrm>
+          <a:prstGeom prst="rect">
+            <a:avLst/>
+          </a:prstGeom>
+          <a:noFill/>
+          <a:ln w="0">
+            <a:noFill/>
+          </a:ln>
+        </p:spPr>
+        <p:txBody>
+          <a:bodyPr lIns="91440" rIns="91440" tIns="45720" bIns="45720" anchor="ctr">
+            <a:noAutofit/>
+          </a:bodyPr>
+          <a:lstStyle>
+            <a:lvl1pPr indent="0" defTabSz="914400">
+              <a:lnSpc>
+                <a:spcPct val="100000"/>
+              </a:lnSpc>
+              <a:buNone/>
+              <a:tabLst>
+                <a:tab algn="l" pos="0"/>
+              </a:tabLst>
+              <a:defRPr b="0" lang="en-GB" sz="1200" strike="noStrike" u="none">
+                <a:solidFill>
+                  <a:schemeClr val="dk1">
+                    <a:tint val="75000"/>
+                  </a:schemeClr>
+                </a:solidFill>
+                <a:effectLst/>
+                <a:uFillTx/>
+                <a:latin typeface="Calibri"/>
+              </a:defRPr>
+            </a:lvl1pPr>
+          </a:lstStyle>
+          <a:p>
+            <a:pPr indent="0" defTabSz="914400">
+              <a:lnSpc>
+                <a:spcPct val="100000"/>
+              </a:lnSpc>
+              <a:buNone/>
+              <a:tabLst>
+                <a:tab algn="l" pos="0"/>
+              </a:tabLst>
+            </a:pPr>
+            <a:r>
+              <a:rPr b="0" lang="en-GB" sz="1200" strike="noStrike" u="none">
+                <a:solidFill>
+                  <a:schemeClr val="dk1">
+                    <a:tint val="75000"/>
+                  </a:schemeClr>
+                </a:solidFill>
+                <a:effectLst/>
+                <a:uFillTx/>
+                <a:latin typeface="Calibri"/>
+              </a:rPr>
+              <a:t>&lt;fecha/hora&gt;</a:t>
+            </a:r>
+            <a:endParaRPr b="0" lang="es-ES" sz="1200" strike="noStrike" u="none">
+              <a:solidFill>
+                <a:srgbClr val="000000"/>
+              </a:solidFill>
+              <a:effectLst/>
+              <a:uFillTx/>
+              <a:latin typeface="Times New Roman"/>
+            </a:endParaRPr>
+          </a:p>
+        </p:txBody>
+      </p:sp>
+      <p:sp>
+        <p:nvSpPr>
+          <p:cNvPr id="57" name="PlaceHolder 4"/>
+          <p:cNvSpPr>
+            <a:spLocks noGrp="1"/>
+          </p:cNvSpPr>
+          <p:nvPr>
+            <p:ph type="ftr" idx="32"/>
+          </p:nvPr>
+        </p:nvSpPr>
+        <p:spPr>
+          <a:xfrm>
+            <a:off x="4038480" y="6356520"/>
+            <a:ext cx="4112280" cy="362520"/>
+          </a:xfrm>
+          <a:prstGeom prst="rect">
+            <a:avLst/>
+          </a:prstGeom>
+          <a:noFill/>
+          <a:ln w="0">
+            <a:noFill/>
+          </a:ln>
+        </p:spPr>
+        <p:txBody>
+          <a:bodyPr lIns="91440" rIns="91440" tIns="45720" bIns="45720" anchor="ctr">
+            <a:noAutofit/>
+          </a:bodyPr>
+          <a:lstStyle>
+            <a:lvl1pPr indent="0" algn="ctr">
+              <a:lnSpc>
+                <a:spcPct val="100000"/>
+              </a:lnSpc>
+              <a:buNone/>
+              <a:tabLst>
+                <a:tab algn="l" pos="0"/>
+              </a:tabLst>
+              <a:defRPr b="0" lang="es-ES" sz="1400" strike="noStrike" u="none">
+                <a:solidFill>
+                  <a:srgbClr val="000000"/>
+                </a:solidFill>
+                <a:effectLst/>
+                <a:uFillTx/>
+                <a:latin typeface="Times New Roman"/>
+              </a:defRPr>
+            </a:lvl1pPr>
+          </a:lstStyle>
+          <a:p>
+            <a:pPr indent="0" algn="ctr">
+              <a:lnSpc>
+                <a:spcPct val="100000"/>
+              </a:lnSpc>
+              <a:buNone/>
+              <a:tabLst>
+                <a:tab algn="l" pos="0"/>
+              </a:tabLst>
+            </a:pPr>
+            <a:r>
+              <a:rPr b="0" lang="es-ES" sz="1400" strike="noStrike" u="none">
+                <a:solidFill>
+                  <a:srgbClr val="000000"/>
+                </a:solidFill>
+                <a:effectLst/>
+                <a:uFillTx/>
+                <a:latin typeface="Times New Roman"/>
+              </a:rPr>
+              <a:t>&lt;pie de página&gt;</a:t>
+            </a:r>
+            <a:endParaRPr b="0" lang="es-ES" sz="1400" strike="noStrike" u="none">
+              <a:solidFill>
+                <a:srgbClr val="000000"/>
+              </a:solidFill>
+              <a:effectLst/>
+              <a:uFillTx/>
+              <a:latin typeface="Times New Roman"/>
+            </a:endParaRPr>
+          </a:p>
+        </p:txBody>
+      </p:sp>
+      <p:sp>
+        <p:nvSpPr>
+          <p:cNvPr id="58" name="PlaceHolder 5"/>
+          <p:cNvSpPr>
+            <a:spLocks noGrp="1"/>
+          </p:cNvSpPr>
+          <p:nvPr>
+            <p:ph type="sldNum" idx="33"/>
+          </p:nvPr>
+        </p:nvSpPr>
+        <p:spPr>
+          <a:xfrm>
+            <a:off x="8610480" y="6356520"/>
+            <a:ext cx="2740680" cy="362520"/>
+          </a:xfrm>
+          <a:prstGeom prst="rect">
+            <a:avLst/>
+          </a:prstGeom>
+          <a:noFill/>
+          <a:ln w="0">
+            <a:noFill/>
+          </a:ln>
+        </p:spPr>
+        <p:txBody>
+          <a:bodyPr lIns="91440" rIns="91440" tIns="45720" bIns="45720" anchor="ctr">
+            <a:noAutofit/>
+          </a:bodyPr>
+          <a:lstStyle>
+            <a:lvl1pPr indent="0" algn="r" defTabSz="914400">
+              <a:lnSpc>
+                <a:spcPct val="100000"/>
+              </a:lnSpc>
+              <a:buNone/>
+              <a:tabLst>
+                <a:tab algn="l" pos="0"/>
+              </a:tabLst>
+              <a:defRPr b="0" lang="en-GB" sz="1200" strike="noStrike" u="none">
+                <a:solidFill>
+                  <a:schemeClr val="dk1">
+                    <a:tint val="75000"/>
+                  </a:schemeClr>
+                </a:solidFill>
+                <a:effectLst/>
+                <a:uFillTx/>
+                <a:latin typeface="Calibri"/>
+              </a:defRPr>
+            </a:lvl1pPr>
+          </a:lstStyle>
+          <a:p>
+            <a:pPr indent="0" algn="r" defTabSz="914400">
+              <a:lnSpc>
+                <a:spcPct val="100000"/>
+              </a:lnSpc>
+              <a:buNone/>
+              <a:tabLst>
+                <a:tab algn="l" pos="0"/>
+              </a:tabLst>
+            </a:pPr>
+            <a:fld id="{BB8548FA-77F0-479D-89F8-78D1B839EB29}" type="slidenum">
+              <a:rPr b="0" lang="en-GB" sz="1200" strike="noStrike" u="none">
+                <a:solidFill>
+                  <a:schemeClr val="dk1">
+                    <a:tint val="75000"/>
+                  </a:schemeClr>
+                </a:solidFill>
+                <a:effectLst/>
+                <a:uFillTx/>
+                <a:latin typeface="Calibri"/>
+              </a:rPr>
+              <a:t>&lt;número&gt;</a:t>
+            </a:fld>
+            <a:endParaRPr b="0" lang="es-ES" sz="1200" strike="noStrike" u="none">
+              <a:solidFill>
+                <a:srgbClr val="000000"/>
+              </a:solidFill>
+              <a:effectLst/>
+              <a:uFillTx/>
+              <a:latin typeface="Times New Roman"/>
+            </a:endParaRPr>
+          </a:p>
+        </p:txBody>
+      </p:sp>
+    </p:spTree>
+  </p:cSld>
+</p:sldLayout>
+</file>
+
+<file path=ppt/slideLayouts/slideLayout2.xml><?xml version="1.0" encoding="utf-8"?>
 <p:sldLayout xmlns:a="http://schemas.openxmlformats.org/drawingml/2006/main" xmlns:p="http://schemas.openxmlformats.org/presentationml/2006/main" xmlns:r="http://schemas.openxmlformats.org/officeDocument/2006/relationships" xmlns:p14="http://schemas.microsoft.com/office/powerpoint/2010/main" xmlns:p15="http://schemas.microsoft.com/office/powerpoint/2012/main" xmlns:mc="http://schemas.openxmlformats.org/markup-compatibility/2006" type="twoObj" preserve="1">
   <p:cSld name="Dos objetos">
     <p:bg>
@@ -368,7 +1490,7 @@
       </p:grpSpPr>
       <p:sp>
         <p:nvSpPr>
-          <p:cNvPr id="45" name="PlaceHolder 1"/>
+          <p:cNvPr id="5" name="PlaceHolder 1"/>
           <p:cNvSpPr>
             <a:spLocks noGrp="1"/>
           </p:cNvSpPr>
@@ -379,7 +1501,7 @@
         <p:spPr>
           <a:xfrm>
             <a:off x="838080" y="365040"/>
-            <a:ext cx="10513440" cy="1323360"/>
+            <a:ext cx="10513080" cy="1323000"/>
           </a:xfrm>
           <a:prstGeom prst="rect">
             <a:avLst/>
@@ -427,7 +1549,7 @@
       </p:sp>
       <p:sp>
         <p:nvSpPr>
-          <p:cNvPr id="46" name="PlaceHolder 2"/>
+          <p:cNvPr id="6" name="PlaceHolder 2"/>
           <p:cNvSpPr>
             <a:spLocks noGrp="1"/>
           </p:cNvSpPr>
@@ -438,7 +1560,7 @@
         <p:spPr>
           <a:xfrm>
             <a:off x="838080" y="1825560"/>
-            <a:ext cx="5179320" cy="4349160"/>
+            <a:ext cx="5178960" cy="4348800"/>
           </a:xfrm>
           <a:prstGeom prst="rect">
             <a:avLst/>
@@ -626,7 +1748,7 @@
       </p:sp>
       <p:sp>
         <p:nvSpPr>
-          <p:cNvPr id="47" name="PlaceHolder 3"/>
+          <p:cNvPr id="7" name="PlaceHolder 3"/>
           <p:cNvSpPr>
             <a:spLocks noGrp="1"/>
           </p:cNvSpPr>
@@ -637,7 +1759,7 @@
         <p:spPr>
           <a:xfrm>
             <a:off x="6172200" y="1825560"/>
-            <a:ext cx="5179320" cy="4349160"/>
+            <a:ext cx="5178960" cy="4348800"/>
           </a:xfrm>
           <a:prstGeom prst="rect">
             <a:avLst/>
@@ -825,18 +1947,18 @@
       </p:sp>
       <p:sp>
         <p:nvSpPr>
-          <p:cNvPr id="48" name="PlaceHolder 4"/>
+          <p:cNvPr id="8" name="PlaceHolder 4"/>
           <p:cNvSpPr>
             <a:spLocks noGrp="1"/>
           </p:cNvSpPr>
           <p:nvPr>
-            <p:ph type="dt" idx="28"/>
+            <p:ph type="dt" idx="4"/>
           </p:nvPr>
         </p:nvSpPr>
         <p:spPr>
           <a:xfrm>
             <a:off x="838080" y="6356520"/>
-            <a:ext cx="2741040" cy="362880"/>
+            <a:ext cx="2740680" cy="362520"/>
           </a:xfrm>
           <a:prstGeom prst="rect">
             <a:avLst/>
@@ -907,18 +2029,18 @@
       </p:sp>
       <p:sp>
         <p:nvSpPr>
-          <p:cNvPr id="49" name="PlaceHolder 5"/>
+          <p:cNvPr id="9" name="PlaceHolder 5"/>
           <p:cNvSpPr>
             <a:spLocks noGrp="1"/>
           </p:cNvSpPr>
           <p:nvPr>
-            <p:ph type="ftr" idx="29"/>
+            <p:ph type="ftr" idx="5"/>
           </p:nvPr>
         </p:nvSpPr>
         <p:spPr>
           <a:xfrm>
             <a:off x="4038480" y="6356520"/>
-            <a:ext cx="4112640" cy="362880"/>
+            <a:ext cx="4112280" cy="362520"/>
           </a:xfrm>
           <a:prstGeom prst="rect">
             <a:avLst/>
@@ -985,18 +2107,18 @@
       </p:sp>
       <p:sp>
         <p:nvSpPr>
-          <p:cNvPr id="50" name="PlaceHolder 6"/>
+          <p:cNvPr id="10" name="PlaceHolder 6"/>
           <p:cNvSpPr>
             <a:spLocks noGrp="1"/>
           </p:cNvSpPr>
           <p:nvPr>
-            <p:ph type="sldNum" idx="30"/>
+            <p:ph type="sldNum" idx="6"/>
           </p:nvPr>
         </p:nvSpPr>
         <p:spPr>
           <a:xfrm>
             <a:off x="8610480" y="6356520"/>
-            <a:ext cx="2741040" cy="362880"/>
+            <a:ext cx="2740680" cy="362520"/>
           </a:xfrm>
           <a:prstGeom prst="rect">
             <a:avLst/>
@@ -1041,7 +2163,7 @@
                 <a:tab algn="l" pos="0"/>
               </a:tabLst>
             </a:pPr>
-            <a:fld id="{6662B734-280C-4FDF-BF2D-F41D1734E14A}" type="slidenum">
+            <a:fld id="{8C30875F-F16C-4678-B4D6-E7A779296D17}" type="slidenum">
               <a:rPr b="0" lang="en-GB" sz="1200" strike="noStrike" u="none">
                 <a:solidFill>
                   <a:schemeClr val="dk1">
@@ -1070,7 +2192,7 @@
 </p:sldLayout>
 </file>
 
-<file path=ppt/slideLayouts/slideLayout11.xml><?xml version="1.0" encoding="utf-8"?>
+<file path=ppt/slideLayouts/slideLayout3.xml><?xml version="1.0" encoding="utf-8"?>
 <p:sldLayout xmlns:a="http://schemas.openxmlformats.org/drawingml/2006/main" xmlns:p="http://schemas.openxmlformats.org/presentationml/2006/main" xmlns:r="http://schemas.openxmlformats.org/officeDocument/2006/relationships" xmlns:p14="http://schemas.microsoft.com/office/powerpoint/2010/main" xmlns:p15="http://schemas.microsoft.com/office/powerpoint/2012/main" xmlns:mc="http://schemas.openxmlformats.org/markup-compatibility/2006" type="blank" preserve="1">
   <p:cSld name="Comparación">
     <p:bg>
@@ -1096,7 +2218,7 @@
       </p:grpSpPr>
       <p:sp>
         <p:nvSpPr>
-          <p:cNvPr id="51" name="PlaceHolder 1"/>
+          <p:cNvPr id="11" name="PlaceHolder 1"/>
           <p:cNvSpPr>
             <a:spLocks noGrp="1"/>
           </p:cNvSpPr>
@@ -1107,7 +2229,7 @@
         <p:spPr>
           <a:xfrm>
             <a:off x="839880" y="365040"/>
-            <a:ext cx="10513440" cy="1323360"/>
+            <a:ext cx="10513080" cy="1323000"/>
           </a:xfrm>
           <a:prstGeom prst="rect">
             <a:avLst/>
@@ -1155,7 +2277,7 @@
       </p:sp>
       <p:sp>
         <p:nvSpPr>
-          <p:cNvPr id="52" name="PlaceHolder 2"/>
+          <p:cNvPr id="12" name="PlaceHolder 2"/>
           <p:cNvSpPr>
             <a:spLocks noGrp="1"/>
           </p:cNvSpPr>
@@ -1166,7 +2288,7 @@
         <p:spPr>
           <a:xfrm>
             <a:off x="839880" y="1681200"/>
-            <a:ext cx="5155560" cy="821880"/>
+            <a:ext cx="5155200" cy="821520"/>
           </a:xfrm>
           <a:prstGeom prst="rect">
             <a:avLst/>
@@ -1217,7 +2339,7 @@
       </p:sp>
       <p:sp>
         <p:nvSpPr>
-          <p:cNvPr id="53" name="PlaceHolder 3"/>
+          <p:cNvPr id="13" name="PlaceHolder 3"/>
           <p:cNvSpPr>
             <a:spLocks noGrp="1"/>
           </p:cNvSpPr>
@@ -1228,7 +2350,7 @@
         <p:spPr>
           <a:xfrm>
             <a:off x="839880" y="2505240"/>
-            <a:ext cx="5155560" cy="3682440"/>
+            <a:ext cx="5155200" cy="3682080"/>
           </a:xfrm>
           <a:prstGeom prst="rect">
             <a:avLst/>
@@ -1416,7 +2538,7 @@
       </p:sp>
       <p:sp>
         <p:nvSpPr>
-          <p:cNvPr id="54" name="PlaceHolder 4"/>
+          <p:cNvPr id="14" name="PlaceHolder 4"/>
           <p:cNvSpPr>
             <a:spLocks noGrp="1"/>
           </p:cNvSpPr>
@@ -1427,7 +2549,7 @@
         <p:spPr>
           <a:xfrm>
             <a:off x="6172200" y="1681200"/>
-            <a:ext cx="5181120" cy="821880"/>
+            <a:ext cx="5180760" cy="821520"/>
           </a:xfrm>
           <a:prstGeom prst="rect">
             <a:avLst/>
@@ -1478,7 +2600,7 @@
       </p:sp>
       <p:sp>
         <p:nvSpPr>
-          <p:cNvPr id="55" name="PlaceHolder 5"/>
+          <p:cNvPr id="15" name="PlaceHolder 5"/>
           <p:cNvSpPr>
             <a:spLocks noGrp="1"/>
           </p:cNvSpPr>
@@ -1489,7 +2611,7 @@
         <p:spPr>
           <a:xfrm>
             <a:off x="6172200" y="2505240"/>
-            <a:ext cx="5181120" cy="3682440"/>
+            <a:ext cx="5180760" cy="3682080"/>
           </a:xfrm>
           <a:prstGeom prst="rect">
             <a:avLst/>
@@ -1677,18 +2799,18 @@
       </p:sp>
       <p:sp>
         <p:nvSpPr>
-          <p:cNvPr id="56" name="PlaceHolder 6"/>
+          <p:cNvPr id="16" name="PlaceHolder 6"/>
           <p:cNvSpPr>
             <a:spLocks noGrp="1"/>
           </p:cNvSpPr>
           <p:nvPr>
-            <p:ph type="dt" idx="31"/>
+            <p:ph type="dt" idx="7"/>
           </p:nvPr>
         </p:nvSpPr>
         <p:spPr>
           <a:xfrm>
             <a:off x="838080" y="6356520"/>
-            <a:ext cx="2741040" cy="362880"/>
+            <a:ext cx="2740680" cy="362520"/>
           </a:xfrm>
           <a:prstGeom prst="rect">
             <a:avLst/>
@@ -1759,18 +2881,18 @@
       </p:sp>
       <p:sp>
         <p:nvSpPr>
-          <p:cNvPr id="57" name="PlaceHolder 7"/>
+          <p:cNvPr id="17" name="PlaceHolder 7"/>
           <p:cNvSpPr>
             <a:spLocks noGrp="1"/>
           </p:cNvSpPr>
           <p:nvPr>
-            <p:ph type="ftr" idx="32"/>
+            <p:ph type="ftr" idx="8"/>
           </p:nvPr>
         </p:nvSpPr>
         <p:spPr>
           <a:xfrm>
             <a:off x="4038480" y="6356520"/>
-            <a:ext cx="4112640" cy="362880"/>
+            <a:ext cx="4112280" cy="362520"/>
           </a:xfrm>
           <a:prstGeom prst="rect">
             <a:avLst/>
@@ -1837,18 +2959,18 @@
       </p:sp>
       <p:sp>
         <p:nvSpPr>
-          <p:cNvPr id="58" name="PlaceHolder 8"/>
+          <p:cNvPr id="18" name="PlaceHolder 8"/>
           <p:cNvSpPr>
             <a:spLocks noGrp="1"/>
           </p:cNvSpPr>
           <p:nvPr>
-            <p:ph type="sldNum" idx="33"/>
+            <p:ph type="sldNum" idx="9"/>
           </p:nvPr>
         </p:nvSpPr>
         <p:spPr>
           <a:xfrm>
             <a:off x="8610480" y="6356520"/>
-            <a:ext cx="2741040" cy="362880"/>
+            <a:ext cx="2740680" cy="362520"/>
           </a:xfrm>
           <a:prstGeom prst="rect">
             <a:avLst/>
@@ -1893,7 +3015,7 @@
                 <a:tab algn="l" pos="0"/>
               </a:tabLst>
             </a:pPr>
-            <a:fld id="{96F49FC8-98EA-4414-9F0F-FC27ABBA1635}" type="slidenum">
+            <a:fld id="{800AB8E6-75EB-47C9-8C8C-6D8E37B5C400}" type="slidenum">
               <a:rPr b="0" lang="en-GB" sz="1200" strike="noStrike" u="none">
                 <a:solidFill>
                   <a:schemeClr val="dk1">
@@ -1922,7 +3044,337 @@
 </p:sldLayout>
 </file>
 
-<file path=ppt/slideLayouts/slideLayout2.xml><?xml version="1.0" encoding="utf-8"?>
+<file path=ppt/slideLayouts/slideLayout4.xml><?xml version="1.0" encoding="utf-8"?>
+<p:sldLayout xmlns:a="http://schemas.openxmlformats.org/drawingml/2006/main" xmlns:p="http://schemas.openxmlformats.org/presentationml/2006/main" xmlns:r="http://schemas.openxmlformats.org/officeDocument/2006/relationships" xmlns:p14="http://schemas.microsoft.com/office/powerpoint/2010/main" xmlns:p15="http://schemas.microsoft.com/office/powerpoint/2012/main" xmlns:mc="http://schemas.openxmlformats.org/markup-compatibility/2006" type="titleOnly" preserve="1">
+  <p:cSld name="Solo el título">
+    <p:bg>
+      <p:bgPr>
+        <a:solidFill>
+          <a:srgbClr val="ffffff"/>
+        </a:solidFill>
+      </p:bgPr>
+    </p:bg>
+    <p:spTree>
+      <p:nvGrpSpPr>
+        <p:cNvPr id="1" name=""/>
+        <p:cNvGrpSpPr/>
+        <p:nvPr/>
+      </p:nvGrpSpPr>
+      <p:grpSpPr>
+        <a:xfrm>
+          <a:off x="0" y="0"/>
+          <a:ext cx="0" cy="0"/>
+          <a:chOff x="0" y="0"/>
+          <a:chExt cx="0" cy="0"/>
+        </a:xfrm>
+      </p:grpSpPr>
+      <p:sp>
+        <p:nvSpPr>
+          <p:cNvPr id="19" name="PlaceHolder 1"/>
+          <p:cNvSpPr>
+            <a:spLocks noGrp="1"/>
+          </p:cNvSpPr>
+          <p:nvPr>
+            <p:ph type="title"/>
+          </p:nvPr>
+        </p:nvSpPr>
+        <p:spPr>
+          <a:xfrm>
+            <a:off x="838080" y="365040"/>
+            <a:ext cx="10513080" cy="1323000"/>
+          </a:xfrm>
+          <a:prstGeom prst="rect">
+            <a:avLst/>
+          </a:prstGeom>
+          <a:noFill/>
+          <a:ln w="0">
+            <a:noFill/>
+          </a:ln>
+        </p:spPr>
+        <p:txBody>
+          <a:bodyPr lIns="91440" rIns="91440" tIns="45720" bIns="45720" anchor="ctr">
+            <a:noAutofit/>
+          </a:bodyPr>
+          <a:p>
+            <a:pPr indent="0" defTabSz="914400">
+              <a:lnSpc>
+                <a:spcPct val="90000"/>
+              </a:lnSpc>
+              <a:buNone/>
+              <a:tabLst>
+                <a:tab algn="l" pos="0"/>
+              </a:tabLst>
+            </a:pPr>
+            <a:r>
+              <a:rPr b="0" lang="es-ES" sz="4400" strike="noStrike" u="none">
+                <a:solidFill>
+                  <a:schemeClr val="dk1"/>
+                </a:solidFill>
+                <a:effectLst/>
+                <a:uFillTx/>
+                <a:latin typeface="Calibri Light"/>
+              </a:rPr>
+              <a:t>Haga clic para modificar el estilo de título del patrón</a:t>
+            </a:r>
+            <a:endParaRPr b="0" lang="es-ES" sz="4400" strike="noStrike" u="none">
+              <a:solidFill>
+                <a:srgbClr val="000000"/>
+              </a:solidFill>
+              <a:effectLst/>
+              <a:uFillTx/>
+              <a:latin typeface="Arial"/>
+            </a:endParaRPr>
+          </a:p>
+        </p:txBody>
+      </p:sp>
+      <p:sp>
+        <p:nvSpPr>
+          <p:cNvPr id="20" name="PlaceHolder 2"/>
+          <p:cNvSpPr>
+            <a:spLocks noGrp="1"/>
+          </p:cNvSpPr>
+          <p:nvPr>
+            <p:ph type="dt" idx="10"/>
+          </p:nvPr>
+        </p:nvSpPr>
+        <p:spPr>
+          <a:xfrm>
+            <a:off x="838080" y="6356520"/>
+            <a:ext cx="2740680" cy="362520"/>
+          </a:xfrm>
+          <a:prstGeom prst="rect">
+            <a:avLst/>
+          </a:prstGeom>
+          <a:noFill/>
+          <a:ln w="0">
+            <a:noFill/>
+          </a:ln>
+        </p:spPr>
+        <p:txBody>
+          <a:bodyPr lIns="91440" rIns="91440" tIns="45720" bIns="45720" anchor="ctr">
+            <a:noAutofit/>
+          </a:bodyPr>
+          <a:lstStyle>
+            <a:lvl1pPr indent="0" defTabSz="914400">
+              <a:lnSpc>
+                <a:spcPct val="100000"/>
+              </a:lnSpc>
+              <a:buNone/>
+              <a:tabLst>
+                <a:tab algn="l" pos="0"/>
+              </a:tabLst>
+              <a:defRPr b="0" lang="en-GB" sz="1200" strike="noStrike" u="none">
+                <a:solidFill>
+                  <a:schemeClr val="dk1">
+                    <a:tint val="75000"/>
+                  </a:schemeClr>
+                </a:solidFill>
+                <a:effectLst/>
+                <a:uFillTx/>
+                <a:latin typeface="Calibri"/>
+              </a:defRPr>
+            </a:lvl1pPr>
+          </a:lstStyle>
+          <a:p>
+            <a:pPr indent="0" defTabSz="914400">
+              <a:lnSpc>
+                <a:spcPct val="100000"/>
+              </a:lnSpc>
+              <a:buNone/>
+              <a:tabLst>
+                <a:tab algn="l" pos="0"/>
+              </a:tabLst>
+            </a:pPr>
+            <a:r>
+              <a:rPr b="0" lang="en-GB" sz="1200" strike="noStrike" u="none">
+                <a:solidFill>
+                  <a:schemeClr val="dk1">
+                    <a:tint val="75000"/>
+                  </a:schemeClr>
+                </a:solidFill>
+                <a:effectLst/>
+                <a:uFillTx/>
+                <a:latin typeface="Calibri"/>
+              </a:rPr>
+              <a:t>&lt;fecha/hora&gt;</a:t>
+            </a:r>
+            <a:endParaRPr b="0" lang="es-ES" sz="1200" strike="noStrike" u="none">
+              <a:solidFill>
+                <a:srgbClr val="000000"/>
+              </a:solidFill>
+              <a:effectLst/>
+              <a:uFillTx/>
+              <a:latin typeface="Times New Roman"/>
+            </a:endParaRPr>
+          </a:p>
+        </p:txBody>
+      </p:sp>
+      <p:sp>
+        <p:nvSpPr>
+          <p:cNvPr id="21" name="PlaceHolder 3"/>
+          <p:cNvSpPr>
+            <a:spLocks noGrp="1"/>
+          </p:cNvSpPr>
+          <p:nvPr>
+            <p:ph type="ftr" idx="11"/>
+          </p:nvPr>
+        </p:nvSpPr>
+        <p:spPr>
+          <a:xfrm>
+            <a:off x="4038480" y="6356520"/>
+            <a:ext cx="4112280" cy="362520"/>
+          </a:xfrm>
+          <a:prstGeom prst="rect">
+            <a:avLst/>
+          </a:prstGeom>
+          <a:noFill/>
+          <a:ln w="0">
+            <a:noFill/>
+          </a:ln>
+        </p:spPr>
+        <p:txBody>
+          <a:bodyPr lIns="91440" rIns="91440" tIns="45720" bIns="45720" anchor="ctr">
+            <a:noAutofit/>
+          </a:bodyPr>
+          <a:lstStyle>
+            <a:lvl1pPr indent="0" algn="ctr">
+              <a:lnSpc>
+                <a:spcPct val="100000"/>
+              </a:lnSpc>
+              <a:buNone/>
+              <a:tabLst>
+                <a:tab algn="l" pos="0"/>
+              </a:tabLst>
+              <a:defRPr b="0" lang="es-ES" sz="1400" strike="noStrike" u="none">
+                <a:solidFill>
+                  <a:srgbClr val="000000"/>
+                </a:solidFill>
+                <a:effectLst/>
+                <a:uFillTx/>
+                <a:latin typeface="Times New Roman"/>
+              </a:defRPr>
+            </a:lvl1pPr>
+          </a:lstStyle>
+          <a:p>
+            <a:pPr indent="0" algn="ctr">
+              <a:lnSpc>
+                <a:spcPct val="100000"/>
+              </a:lnSpc>
+              <a:buNone/>
+              <a:tabLst>
+                <a:tab algn="l" pos="0"/>
+              </a:tabLst>
+            </a:pPr>
+            <a:r>
+              <a:rPr b="0" lang="es-ES" sz="1400" strike="noStrike" u="none">
+                <a:solidFill>
+                  <a:srgbClr val="000000"/>
+                </a:solidFill>
+                <a:effectLst/>
+                <a:uFillTx/>
+                <a:latin typeface="Times New Roman"/>
+              </a:rPr>
+              <a:t>&lt;pie de página&gt;</a:t>
+            </a:r>
+            <a:endParaRPr b="0" lang="es-ES" sz="1400" strike="noStrike" u="none">
+              <a:solidFill>
+                <a:srgbClr val="000000"/>
+              </a:solidFill>
+              <a:effectLst/>
+              <a:uFillTx/>
+              <a:latin typeface="Times New Roman"/>
+            </a:endParaRPr>
+          </a:p>
+        </p:txBody>
+      </p:sp>
+      <p:sp>
+        <p:nvSpPr>
+          <p:cNvPr id="22" name="PlaceHolder 4"/>
+          <p:cNvSpPr>
+            <a:spLocks noGrp="1"/>
+          </p:cNvSpPr>
+          <p:nvPr>
+            <p:ph type="sldNum" idx="12"/>
+          </p:nvPr>
+        </p:nvSpPr>
+        <p:spPr>
+          <a:xfrm>
+            <a:off x="8610480" y="6356520"/>
+            <a:ext cx="2740680" cy="362520"/>
+          </a:xfrm>
+          <a:prstGeom prst="rect">
+            <a:avLst/>
+          </a:prstGeom>
+          <a:noFill/>
+          <a:ln w="0">
+            <a:noFill/>
+          </a:ln>
+        </p:spPr>
+        <p:txBody>
+          <a:bodyPr lIns="91440" rIns="91440" tIns="45720" bIns="45720" anchor="ctr">
+            <a:noAutofit/>
+          </a:bodyPr>
+          <a:lstStyle>
+            <a:lvl1pPr indent="0" algn="r" defTabSz="914400">
+              <a:lnSpc>
+                <a:spcPct val="100000"/>
+              </a:lnSpc>
+              <a:buNone/>
+              <a:tabLst>
+                <a:tab algn="l" pos="0"/>
+              </a:tabLst>
+              <a:defRPr b="0" lang="en-GB" sz="1200" strike="noStrike" u="none">
+                <a:solidFill>
+                  <a:schemeClr val="dk1">
+                    <a:tint val="75000"/>
+                  </a:schemeClr>
+                </a:solidFill>
+                <a:effectLst/>
+                <a:uFillTx/>
+                <a:latin typeface="Calibri"/>
+              </a:defRPr>
+            </a:lvl1pPr>
+          </a:lstStyle>
+          <a:p>
+            <a:pPr indent="0" algn="r" defTabSz="914400">
+              <a:lnSpc>
+                <a:spcPct val="100000"/>
+              </a:lnSpc>
+              <a:buNone/>
+              <a:tabLst>
+                <a:tab algn="l" pos="0"/>
+              </a:tabLst>
+            </a:pPr>
+            <a:fld id="{2CE81AA9-9D2D-4A05-979E-49C94B429AC7}" type="slidenum">
+              <a:rPr b="0" lang="en-GB" sz="1200" strike="noStrike" u="none">
+                <a:solidFill>
+                  <a:schemeClr val="dk1">
+                    <a:tint val="75000"/>
+                  </a:schemeClr>
+                </a:solidFill>
+                <a:effectLst/>
+                <a:uFillTx/>
+                <a:latin typeface="Calibri"/>
+              </a:rPr>
+              <a:t>&lt;número&gt;</a:t>
+            </a:fld>
+            <a:endParaRPr b="0" lang="es-ES" sz="1200" strike="noStrike" u="none">
+              <a:solidFill>
+                <a:srgbClr val="000000"/>
+              </a:solidFill>
+              <a:effectLst/>
+              <a:uFillTx/>
+              <a:latin typeface="Times New Roman"/>
+            </a:endParaRPr>
+          </a:p>
+        </p:txBody>
+      </p:sp>
+    </p:spTree>
+  </p:cSld>
+</p:sldLayout>
+</file>
+
+<file path=ppt/slideLayouts/slideLayout5.xml><?xml version="1.0" encoding="utf-8"?>
 <p:sldLayout xmlns:a="http://schemas.openxmlformats.org/drawingml/2006/main" xmlns:p="http://schemas.openxmlformats.org/presentationml/2006/main" xmlns:r="http://schemas.openxmlformats.org/officeDocument/2006/relationships" xmlns:p14="http://schemas.microsoft.com/office/powerpoint/2010/main" xmlns:p15="http://schemas.microsoft.com/office/powerpoint/2012/main" xmlns:mc="http://schemas.openxmlformats.org/markup-compatibility/2006" type="blank" preserve="1">
   <p:cSld name="En blanco">
     <p:bg>
@@ -1948,18 +3400,18 @@
       </p:grpSpPr>
       <p:sp>
         <p:nvSpPr>
-          <p:cNvPr id="4" name="PlaceHolder 1"/>
+          <p:cNvPr id="23" name="PlaceHolder 1"/>
           <p:cNvSpPr>
             <a:spLocks noGrp="1"/>
           </p:cNvSpPr>
           <p:nvPr>
-            <p:ph type="dt" idx="4"/>
+            <p:ph type="dt" idx="13"/>
           </p:nvPr>
         </p:nvSpPr>
         <p:spPr>
           <a:xfrm>
             <a:off x="838080" y="6356520"/>
-            <a:ext cx="2741040" cy="362880"/>
+            <a:ext cx="2740680" cy="362520"/>
           </a:xfrm>
           <a:prstGeom prst="rect">
             <a:avLst/>
@@ -2030,18 +3482,18 @@
       </p:sp>
       <p:sp>
         <p:nvSpPr>
-          <p:cNvPr id="5" name="PlaceHolder 2"/>
+          <p:cNvPr id="24" name="PlaceHolder 2"/>
           <p:cNvSpPr>
             <a:spLocks noGrp="1"/>
           </p:cNvSpPr>
           <p:nvPr>
-            <p:ph type="ftr" idx="5"/>
+            <p:ph type="ftr" idx="14"/>
           </p:nvPr>
         </p:nvSpPr>
         <p:spPr>
           <a:xfrm>
             <a:off x="4038480" y="6356520"/>
-            <a:ext cx="4112640" cy="362880"/>
+            <a:ext cx="4112280" cy="362520"/>
           </a:xfrm>
           <a:prstGeom prst="rect">
             <a:avLst/>
@@ -2108,18 +3560,18 @@
       </p:sp>
       <p:sp>
         <p:nvSpPr>
-          <p:cNvPr id="6" name="PlaceHolder 3"/>
+          <p:cNvPr id="25" name="PlaceHolder 3"/>
           <p:cNvSpPr>
             <a:spLocks noGrp="1"/>
           </p:cNvSpPr>
           <p:nvPr>
-            <p:ph type="sldNum" idx="6"/>
+            <p:ph type="sldNum" idx="15"/>
           </p:nvPr>
         </p:nvSpPr>
         <p:spPr>
           <a:xfrm>
             <a:off x="8610480" y="6356520"/>
-            <a:ext cx="2741040" cy="362880"/>
+            <a:ext cx="2740680" cy="362520"/>
           </a:xfrm>
           <a:prstGeom prst="rect">
             <a:avLst/>
@@ -2164,7 +3616,7 @@
                 <a:tab algn="l" pos="0"/>
               </a:tabLst>
             </a:pPr>
-            <a:fld id="{2F113924-B8C6-4971-B611-2B9AAD9CEB88}" type="slidenum">
+            <a:fld id="{E1D10BC9-EACE-4E33-BEEC-951048F4806C}" type="slidenum">
               <a:rPr b="0" lang="en-GB" sz="1200" strike="noStrike" u="none">
                 <a:solidFill>
                   <a:schemeClr val="dk1">
@@ -2190,7 +3642,7 @@
       </p:sp>
       <p:sp>
         <p:nvSpPr>
-          <p:cNvPr id="7" name="PlaceHolder 4"/>
+          <p:cNvPr id="26" name="PlaceHolder 4"/>
           <p:cNvSpPr>
             <a:spLocks noGrp="1"/>
           </p:cNvSpPr>
@@ -2201,7 +3653,7 @@
         <p:spPr>
           <a:xfrm>
             <a:off x="609480" y="273600"/>
-            <a:ext cx="10971000" cy="1143360"/>
+            <a:ext cx="10970640" cy="1143000"/>
           </a:xfrm>
           <a:prstGeom prst="rect">
             <a:avLst/>
@@ -2249,7 +3701,7 @@
       </p:sp>
       <p:sp>
         <p:nvSpPr>
-          <p:cNvPr id="8" name="PlaceHolder 5"/>
+          <p:cNvPr id="27" name="PlaceHolder 5"/>
           <p:cNvSpPr>
             <a:spLocks noGrp="1"/>
           </p:cNvSpPr>
@@ -2260,7 +3712,7 @@
         <p:spPr>
           <a:xfrm>
             <a:off x="609480" y="1604520"/>
-            <a:ext cx="10971000" cy="3975840"/>
+            <a:ext cx="10970640" cy="3975480"/>
           </a:xfrm>
           <a:prstGeom prst="rect">
             <a:avLst/>
@@ -2526,7 +3978,7 @@
 </p:sldLayout>
 </file>
 
-<file path=ppt/slideLayouts/slideLayout3.xml><?xml version="1.0" encoding="utf-8"?>
+<file path=ppt/slideLayouts/slideLayout6.xml><?xml version="1.0" encoding="utf-8"?>
 <p:sldLayout xmlns:a="http://schemas.openxmlformats.org/drawingml/2006/main" xmlns:p="http://schemas.openxmlformats.org/presentationml/2006/main" xmlns:r="http://schemas.openxmlformats.org/officeDocument/2006/relationships" xmlns:p14="http://schemas.microsoft.com/office/powerpoint/2010/main" xmlns:p15="http://schemas.microsoft.com/office/powerpoint/2012/main" xmlns:mc="http://schemas.openxmlformats.org/markup-compatibility/2006" type="blank" preserve="1">
   <p:cSld name="Contenido con título">
     <p:bg>
@@ -2552,7 +4004,7 @@
       </p:grpSpPr>
       <p:sp>
         <p:nvSpPr>
-          <p:cNvPr id="9" name="PlaceHolder 1"/>
+          <p:cNvPr id="28" name="PlaceHolder 1"/>
           <p:cNvSpPr>
             <a:spLocks noGrp="1"/>
           </p:cNvSpPr>
@@ -2563,7 +4015,7 @@
         <p:spPr>
           <a:xfrm>
             <a:off x="839880" y="457200"/>
-            <a:ext cx="3930120" cy="1598040"/>
+            <a:ext cx="3929760" cy="1597680"/>
           </a:xfrm>
           <a:prstGeom prst="rect">
             <a:avLst/>
@@ -2611,7 +4063,7 @@
       </p:sp>
       <p:sp>
         <p:nvSpPr>
-          <p:cNvPr id="10" name="PlaceHolder 2"/>
+          <p:cNvPr id="29" name="PlaceHolder 2"/>
           <p:cNvSpPr>
             <a:spLocks noGrp="1"/>
           </p:cNvSpPr>
@@ -2622,7 +4074,7 @@
         <p:spPr>
           <a:xfrm>
             <a:off x="5183280" y="987480"/>
-            <a:ext cx="6170040" cy="4871520"/>
+            <a:ext cx="6169680" cy="4871160"/>
           </a:xfrm>
           <a:prstGeom prst="rect">
             <a:avLst/>
@@ -2810,7 +4262,7 @@
       </p:sp>
       <p:sp>
         <p:nvSpPr>
-          <p:cNvPr id="11" name="PlaceHolder 3"/>
+          <p:cNvPr id="30" name="PlaceHolder 3"/>
           <p:cNvSpPr>
             <a:spLocks noGrp="1"/>
           </p:cNvSpPr>
@@ -2821,7 +4273,7 @@
         <p:spPr>
           <a:xfrm>
             <a:off x="839880" y="2057400"/>
-            <a:ext cx="3930120" cy="3809520"/>
+            <a:ext cx="3929760" cy="3809160"/>
           </a:xfrm>
           <a:prstGeom prst="rect">
             <a:avLst/>
@@ -2872,18 +4324,18 @@
       </p:sp>
       <p:sp>
         <p:nvSpPr>
-          <p:cNvPr id="12" name="PlaceHolder 4"/>
+          <p:cNvPr id="31" name="PlaceHolder 4"/>
           <p:cNvSpPr>
             <a:spLocks noGrp="1"/>
           </p:cNvSpPr>
           <p:nvPr>
-            <p:ph type="dt" idx="7"/>
+            <p:ph type="dt" idx="16"/>
           </p:nvPr>
         </p:nvSpPr>
         <p:spPr>
           <a:xfrm>
             <a:off x="838080" y="6356520"/>
-            <a:ext cx="2741040" cy="362880"/>
+            <a:ext cx="2740680" cy="362520"/>
           </a:xfrm>
           <a:prstGeom prst="rect">
             <a:avLst/>
@@ -2954,18 +4406,18 @@
       </p:sp>
       <p:sp>
         <p:nvSpPr>
-          <p:cNvPr id="13" name="PlaceHolder 5"/>
+          <p:cNvPr id="32" name="PlaceHolder 5"/>
           <p:cNvSpPr>
             <a:spLocks noGrp="1"/>
           </p:cNvSpPr>
           <p:nvPr>
-            <p:ph type="ftr" idx="8"/>
+            <p:ph type="ftr" idx="17"/>
           </p:nvPr>
         </p:nvSpPr>
         <p:spPr>
           <a:xfrm>
             <a:off x="4038480" y="6356520"/>
-            <a:ext cx="4112640" cy="362880"/>
+            <a:ext cx="4112280" cy="362520"/>
           </a:xfrm>
           <a:prstGeom prst="rect">
             <a:avLst/>
@@ -3032,18 +4484,18 @@
       </p:sp>
       <p:sp>
         <p:nvSpPr>
-          <p:cNvPr id="14" name="PlaceHolder 6"/>
+          <p:cNvPr id="33" name="PlaceHolder 6"/>
           <p:cNvSpPr>
             <a:spLocks noGrp="1"/>
           </p:cNvSpPr>
           <p:nvPr>
-            <p:ph type="sldNum" idx="9"/>
+            <p:ph type="sldNum" idx="18"/>
           </p:nvPr>
         </p:nvSpPr>
         <p:spPr>
           <a:xfrm>
             <a:off x="8610480" y="6356520"/>
-            <a:ext cx="2741040" cy="362880"/>
+            <a:ext cx="2740680" cy="362520"/>
           </a:xfrm>
           <a:prstGeom prst="rect">
             <a:avLst/>
@@ -3088,7 +4540,7 @@
                 <a:tab algn="l" pos="0"/>
               </a:tabLst>
             </a:pPr>
-            <a:fld id="{F751533C-5E91-40E1-A00E-83DA72A07758}" type="slidenum">
+            <a:fld id="{B440E2B4-AA95-411C-80D4-19DC494FF41A}" type="slidenum">
               <a:rPr b="0" lang="en-GB" sz="1200" strike="noStrike" u="none">
                 <a:solidFill>
                   <a:schemeClr val="dk1">
@@ -3117,7 +4569,7 @@
 </p:sldLayout>
 </file>
 
-<file path=ppt/slideLayouts/slideLayout4.xml><?xml version="1.0" encoding="utf-8"?>
+<file path=ppt/slideLayouts/slideLayout7.xml><?xml version="1.0" encoding="utf-8"?>
 <p:sldLayout xmlns:a="http://schemas.openxmlformats.org/drawingml/2006/main" xmlns:p="http://schemas.openxmlformats.org/presentationml/2006/main" xmlns:r="http://schemas.openxmlformats.org/officeDocument/2006/relationships" xmlns:p14="http://schemas.microsoft.com/office/powerpoint/2010/main" xmlns:p15="http://schemas.microsoft.com/office/powerpoint/2012/main" xmlns:mc="http://schemas.openxmlformats.org/markup-compatibility/2006" type="blank" preserve="1">
   <p:cSld name="Imagen con título">
     <p:bg>
@@ -3143,7 +4595,7 @@
       </p:grpSpPr>
       <p:sp>
         <p:nvSpPr>
-          <p:cNvPr id="15" name="PlaceHolder 1"/>
+          <p:cNvPr id="34" name="PlaceHolder 1"/>
           <p:cNvSpPr>
             <a:spLocks noGrp="1"/>
           </p:cNvSpPr>
@@ -3154,7 +4606,7 @@
         <p:spPr>
           <a:xfrm>
             <a:off x="839880" y="457200"/>
-            <a:ext cx="3930120" cy="1598040"/>
+            <a:ext cx="3929760" cy="1597680"/>
           </a:xfrm>
           <a:prstGeom prst="rect">
             <a:avLst/>
@@ -3202,7 +4654,7 @@
       </p:sp>
       <p:sp>
         <p:nvSpPr>
-          <p:cNvPr id="16" name="PlaceHolder 2"/>
+          <p:cNvPr id="35" name="PlaceHolder 2"/>
           <p:cNvSpPr>
             <a:spLocks noGrp="1"/>
           </p:cNvSpPr>
@@ -3213,7 +4665,7 @@
         <p:spPr>
           <a:xfrm>
             <a:off x="5183280" y="987480"/>
-            <a:ext cx="6170040" cy="4871520"/>
+            <a:ext cx="6169680" cy="4871160"/>
           </a:xfrm>
           <a:prstGeom prst="rect">
             <a:avLst/>
@@ -3476,7 +4928,7 @@
       </p:sp>
       <p:sp>
         <p:nvSpPr>
-          <p:cNvPr id="17" name="PlaceHolder 3"/>
+          <p:cNvPr id="36" name="PlaceHolder 3"/>
           <p:cNvSpPr>
             <a:spLocks noGrp="1"/>
           </p:cNvSpPr>
@@ -3487,7 +4939,7 @@
         <p:spPr>
           <a:xfrm>
             <a:off x="839880" y="2057400"/>
-            <a:ext cx="3930120" cy="3809520"/>
+            <a:ext cx="3929760" cy="3809160"/>
           </a:xfrm>
           <a:prstGeom prst="rect">
             <a:avLst/>
@@ -3538,1395 +4990,7 @@
       </p:sp>
       <p:sp>
         <p:nvSpPr>
-          <p:cNvPr id="18" name="PlaceHolder 4"/>
-          <p:cNvSpPr>
-            <a:spLocks noGrp="1"/>
-          </p:cNvSpPr>
-          <p:nvPr>
-            <p:ph type="dt" idx="10"/>
-          </p:nvPr>
-        </p:nvSpPr>
-        <p:spPr>
-          <a:xfrm>
-            <a:off x="838080" y="6356520"/>
-            <a:ext cx="2741040" cy="362880"/>
-          </a:xfrm>
-          <a:prstGeom prst="rect">
-            <a:avLst/>
-          </a:prstGeom>
-          <a:noFill/>
-          <a:ln w="0">
-            <a:noFill/>
-          </a:ln>
-        </p:spPr>
-        <p:txBody>
-          <a:bodyPr lIns="91440" rIns="91440" tIns="45720" bIns="45720" anchor="ctr">
-            <a:noAutofit/>
-          </a:bodyPr>
-          <a:lstStyle>
-            <a:lvl1pPr indent="0" defTabSz="914400">
-              <a:lnSpc>
-                <a:spcPct val="100000"/>
-              </a:lnSpc>
-              <a:buNone/>
-              <a:tabLst>
-                <a:tab algn="l" pos="0"/>
-              </a:tabLst>
-              <a:defRPr b="0" lang="en-GB" sz="1200" strike="noStrike" u="none">
-                <a:solidFill>
-                  <a:schemeClr val="dk1">
-                    <a:tint val="75000"/>
-                  </a:schemeClr>
-                </a:solidFill>
-                <a:effectLst/>
-                <a:uFillTx/>
-                <a:latin typeface="Calibri"/>
-              </a:defRPr>
-            </a:lvl1pPr>
-          </a:lstStyle>
-          <a:p>
-            <a:pPr indent="0" defTabSz="914400">
-              <a:lnSpc>
-                <a:spcPct val="100000"/>
-              </a:lnSpc>
-              <a:buNone/>
-              <a:tabLst>
-                <a:tab algn="l" pos="0"/>
-              </a:tabLst>
-            </a:pPr>
-            <a:r>
-              <a:rPr b="0" lang="en-GB" sz="1200" strike="noStrike" u="none">
-                <a:solidFill>
-                  <a:schemeClr val="dk1">
-                    <a:tint val="75000"/>
-                  </a:schemeClr>
-                </a:solidFill>
-                <a:effectLst/>
-                <a:uFillTx/>
-                <a:latin typeface="Calibri"/>
-              </a:rPr>
-              <a:t>&lt;fecha/hora&gt;</a:t>
-            </a:r>
-            <a:endParaRPr b="0" lang="es-ES" sz="1200" strike="noStrike" u="none">
-              <a:solidFill>
-                <a:srgbClr val="000000"/>
-              </a:solidFill>
-              <a:effectLst/>
-              <a:uFillTx/>
-              <a:latin typeface="Times New Roman"/>
-            </a:endParaRPr>
-          </a:p>
-        </p:txBody>
-      </p:sp>
-      <p:sp>
-        <p:nvSpPr>
-          <p:cNvPr id="19" name="PlaceHolder 5"/>
-          <p:cNvSpPr>
-            <a:spLocks noGrp="1"/>
-          </p:cNvSpPr>
-          <p:nvPr>
-            <p:ph type="ftr" idx="11"/>
-          </p:nvPr>
-        </p:nvSpPr>
-        <p:spPr>
-          <a:xfrm>
-            <a:off x="4038480" y="6356520"/>
-            <a:ext cx="4112640" cy="362880"/>
-          </a:xfrm>
-          <a:prstGeom prst="rect">
-            <a:avLst/>
-          </a:prstGeom>
-          <a:noFill/>
-          <a:ln w="0">
-            <a:noFill/>
-          </a:ln>
-        </p:spPr>
-        <p:txBody>
-          <a:bodyPr lIns="91440" rIns="91440" tIns="45720" bIns="45720" anchor="ctr">
-            <a:noAutofit/>
-          </a:bodyPr>
-          <a:lstStyle>
-            <a:lvl1pPr indent="0" algn="ctr">
-              <a:lnSpc>
-                <a:spcPct val="100000"/>
-              </a:lnSpc>
-              <a:buNone/>
-              <a:tabLst>
-                <a:tab algn="l" pos="0"/>
-              </a:tabLst>
-              <a:defRPr b="0" lang="es-ES" sz="1400" strike="noStrike" u="none">
-                <a:solidFill>
-                  <a:srgbClr val="000000"/>
-                </a:solidFill>
-                <a:effectLst/>
-                <a:uFillTx/>
-                <a:latin typeface="Times New Roman"/>
-              </a:defRPr>
-            </a:lvl1pPr>
-          </a:lstStyle>
-          <a:p>
-            <a:pPr indent="0" algn="ctr">
-              <a:lnSpc>
-                <a:spcPct val="100000"/>
-              </a:lnSpc>
-              <a:buNone/>
-              <a:tabLst>
-                <a:tab algn="l" pos="0"/>
-              </a:tabLst>
-            </a:pPr>
-            <a:r>
-              <a:rPr b="0" lang="es-ES" sz="1400" strike="noStrike" u="none">
-                <a:solidFill>
-                  <a:srgbClr val="000000"/>
-                </a:solidFill>
-                <a:effectLst/>
-                <a:uFillTx/>
-                <a:latin typeface="Times New Roman"/>
-              </a:rPr>
-              <a:t>&lt;pie de página&gt;</a:t>
-            </a:r>
-            <a:endParaRPr b="0" lang="es-ES" sz="1400" strike="noStrike" u="none">
-              <a:solidFill>
-                <a:srgbClr val="000000"/>
-              </a:solidFill>
-              <a:effectLst/>
-              <a:uFillTx/>
-              <a:latin typeface="Times New Roman"/>
-            </a:endParaRPr>
-          </a:p>
-        </p:txBody>
-      </p:sp>
-      <p:sp>
-        <p:nvSpPr>
-          <p:cNvPr id="20" name="PlaceHolder 6"/>
-          <p:cNvSpPr>
-            <a:spLocks noGrp="1"/>
-          </p:cNvSpPr>
-          <p:nvPr>
-            <p:ph type="sldNum" idx="12"/>
-          </p:nvPr>
-        </p:nvSpPr>
-        <p:spPr>
-          <a:xfrm>
-            <a:off x="8610480" y="6356520"/>
-            <a:ext cx="2741040" cy="362880"/>
-          </a:xfrm>
-          <a:prstGeom prst="rect">
-            <a:avLst/>
-          </a:prstGeom>
-          <a:noFill/>
-          <a:ln w="0">
-            <a:noFill/>
-          </a:ln>
-        </p:spPr>
-        <p:txBody>
-          <a:bodyPr lIns="91440" rIns="91440" tIns="45720" bIns="45720" anchor="ctr">
-            <a:noAutofit/>
-          </a:bodyPr>
-          <a:lstStyle>
-            <a:lvl1pPr indent="0" algn="r" defTabSz="914400">
-              <a:lnSpc>
-                <a:spcPct val="100000"/>
-              </a:lnSpc>
-              <a:buNone/>
-              <a:tabLst>
-                <a:tab algn="l" pos="0"/>
-              </a:tabLst>
-              <a:defRPr b="0" lang="en-GB" sz="1200" strike="noStrike" u="none">
-                <a:solidFill>
-                  <a:schemeClr val="dk1">
-                    <a:tint val="75000"/>
-                  </a:schemeClr>
-                </a:solidFill>
-                <a:effectLst/>
-                <a:uFillTx/>
-                <a:latin typeface="Calibri"/>
-              </a:defRPr>
-            </a:lvl1pPr>
-          </a:lstStyle>
-          <a:p>
-            <a:pPr indent="0" algn="r" defTabSz="914400">
-              <a:lnSpc>
-                <a:spcPct val="100000"/>
-              </a:lnSpc>
-              <a:buNone/>
-              <a:tabLst>
-                <a:tab algn="l" pos="0"/>
-              </a:tabLst>
-            </a:pPr>
-            <a:fld id="{F126CE7A-2E6D-47C2-AA65-F6CDEAC03627}" type="slidenum">
-              <a:rPr b="0" lang="en-GB" sz="1200" strike="noStrike" u="none">
-                <a:solidFill>
-                  <a:schemeClr val="dk1">
-                    <a:tint val="75000"/>
-                  </a:schemeClr>
-                </a:solidFill>
-                <a:effectLst/>
-                <a:uFillTx/>
-                <a:latin typeface="Calibri"/>
-              </a:rPr>
-              <a:t>&lt;número&gt;</a:t>
-            </a:fld>
-            <a:endParaRPr b="0" lang="es-ES" sz="1200" strike="noStrike" u="none">
-              <a:solidFill>
-                <a:srgbClr val="000000"/>
-              </a:solidFill>
-              <a:effectLst/>
-              <a:uFillTx/>
-              <a:latin typeface="Times New Roman"/>
-            </a:endParaRPr>
-          </a:p>
-        </p:txBody>
-      </p:sp>
-    </p:spTree>
-  </p:cSld>
-</p:sldLayout>
-</file>
-
-<file path=ppt/slideLayouts/slideLayout5.xml><?xml version="1.0" encoding="utf-8"?>
-<p:sldLayout xmlns:a="http://schemas.openxmlformats.org/drawingml/2006/main" xmlns:p="http://schemas.openxmlformats.org/presentationml/2006/main" xmlns:r="http://schemas.openxmlformats.org/officeDocument/2006/relationships" xmlns:p14="http://schemas.microsoft.com/office/powerpoint/2010/main" xmlns:p15="http://schemas.microsoft.com/office/powerpoint/2012/main" xmlns:mc="http://schemas.openxmlformats.org/markup-compatibility/2006" type="title" preserve="1">
-  <p:cSld name="Diapositiva de título">
-    <p:bg>
-      <p:bgPr>
-        <a:solidFill>
-          <a:srgbClr val="ffffff"/>
-        </a:solidFill>
-      </p:bgPr>
-    </p:bg>
-    <p:spTree>
-      <p:nvGrpSpPr>
-        <p:cNvPr id="1" name=""/>
-        <p:cNvGrpSpPr/>
-        <p:nvPr/>
-      </p:nvGrpSpPr>
-      <p:grpSpPr>
-        <a:xfrm>
-          <a:off x="0" y="0"/>
-          <a:ext cx="0" cy="0"/>
-          <a:chOff x="0" y="0"/>
-          <a:chExt cx="0" cy="0"/>
-        </a:xfrm>
-      </p:grpSpPr>
-      <p:sp>
-        <p:nvSpPr>
-          <p:cNvPr id="21" name="PlaceHolder 1"/>
-          <p:cNvSpPr>
-            <a:spLocks noGrp="1"/>
-          </p:cNvSpPr>
-          <p:nvPr>
-            <p:ph type="title"/>
-          </p:nvPr>
-        </p:nvSpPr>
-        <p:spPr>
-          <a:xfrm>
-            <a:off x="1523880" y="1122480"/>
-            <a:ext cx="9141840" cy="2385360"/>
-          </a:xfrm>
-          <a:prstGeom prst="rect">
-            <a:avLst/>
-          </a:prstGeom>
-          <a:noFill/>
-          <a:ln w="0">
-            <a:noFill/>
-          </a:ln>
-        </p:spPr>
-        <p:txBody>
-          <a:bodyPr lIns="91440" rIns="91440" tIns="45720" bIns="45720" anchor="b">
-            <a:noAutofit/>
-          </a:bodyPr>
-          <a:p>
-            <a:pPr indent="0" algn="ctr" defTabSz="914400">
-              <a:lnSpc>
-                <a:spcPct val="90000"/>
-              </a:lnSpc>
-              <a:buNone/>
-              <a:tabLst>
-                <a:tab algn="l" pos="0"/>
-              </a:tabLst>
-            </a:pPr>
-            <a:r>
-              <a:rPr b="0" lang="es-ES" sz="6000" strike="noStrike" u="none">
-                <a:solidFill>
-                  <a:schemeClr val="dk1"/>
-                </a:solidFill>
-                <a:effectLst/>
-                <a:uFillTx/>
-                <a:latin typeface="Calibri Light"/>
-              </a:rPr>
-              <a:t>Haga clic para modificar el estilo de título del patrón</a:t>
-            </a:r>
-            <a:endParaRPr b="0" lang="es-ES" sz="6000" strike="noStrike" u="none">
-              <a:solidFill>
-                <a:srgbClr val="000000"/>
-              </a:solidFill>
-              <a:effectLst/>
-              <a:uFillTx/>
-              <a:latin typeface="Arial"/>
-            </a:endParaRPr>
-          </a:p>
-        </p:txBody>
-      </p:sp>
-      <p:sp>
-        <p:nvSpPr>
-          <p:cNvPr id="22" name="PlaceHolder 2"/>
-          <p:cNvSpPr>
-            <a:spLocks noGrp="1"/>
-          </p:cNvSpPr>
-          <p:nvPr>
-            <p:ph type="dt" idx="13"/>
-          </p:nvPr>
-        </p:nvSpPr>
-        <p:spPr>
-          <a:xfrm>
-            <a:off x="838080" y="6356520"/>
-            <a:ext cx="2741040" cy="362880"/>
-          </a:xfrm>
-          <a:prstGeom prst="rect">
-            <a:avLst/>
-          </a:prstGeom>
-          <a:noFill/>
-          <a:ln w="0">
-            <a:noFill/>
-          </a:ln>
-        </p:spPr>
-        <p:txBody>
-          <a:bodyPr lIns="91440" rIns="91440" tIns="45720" bIns="45720" anchor="ctr">
-            <a:noAutofit/>
-          </a:bodyPr>
-          <a:lstStyle>
-            <a:lvl1pPr indent="0" defTabSz="914400">
-              <a:lnSpc>
-                <a:spcPct val="100000"/>
-              </a:lnSpc>
-              <a:buNone/>
-              <a:tabLst>
-                <a:tab algn="l" pos="0"/>
-              </a:tabLst>
-              <a:defRPr b="0" lang="en-GB" sz="1200" strike="noStrike" u="none">
-                <a:solidFill>
-                  <a:schemeClr val="dk1">
-                    <a:tint val="75000"/>
-                  </a:schemeClr>
-                </a:solidFill>
-                <a:effectLst/>
-                <a:uFillTx/>
-                <a:latin typeface="Calibri"/>
-              </a:defRPr>
-            </a:lvl1pPr>
-          </a:lstStyle>
-          <a:p>
-            <a:pPr indent="0" defTabSz="914400">
-              <a:lnSpc>
-                <a:spcPct val="100000"/>
-              </a:lnSpc>
-              <a:buNone/>
-              <a:tabLst>
-                <a:tab algn="l" pos="0"/>
-              </a:tabLst>
-            </a:pPr>
-            <a:r>
-              <a:rPr b="0" lang="en-GB" sz="1200" strike="noStrike" u="none">
-                <a:solidFill>
-                  <a:schemeClr val="dk1">
-                    <a:tint val="75000"/>
-                  </a:schemeClr>
-                </a:solidFill>
-                <a:effectLst/>
-                <a:uFillTx/>
-                <a:latin typeface="Calibri"/>
-              </a:rPr>
-              <a:t>&lt;fecha/hora&gt;</a:t>
-            </a:r>
-            <a:endParaRPr b="0" lang="es-ES" sz="1200" strike="noStrike" u="none">
-              <a:solidFill>
-                <a:srgbClr val="000000"/>
-              </a:solidFill>
-              <a:effectLst/>
-              <a:uFillTx/>
-              <a:latin typeface="Times New Roman"/>
-            </a:endParaRPr>
-          </a:p>
-        </p:txBody>
-      </p:sp>
-      <p:sp>
-        <p:nvSpPr>
-          <p:cNvPr id="23" name="PlaceHolder 3"/>
-          <p:cNvSpPr>
-            <a:spLocks noGrp="1"/>
-          </p:cNvSpPr>
-          <p:nvPr>
-            <p:ph type="ftr" idx="14"/>
-          </p:nvPr>
-        </p:nvSpPr>
-        <p:spPr>
-          <a:xfrm>
-            <a:off x="4038480" y="6356520"/>
-            <a:ext cx="4112640" cy="362880"/>
-          </a:xfrm>
-          <a:prstGeom prst="rect">
-            <a:avLst/>
-          </a:prstGeom>
-          <a:noFill/>
-          <a:ln w="0">
-            <a:noFill/>
-          </a:ln>
-        </p:spPr>
-        <p:txBody>
-          <a:bodyPr lIns="91440" rIns="91440" tIns="45720" bIns="45720" anchor="ctr">
-            <a:noAutofit/>
-          </a:bodyPr>
-          <a:lstStyle>
-            <a:lvl1pPr indent="0" algn="ctr">
-              <a:lnSpc>
-                <a:spcPct val="100000"/>
-              </a:lnSpc>
-              <a:buNone/>
-              <a:tabLst>
-                <a:tab algn="l" pos="0"/>
-              </a:tabLst>
-              <a:defRPr b="0" lang="es-ES" sz="1400" strike="noStrike" u="none">
-                <a:solidFill>
-                  <a:srgbClr val="000000"/>
-                </a:solidFill>
-                <a:effectLst/>
-                <a:uFillTx/>
-                <a:latin typeface="Times New Roman"/>
-              </a:defRPr>
-            </a:lvl1pPr>
-          </a:lstStyle>
-          <a:p>
-            <a:pPr indent="0" algn="ctr">
-              <a:lnSpc>
-                <a:spcPct val="100000"/>
-              </a:lnSpc>
-              <a:buNone/>
-              <a:tabLst>
-                <a:tab algn="l" pos="0"/>
-              </a:tabLst>
-            </a:pPr>
-            <a:r>
-              <a:rPr b="0" lang="es-ES" sz="1400" strike="noStrike" u="none">
-                <a:solidFill>
-                  <a:srgbClr val="000000"/>
-                </a:solidFill>
-                <a:effectLst/>
-                <a:uFillTx/>
-                <a:latin typeface="Times New Roman"/>
-              </a:rPr>
-              <a:t>&lt;pie de página&gt;</a:t>
-            </a:r>
-            <a:endParaRPr b="0" lang="es-ES" sz="1400" strike="noStrike" u="none">
-              <a:solidFill>
-                <a:srgbClr val="000000"/>
-              </a:solidFill>
-              <a:effectLst/>
-              <a:uFillTx/>
-              <a:latin typeface="Times New Roman"/>
-            </a:endParaRPr>
-          </a:p>
-        </p:txBody>
-      </p:sp>
-      <p:sp>
-        <p:nvSpPr>
-          <p:cNvPr id="24" name="PlaceHolder 4"/>
-          <p:cNvSpPr>
-            <a:spLocks noGrp="1"/>
-          </p:cNvSpPr>
-          <p:nvPr>
-            <p:ph type="sldNum" idx="15"/>
-          </p:nvPr>
-        </p:nvSpPr>
-        <p:spPr>
-          <a:xfrm>
-            <a:off x="8610480" y="6356520"/>
-            <a:ext cx="2741040" cy="362880"/>
-          </a:xfrm>
-          <a:prstGeom prst="rect">
-            <a:avLst/>
-          </a:prstGeom>
-          <a:noFill/>
-          <a:ln w="0">
-            <a:noFill/>
-          </a:ln>
-        </p:spPr>
-        <p:txBody>
-          <a:bodyPr lIns="91440" rIns="91440" tIns="45720" bIns="45720" anchor="ctr">
-            <a:noAutofit/>
-          </a:bodyPr>
-          <a:lstStyle>
-            <a:lvl1pPr indent="0" algn="r" defTabSz="914400">
-              <a:lnSpc>
-                <a:spcPct val="100000"/>
-              </a:lnSpc>
-              <a:buNone/>
-              <a:tabLst>
-                <a:tab algn="l" pos="0"/>
-              </a:tabLst>
-              <a:defRPr b="0" lang="en-GB" sz="1200" strike="noStrike" u="none">
-                <a:solidFill>
-                  <a:schemeClr val="dk1">
-                    <a:tint val="75000"/>
-                  </a:schemeClr>
-                </a:solidFill>
-                <a:effectLst/>
-                <a:uFillTx/>
-                <a:latin typeface="Calibri"/>
-              </a:defRPr>
-            </a:lvl1pPr>
-          </a:lstStyle>
-          <a:p>
-            <a:pPr indent="0" algn="r" defTabSz="914400">
-              <a:lnSpc>
-                <a:spcPct val="100000"/>
-              </a:lnSpc>
-              <a:buNone/>
-              <a:tabLst>
-                <a:tab algn="l" pos="0"/>
-              </a:tabLst>
-            </a:pPr>
-            <a:fld id="{5396E0D0-5227-4702-B483-208B19C73D98}" type="slidenum">
-              <a:rPr b="0" lang="en-GB" sz="1200" strike="noStrike" u="none">
-                <a:solidFill>
-                  <a:schemeClr val="dk1">
-                    <a:tint val="75000"/>
-                  </a:schemeClr>
-                </a:solidFill>
-                <a:effectLst/>
-                <a:uFillTx/>
-                <a:latin typeface="Calibri"/>
-              </a:rPr>
-              <a:t>&lt;número&gt;</a:t>
-            </a:fld>
-            <a:endParaRPr b="0" lang="es-ES" sz="1200" strike="noStrike" u="none">
-              <a:solidFill>
-                <a:srgbClr val="000000"/>
-              </a:solidFill>
-              <a:effectLst/>
-              <a:uFillTx/>
-              <a:latin typeface="Times New Roman"/>
-            </a:endParaRPr>
-          </a:p>
-        </p:txBody>
-      </p:sp>
-    </p:spTree>
-  </p:cSld>
-</p:sldLayout>
-</file>
-
-<file path=ppt/slideLayouts/slideLayout6.xml><?xml version="1.0" encoding="utf-8"?>
-<p:sldLayout xmlns:a="http://schemas.openxmlformats.org/drawingml/2006/main" xmlns:p="http://schemas.openxmlformats.org/presentationml/2006/main" xmlns:r="http://schemas.openxmlformats.org/officeDocument/2006/relationships" xmlns:p14="http://schemas.microsoft.com/office/powerpoint/2010/main" xmlns:p15="http://schemas.microsoft.com/office/powerpoint/2012/main" xmlns:mc="http://schemas.openxmlformats.org/markup-compatibility/2006" type="vertTx" preserve="1">
-  <p:cSld name="Título y texto vertical">
-    <p:bg>
-      <p:bgPr>
-        <a:solidFill>
-          <a:srgbClr val="ffffff"/>
-        </a:solidFill>
-      </p:bgPr>
-    </p:bg>
-    <p:spTree>
-      <p:nvGrpSpPr>
-        <p:cNvPr id="1" name=""/>
-        <p:cNvGrpSpPr/>
-        <p:nvPr/>
-      </p:nvGrpSpPr>
-      <p:grpSpPr>
-        <a:xfrm>
-          <a:off x="0" y="0"/>
-          <a:ext cx="0" cy="0"/>
-          <a:chOff x="0" y="0"/>
-          <a:chExt cx="0" cy="0"/>
-        </a:xfrm>
-      </p:grpSpPr>
-      <p:sp>
-        <p:nvSpPr>
-          <p:cNvPr id="25" name="PlaceHolder 1"/>
-          <p:cNvSpPr>
-            <a:spLocks noGrp="1"/>
-          </p:cNvSpPr>
-          <p:nvPr>
-            <p:ph type="title"/>
-          </p:nvPr>
-        </p:nvSpPr>
-        <p:spPr>
-          <a:xfrm>
-            <a:off x="838080" y="365040"/>
-            <a:ext cx="10513440" cy="1323360"/>
-          </a:xfrm>
-          <a:prstGeom prst="rect">
-            <a:avLst/>
-          </a:prstGeom>
-          <a:noFill/>
-          <a:ln w="0">
-            <a:noFill/>
-          </a:ln>
-        </p:spPr>
-        <p:txBody>
-          <a:bodyPr lIns="91440" rIns="91440" tIns="45720" bIns="45720" anchor="ctr">
-            <a:noAutofit/>
-          </a:bodyPr>
-          <a:p>
-            <a:pPr indent="0" defTabSz="914400">
-              <a:lnSpc>
-                <a:spcPct val="90000"/>
-              </a:lnSpc>
-              <a:buNone/>
-              <a:tabLst>
-                <a:tab algn="l" pos="0"/>
-              </a:tabLst>
-            </a:pPr>
-            <a:r>
-              <a:rPr b="0" lang="es-ES" sz="4400" strike="noStrike" u="none">
-                <a:solidFill>
-                  <a:schemeClr val="dk1"/>
-                </a:solidFill>
-                <a:effectLst/>
-                <a:uFillTx/>
-                <a:latin typeface="Calibri Light"/>
-              </a:rPr>
-              <a:t>Haga clic para modificar el estilo de título del patrón</a:t>
-            </a:r>
-            <a:endParaRPr b="0" lang="es-ES" sz="4400" strike="noStrike" u="none">
-              <a:solidFill>
-                <a:srgbClr val="000000"/>
-              </a:solidFill>
-              <a:effectLst/>
-              <a:uFillTx/>
-              <a:latin typeface="Arial"/>
-            </a:endParaRPr>
-          </a:p>
-        </p:txBody>
-      </p:sp>
-      <p:sp>
-        <p:nvSpPr>
-          <p:cNvPr id="26" name="PlaceHolder 2"/>
-          <p:cNvSpPr>
-            <a:spLocks noGrp="1"/>
-          </p:cNvSpPr>
-          <p:nvPr>
-            <p:ph type="body"/>
-          </p:nvPr>
-        </p:nvSpPr>
-        <p:spPr>
-          <a:xfrm>
-            <a:off x="838080" y="1825560"/>
-            <a:ext cx="10513440" cy="4349160"/>
-          </a:xfrm>
-          <a:prstGeom prst="rect">
-            <a:avLst/>
-          </a:prstGeom>
-          <a:noFill/>
-          <a:ln w="0">
-            <a:noFill/>
-          </a:ln>
-        </p:spPr>
-        <p:txBody>
-          <a:bodyPr lIns="91440" rIns="91440" tIns="45720" bIns="45720" anchor="t" vert="eaVert">
-            <a:noAutofit/>
-          </a:bodyPr>
-          <a:p>
-            <a:pPr marL="228600" indent="-228600" defTabSz="914400">
-              <a:lnSpc>
-                <a:spcPct val="90000"/>
-              </a:lnSpc>
-              <a:spcBef>
-                <a:spcPts val="1001"/>
-              </a:spcBef>
-              <a:buClr>
-                <a:srgbClr val="000000"/>
-              </a:buClr>
-              <a:buFont typeface="Arial"/>
-              <a:buChar char="•"/>
-            </a:pPr>
-            <a:r>
-              <a:rPr b="0" lang="es-ES" sz="2800" strike="noStrike" u="none">
-                <a:solidFill>
-                  <a:schemeClr val="dk1"/>
-                </a:solidFill>
-                <a:effectLst/>
-                <a:uFillTx/>
-                <a:latin typeface="Calibri"/>
-              </a:rPr>
-              <a:t>Haga clic para modificar los estilos de texto del patrón</a:t>
-            </a:r>
-            <a:endParaRPr b="0" lang="es-ES" sz="2800" strike="noStrike" u="none">
-              <a:solidFill>
-                <a:srgbClr val="000000"/>
-              </a:solidFill>
-              <a:effectLst/>
-              <a:uFillTx/>
-              <a:latin typeface="Arial"/>
-            </a:endParaRPr>
-          </a:p>
-          <a:p>
-            <a:pPr lvl="1" marL="685800" indent="-228600" defTabSz="914400">
-              <a:lnSpc>
-                <a:spcPct val="90000"/>
-              </a:lnSpc>
-              <a:spcBef>
-                <a:spcPts val="499"/>
-              </a:spcBef>
-              <a:buClr>
-                <a:srgbClr val="000000"/>
-              </a:buClr>
-              <a:buFont typeface="Arial"/>
-              <a:buChar char="•"/>
-            </a:pPr>
-            <a:r>
-              <a:rPr b="0" lang="es-ES" sz="2400" strike="noStrike" u="none">
-                <a:solidFill>
-                  <a:schemeClr val="dk1"/>
-                </a:solidFill>
-                <a:effectLst/>
-                <a:uFillTx/>
-                <a:latin typeface="Calibri"/>
-              </a:rPr>
-              <a:t>Segundo nivel</a:t>
-            </a:r>
-            <a:endParaRPr b="0" lang="es-ES" sz="2400" strike="noStrike" u="none">
-              <a:solidFill>
-                <a:srgbClr val="000000"/>
-              </a:solidFill>
-              <a:effectLst/>
-              <a:uFillTx/>
-              <a:latin typeface="Arial"/>
-            </a:endParaRPr>
-          </a:p>
-          <a:p>
-            <a:pPr lvl="2" marL="1143000" indent="-228600" defTabSz="914400">
-              <a:lnSpc>
-                <a:spcPct val="90000"/>
-              </a:lnSpc>
-              <a:spcBef>
-                <a:spcPts val="499"/>
-              </a:spcBef>
-              <a:buClr>
-                <a:srgbClr val="000000"/>
-              </a:buClr>
-              <a:buFont typeface="Arial"/>
-              <a:buChar char="•"/>
-            </a:pPr>
-            <a:r>
-              <a:rPr b="0" lang="es-ES" sz="2000" strike="noStrike" u="none">
-                <a:solidFill>
-                  <a:schemeClr val="dk1"/>
-                </a:solidFill>
-                <a:effectLst/>
-                <a:uFillTx/>
-                <a:latin typeface="Calibri"/>
-              </a:rPr>
-              <a:t>Tercer nivel</a:t>
-            </a:r>
-            <a:endParaRPr b="0" lang="es-ES" sz="2000" strike="noStrike" u="none">
-              <a:solidFill>
-                <a:srgbClr val="000000"/>
-              </a:solidFill>
-              <a:effectLst/>
-              <a:uFillTx/>
-              <a:latin typeface="Arial"/>
-            </a:endParaRPr>
-          </a:p>
-          <a:p>
-            <a:pPr lvl="3" marL="1600200" indent="-228600" defTabSz="914400">
-              <a:lnSpc>
-                <a:spcPct val="90000"/>
-              </a:lnSpc>
-              <a:spcBef>
-                <a:spcPts val="499"/>
-              </a:spcBef>
-              <a:buClr>
-                <a:srgbClr val="000000"/>
-              </a:buClr>
-              <a:buFont typeface="Arial"/>
-              <a:buChar char="•"/>
-            </a:pPr>
-            <a:r>
-              <a:rPr b="0" lang="es-ES" sz="1800" strike="noStrike" u="none">
-                <a:solidFill>
-                  <a:schemeClr val="dk1"/>
-                </a:solidFill>
-                <a:effectLst/>
-                <a:uFillTx/>
-                <a:latin typeface="Calibri"/>
-              </a:rPr>
-              <a:t>Cuarto nivel</a:t>
-            </a:r>
-            <a:endParaRPr b="0" lang="es-ES" sz="1800" strike="noStrike" u="none">
-              <a:solidFill>
-                <a:srgbClr val="000000"/>
-              </a:solidFill>
-              <a:effectLst/>
-              <a:uFillTx/>
-              <a:latin typeface="Arial"/>
-            </a:endParaRPr>
-          </a:p>
-          <a:p>
-            <a:pPr lvl="4" marL="2057400" indent="-228600" defTabSz="914400">
-              <a:lnSpc>
-                <a:spcPct val="90000"/>
-              </a:lnSpc>
-              <a:spcBef>
-                <a:spcPts val="499"/>
-              </a:spcBef>
-              <a:buClr>
-                <a:srgbClr val="000000"/>
-              </a:buClr>
-              <a:buFont typeface="Arial"/>
-              <a:buChar char="•"/>
-            </a:pPr>
-            <a:r>
-              <a:rPr b="0" lang="es-ES" sz="1800" strike="noStrike" u="none">
-                <a:solidFill>
-                  <a:schemeClr val="dk1"/>
-                </a:solidFill>
-                <a:effectLst/>
-                <a:uFillTx/>
-                <a:latin typeface="Calibri"/>
-              </a:rPr>
-              <a:t>Quinto nivel</a:t>
-            </a:r>
-            <a:endParaRPr b="0" lang="es-ES" sz="1800" strike="noStrike" u="none">
-              <a:solidFill>
-                <a:srgbClr val="000000"/>
-              </a:solidFill>
-              <a:effectLst/>
-              <a:uFillTx/>
-              <a:latin typeface="Arial"/>
-            </a:endParaRPr>
-          </a:p>
-        </p:txBody>
-      </p:sp>
-      <p:sp>
-        <p:nvSpPr>
-          <p:cNvPr id="27" name="PlaceHolder 3"/>
-          <p:cNvSpPr>
-            <a:spLocks noGrp="1"/>
-          </p:cNvSpPr>
-          <p:nvPr>
-            <p:ph type="dt" idx="16"/>
-          </p:nvPr>
-        </p:nvSpPr>
-        <p:spPr>
-          <a:xfrm>
-            <a:off x="838080" y="6356520"/>
-            <a:ext cx="2741040" cy="362880"/>
-          </a:xfrm>
-          <a:prstGeom prst="rect">
-            <a:avLst/>
-          </a:prstGeom>
-          <a:noFill/>
-          <a:ln w="0">
-            <a:noFill/>
-          </a:ln>
-        </p:spPr>
-        <p:txBody>
-          <a:bodyPr lIns="91440" rIns="91440" tIns="45720" bIns="45720" anchor="ctr">
-            <a:noAutofit/>
-          </a:bodyPr>
-          <a:lstStyle>
-            <a:lvl1pPr indent="0" defTabSz="914400">
-              <a:lnSpc>
-                <a:spcPct val="100000"/>
-              </a:lnSpc>
-              <a:buNone/>
-              <a:tabLst>
-                <a:tab algn="l" pos="0"/>
-              </a:tabLst>
-              <a:defRPr b="0" lang="en-GB" sz="1200" strike="noStrike" u="none">
-                <a:solidFill>
-                  <a:schemeClr val="dk1">
-                    <a:tint val="75000"/>
-                  </a:schemeClr>
-                </a:solidFill>
-                <a:effectLst/>
-                <a:uFillTx/>
-                <a:latin typeface="Calibri"/>
-              </a:defRPr>
-            </a:lvl1pPr>
-          </a:lstStyle>
-          <a:p>
-            <a:pPr indent="0" defTabSz="914400">
-              <a:lnSpc>
-                <a:spcPct val="100000"/>
-              </a:lnSpc>
-              <a:buNone/>
-              <a:tabLst>
-                <a:tab algn="l" pos="0"/>
-              </a:tabLst>
-            </a:pPr>
-            <a:r>
-              <a:rPr b="0" lang="en-GB" sz="1200" strike="noStrike" u="none">
-                <a:solidFill>
-                  <a:schemeClr val="dk1">
-                    <a:tint val="75000"/>
-                  </a:schemeClr>
-                </a:solidFill>
-                <a:effectLst/>
-                <a:uFillTx/>
-                <a:latin typeface="Calibri"/>
-              </a:rPr>
-              <a:t>&lt;fecha/hora&gt;</a:t>
-            </a:r>
-            <a:endParaRPr b="0" lang="es-ES" sz="1200" strike="noStrike" u="none">
-              <a:solidFill>
-                <a:srgbClr val="000000"/>
-              </a:solidFill>
-              <a:effectLst/>
-              <a:uFillTx/>
-              <a:latin typeface="Times New Roman"/>
-            </a:endParaRPr>
-          </a:p>
-        </p:txBody>
-      </p:sp>
-      <p:sp>
-        <p:nvSpPr>
-          <p:cNvPr id="28" name="PlaceHolder 4"/>
-          <p:cNvSpPr>
-            <a:spLocks noGrp="1"/>
-          </p:cNvSpPr>
-          <p:nvPr>
-            <p:ph type="ftr" idx="17"/>
-          </p:nvPr>
-        </p:nvSpPr>
-        <p:spPr>
-          <a:xfrm>
-            <a:off x="4038480" y="6356520"/>
-            <a:ext cx="4112640" cy="362880"/>
-          </a:xfrm>
-          <a:prstGeom prst="rect">
-            <a:avLst/>
-          </a:prstGeom>
-          <a:noFill/>
-          <a:ln w="0">
-            <a:noFill/>
-          </a:ln>
-        </p:spPr>
-        <p:txBody>
-          <a:bodyPr lIns="91440" rIns="91440" tIns="45720" bIns="45720" anchor="ctr">
-            <a:noAutofit/>
-          </a:bodyPr>
-          <a:lstStyle>
-            <a:lvl1pPr indent="0" algn="ctr">
-              <a:lnSpc>
-                <a:spcPct val="100000"/>
-              </a:lnSpc>
-              <a:buNone/>
-              <a:tabLst>
-                <a:tab algn="l" pos="0"/>
-              </a:tabLst>
-              <a:defRPr b="0" lang="es-ES" sz="1400" strike="noStrike" u="none">
-                <a:solidFill>
-                  <a:srgbClr val="000000"/>
-                </a:solidFill>
-                <a:effectLst/>
-                <a:uFillTx/>
-                <a:latin typeface="Times New Roman"/>
-              </a:defRPr>
-            </a:lvl1pPr>
-          </a:lstStyle>
-          <a:p>
-            <a:pPr indent="0" algn="ctr">
-              <a:lnSpc>
-                <a:spcPct val="100000"/>
-              </a:lnSpc>
-              <a:buNone/>
-              <a:tabLst>
-                <a:tab algn="l" pos="0"/>
-              </a:tabLst>
-            </a:pPr>
-            <a:r>
-              <a:rPr b="0" lang="es-ES" sz="1400" strike="noStrike" u="none">
-                <a:solidFill>
-                  <a:srgbClr val="000000"/>
-                </a:solidFill>
-                <a:effectLst/>
-                <a:uFillTx/>
-                <a:latin typeface="Times New Roman"/>
-              </a:rPr>
-              <a:t>&lt;pie de página&gt;</a:t>
-            </a:r>
-            <a:endParaRPr b="0" lang="es-ES" sz="1400" strike="noStrike" u="none">
-              <a:solidFill>
-                <a:srgbClr val="000000"/>
-              </a:solidFill>
-              <a:effectLst/>
-              <a:uFillTx/>
-              <a:latin typeface="Times New Roman"/>
-            </a:endParaRPr>
-          </a:p>
-        </p:txBody>
-      </p:sp>
-      <p:sp>
-        <p:nvSpPr>
-          <p:cNvPr id="29" name="PlaceHolder 5"/>
-          <p:cNvSpPr>
-            <a:spLocks noGrp="1"/>
-          </p:cNvSpPr>
-          <p:nvPr>
-            <p:ph type="sldNum" idx="18"/>
-          </p:nvPr>
-        </p:nvSpPr>
-        <p:spPr>
-          <a:xfrm>
-            <a:off x="8610480" y="6356520"/>
-            <a:ext cx="2741040" cy="362880"/>
-          </a:xfrm>
-          <a:prstGeom prst="rect">
-            <a:avLst/>
-          </a:prstGeom>
-          <a:noFill/>
-          <a:ln w="0">
-            <a:noFill/>
-          </a:ln>
-        </p:spPr>
-        <p:txBody>
-          <a:bodyPr lIns="91440" rIns="91440" tIns="45720" bIns="45720" anchor="ctr">
-            <a:noAutofit/>
-          </a:bodyPr>
-          <a:lstStyle>
-            <a:lvl1pPr indent="0" algn="r" defTabSz="914400">
-              <a:lnSpc>
-                <a:spcPct val="100000"/>
-              </a:lnSpc>
-              <a:buNone/>
-              <a:tabLst>
-                <a:tab algn="l" pos="0"/>
-              </a:tabLst>
-              <a:defRPr b="0" lang="en-GB" sz="1200" strike="noStrike" u="none">
-                <a:solidFill>
-                  <a:schemeClr val="dk1">
-                    <a:tint val="75000"/>
-                  </a:schemeClr>
-                </a:solidFill>
-                <a:effectLst/>
-                <a:uFillTx/>
-                <a:latin typeface="Calibri"/>
-              </a:defRPr>
-            </a:lvl1pPr>
-          </a:lstStyle>
-          <a:p>
-            <a:pPr indent="0" algn="r" defTabSz="914400">
-              <a:lnSpc>
-                <a:spcPct val="100000"/>
-              </a:lnSpc>
-              <a:buNone/>
-              <a:tabLst>
-                <a:tab algn="l" pos="0"/>
-              </a:tabLst>
-            </a:pPr>
-            <a:fld id="{104F1B70-0E55-41E1-B978-CA6DB3E46AF2}" type="slidenum">
-              <a:rPr b="0" lang="en-GB" sz="1200" strike="noStrike" u="none">
-                <a:solidFill>
-                  <a:schemeClr val="dk1">
-                    <a:tint val="75000"/>
-                  </a:schemeClr>
-                </a:solidFill>
-                <a:effectLst/>
-                <a:uFillTx/>
-                <a:latin typeface="Calibri"/>
-              </a:rPr>
-              <a:t>&lt;número&gt;</a:t>
-            </a:fld>
-            <a:endParaRPr b="0" lang="es-ES" sz="1200" strike="noStrike" u="none">
-              <a:solidFill>
-                <a:srgbClr val="000000"/>
-              </a:solidFill>
-              <a:effectLst/>
-              <a:uFillTx/>
-              <a:latin typeface="Times New Roman"/>
-            </a:endParaRPr>
-          </a:p>
-        </p:txBody>
-      </p:sp>
-    </p:spTree>
-  </p:cSld>
-</p:sldLayout>
-</file>
-
-<file path=ppt/slideLayouts/slideLayout7.xml><?xml version="1.0" encoding="utf-8"?>
-<p:sldLayout xmlns:a="http://schemas.openxmlformats.org/drawingml/2006/main" xmlns:p="http://schemas.openxmlformats.org/presentationml/2006/main" xmlns:r="http://schemas.openxmlformats.org/officeDocument/2006/relationships" xmlns:p14="http://schemas.microsoft.com/office/powerpoint/2010/main" xmlns:p15="http://schemas.microsoft.com/office/powerpoint/2012/main" xmlns:mc="http://schemas.openxmlformats.org/markup-compatibility/2006" type="vertTitleAndTx" preserve="1">
-  <p:cSld name="Título vertical y texto">
-    <p:bg>
-      <p:bgPr>
-        <a:solidFill>
-          <a:srgbClr val="ffffff"/>
-        </a:solidFill>
-      </p:bgPr>
-    </p:bg>
-    <p:spTree>
-      <p:nvGrpSpPr>
-        <p:cNvPr id="1" name=""/>
-        <p:cNvGrpSpPr/>
-        <p:nvPr/>
-      </p:nvGrpSpPr>
-      <p:grpSpPr>
-        <a:xfrm>
-          <a:off x="0" y="0"/>
-          <a:ext cx="0" cy="0"/>
-          <a:chOff x="0" y="0"/>
-          <a:chExt cx="0" cy="0"/>
-        </a:xfrm>
-      </p:grpSpPr>
-      <p:sp>
-        <p:nvSpPr>
-          <p:cNvPr id="30" name="PlaceHolder 1"/>
-          <p:cNvSpPr>
-            <a:spLocks noGrp="1"/>
-          </p:cNvSpPr>
-          <p:nvPr>
-            <p:ph type="title"/>
-          </p:nvPr>
-        </p:nvSpPr>
-        <p:spPr>
-          <a:xfrm>
-            <a:off x="8724960" y="365040"/>
-            <a:ext cx="2626920" cy="5809680"/>
-          </a:xfrm>
-          <a:prstGeom prst="rect">
-            <a:avLst/>
-          </a:prstGeom>
-          <a:noFill/>
-          <a:ln w="0">
-            <a:noFill/>
-          </a:ln>
-        </p:spPr>
-        <p:txBody>
-          <a:bodyPr lIns="91440" rIns="91440" tIns="45720" bIns="45720" anchor="ctr" vert="eaVert">
-            <a:noAutofit/>
-          </a:bodyPr>
-          <a:p>
-            <a:pPr indent="0" defTabSz="914400">
-              <a:lnSpc>
-                <a:spcPct val="90000"/>
-              </a:lnSpc>
-              <a:buNone/>
-              <a:tabLst>
-                <a:tab algn="l" pos="0"/>
-              </a:tabLst>
-            </a:pPr>
-            <a:r>
-              <a:rPr b="0" lang="es-ES" sz="4400" strike="noStrike" u="none">
-                <a:solidFill>
-                  <a:schemeClr val="dk1"/>
-                </a:solidFill>
-                <a:effectLst/>
-                <a:uFillTx/>
-                <a:latin typeface="Calibri Light"/>
-              </a:rPr>
-              <a:t>Haga clic para modificar el estilo de título del patrón</a:t>
-            </a:r>
-            <a:endParaRPr b="0" lang="es-ES" sz="4400" strike="noStrike" u="none">
-              <a:solidFill>
-                <a:srgbClr val="000000"/>
-              </a:solidFill>
-              <a:effectLst/>
-              <a:uFillTx/>
-              <a:latin typeface="Arial"/>
-            </a:endParaRPr>
-          </a:p>
-        </p:txBody>
-      </p:sp>
-      <p:sp>
-        <p:nvSpPr>
-          <p:cNvPr id="31" name="PlaceHolder 2"/>
-          <p:cNvSpPr>
-            <a:spLocks noGrp="1"/>
-          </p:cNvSpPr>
-          <p:nvPr>
-            <p:ph type="body"/>
-          </p:nvPr>
-        </p:nvSpPr>
-        <p:spPr>
-          <a:xfrm>
-            <a:off x="838080" y="365040"/>
-            <a:ext cx="7732080" cy="5809680"/>
-          </a:xfrm>
-          <a:prstGeom prst="rect">
-            <a:avLst/>
-          </a:prstGeom>
-          <a:noFill/>
-          <a:ln w="0">
-            <a:noFill/>
-          </a:ln>
-        </p:spPr>
-        <p:txBody>
-          <a:bodyPr lIns="91440" rIns="91440" tIns="45720" bIns="45720" anchor="t" vert="eaVert">
-            <a:noAutofit/>
-          </a:bodyPr>
-          <a:p>
-            <a:pPr marL="228600" indent="-228600" defTabSz="914400">
-              <a:lnSpc>
-                <a:spcPct val="90000"/>
-              </a:lnSpc>
-              <a:spcBef>
-                <a:spcPts val="1001"/>
-              </a:spcBef>
-              <a:buClr>
-                <a:srgbClr val="000000"/>
-              </a:buClr>
-              <a:buFont typeface="Arial"/>
-              <a:buChar char="•"/>
-            </a:pPr>
-            <a:r>
-              <a:rPr b="0" lang="es-ES" sz="2800" strike="noStrike" u="none">
-                <a:solidFill>
-                  <a:schemeClr val="dk1"/>
-                </a:solidFill>
-                <a:effectLst/>
-                <a:uFillTx/>
-                <a:latin typeface="Calibri"/>
-              </a:rPr>
-              <a:t>Haga clic para modificar los estilos de texto del patrón</a:t>
-            </a:r>
-            <a:endParaRPr b="0" lang="es-ES" sz="2800" strike="noStrike" u="none">
-              <a:solidFill>
-                <a:srgbClr val="000000"/>
-              </a:solidFill>
-              <a:effectLst/>
-              <a:uFillTx/>
-              <a:latin typeface="Arial"/>
-            </a:endParaRPr>
-          </a:p>
-          <a:p>
-            <a:pPr lvl="1" marL="685800" indent="-228600" defTabSz="914400">
-              <a:lnSpc>
-                <a:spcPct val="90000"/>
-              </a:lnSpc>
-              <a:spcBef>
-                <a:spcPts val="499"/>
-              </a:spcBef>
-              <a:buClr>
-                <a:srgbClr val="000000"/>
-              </a:buClr>
-              <a:buFont typeface="Arial"/>
-              <a:buChar char="•"/>
-            </a:pPr>
-            <a:r>
-              <a:rPr b="0" lang="es-ES" sz="2400" strike="noStrike" u="none">
-                <a:solidFill>
-                  <a:schemeClr val="dk1"/>
-                </a:solidFill>
-                <a:effectLst/>
-                <a:uFillTx/>
-                <a:latin typeface="Calibri"/>
-              </a:rPr>
-              <a:t>Segundo nivel</a:t>
-            </a:r>
-            <a:endParaRPr b="0" lang="es-ES" sz="2400" strike="noStrike" u="none">
-              <a:solidFill>
-                <a:srgbClr val="000000"/>
-              </a:solidFill>
-              <a:effectLst/>
-              <a:uFillTx/>
-              <a:latin typeface="Arial"/>
-            </a:endParaRPr>
-          </a:p>
-          <a:p>
-            <a:pPr lvl="2" marL="1143000" indent="-228600" defTabSz="914400">
-              <a:lnSpc>
-                <a:spcPct val="90000"/>
-              </a:lnSpc>
-              <a:spcBef>
-                <a:spcPts val="499"/>
-              </a:spcBef>
-              <a:buClr>
-                <a:srgbClr val="000000"/>
-              </a:buClr>
-              <a:buFont typeface="Arial"/>
-              <a:buChar char="•"/>
-            </a:pPr>
-            <a:r>
-              <a:rPr b="0" lang="es-ES" sz="2000" strike="noStrike" u="none">
-                <a:solidFill>
-                  <a:schemeClr val="dk1"/>
-                </a:solidFill>
-                <a:effectLst/>
-                <a:uFillTx/>
-                <a:latin typeface="Calibri"/>
-              </a:rPr>
-              <a:t>Tercer nivel</a:t>
-            </a:r>
-            <a:endParaRPr b="0" lang="es-ES" sz="2000" strike="noStrike" u="none">
-              <a:solidFill>
-                <a:srgbClr val="000000"/>
-              </a:solidFill>
-              <a:effectLst/>
-              <a:uFillTx/>
-              <a:latin typeface="Arial"/>
-            </a:endParaRPr>
-          </a:p>
-          <a:p>
-            <a:pPr lvl="3" marL="1600200" indent="-228600" defTabSz="914400">
-              <a:lnSpc>
-                <a:spcPct val="90000"/>
-              </a:lnSpc>
-              <a:spcBef>
-                <a:spcPts val="499"/>
-              </a:spcBef>
-              <a:buClr>
-                <a:srgbClr val="000000"/>
-              </a:buClr>
-              <a:buFont typeface="Arial"/>
-              <a:buChar char="•"/>
-            </a:pPr>
-            <a:r>
-              <a:rPr b="0" lang="es-ES" sz="1800" strike="noStrike" u="none">
-                <a:solidFill>
-                  <a:schemeClr val="dk1"/>
-                </a:solidFill>
-                <a:effectLst/>
-                <a:uFillTx/>
-                <a:latin typeface="Calibri"/>
-              </a:rPr>
-              <a:t>Cuarto nivel</a:t>
-            </a:r>
-            <a:endParaRPr b="0" lang="es-ES" sz="1800" strike="noStrike" u="none">
-              <a:solidFill>
-                <a:srgbClr val="000000"/>
-              </a:solidFill>
-              <a:effectLst/>
-              <a:uFillTx/>
-              <a:latin typeface="Arial"/>
-            </a:endParaRPr>
-          </a:p>
-          <a:p>
-            <a:pPr lvl="4" marL="2057400" indent="-228600" defTabSz="914400">
-              <a:lnSpc>
-                <a:spcPct val="90000"/>
-              </a:lnSpc>
-              <a:spcBef>
-                <a:spcPts val="499"/>
-              </a:spcBef>
-              <a:buClr>
-                <a:srgbClr val="000000"/>
-              </a:buClr>
-              <a:buFont typeface="Arial"/>
-              <a:buChar char="•"/>
-            </a:pPr>
-            <a:r>
-              <a:rPr b="0" lang="es-ES" sz="1800" strike="noStrike" u="none">
-                <a:solidFill>
-                  <a:schemeClr val="dk1"/>
-                </a:solidFill>
-                <a:effectLst/>
-                <a:uFillTx/>
-                <a:latin typeface="Calibri"/>
-              </a:rPr>
-              <a:t>Quinto nivel</a:t>
-            </a:r>
-            <a:endParaRPr b="0" lang="es-ES" sz="1800" strike="noStrike" u="none">
-              <a:solidFill>
-                <a:srgbClr val="000000"/>
-              </a:solidFill>
-              <a:effectLst/>
-              <a:uFillTx/>
-              <a:latin typeface="Arial"/>
-            </a:endParaRPr>
-          </a:p>
-        </p:txBody>
-      </p:sp>
-      <p:sp>
-        <p:nvSpPr>
-          <p:cNvPr id="32" name="PlaceHolder 3"/>
+          <p:cNvPr id="37" name="PlaceHolder 4"/>
           <p:cNvSpPr>
             <a:spLocks noGrp="1"/>
           </p:cNvSpPr>
@@ -4937,7 +5001,7 @@
         <p:spPr>
           <a:xfrm>
             <a:off x="838080" y="6356520"/>
-            <a:ext cx="2741040" cy="362880"/>
+            <a:ext cx="2740680" cy="362520"/>
           </a:xfrm>
           <a:prstGeom prst="rect">
             <a:avLst/>
@@ -5008,7 +5072,7 @@
       </p:sp>
       <p:sp>
         <p:nvSpPr>
-          <p:cNvPr id="33" name="PlaceHolder 4"/>
+          <p:cNvPr id="38" name="PlaceHolder 5"/>
           <p:cNvSpPr>
             <a:spLocks noGrp="1"/>
           </p:cNvSpPr>
@@ -5019,7 +5083,7 @@
         <p:spPr>
           <a:xfrm>
             <a:off x="4038480" y="6356520"/>
-            <a:ext cx="4112640" cy="362880"/>
+            <a:ext cx="4112280" cy="362520"/>
           </a:xfrm>
           <a:prstGeom prst="rect">
             <a:avLst/>
@@ -5086,7 +5150,7 @@
       </p:sp>
       <p:sp>
         <p:nvSpPr>
-          <p:cNvPr id="34" name="PlaceHolder 5"/>
+          <p:cNvPr id="39" name="PlaceHolder 6"/>
           <p:cNvSpPr>
             <a:spLocks noGrp="1"/>
           </p:cNvSpPr>
@@ -5097,7 +5161,7 @@
         <p:spPr>
           <a:xfrm>
             <a:off x="8610480" y="6356520"/>
-            <a:ext cx="2741040" cy="362880"/>
+            <a:ext cx="2740680" cy="362520"/>
           </a:xfrm>
           <a:prstGeom prst="rect">
             <a:avLst/>
@@ -5142,7 +5206,7 @@
                 <a:tab algn="l" pos="0"/>
               </a:tabLst>
             </a:pPr>
-            <a:fld id="{BA410100-7A00-435B-82C9-47F280CAC41C}" type="slidenum">
+            <a:fld id="{5AB0DEB4-794E-4BC7-91F6-F06BD0B2CCA5}" type="slidenum">
               <a:rPr b="0" lang="en-GB" sz="1200" strike="noStrike" u="none">
                 <a:solidFill>
                   <a:schemeClr val="dk1">
@@ -5172,537 +5236,8 @@
 </file>
 
 <file path=ppt/slideLayouts/slideLayout8.xml><?xml version="1.0" encoding="utf-8"?>
-<p:sldLayout xmlns:a="http://schemas.openxmlformats.org/drawingml/2006/main" xmlns:p="http://schemas.openxmlformats.org/presentationml/2006/main" xmlns:r="http://schemas.openxmlformats.org/officeDocument/2006/relationships" xmlns:p14="http://schemas.microsoft.com/office/powerpoint/2010/main" xmlns:p15="http://schemas.microsoft.com/office/powerpoint/2012/main" xmlns:mc="http://schemas.openxmlformats.org/markup-compatibility/2006" type="obj" preserve="1">
-  <p:cSld name="Título y objetos">
-    <p:bg>
-      <p:bgPr>
-        <a:solidFill>
-          <a:srgbClr val="ffffff"/>
-        </a:solidFill>
-      </p:bgPr>
-    </p:bg>
-    <p:spTree>
-      <p:nvGrpSpPr>
-        <p:cNvPr id="1" name=""/>
-        <p:cNvGrpSpPr/>
-        <p:nvPr/>
-      </p:nvGrpSpPr>
-      <p:grpSpPr>
-        <a:xfrm>
-          <a:off x="0" y="0"/>
-          <a:ext cx="0" cy="0"/>
-          <a:chOff x="0" y="0"/>
-          <a:chExt cx="0" cy="0"/>
-        </a:xfrm>
-      </p:grpSpPr>
-      <p:sp>
-        <p:nvSpPr>
-          <p:cNvPr id="35" name="PlaceHolder 1"/>
-          <p:cNvSpPr>
-            <a:spLocks noGrp="1"/>
-          </p:cNvSpPr>
-          <p:nvPr>
-            <p:ph type="title"/>
-          </p:nvPr>
-        </p:nvSpPr>
-        <p:spPr>
-          <a:xfrm>
-            <a:off x="838080" y="365040"/>
-            <a:ext cx="10513440" cy="1323360"/>
-          </a:xfrm>
-          <a:prstGeom prst="rect">
-            <a:avLst/>
-          </a:prstGeom>
-          <a:noFill/>
-          <a:ln w="0">
-            <a:noFill/>
-          </a:ln>
-        </p:spPr>
-        <p:txBody>
-          <a:bodyPr lIns="91440" rIns="91440" tIns="45720" bIns="45720" anchor="ctr">
-            <a:noAutofit/>
-          </a:bodyPr>
-          <a:p>
-            <a:pPr indent="0" defTabSz="914400">
-              <a:lnSpc>
-                <a:spcPct val="90000"/>
-              </a:lnSpc>
-              <a:buNone/>
-              <a:tabLst>
-                <a:tab algn="l" pos="0"/>
-              </a:tabLst>
-            </a:pPr>
-            <a:r>
-              <a:rPr b="0" lang="es-ES" sz="4400" strike="noStrike" u="none">
-                <a:solidFill>
-                  <a:schemeClr val="dk1"/>
-                </a:solidFill>
-                <a:effectLst/>
-                <a:uFillTx/>
-                <a:latin typeface="Calibri Light"/>
-              </a:rPr>
-              <a:t>Haga clic para modificar el estilo de título del patrón</a:t>
-            </a:r>
-            <a:endParaRPr b="0" lang="es-ES" sz="4400" strike="noStrike" u="none">
-              <a:solidFill>
-                <a:srgbClr val="000000"/>
-              </a:solidFill>
-              <a:effectLst/>
-              <a:uFillTx/>
-              <a:latin typeface="Arial"/>
-            </a:endParaRPr>
-          </a:p>
-        </p:txBody>
-      </p:sp>
-      <p:sp>
-        <p:nvSpPr>
-          <p:cNvPr id="36" name="PlaceHolder 2"/>
-          <p:cNvSpPr>
-            <a:spLocks noGrp="1"/>
-          </p:cNvSpPr>
-          <p:nvPr>
-            <p:ph type="body"/>
-          </p:nvPr>
-        </p:nvSpPr>
-        <p:spPr>
-          <a:xfrm>
-            <a:off x="838080" y="1825560"/>
-            <a:ext cx="10513440" cy="4349160"/>
-          </a:xfrm>
-          <a:prstGeom prst="rect">
-            <a:avLst/>
-          </a:prstGeom>
-          <a:noFill/>
-          <a:ln w="0">
-            <a:noFill/>
-          </a:ln>
-        </p:spPr>
-        <p:txBody>
-          <a:bodyPr lIns="91440" rIns="91440" tIns="45720" bIns="45720" anchor="t">
-            <a:noAutofit/>
-          </a:bodyPr>
-          <a:p>
-            <a:pPr marL="228600" indent="-228600" defTabSz="914400">
-              <a:lnSpc>
-                <a:spcPct val="90000"/>
-              </a:lnSpc>
-              <a:spcBef>
-                <a:spcPts val="1001"/>
-              </a:spcBef>
-              <a:buClr>
-                <a:srgbClr val="000000"/>
-              </a:buClr>
-              <a:buFont typeface="Arial"/>
-              <a:buChar char="•"/>
-            </a:pPr>
-            <a:r>
-              <a:rPr b="0" lang="es-ES" sz="2800" strike="noStrike" u="none">
-                <a:solidFill>
-                  <a:schemeClr val="dk1"/>
-                </a:solidFill>
-                <a:effectLst/>
-                <a:uFillTx/>
-                <a:latin typeface="Calibri"/>
-              </a:rPr>
-              <a:t>Haga clic para modificar los estilos de texto del patrón</a:t>
-            </a:r>
-            <a:endParaRPr b="0" lang="es-ES" sz="2800" strike="noStrike" u="none">
-              <a:solidFill>
-                <a:srgbClr val="000000"/>
-              </a:solidFill>
-              <a:effectLst/>
-              <a:uFillTx/>
-              <a:latin typeface="Arial"/>
-            </a:endParaRPr>
-          </a:p>
-          <a:p>
-            <a:pPr lvl="1" marL="685800" indent="-228600" defTabSz="914400">
-              <a:lnSpc>
-                <a:spcPct val="90000"/>
-              </a:lnSpc>
-              <a:spcBef>
-                <a:spcPts val="499"/>
-              </a:spcBef>
-              <a:buClr>
-                <a:srgbClr val="000000"/>
-              </a:buClr>
-              <a:buFont typeface="Arial"/>
-              <a:buChar char="•"/>
-            </a:pPr>
-            <a:r>
-              <a:rPr b="0" lang="es-ES" sz="2400" strike="noStrike" u="none">
-                <a:solidFill>
-                  <a:schemeClr val="dk1"/>
-                </a:solidFill>
-                <a:effectLst/>
-                <a:uFillTx/>
-                <a:latin typeface="Calibri"/>
-              </a:rPr>
-              <a:t>Segundo nivel</a:t>
-            </a:r>
-            <a:endParaRPr b="0" lang="es-ES" sz="2400" strike="noStrike" u="none">
-              <a:solidFill>
-                <a:srgbClr val="000000"/>
-              </a:solidFill>
-              <a:effectLst/>
-              <a:uFillTx/>
-              <a:latin typeface="Arial"/>
-            </a:endParaRPr>
-          </a:p>
-          <a:p>
-            <a:pPr lvl="2" marL="1143000" indent="-228600" defTabSz="914400">
-              <a:lnSpc>
-                <a:spcPct val="90000"/>
-              </a:lnSpc>
-              <a:spcBef>
-                <a:spcPts val="499"/>
-              </a:spcBef>
-              <a:buClr>
-                <a:srgbClr val="000000"/>
-              </a:buClr>
-              <a:buFont typeface="Arial"/>
-              <a:buChar char="•"/>
-            </a:pPr>
-            <a:r>
-              <a:rPr b="0" lang="es-ES" sz="2000" strike="noStrike" u="none">
-                <a:solidFill>
-                  <a:schemeClr val="dk1"/>
-                </a:solidFill>
-                <a:effectLst/>
-                <a:uFillTx/>
-                <a:latin typeface="Calibri"/>
-              </a:rPr>
-              <a:t>Tercer nivel</a:t>
-            </a:r>
-            <a:endParaRPr b="0" lang="es-ES" sz="2000" strike="noStrike" u="none">
-              <a:solidFill>
-                <a:srgbClr val="000000"/>
-              </a:solidFill>
-              <a:effectLst/>
-              <a:uFillTx/>
-              <a:latin typeface="Arial"/>
-            </a:endParaRPr>
-          </a:p>
-          <a:p>
-            <a:pPr lvl="3" marL="1600200" indent="-228600" defTabSz="914400">
-              <a:lnSpc>
-                <a:spcPct val="90000"/>
-              </a:lnSpc>
-              <a:spcBef>
-                <a:spcPts val="499"/>
-              </a:spcBef>
-              <a:buClr>
-                <a:srgbClr val="000000"/>
-              </a:buClr>
-              <a:buFont typeface="Arial"/>
-              <a:buChar char="•"/>
-            </a:pPr>
-            <a:r>
-              <a:rPr b="0" lang="es-ES" sz="1800" strike="noStrike" u="none">
-                <a:solidFill>
-                  <a:schemeClr val="dk1"/>
-                </a:solidFill>
-                <a:effectLst/>
-                <a:uFillTx/>
-                <a:latin typeface="Calibri"/>
-              </a:rPr>
-              <a:t>Cuarto nivel</a:t>
-            </a:r>
-            <a:endParaRPr b="0" lang="es-ES" sz="1800" strike="noStrike" u="none">
-              <a:solidFill>
-                <a:srgbClr val="000000"/>
-              </a:solidFill>
-              <a:effectLst/>
-              <a:uFillTx/>
-              <a:latin typeface="Arial"/>
-            </a:endParaRPr>
-          </a:p>
-          <a:p>
-            <a:pPr lvl="4" marL="2057400" indent="-228600" defTabSz="914400">
-              <a:lnSpc>
-                <a:spcPct val="90000"/>
-              </a:lnSpc>
-              <a:spcBef>
-                <a:spcPts val="499"/>
-              </a:spcBef>
-              <a:buClr>
-                <a:srgbClr val="000000"/>
-              </a:buClr>
-              <a:buFont typeface="Arial"/>
-              <a:buChar char="•"/>
-            </a:pPr>
-            <a:r>
-              <a:rPr b="0" lang="es-ES" sz="1800" strike="noStrike" u="none">
-                <a:solidFill>
-                  <a:schemeClr val="dk1"/>
-                </a:solidFill>
-                <a:effectLst/>
-                <a:uFillTx/>
-                <a:latin typeface="Calibri"/>
-              </a:rPr>
-              <a:t>Quinto nivel</a:t>
-            </a:r>
-            <a:endParaRPr b="0" lang="es-ES" sz="1800" strike="noStrike" u="none">
-              <a:solidFill>
-                <a:srgbClr val="000000"/>
-              </a:solidFill>
-              <a:effectLst/>
-              <a:uFillTx/>
-              <a:latin typeface="Arial"/>
-            </a:endParaRPr>
-          </a:p>
-        </p:txBody>
-      </p:sp>
-      <p:sp>
-        <p:nvSpPr>
-          <p:cNvPr id="37" name="PlaceHolder 3"/>
-          <p:cNvSpPr>
-            <a:spLocks noGrp="1"/>
-          </p:cNvSpPr>
-          <p:nvPr>
-            <p:ph type="dt" idx="22"/>
-          </p:nvPr>
-        </p:nvSpPr>
-        <p:spPr>
-          <a:xfrm>
-            <a:off x="838080" y="6356520"/>
-            <a:ext cx="2741040" cy="362880"/>
-          </a:xfrm>
-          <a:prstGeom prst="rect">
-            <a:avLst/>
-          </a:prstGeom>
-          <a:noFill/>
-          <a:ln w="0">
-            <a:noFill/>
-          </a:ln>
-        </p:spPr>
-        <p:txBody>
-          <a:bodyPr lIns="91440" rIns="91440" tIns="45720" bIns="45720" anchor="ctr">
-            <a:noAutofit/>
-          </a:bodyPr>
-          <a:lstStyle>
-            <a:lvl1pPr indent="0" defTabSz="914400">
-              <a:lnSpc>
-                <a:spcPct val="100000"/>
-              </a:lnSpc>
-              <a:buNone/>
-              <a:tabLst>
-                <a:tab algn="l" pos="0"/>
-              </a:tabLst>
-              <a:defRPr b="0" lang="en-GB" sz="1200" strike="noStrike" u="none">
-                <a:solidFill>
-                  <a:schemeClr val="dk1">
-                    <a:tint val="75000"/>
-                  </a:schemeClr>
-                </a:solidFill>
-                <a:effectLst/>
-                <a:uFillTx/>
-                <a:latin typeface="Calibri"/>
-              </a:defRPr>
-            </a:lvl1pPr>
-          </a:lstStyle>
-          <a:p>
-            <a:pPr indent="0" defTabSz="914400">
-              <a:lnSpc>
-                <a:spcPct val="100000"/>
-              </a:lnSpc>
-              <a:buNone/>
-              <a:tabLst>
-                <a:tab algn="l" pos="0"/>
-              </a:tabLst>
-            </a:pPr>
-            <a:r>
-              <a:rPr b="0" lang="en-GB" sz="1200" strike="noStrike" u="none">
-                <a:solidFill>
-                  <a:schemeClr val="dk1">
-                    <a:tint val="75000"/>
-                  </a:schemeClr>
-                </a:solidFill>
-                <a:effectLst/>
-                <a:uFillTx/>
-                <a:latin typeface="Calibri"/>
-              </a:rPr>
-              <a:t>&lt;fecha/hora&gt;</a:t>
-            </a:r>
-            <a:endParaRPr b="0" lang="es-ES" sz="1200" strike="noStrike" u="none">
-              <a:solidFill>
-                <a:srgbClr val="000000"/>
-              </a:solidFill>
-              <a:effectLst/>
-              <a:uFillTx/>
-              <a:latin typeface="Times New Roman"/>
-            </a:endParaRPr>
-          </a:p>
-        </p:txBody>
-      </p:sp>
-      <p:sp>
-        <p:nvSpPr>
-          <p:cNvPr id="38" name="PlaceHolder 4"/>
-          <p:cNvSpPr>
-            <a:spLocks noGrp="1"/>
-          </p:cNvSpPr>
-          <p:nvPr>
-            <p:ph type="ftr" idx="23"/>
-          </p:nvPr>
-        </p:nvSpPr>
-        <p:spPr>
-          <a:xfrm>
-            <a:off x="4038480" y="6356520"/>
-            <a:ext cx="4112640" cy="362880"/>
-          </a:xfrm>
-          <a:prstGeom prst="rect">
-            <a:avLst/>
-          </a:prstGeom>
-          <a:noFill/>
-          <a:ln w="0">
-            <a:noFill/>
-          </a:ln>
-        </p:spPr>
-        <p:txBody>
-          <a:bodyPr lIns="91440" rIns="91440" tIns="45720" bIns="45720" anchor="ctr">
-            <a:noAutofit/>
-          </a:bodyPr>
-          <a:lstStyle>
-            <a:lvl1pPr indent="0" algn="ctr">
-              <a:lnSpc>
-                <a:spcPct val="100000"/>
-              </a:lnSpc>
-              <a:buNone/>
-              <a:tabLst>
-                <a:tab algn="l" pos="0"/>
-              </a:tabLst>
-              <a:defRPr b="0" lang="es-ES" sz="1400" strike="noStrike" u="none">
-                <a:solidFill>
-                  <a:srgbClr val="000000"/>
-                </a:solidFill>
-                <a:effectLst/>
-                <a:uFillTx/>
-                <a:latin typeface="Times New Roman"/>
-              </a:defRPr>
-            </a:lvl1pPr>
-          </a:lstStyle>
-          <a:p>
-            <a:pPr indent="0" algn="ctr">
-              <a:lnSpc>
-                <a:spcPct val="100000"/>
-              </a:lnSpc>
-              <a:buNone/>
-              <a:tabLst>
-                <a:tab algn="l" pos="0"/>
-              </a:tabLst>
-            </a:pPr>
-            <a:r>
-              <a:rPr b="0" lang="es-ES" sz="1400" strike="noStrike" u="none">
-                <a:solidFill>
-                  <a:srgbClr val="000000"/>
-                </a:solidFill>
-                <a:effectLst/>
-                <a:uFillTx/>
-                <a:latin typeface="Times New Roman"/>
-              </a:rPr>
-              <a:t>&lt;pie de página&gt;</a:t>
-            </a:r>
-            <a:endParaRPr b="0" lang="es-ES" sz="1400" strike="noStrike" u="none">
-              <a:solidFill>
-                <a:srgbClr val="000000"/>
-              </a:solidFill>
-              <a:effectLst/>
-              <a:uFillTx/>
-              <a:latin typeface="Times New Roman"/>
-            </a:endParaRPr>
-          </a:p>
-        </p:txBody>
-      </p:sp>
-      <p:sp>
-        <p:nvSpPr>
-          <p:cNvPr id="39" name="PlaceHolder 5"/>
-          <p:cNvSpPr>
-            <a:spLocks noGrp="1"/>
-          </p:cNvSpPr>
-          <p:nvPr>
-            <p:ph type="sldNum" idx="24"/>
-          </p:nvPr>
-        </p:nvSpPr>
-        <p:spPr>
-          <a:xfrm>
-            <a:off x="8610480" y="6356520"/>
-            <a:ext cx="2741040" cy="362880"/>
-          </a:xfrm>
-          <a:prstGeom prst="rect">
-            <a:avLst/>
-          </a:prstGeom>
-          <a:noFill/>
-          <a:ln w="0">
-            <a:noFill/>
-          </a:ln>
-        </p:spPr>
-        <p:txBody>
-          <a:bodyPr lIns="91440" rIns="91440" tIns="45720" bIns="45720" anchor="ctr">
-            <a:noAutofit/>
-          </a:bodyPr>
-          <a:lstStyle>
-            <a:lvl1pPr indent="0" algn="r" defTabSz="914400">
-              <a:lnSpc>
-                <a:spcPct val="100000"/>
-              </a:lnSpc>
-              <a:buNone/>
-              <a:tabLst>
-                <a:tab algn="l" pos="0"/>
-              </a:tabLst>
-              <a:defRPr b="0" lang="en-GB" sz="1200" strike="noStrike" u="none">
-                <a:solidFill>
-                  <a:schemeClr val="dk1">
-                    <a:tint val="75000"/>
-                  </a:schemeClr>
-                </a:solidFill>
-                <a:effectLst/>
-                <a:uFillTx/>
-                <a:latin typeface="Calibri"/>
-              </a:defRPr>
-            </a:lvl1pPr>
-          </a:lstStyle>
-          <a:p>
-            <a:pPr indent="0" algn="r" defTabSz="914400">
-              <a:lnSpc>
-                <a:spcPct val="100000"/>
-              </a:lnSpc>
-              <a:buNone/>
-              <a:tabLst>
-                <a:tab algn="l" pos="0"/>
-              </a:tabLst>
-            </a:pPr>
-            <a:fld id="{F5CD131D-A592-4718-85D8-1011320ADAD7}" type="slidenum">
-              <a:rPr b="0" lang="en-GB" sz="1200" strike="noStrike" u="none">
-                <a:solidFill>
-                  <a:schemeClr val="dk1">
-                    <a:tint val="75000"/>
-                  </a:schemeClr>
-                </a:solidFill>
-                <a:effectLst/>
-                <a:uFillTx/>
-                <a:latin typeface="Calibri"/>
-              </a:rPr>
-              <a:t>&lt;número&gt;</a:t>
-            </a:fld>
-            <a:endParaRPr b="0" lang="es-ES" sz="1200" strike="noStrike" u="none">
-              <a:solidFill>
-                <a:srgbClr val="000000"/>
-              </a:solidFill>
-              <a:effectLst/>
-              <a:uFillTx/>
-              <a:latin typeface="Times New Roman"/>
-            </a:endParaRPr>
-          </a:p>
-        </p:txBody>
-      </p:sp>
-    </p:spTree>
-  </p:cSld>
-</p:sldLayout>
-</file>
-
-<file path=ppt/slideLayouts/slideLayout9.xml><?xml version="1.0" encoding="utf-8"?>
-<p:sldLayout xmlns:a="http://schemas.openxmlformats.org/drawingml/2006/main" xmlns:p="http://schemas.openxmlformats.org/presentationml/2006/main" xmlns:r="http://schemas.openxmlformats.org/officeDocument/2006/relationships" xmlns:p14="http://schemas.microsoft.com/office/powerpoint/2010/main" xmlns:p15="http://schemas.microsoft.com/office/powerpoint/2012/main" xmlns:mc="http://schemas.openxmlformats.org/markup-compatibility/2006" type="blank" preserve="1">
-  <p:cSld name="Encabezado de sección">
+<p:sldLayout xmlns:a="http://schemas.openxmlformats.org/drawingml/2006/main" xmlns:p="http://schemas.openxmlformats.org/presentationml/2006/main" xmlns:r="http://schemas.openxmlformats.org/officeDocument/2006/relationships" xmlns:p14="http://schemas.microsoft.com/office/powerpoint/2010/main" xmlns:p15="http://schemas.microsoft.com/office/powerpoint/2012/main" xmlns:mc="http://schemas.openxmlformats.org/markup-compatibility/2006" type="title" preserve="1">
+  <p:cSld name="Diapositiva de título">
     <p:bg>
       <p:bgPr>
         <a:solidFill>
@@ -5736,8 +5271,8 @@
         </p:nvSpPr>
         <p:spPr>
           <a:xfrm>
-            <a:off x="831960" y="1709640"/>
-            <a:ext cx="10513440" cy="2850480"/>
+            <a:off x="1523880" y="1122480"/>
+            <a:ext cx="9141480" cy="2385000"/>
           </a:xfrm>
           <a:prstGeom prst="rect">
             <a:avLst/>
@@ -5752,7 +5287,7 @@
             <a:noAutofit/>
           </a:bodyPr>
           <a:p>
-            <a:pPr indent="0" defTabSz="914400">
+            <a:pPr indent="0" algn="ctr" defTabSz="914400">
               <a:lnSpc>
                 <a:spcPct val="90000"/>
               </a:lnSpc>
@@ -5790,13 +5325,13 @@
             <a:spLocks noGrp="1"/>
           </p:cNvSpPr>
           <p:nvPr>
-            <p:ph type="body"/>
+            <p:ph type="dt" idx="22"/>
           </p:nvPr>
         </p:nvSpPr>
         <p:spPr>
           <a:xfrm>
-            <a:off x="831960" y="4589640"/>
-            <a:ext cx="10513440" cy="1497960"/>
+            <a:off x="838080" y="6356520"/>
+            <a:ext cx="2740680" cy="362520"/>
           </a:xfrm>
           <a:prstGeom prst="rect">
             <a:avLst/>
@@ -5807,24 +5342,19 @@
           </a:ln>
         </p:spPr>
         <p:txBody>
-          <a:bodyPr lIns="91440" rIns="91440" tIns="45720" bIns="45720" anchor="t">
+          <a:bodyPr lIns="91440" rIns="91440" tIns="45720" bIns="45720" anchor="ctr">
             <a:noAutofit/>
           </a:bodyPr>
-          <a:p>
-            <a:pPr indent="0" defTabSz="914400">
-              <a:lnSpc>
-                <a:spcPct val="90000"/>
-              </a:lnSpc>
-              <a:spcBef>
-                <a:spcPts val="1001"/>
-              </a:spcBef>
-              <a:buNone/>
-              <a:tabLst>
-                <a:tab algn="l" pos="0"/>
-              </a:tabLst>
-            </a:pPr>
-            <a:r>
-              <a:rPr b="0" lang="es-ES" sz="2400" strike="noStrike" u="none">
+          <a:lstStyle>
+            <a:lvl1pPr indent="0" defTabSz="914400">
+              <a:lnSpc>
+                <a:spcPct val="100000"/>
+              </a:lnSpc>
+              <a:buNone/>
+              <a:tabLst>
+                <a:tab algn="l" pos="0"/>
+              </a:tabLst>
+              <a:defRPr b="0" lang="en-GB" sz="1200" strike="noStrike" u="none">
                 <a:solidFill>
                   <a:schemeClr val="dk1">
                     <a:tint val="75000"/>
@@ -5833,16 +5363,39 @@
                 <a:effectLst/>
                 <a:uFillTx/>
                 <a:latin typeface="Calibri"/>
-              </a:rPr>
-              <a:t>Haga clic para modificar los estilos de texto del patrón</a:t>
-            </a:r>
-            <a:endParaRPr b="0" lang="es-ES" sz="2400" strike="noStrike" u="none">
-              <a:solidFill>
-                <a:srgbClr val="000000"/>
-              </a:solidFill>
-              <a:effectLst/>
-              <a:uFillTx/>
-              <a:latin typeface="Arial"/>
+              </a:defRPr>
+            </a:lvl1pPr>
+          </a:lstStyle>
+          <a:p>
+            <a:pPr indent="0" defTabSz="914400">
+              <a:lnSpc>
+                <a:spcPct val="100000"/>
+              </a:lnSpc>
+              <a:buNone/>
+              <a:tabLst>
+                <a:tab algn="l" pos="0"/>
+              </a:tabLst>
+            </a:pPr>
+            <a:r>
+              <a:rPr b="0" lang="en-GB" sz="1200" strike="noStrike" u="none">
+                <a:solidFill>
+                  <a:schemeClr val="dk1">
+                    <a:tint val="75000"/>
+                  </a:schemeClr>
+                </a:solidFill>
+                <a:effectLst/>
+                <a:uFillTx/>
+                <a:latin typeface="Calibri"/>
+              </a:rPr>
+              <a:t>&lt;fecha/hora&gt;</a:t>
+            </a:r>
+            <a:endParaRPr b="0" lang="es-ES" sz="1200" strike="noStrike" u="none">
+              <a:solidFill>
+                <a:srgbClr val="000000"/>
+              </a:solidFill>
+              <a:effectLst/>
+              <a:uFillTx/>
+              <a:latin typeface="Times New Roman"/>
             </a:endParaRPr>
           </a:p>
         </p:txBody>
@@ -5854,13 +5407,13 @@
             <a:spLocks noGrp="1"/>
           </p:cNvSpPr>
           <p:nvPr>
-            <p:ph type="dt" idx="25"/>
+            <p:ph type="ftr" idx="23"/>
           </p:nvPr>
         </p:nvSpPr>
         <p:spPr>
           <a:xfrm>
-            <a:off x="838080" y="6356520"/>
-            <a:ext cx="2741040" cy="362880"/>
+            <a:off x="4038480" y="6356520"/>
+            <a:ext cx="4112280" cy="362520"/>
           </a:xfrm>
           <a:prstGeom prst="rect">
             <a:avLst/>
@@ -5875,50 +5428,46 @@
             <a:noAutofit/>
           </a:bodyPr>
           <a:lstStyle>
-            <a:lvl1pPr indent="0" defTabSz="914400">
-              <a:lnSpc>
-                <a:spcPct val="100000"/>
-              </a:lnSpc>
-              <a:buNone/>
-              <a:tabLst>
-                <a:tab algn="l" pos="0"/>
-              </a:tabLst>
-              <a:defRPr b="0" lang="en-GB" sz="1200" strike="noStrike" u="none">
-                <a:solidFill>
-                  <a:schemeClr val="dk1">
-                    <a:tint val="75000"/>
-                  </a:schemeClr>
-                </a:solidFill>
-                <a:effectLst/>
-                <a:uFillTx/>
-                <a:latin typeface="Calibri"/>
+            <a:lvl1pPr indent="0" algn="ctr">
+              <a:lnSpc>
+                <a:spcPct val="100000"/>
+              </a:lnSpc>
+              <a:buNone/>
+              <a:tabLst>
+                <a:tab algn="l" pos="0"/>
+              </a:tabLst>
+              <a:defRPr b="0" lang="es-ES" sz="1400" strike="noStrike" u="none">
+                <a:solidFill>
+                  <a:srgbClr val="000000"/>
+                </a:solidFill>
+                <a:effectLst/>
+                <a:uFillTx/>
+                <a:latin typeface="Times New Roman"/>
               </a:defRPr>
             </a:lvl1pPr>
           </a:lstStyle>
           <a:p>
-            <a:pPr indent="0" defTabSz="914400">
-              <a:lnSpc>
-                <a:spcPct val="100000"/>
-              </a:lnSpc>
-              <a:buNone/>
-              <a:tabLst>
-                <a:tab algn="l" pos="0"/>
-              </a:tabLst>
-            </a:pPr>
-            <a:r>
-              <a:rPr b="0" lang="en-GB" sz="1200" strike="noStrike" u="none">
-                <a:solidFill>
-                  <a:schemeClr val="dk1">
-                    <a:tint val="75000"/>
-                  </a:schemeClr>
-                </a:solidFill>
-                <a:effectLst/>
-                <a:uFillTx/>
-                <a:latin typeface="Calibri"/>
-              </a:rPr>
-              <a:t>&lt;fecha/hora&gt;</a:t>
-            </a:r>
-            <a:endParaRPr b="0" lang="es-ES" sz="1200" strike="noStrike" u="none">
+            <a:pPr indent="0" algn="ctr">
+              <a:lnSpc>
+                <a:spcPct val="100000"/>
+              </a:lnSpc>
+              <a:buNone/>
+              <a:tabLst>
+                <a:tab algn="l" pos="0"/>
+              </a:tabLst>
+            </a:pPr>
+            <a:r>
+              <a:rPr b="0" lang="es-ES" sz="1400" strike="noStrike" u="none">
+                <a:solidFill>
+                  <a:srgbClr val="000000"/>
+                </a:solidFill>
+                <a:effectLst/>
+                <a:uFillTx/>
+                <a:latin typeface="Times New Roman"/>
+              </a:rPr>
+              <a:t>&lt;pie de página&gt;</a:t>
+            </a:r>
+            <a:endParaRPr b="0" lang="es-ES" sz="1400" strike="noStrike" u="none">
               <a:solidFill>
                 <a:srgbClr val="000000"/>
               </a:solidFill>
@@ -5936,13 +5485,464 @@
             <a:spLocks noGrp="1"/>
           </p:cNvSpPr>
           <p:nvPr>
+            <p:ph type="sldNum" idx="24"/>
+          </p:nvPr>
+        </p:nvSpPr>
+        <p:spPr>
+          <a:xfrm>
+            <a:off x="8610480" y="6356520"/>
+            <a:ext cx="2740680" cy="362520"/>
+          </a:xfrm>
+          <a:prstGeom prst="rect">
+            <a:avLst/>
+          </a:prstGeom>
+          <a:noFill/>
+          <a:ln w="0">
+            <a:noFill/>
+          </a:ln>
+        </p:spPr>
+        <p:txBody>
+          <a:bodyPr lIns="91440" rIns="91440" tIns="45720" bIns="45720" anchor="ctr">
+            <a:noAutofit/>
+          </a:bodyPr>
+          <a:lstStyle>
+            <a:lvl1pPr indent="0" algn="r" defTabSz="914400">
+              <a:lnSpc>
+                <a:spcPct val="100000"/>
+              </a:lnSpc>
+              <a:buNone/>
+              <a:tabLst>
+                <a:tab algn="l" pos="0"/>
+              </a:tabLst>
+              <a:defRPr b="0" lang="en-GB" sz="1200" strike="noStrike" u="none">
+                <a:solidFill>
+                  <a:schemeClr val="dk1">
+                    <a:tint val="75000"/>
+                  </a:schemeClr>
+                </a:solidFill>
+                <a:effectLst/>
+                <a:uFillTx/>
+                <a:latin typeface="Calibri"/>
+              </a:defRPr>
+            </a:lvl1pPr>
+          </a:lstStyle>
+          <a:p>
+            <a:pPr indent="0" algn="r" defTabSz="914400">
+              <a:lnSpc>
+                <a:spcPct val="100000"/>
+              </a:lnSpc>
+              <a:buNone/>
+              <a:tabLst>
+                <a:tab algn="l" pos="0"/>
+              </a:tabLst>
+            </a:pPr>
+            <a:fld id="{C9FE6D27-B38F-4F80-A351-564724B74E84}" type="slidenum">
+              <a:rPr b="0" lang="en-GB" sz="1200" strike="noStrike" u="none">
+                <a:solidFill>
+                  <a:schemeClr val="dk1">
+                    <a:tint val="75000"/>
+                  </a:schemeClr>
+                </a:solidFill>
+                <a:effectLst/>
+                <a:uFillTx/>
+                <a:latin typeface="Calibri"/>
+              </a:rPr>
+              <a:t>&lt;número&gt;</a:t>
+            </a:fld>
+            <a:endParaRPr b="0" lang="es-ES" sz="1200" strike="noStrike" u="none">
+              <a:solidFill>
+                <a:srgbClr val="000000"/>
+              </a:solidFill>
+              <a:effectLst/>
+              <a:uFillTx/>
+              <a:latin typeface="Times New Roman"/>
+            </a:endParaRPr>
+          </a:p>
+        </p:txBody>
+      </p:sp>
+    </p:spTree>
+  </p:cSld>
+</p:sldLayout>
+</file>
+
+<file path=ppt/slideLayouts/slideLayout9.xml><?xml version="1.0" encoding="utf-8"?>
+<p:sldLayout xmlns:a="http://schemas.openxmlformats.org/drawingml/2006/main" xmlns:p="http://schemas.openxmlformats.org/presentationml/2006/main" xmlns:r="http://schemas.openxmlformats.org/officeDocument/2006/relationships" xmlns:p14="http://schemas.microsoft.com/office/powerpoint/2010/main" xmlns:p15="http://schemas.microsoft.com/office/powerpoint/2012/main" xmlns:mc="http://schemas.openxmlformats.org/markup-compatibility/2006" type="vertTx" preserve="1">
+  <p:cSld name="Título y texto vertical">
+    <p:bg>
+      <p:bgPr>
+        <a:solidFill>
+          <a:srgbClr val="ffffff"/>
+        </a:solidFill>
+      </p:bgPr>
+    </p:bg>
+    <p:spTree>
+      <p:nvGrpSpPr>
+        <p:cNvPr id="1" name=""/>
+        <p:cNvGrpSpPr/>
+        <p:nvPr/>
+      </p:nvGrpSpPr>
+      <p:grpSpPr>
+        <a:xfrm>
+          <a:off x="0" y="0"/>
+          <a:ext cx="0" cy="0"/>
+          <a:chOff x="0" y="0"/>
+          <a:chExt cx="0" cy="0"/>
+        </a:xfrm>
+      </p:grpSpPr>
+      <p:sp>
+        <p:nvSpPr>
+          <p:cNvPr id="44" name="PlaceHolder 1"/>
+          <p:cNvSpPr>
+            <a:spLocks noGrp="1"/>
+          </p:cNvSpPr>
+          <p:nvPr>
+            <p:ph type="title"/>
+          </p:nvPr>
+        </p:nvSpPr>
+        <p:spPr>
+          <a:xfrm>
+            <a:off x="838080" y="365040"/>
+            <a:ext cx="10513080" cy="1323000"/>
+          </a:xfrm>
+          <a:prstGeom prst="rect">
+            <a:avLst/>
+          </a:prstGeom>
+          <a:noFill/>
+          <a:ln w="0">
+            <a:noFill/>
+          </a:ln>
+        </p:spPr>
+        <p:txBody>
+          <a:bodyPr lIns="91440" rIns="91440" tIns="45720" bIns="45720" anchor="ctr">
+            <a:noAutofit/>
+          </a:bodyPr>
+          <a:p>
+            <a:pPr indent="0" defTabSz="914400">
+              <a:lnSpc>
+                <a:spcPct val="90000"/>
+              </a:lnSpc>
+              <a:buNone/>
+              <a:tabLst>
+                <a:tab algn="l" pos="0"/>
+              </a:tabLst>
+            </a:pPr>
+            <a:r>
+              <a:rPr b="0" lang="es-ES" sz="4400" strike="noStrike" u="none">
+                <a:solidFill>
+                  <a:schemeClr val="dk1"/>
+                </a:solidFill>
+                <a:effectLst/>
+                <a:uFillTx/>
+                <a:latin typeface="Calibri Light"/>
+              </a:rPr>
+              <a:t>Haga clic para modificar el estilo de título del patrón</a:t>
+            </a:r>
+            <a:endParaRPr b="0" lang="es-ES" sz="4400" strike="noStrike" u="none">
+              <a:solidFill>
+                <a:srgbClr val="000000"/>
+              </a:solidFill>
+              <a:effectLst/>
+              <a:uFillTx/>
+              <a:latin typeface="Arial"/>
+            </a:endParaRPr>
+          </a:p>
+        </p:txBody>
+      </p:sp>
+      <p:sp>
+        <p:nvSpPr>
+          <p:cNvPr id="45" name="PlaceHolder 2"/>
+          <p:cNvSpPr>
+            <a:spLocks noGrp="1"/>
+          </p:cNvSpPr>
+          <p:nvPr>
+            <p:ph type="body"/>
+          </p:nvPr>
+        </p:nvSpPr>
+        <p:spPr>
+          <a:xfrm>
+            <a:off x="838080" y="1825560"/>
+            <a:ext cx="10513080" cy="4348800"/>
+          </a:xfrm>
+          <a:prstGeom prst="rect">
+            <a:avLst/>
+          </a:prstGeom>
+          <a:noFill/>
+          <a:ln w="0">
+            <a:noFill/>
+          </a:ln>
+        </p:spPr>
+        <p:txBody>
+          <a:bodyPr lIns="91440" rIns="91440" tIns="45720" bIns="45720" anchor="t" vert="eaVert">
+            <a:noAutofit/>
+          </a:bodyPr>
+          <a:p>
+            <a:pPr marL="228600" indent="-228600" defTabSz="914400">
+              <a:lnSpc>
+                <a:spcPct val="90000"/>
+              </a:lnSpc>
+              <a:spcBef>
+                <a:spcPts val="1001"/>
+              </a:spcBef>
+              <a:buClr>
+                <a:srgbClr val="000000"/>
+              </a:buClr>
+              <a:buFont typeface="Arial"/>
+              <a:buChar char="•"/>
+            </a:pPr>
+            <a:r>
+              <a:rPr b="0" lang="es-ES" sz="2800" strike="noStrike" u="none">
+                <a:solidFill>
+                  <a:schemeClr val="dk1"/>
+                </a:solidFill>
+                <a:effectLst/>
+                <a:uFillTx/>
+                <a:latin typeface="Calibri"/>
+              </a:rPr>
+              <a:t>Haga clic para modificar los estilos de texto del patrón</a:t>
+            </a:r>
+            <a:endParaRPr b="0" lang="es-ES" sz="2800" strike="noStrike" u="none">
+              <a:solidFill>
+                <a:srgbClr val="000000"/>
+              </a:solidFill>
+              <a:effectLst/>
+              <a:uFillTx/>
+              <a:latin typeface="Arial"/>
+            </a:endParaRPr>
+          </a:p>
+          <a:p>
+            <a:pPr lvl="1" marL="685800" indent="-228600" defTabSz="914400">
+              <a:lnSpc>
+                <a:spcPct val="90000"/>
+              </a:lnSpc>
+              <a:spcBef>
+                <a:spcPts val="499"/>
+              </a:spcBef>
+              <a:buClr>
+                <a:srgbClr val="000000"/>
+              </a:buClr>
+              <a:buFont typeface="Arial"/>
+              <a:buChar char="•"/>
+            </a:pPr>
+            <a:r>
+              <a:rPr b="0" lang="es-ES" sz="2400" strike="noStrike" u="none">
+                <a:solidFill>
+                  <a:schemeClr val="dk1"/>
+                </a:solidFill>
+                <a:effectLst/>
+                <a:uFillTx/>
+                <a:latin typeface="Calibri"/>
+              </a:rPr>
+              <a:t>Segundo nivel</a:t>
+            </a:r>
+            <a:endParaRPr b="0" lang="es-ES" sz="2400" strike="noStrike" u="none">
+              <a:solidFill>
+                <a:srgbClr val="000000"/>
+              </a:solidFill>
+              <a:effectLst/>
+              <a:uFillTx/>
+              <a:latin typeface="Arial"/>
+            </a:endParaRPr>
+          </a:p>
+          <a:p>
+            <a:pPr lvl="2" marL="1143000" indent="-228600" defTabSz="914400">
+              <a:lnSpc>
+                <a:spcPct val="90000"/>
+              </a:lnSpc>
+              <a:spcBef>
+                <a:spcPts val="499"/>
+              </a:spcBef>
+              <a:buClr>
+                <a:srgbClr val="000000"/>
+              </a:buClr>
+              <a:buFont typeface="Arial"/>
+              <a:buChar char="•"/>
+            </a:pPr>
+            <a:r>
+              <a:rPr b="0" lang="es-ES" sz="2000" strike="noStrike" u="none">
+                <a:solidFill>
+                  <a:schemeClr val="dk1"/>
+                </a:solidFill>
+                <a:effectLst/>
+                <a:uFillTx/>
+                <a:latin typeface="Calibri"/>
+              </a:rPr>
+              <a:t>Tercer nivel</a:t>
+            </a:r>
+            <a:endParaRPr b="0" lang="es-ES" sz="2000" strike="noStrike" u="none">
+              <a:solidFill>
+                <a:srgbClr val="000000"/>
+              </a:solidFill>
+              <a:effectLst/>
+              <a:uFillTx/>
+              <a:latin typeface="Arial"/>
+            </a:endParaRPr>
+          </a:p>
+          <a:p>
+            <a:pPr lvl="3" marL="1600200" indent="-228600" defTabSz="914400">
+              <a:lnSpc>
+                <a:spcPct val="90000"/>
+              </a:lnSpc>
+              <a:spcBef>
+                <a:spcPts val="499"/>
+              </a:spcBef>
+              <a:buClr>
+                <a:srgbClr val="000000"/>
+              </a:buClr>
+              <a:buFont typeface="Arial"/>
+              <a:buChar char="•"/>
+            </a:pPr>
+            <a:r>
+              <a:rPr b="0" lang="es-ES" sz="1800" strike="noStrike" u="none">
+                <a:solidFill>
+                  <a:schemeClr val="dk1"/>
+                </a:solidFill>
+                <a:effectLst/>
+                <a:uFillTx/>
+                <a:latin typeface="Calibri"/>
+              </a:rPr>
+              <a:t>Cuarto nivel</a:t>
+            </a:r>
+            <a:endParaRPr b="0" lang="es-ES" sz="1800" strike="noStrike" u="none">
+              <a:solidFill>
+                <a:srgbClr val="000000"/>
+              </a:solidFill>
+              <a:effectLst/>
+              <a:uFillTx/>
+              <a:latin typeface="Arial"/>
+            </a:endParaRPr>
+          </a:p>
+          <a:p>
+            <a:pPr lvl="4" marL="2057400" indent="-228600" defTabSz="914400">
+              <a:lnSpc>
+                <a:spcPct val="90000"/>
+              </a:lnSpc>
+              <a:spcBef>
+                <a:spcPts val="499"/>
+              </a:spcBef>
+              <a:buClr>
+                <a:srgbClr val="000000"/>
+              </a:buClr>
+              <a:buFont typeface="Arial"/>
+              <a:buChar char="•"/>
+            </a:pPr>
+            <a:r>
+              <a:rPr b="0" lang="es-ES" sz="1800" strike="noStrike" u="none">
+                <a:solidFill>
+                  <a:schemeClr val="dk1"/>
+                </a:solidFill>
+                <a:effectLst/>
+                <a:uFillTx/>
+                <a:latin typeface="Calibri"/>
+              </a:rPr>
+              <a:t>Quinto nivel</a:t>
+            </a:r>
+            <a:endParaRPr b="0" lang="es-ES" sz="1800" strike="noStrike" u="none">
+              <a:solidFill>
+                <a:srgbClr val="000000"/>
+              </a:solidFill>
+              <a:effectLst/>
+              <a:uFillTx/>
+              <a:latin typeface="Arial"/>
+            </a:endParaRPr>
+          </a:p>
+        </p:txBody>
+      </p:sp>
+      <p:sp>
+        <p:nvSpPr>
+          <p:cNvPr id="46" name="PlaceHolder 3"/>
+          <p:cNvSpPr>
+            <a:spLocks noGrp="1"/>
+          </p:cNvSpPr>
+          <p:nvPr>
+            <p:ph type="dt" idx="25"/>
+          </p:nvPr>
+        </p:nvSpPr>
+        <p:spPr>
+          <a:xfrm>
+            <a:off x="838080" y="6356520"/>
+            <a:ext cx="2740680" cy="362520"/>
+          </a:xfrm>
+          <a:prstGeom prst="rect">
+            <a:avLst/>
+          </a:prstGeom>
+          <a:noFill/>
+          <a:ln w="0">
+            <a:noFill/>
+          </a:ln>
+        </p:spPr>
+        <p:txBody>
+          <a:bodyPr lIns="91440" rIns="91440" tIns="45720" bIns="45720" anchor="ctr">
+            <a:noAutofit/>
+          </a:bodyPr>
+          <a:lstStyle>
+            <a:lvl1pPr indent="0" defTabSz="914400">
+              <a:lnSpc>
+                <a:spcPct val="100000"/>
+              </a:lnSpc>
+              <a:buNone/>
+              <a:tabLst>
+                <a:tab algn="l" pos="0"/>
+              </a:tabLst>
+              <a:defRPr b="0" lang="en-GB" sz="1200" strike="noStrike" u="none">
+                <a:solidFill>
+                  <a:schemeClr val="dk1">
+                    <a:tint val="75000"/>
+                  </a:schemeClr>
+                </a:solidFill>
+                <a:effectLst/>
+                <a:uFillTx/>
+                <a:latin typeface="Calibri"/>
+              </a:defRPr>
+            </a:lvl1pPr>
+          </a:lstStyle>
+          <a:p>
+            <a:pPr indent="0" defTabSz="914400">
+              <a:lnSpc>
+                <a:spcPct val="100000"/>
+              </a:lnSpc>
+              <a:buNone/>
+              <a:tabLst>
+                <a:tab algn="l" pos="0"/>
+              </a:tabLst>
+            </a:pPr>
+            <a:r>
+              <a:rPr b="0" lang="en-GB" sz="1200" strike="noStrike" u="none">
+                <a:solidFill>
+                  <a:schemeClr val="dk1">
+                    <a:tint val="75000"/>
+                  </a:schemeClr>
+                </a:solidFill>
+                <a:effectLst/>
+                <a:uFillTx/>
+                <a:latin typeface="Calibri"/>
+              </a:rPr>
+              <a:t>&lt;fecha/hora&gt;</a:t>
+            </a:r>
+            <a:endParaRPr b="0" lang="es-ES" sz="1200" strike="noStrike" u="none">
+              <a:solidFill>
+                <a:srgbClr val="000000"/>
+              </a:solidFill>
+              <a:effectLst/>
+              <a:uFillTx/>
+              <a:latin typeface="Times New Roman"/>
+            </a:endParaRPr>
+          </a:p>
+        </p:txBody>
+      </p:sp>
+      <p:sp>
+        <p:nvSpPr>
+          <p:cNvPr id="47" name="PlaceHolder 4"/>
+          <p:cNvSpPr>
+            <a:spLocks noGrp="1"/>
+          </p:cNvSpPr>
+          <p:nvPr>
             <p:ph type="ftr" idx="26"/>
           </p:nvPr>
         </p:nvSpPr>
         <p:spPr>
           <a:xfrm>
             <a:off x="4038480" y="6356520"/>
-            <a:ext cx="4112640" cy="362880"/>
+            <a:ext cx="4112280" cy="362520"/>
           </a:xfrm>
           <a:prstGeom prst="rect">
             <a:avLst/>
@@ -6009,7 +6009,7 @@
       </p:sp>
       <p:sp>
         <p:nvSpPr>
-          <p:cNvPr id="44" name="PlaceHolder 5"/>
+          <p:cNvPr id="48" name="PlaceHolder 5"/>
           <p:cNvSpPr>
             <a:spLocks noGrp="1"/>
           </p:cNvSpPr>
@@ -6020,7 +6020,7 @@
         <p:spPr>
           <a:xfrm>
             <a:off x="8610480" y="6356520"/>
-            <a:ext cx="2741040" cy="362880"/>
+            <a:ext cx="2740680" cy="362520"/>
           </a:xfrm>
           <a:prstGeom prst="rect">
             <a:avLst/>
@@ -6065,7 +6065,7 @@
                 <a:tab algn="l" pos="0"/>
               </a:tabLst>
             </a:pPr>
-            <a:fld id="{A8170D86-5B66-4A2D-9E8B-EF78EF50125F}" type="slidenum">
+            <a:fld id="{788DD300-5090-44B9-96B6-65967370CEC8}" type="slidenum">
               <a:rPr b="0" lang="en-GB" sz="1200" strike="noStrike" u="none">
                 <a:solidFill>
                   <a:schemeClr val="dk1">
@@ -6156,7 +6156,7 @@
         <p:spPr>
           <a:xfrm>
             <a:off x="837360" y="2700000"/>
-            <a:ext cx="1560600" cy="645840"/>
+            <a:ext cx="1560240" cy="645480"/>
           </a:xfrm>
           <a:prstGeom prst="round2DiagRect">
             <a:avLst>
@@ -6225,8 +6225,8 @@
         </p:nvSpPr>
         <p:spPr>
           <a:xfrm>
-            <a:off x="2759400" y="1260000"/>
-            <a:ext cx="1560600" cy="645840"/>
+            <a:off x="2759760" y="1694520"/>
+            <a:ext cx="1560240" cy="645480"/>
           </a:xfrm>
           <a:prstGeom prst="round2DiagRect">
             <a:avLst>
@@ -6296,7 +6296,7 @@
         <p:spPr>
           <a:xfrm>
             <a:off x="5040360" y="2700360"/>
-            <a:ext cx="1560600" cy="645840"/>
+            <a:ext cx="1560240" cy="645480"/>
           </a:xfrm>
           <a:prstGeom prst="round2DiagRect">
             <a:avLst>
@@ -6366,7 +6366,7 @@
         <p:spPr>
           <a:xfrm>
             <a:off x="2759400" y="3420000"/>
-            <a:ext cx="1560600" cy="645840"/>
+            <a:ext cx="1560240" cy="645480"/>
           </a:xfrm>
           <a:prstGeom prst="round2DiagRect">
             <a:avLst>
@@ -6436,7 +6436,7 @@
         <p:spPr>
           <a:xfrm>
             <a:off x="105480" y="175320"/>
-            <a:ext cx="2773080" cy="363960"/>
+            <a:ext cx="2772720" cy="363960"/>
           </a:xfrm>
           <a:prstGeom prst="rect">
             <a:avLst/>
@@ -6495,8 +6495,8 @@
         </p:nvCxnSpPr>
         <p:spPr>
           <a:xfrm flipV="1">
-            <a:off x="1617480" y="1582920"/>
-            <a:ext cx="1142280" cy="1117440"/>
+            <a:off x="1617480" y="2017080"/>
+            <a:ext cx="1142640" cy="683280"/>
           </a:xfrm>
           <a:prstGeom prst="straightConnector1">
             <a:avLst/>
@@ -6520,8 +6520,8 @@
         </p:nvCxnSpPr>
         <p:spPr>
           <a:xfrm flipV="1">
-            <a:off x="4320000" y="2049480"/>
-            <a:ext cx="720720" cy="1693800"/>
+            <a:off x="4319640" y="2049120"/>
+            <a:ext cx="721080" cy="1693800"/>
           </a:xfrm>
           <a:prstGeom prst="straightConnector1">
             <a:avLst/>
@@ -6545,8 +6545,8 @@
         </p:nvCxnSpPr>
         <p:spPr>
           <a:xfrm flipV="1">
-            <a:off x="4320000" y="3023280"/>
-            <a:ext cx="720720" cy="720000"/>
+            <a:off x="4319640" y="3022920"/>
+            <a:ext cx="721080" cy="720000"/>
           </a:xfrm>
           <a:prstGeom prst="straightConnector1">
             <a:avLst/>
@@ -6570,7 +6570,7 @@
         </p:nvCxnSpPr>
         <p:spPr>
           <a:xfrm>
-            <a:off x="1617480" y="3345840"/>
+            <a:off x="1617480" y="3345480"/>
             <a:ext cx="1142280" cy="397440"/>
           </a:xfrm>
           <a:prstGeom prst="straightConnector1">
@@ -6593,7 +6593,7 @@
         <p:spPr>
           <a:xfrm>
             <a:off x="5040000" y="5040720"/>
-            <a:ext cx="1560600" cy="645840"/>
+            <a:ext cx="1560240" cy="645480"/>
           </a:xfrm>
           <a:prstGeom prst="round2DiagRect">
             <a:avLst>
@@ -6663,7 +6663,7 @@
         <p:spPr>
           <a:xfrm>
             <a:off x="5040360" y="3706560"/>
-            <a:ext cx="1560600" cy="645840"/>
+            <a:ext cx="1560240" cy="645480"/>
           </a:xfrm>
           <a:prstGeom prst="round2DiagRect">
             <a:avLst>
@@ -6733,7 +6733,7 @@
         <p:spPr>
           <a:xfrm>
             <a:off x="5040360" y="1726560"/>
-            <a:ext cx="1560600" cy="645840"/>
+            <a:ext cx="1560240" cy="645480"/>
           </a:xfrm>
           <a:prstGeom prst="round2DiagRect">
             <a:avLst>
@@ -6803,7 +6803,7 @@
         <p:spPr>
           <a:xfrm>
             <a:off x="7079400" y="2700360"/>
-            <a:ext cx="1560600" cy="645840"/>
+            <a:ext cx="1560240" cy="645480"/>
           </a:xfrm>
           <a:prstGeom prst="round2DiagRect">
             <a:avLst>
@@ -6875,8 +6875,8 @@
         </p:nvCxnSpPr>
         <p:spPr>
           <a:xfrm>
-            <a:off x="6600960" y="3023280"/>
-            <a:ext cx="478800" cy="360"/>
+            <a:off x="6600600" y="3022920"/>
+            <a:ext cx="479160" cy="360"/>
           </a:xfrm>
           <a:prstGeom prst="straightConnector1">
             <a:avLst/>
@@ -6900,8 +6900,8 @@
         </p:nvCxnSpPr>
         <p:spPr>
           <a:xfrm>
-            <a:off x="4320000" y="3742920"/>
-            <a:ext cx="720360" cy="1621080"/>
+            <a:off x="4319640" y="3742560"/>
+            <a:ext cx="720720" cy="1621080"/>
           </a:xfrm>
           <a:prstGeom prst="straightConnector1">
             <a:avLst/>
@@ -6925,8 +6925,8 @@
         </p:nvCxnSpPr>
         <p:spPr>
           <a:xfrm>
-            <a:off x="4320000" y="3742920"/>
-            <a:ext cx="720720" cy="286920"/>
+            <a:off x="4319640" y="3742560"/>
+            <a:ext cx="721080" cy="286920"/>
           </a:xfrm>
           <a:prstGeom prst="straightConnector1">
             <a:avLst/>
@@ -6948,7 +6948,7 @@
         <p:spPr>
           <a:xfrm>
             <a:off x="7079400" y="3706560"/>
-            <a:ext cx="1560600" cy="645840"/>
+            <a:ext cx="1560240" cy="645480"/>
           </a:xfrm>
           <a:prstGeom prst="round2DiagRect">
             <a:avLst>
@@ -7020,8 +7020,8 @@
         </p:nvCxnSpPr>
         <p:spPr>
           <a:xfrm>
-            <a:off x="8640000" y="5903280"/>
-            <a:ext cx="419760" cy="360"/>
+            <a:off x="8639640" y="5902920"/>
+            <a:ext cx="420120" cy="360"/>
           </a:xfrm>
           <a:prstGeom prst="straightConnector1">
             <a:avLst/>
@@ -7045,8 +7045,8 @@
         </p:nvCxnSpPr>
         <p:spPr>
           <a:xfrm flipV="1">
-            <a:off x="6600600" y="5003280"/>
-            <a:ext cx="479160" cy="360720"/>
+            <a:off x="6600240" y="5002920"/>
+            <a:ext cx="479520" cy="360720"/>
           </a:xfrm>
           <a:prstGeom prst="straightConnector1">
             <a:avLst/>
@@ -7070,8 +7070,8 @@
         </p:nvCxnSpPr>
         <p:spPr>
           <a:xfrm>
-            <a:off x="6600960" y="4029480"/>
-            <a:ext cx="478800" cy="360"/>
+            <a:off x="6600600" y="4029120"/>
+            <a:ext cx="479160" cy="360"/>
           </a:xfrm>
           <a:prstGeom prst="straightConnector1">
             <a:avLst/>
@@ -7093,7 +7093,7 @@
         <p:spPr>
           <a:xfrm>
             <a:off x="7079400" y="5580360"/>
-            <a:ext cx="1560600" cy="645840"/>
+            <a:ext cx="1560240" cy="645480"/>
           </a:xfrm>
           <a:prstGeom prst="round2DiagRect">
             <a:avLst>
@@ -7163,7 +7163,7 @@
         <p:spPr>
           <a:xfrm>
             <a:off x="7079400" y="4680360"/>
-            <a:ext cx="1560600" cy="645840"/>
+            <a:ext cx="1560240" cy="645480"/>
           </a:xfrm>
           <a:prstGeom prst="round2DiagRect">
             <a:avLst>
@@ -7233,7 +7233,7 @@
         <p:spPr>
           <a:xfrm>
             <a:off x="9059400" y="5580360"/>
-            <a:ext cx="1560600" cy="645840"/>
+            <a:ext cx="1560240" cy="645480"/>
           </a:xfrm>
           <a:prstGeom prst="round2DiagRect">
             <a:avLst>
@@ -7305,128 +7305,8 @@
         </p:nvCxnSpPr>
         <p:spPr>
           <a:xfrm>
-            <a:off x="6600600" y="5363640"/>
-            <a:ext cx="479160" cy="540000"/>
-          </a:xfrm>
-          <a:prstGeom prst="straightConnector1">
-            <a:avLst/>
-          </a:prstGeom>
-          <a:ln w="0">
-            <a:solidFill>
-              <a:srgbClr val="4472c4"/>
-            </a:solidFill>
-            <a:tailEnd len="med" type="triangle" w="med"/>
-          </a:ln>
-        </p:spPr>
-      </p:cxnSp>
-      <p:sp>
-        <p:nvSpPr>
-          <p:cNvPr id="83" name="5 Redondear rectángulo de esquina diagonal 2"/>
-          <p:cNvSpPr/>
-          <p:nvPr/>
-        </p:nvSpPr>
-        <p:spPr>
-          <a:xfrm>
-            <a:off x="2759400" y="2196720"/>
-            <a:ext cx="1560600" cy="645840"/>
-          </a:xfrm>
-          <a:prstGeom prst="round2DiagRect">
-            <a:avLst>
-              <a:gd name="adj1" fmla="val 16667"/>
-              <a:gd name="adj2" fmla="val 0"/>
-            </a:avLst>
-          </a:prstGeom>
-          <a:solidFill>
-            <a:srgbClr val="ffffff"/>
-          </a:solidFill>
-          <a:ln w="28575">
-            <a:solidFill>
-              <a:srgbClr val="000000"/>
-            </a:solidFill>
-          </a:ln>
-        </p:spPr>
-        <p:style>
-          <a:lnRef idx="2">
-            <a:schemeClr val="dk1"/>
-          </a:lnRef>
-          <a:fillRef idx="1">
-            <a:schemeClr val="lt1"/>
-          </a:fillRef>
-          <a:effectRef idx="0">
-            <a:schemeClr val="dk1"/>
-          </a:effectRef>
-          <a:fontRef idx="minor"/>
-        </p:style>
-        <p:txBody>
-          <a:bodyPr lIns="90000" rIns="90000" tIns="45000" bIns="45000" anchor="ctr">
-            <a:noAutofit/>
-          </a:bodyPr>
-          <a:p>
-            <a:pPr algn="ctr" defTabSz="914400">
-              <a:lnSpc>
-                <a:spcPct val="100000"/>
-              </a:lnSpc>
-            </a:pPr>
-            <a:r>
-              <a:rPr b="0" lang="es-ES" sz="1400" strike="noStrike" u="none">
-                <a:solidFill>
-                  <a:srgbClr val="000000"/>
-                </a:solidFill>
-                <a:effectLst/>
-                <a:uFillTx/>
-                <a:latin typeface="Calibri"/>
-              </a:rPr>
-              <a:t>Confirmar registro</a:t>
-            </a:r>
-            <a:endParaRPr b="0" lang="es-ES" sz="1400" strike="noStrike" u="none">
-              <a:solidFill>
-                <a:srgbClr val="000000"/>
-              </a:solidFill>
-              <a:effectLst/>
-              <a:uFillTx/>
-              <a:latin typeface="Arial"/>
-            </a:endParaRPr>
-          </a:p>
-        </p:txBody>
-      </p:sp>
-      <p:cxnSp>
-        <p:nvCxnSpPr>
-          <p:cNvPr id="84" name="Conector recto de flecha 3"/>
-          <p:cNvCxnSpPr>
-            <a:stCxn id="60" idx="2"/>
-            <a:endCxn id="83" idx="0"/>
-          </p:cNvCxnSpPr>
-          <p:nvPr/>
-        </p:nvCxnSpPr>
-        <p:spPr>
-          <a:xfrm>
-            <a:off x="3539520" y="1905840"/>
-            <a:ext cx="360" cy="291240"/>
-          </a:xfrm>
-          <a:prstGeom prst="straightConnector1">
-            <a:avLst/>
-          </a:prstGeom>
-          <a:ln w="0">
-            <a:solidFill>
-              <a:srgbClr val="4472c4"/>
-            </a:solidFill>
-            <a:tailEnd len="med" type="triangle" w="med"/>
-          </a:ln>
-        </p:spPr>
-      </p:cxnSp>
-      <p:cxnSp>
-        <p:nvCxnSpPr>
-          <p:cNvPr id="85" name="Conector recto de flecha 7"/>
-          <p:cNvCxnSpPr>
-            <a:stCxn id="83" idx="1"/>
-            <a:endCxn id="59" idx="3"/>
-          </p:cNvCxnSpPr>
-          <p:nvPr/>
-        </p:nvCxnSpPr>
-        <p:spPr>
-          <a:xfrm flipH="1">
-            <a:off x="2397960" y="2519640"/>
-            <a:ext cx="361800" cy="503640"/>
+            <a:off x="6600240" y="5363280"/>
+            <a:ext cx="479520" cy="540000"/>
           </a:xfrm>
           <a:prstGeom prst="straightConnector1">
             <a:avLst/>

--- a/docs/Diagrama_de_contenidos.pptx
+++ b/docs/Diagrama_de_contenidos.pptx
@@ -13,8 +13,8 @@
 </file>
 
 <file path=ppt/slideLayouts/slideLayout1.xml><?xml version="1.0" encoding="utf-8"?>
-<p:sldLayout xmlns:a="http://schemas.openxmlformats.org/drawingml/2006/main" xmlns:p="http://schemas.openxmlformats.org/presentationml/2006/main" xmlns:r="http://schemas.openxmlformats.org/officeDocument/2006/relationships" xmlns:p14="http://schemas.microsoft.com/office/powerpoint/2010/main" xmlns:p15="http://schemas.microsoft.com/office/powerpoint/2012/main" xmlns:mc="http://schemas.openxmlformats.org/markup-compatibility/2006" type="titleOnly" preserve="1">
-  <p:cSld name="Solo el título">
+<p:sldLayout xmlns:a="http://schemas.openxmlformats.org/drawingml/2006/main" xmlns:p="http://schemas.openxmlformats.org/presentationml/2006/main" xmlns:r="http://schemas.openxmlformats.org/officeDocument/2006/relationships" xmlns:p14="http://schemas.microsoft.com/office/powerpoint/2010/main" xmlns:p15="http://schemas.microsoft.com/office/powerpoint/2012/main" xmlns:mc="http://schemas.openxmlformats.org/markup-compatibility/2006" type="vertTx" preserve="1">
+  <p:cSld name="Título y texto vertical">
     <p:bg>
       <p:bgPr>
         <a:solidFill>
@@ -49,7 +49,7 @@
         <p:spPr>
           <a:xfrm>
             <a:off x="838080" y="365040"/>
-            <a:ext cx="10513440" cy="1323360"/>
+            <a:ext cx="10512720" cy="1322640"/>
           </a:xfrm>
           <a:prstGeom prst="rect">
             <a:avLst/>
@@ -102,13 +102,13 @@
             <a:spLocks noGrp="1"/>
           </p:cNvSpPr>
           <p:nvPr>
-            <p:ph type="dt" idx="1"/>
+            <p:ph type="body"/>
           </p:nvPr>
         </p:nvSpPr>
         <p:spPr>
           <a:xfrm>
-            <a:off x="838080" y="6356520"/>
-            <a:ext cx="2741040" cy="362880"/>
+            <a:off x="838080" y="1825560"/>
+            <a:ext cx="10512720" cy="4348440"/>
           </a:xfrm>
           <a:prstGeom prst="rect">
             <a:avLst/>
@@ -119,60 +119,177 @@
           </a:ln>
         </p:spPr>
         <p:txBody>
-          <a:bodyPr lIns="91440" rIns="91440" tIns="45720" bIns="45720" anchor="ctr">
+          <a:bodyPr lIns="91440" rIns="91440" tIns="45720" bIns="45720" anchor="t" vert="eaVert">
             <a:noAutofit/>
           </a:bodyPr>
-          <a:lstStyle>
-            <a:lvl1pPr indent="0" defTabSz="914400">
-              <a:lnSpc>
-                <a:spcPct val="100000"/>
-              </a:lnSpc>
-              <a:buNone/>
-              <a:tabLst>
-                <a:tab algn="l" pos="0"/>
-              </a:tabLst>
-              <a:defRPr b="0" lang="en-GB" sz="1200" strike="noStrike" u="none">
-                <a:solidFill>
-                  <a:schemeClr val="dk1">
-                    <a:tint val="75000"/>
-                  </a:schemeClr>
-                </a:solidFill>
-                <a:effectLst/>
-                <a:uFillTx/>
-                <a:latin typeface="Calibri"/>
-              </a:defRPr>
-            </a:lvl1pPr>
-          </a:lstStyle>
-          <a:p>
-            <a:pPr indent="0" defTabSz="914400">
-              <a:lnSpc>
-                <a:spcPct val="100000"/>
-              </a:lnSpc>
-              <a:buNone/>
-              <a:tabLst>
-                <a:tab algn="l" pos="0"/>
-              </a:tabLst>
-            </a:pPr>
-            <a:r>
-              <a:rPr b="0" lang="en-GB" sz="1200" strike="noStrike" u="none">
-                <a:solidFill>
-                  <a:schemeClr val="dk1">
-                    <a:tint val="75000"/>
-                  </a:schemeClr>
-                </a:solidFill>
-                <a:effectLst/>
-                <a:uFillTx/>
-                <a:latin typeface="Calibri"/>
-              </a:rPr>
-              <a:t>&lt;fecha/hora&gt;</a:t>
-            </a:r>
-            <a:endParaRPr b="0" lang="es-ES" sz="1200" strike="noStrike" u="none">
-              <a:solidFill>
-                <a:srgbClr val="000000"/>
-              </a:solidFill>
-              <a:effectLst/>
-              <a:uFillTx/>
-              <a:latin typeface="Times New Roman"/>
+          <a:p>
+            <a:pPr marL="228600" indent="-228600" defTabSz="914400">
+              <a:lnSpc>
+                <a:spcPct val="90000"/>
+              </a:lnSpc>
+              <a:spcBef>
+                <a:spcPts val="1001"/>
+              </a:spcBef>
+              <a:buClr>
+                <a:srgbClr val="000000"/>
+              </a:buClr>
+              <a:buFont typeface="Arial"/>
+              <a:buChar char="•"/>
+            </a:pPr>
+            <a:r>
+              <a:rPr b="0" lang="es-ES" sz="2800" strike="noStrike" u="none">
+                <a:solidFill>
+                  <a:schemeClr val="dk1"/>
+                </a:solidFill>
+                <a:effectLst/>
+                <a:uFillTx/>
+                <a:latin typeface="Calibri"/>
+              </a:rPr>
+              <a:t>Haga clic para modificar los estilos de texto del patrón</a:t>
+            </a:r>
+            <a:endParaRPr b="0" lang="es-ES" sz="2800" strike="noStrike" u="none">
+              <a:solidFill>
+                <a:srgbClr val="000000"/>
+              </a:solidFill>
+              <a:effectLst/>
+              <a:uFillTx/>
+              <a:latin typeface="Arial"/>
+            </a:endParaRPr>
+          </a:p>
+          <a:p>
+            <a:pPr lvl="1" marL="685800" indent="-228600" defTabSz="914400">
+              <a:lnSpc>
+                <a:spcPct val="90000"/>
+              </a:lnSpc>
+              <a:spcBef>
+                <a:spcPts val="499"/>
+              </a:spcBef>
+              <a:buClr>
+                <a:srgbClr val="000000"/>
+              </a:buClr>
+              <a:buFont typeface="Arial"/>
+              <a:buChar char="•"/>
+            </a:pPr>
+            <a:r>
+              <a:rPr b="0" lang="es-ES" sz="2400" strike="noStrike" u="none">
+                <a:solidFill>
+                  <a:schemeClr val="dk1"/>
+                </a:solidFill>
+                <a:effectLst/>
+                <a:uFillTx/>
+                <a:latin typeface="Calibri"/>
+              </a:rPr>
+              <a:t>Segundo nivel</a:t>
+            </a:r>
+            <a:endParaRPr b="0" lang="es-ES" sz="2400" strike="noStrike" u="none">
+              <a:solidFill>
+                <a:srgbClr val="000000"/>
+              </a:solidFill>
+              <a:effectLst/>
+              <a:uFillTx/>
+              <a:latin typeface="Arial"/>
+            </a:endParaRPr>
+          </a:p>
+          <a:p>
+            <a:pPr lvl="2" marL="1143000" indent="-228600" defTabSz="914400">
+              <a:lnSpc>
+                <a:spcPct val="90000"/>
+              </a:lnSpc>
+              <a:spcBef>
+                <a:spcPts val="499"/>
+              </a:spcBef>
+              <a:buClr>
+                <a:srgbClr val="000000"/>
+              </a:buClr>
+              <a:buFont typeface="Arial"/>
+              <a:buChar char="•"/>
+            </a:pPr>
+            <a:r>
+              <a:rPr b="0" lang="es-ES" sz="2000" strike="noStrike" u="none">
+                <a:solidFill>
+                  <a:schemeClr val="dk1"/>
+                </a:solidFill>
+                <a:effectLst/>
+                <a:uFillTx/>
+                <a:latin typeface="Calibri"/>
+              </a:rPr>
+              <a:t>Tercer nivel</a:t>
+            </a:r>
+            <a:endParaRPr b="0" lang="es-ES" sz="2000" strike="noStrike" u="none">
+              <a:solidFill>
+                <a:srgbClr val="000000"/>
+              </a:solidFill>
+              <a:effectLst/>
+              <a:uFillTx/>
+              <a:latin typeface="Arial"/>
+            </a:endParaRPr>
+          </a:p>
+          <a:p>
+            <a:pPr lvl="3" marL="1600200" indent="-228600" defTabSz="914400">
+              <a:lnSpc>
+                <a:spcPct val="90000"/>
+              </a:lnSpc>
+              <a:spcBef>
+                <a:spcPts val="499"/>
+              </a:spcBef>
+              <a:buClr>
+                <a:srgbClr val="000000"/>
+              </a:buClr>
+              <a:buFont typeface="Arial"/>
+              <a:buChar char="•"/>
+            </a:pPr>
+            <a:r>
+              <a:rPr b="0" lang="es-ES" sz="1800" strike="noStrike" u="none">
+                <a:solidFill>
+                  <a:schemeClr val="dk1"/>
+                </a:solidFill>
+                <a:effectLst/>
+                <a:uFillTx/>
+                <a:latin typeface="Calibri"/>
+              </a:rPr>
+              <a:t>Cuarto nivel</a:t>
+            </a:r>
+            <a:endParaRPr b="0" lang="es-ES" sz="1800" strike="noStrike" u="none">
+              <a:solidFill>
+                <a:srgbClr val="000000"/>
+              </a:solidFill>
+              <a:effectLst/>
+              <a:uFillTx/>
+              <a:latin typeface="Arial"/>
+            </a:endParaRPr>
+          </a:p>
+          <a:p>
+            <a:pPr lvl="4" marL="2057400" indent="-228600" defTabSz="914400">
+              <a:lnSpc>
+                <a:spcPct val="90000"/>
+              </a:lnSpc>
+              <a:spcBef>
+                <a:spcPts val="499"/>
+              </a:spcBef>
+              <a:buClr>
+                <a:srgbClr val="000000"/>
+              </a:buClr>
+              <a:buFont typeface="Arial"/>
+              <a:buChar char="•"/>
+            </a:pPr>
+            <a:r>
+              <a:rPr b="0" lang="es-ES" sz="1800" strike="noStrike" u="none">
+                <a:solidFill>
+                  <a:schemeClr val="dk1"/>
+                </a:solidFill>
+                <a:effectLst/>
+                <a:uFillTx/>
+                <a:latin typeface="Calibri"/>
+              </a:rPr>
+              <a:t>Quinto nivel</a:t>
+            </a:r>
+            <a:endParaRPr b="0" lang="es-ES" sz="1800" strike="noStrike" u="none">
+              <a:solidFill>
+                <a:srgbClr val="000000"/>
+              </a:solidFill>
+              <a:effectLst/>
+              <a:uFillTx/>
+              <a:latin typeface="Arial"/>
             </a:endParaRPr>
           </a:p>
         </p:txBody>
@@ -184,13 +301,13 @@
             <a:spLocks noGrp="1"/>
           </p:cNvSpPr>
           <p:nvPr>
-            <p:ph type="ftr" idx="2"/>
+            <p:ph type="dt" idx="1"/>
           </p:nvPr>
         </p:nvSpPr>
         <p:spPr>
           <a:xfrm>
-            <a:off x="4038480" y="6356520"/>
-            <a:ext cx="4112640" cy="362880"/>
+            <a:off x="838080" y="6356520"/>
+            <a:ext cx="2740320" cy="362160"/>
           </a:xfrm>
           <a:prstGeom prst="rect">
             <a:avLst/>
@@ -205,46 +322,50 @@
             <a:noAutofit/>
           </a:bodyPr>
           <a:lstStyle>
-            <a:lvl1pPr indent="0" algn="ctr">
-              <a:lnSpc>
-                <a:spcPct val="100000"/>
-              </a:lnSpc>
-              <a:buNone/>
-              <a:tabLst>
-                <a:tab algn="l" pos="0"/>
-              </a:tabLst>
-              <a:defRPr b="0" lang="es-ES" sz="1400" strike="noStrike" u="none">
-                <a:solidFill>
-                  <a:srgbClr val="000000"/>
-                </a:solidFill>
-                <a:effectLst/>
-                <a:uFillTx/>
-                <a:latin typeface="Times New Roman"/>
+            <a:lvl1pPr indent="0" defTabSz="914400">
+              <a:lnSpc>
+                <a:spcPct val="100000"/>
+              </a:lnSpc>
+              <a:buNone/>
+              <a:tabLst>
+                <a:tab algn="l" pos="0"/>
+              </a:tabLst>
+              <a:defRPr b="0" lang="en-GB" sz="1200" strike="noStrike" u="none">
+                <a:solidFill>
+                  <a:schemeClr val="dk1">
+                    <a:tint val="75000"/>
+                  </a:schemeClr>
+                </a:solidFill>
+                <a:effectLst/>
+                <a:uFillTx/>
+                <a:latin typeface="Calibri"/>
               </a:defRPr>
             </a:lvl1pPr>
           </a:lstStyle>
           <a:p>
-            <a:pPr indent="0" algn="ctr">
-              <a:lnSpc>
-                <a:spcPct val="100000"/>
-              </a:lnSpc>
-              <a:buNone/>
-              <a:tabLst>
-                <a:tab algn="l" pos="0"/>
-              </a:tabLst>
-            </a:pPr>
-            <a:r>
-              <a:rPr b="0" lang="es-ES" sz="1400" strike="noStrike" u="none">
-                <a:solidFill>
-                  <a:srgbClr val="000000"/>
-                </a:solidFill>
-                <a:effectLst/>
-                <a:uFillTx/>
-                <a:latin typeface="Times New Roman"/>
-              </a:rPr>
-              <a:t>&lt;pie de página&gt;</a:t>
-            </a:r>
-            <a:endParaRPr b="0" lang="es-ES" sz="1400" strike="noStrike" u="none">
+            <a:pPr indent="0" defTabSz="914400">
+              <a:lnSpc>
+                <a:spcPct val="100000"/>
+              </a:lnSpc>
+              <a:buNone/>
+              <a:tabLst>
+                <a:tab algn="l" pos="0"/>
+              </a:tabLst>
+            </a:pPr>
+            <a:r>
+              <a:rPr b="0" lang="en-GB" sz="1200" strike="noStrike" u="none">
+                <a:solidFill>
+                  <a:schemeClr val="dk1">
+                    <a:tint val="75000"/>
+                  </a:schemeClr>
+                </a:solidFill>
+                <a:effectLst/>
+                <a:uFillTx/>
+                <a:latin typeface="Calibri"/>
+              </a:rPr>
+              <a:t>&lt;fecha/hora&gt;</a:t>
+            </a:r>
+            <a:endParaRPr b="0" lang="es-ES" sz="1200" strike="noStrike" u="none">
               <a:solidFill>
                 <a:srgbClr val="000000"/>
               </a:solidFill>
@@ -262,13 +383,91 @@
             <a:spLocks noGrp="1"/>
           </p:cNvSpPr>
           <p:nvPr>
+            <p:ph type="ftr" idx="2"/>
+          </p:nvPr>
+        </p:nvSpPr>
+        <p:spPr>
+          <a:xfrm>
+            <a:off x="4038480" y="6356520"/>
+            <a:ext cx="4111920" cy="362160"/>
+          </a:xfrm>
+          <a:prstGeom prst="rect">
+            <a:avLst/>
+          </a:prstGeom>
+          <a:noFill/>
+          <a:ln w="0">
+            <a:noFill/>
+          </a:ln>
+        </p:spPr>
+        <p:txBody>
+          <a:bodyPr lIns="91440" rIns="91440" tIns="45720" bIns="45720" anchor="ctr">
+            <a:noAutofit/>
+          </a:bodyPr>
+          <a:lstStyle>
+            <a:lvl1pPr indent="0" algn="ctr">
+              <a:lnSpc>
+                <a:spcPct val="100000"/>
+              </a:lnSpc>
+              <a:buNone/>
+              <a:tabLst>
+                <a:tab algn="l" pos="0"/>
+              </a:tabLst>
+              <a:defRPr b="0" lang="es-ES" sz="1400" strike="noStrike" u="none">
+                <a:solidFill>
+                  <a:srgbClr val="000000"/>
+                </a:solidFill>
+                <a:effectLst/>
+                <a:uFillTx/>
+                <a:latin typeface="Times New Roman"/>
+              </a:defRPr>
+            </a:lvl1pPr>
+          </a:lstStyle>
+          <a:p>
+            <a:pPr indent="0" algn="ctr">
+              <a:lnSpc>
+                <a:spcPct val="100000"/>
+              </a:lnSpc>
+              <a:buNone/>
+              <a:tabLst>
+                <a:tab algn="l" pos="0"/>
+              </a:tabLst>
+            </a:pPr>
+            <a:r>
+              <a:rPr b="0" lang="es-ES" sz="1400" strike="noStrike" u="none">
+                <a:solidFill>
+                  <a:srgbClr val="000000"/>
+                </a:solidFill>
+                <a:effectLst/>
+                <a:uFillTx/>
+                <a:latin typeface="Times New Roman"/>
+              </a:rPr>
+              <a:t>&lt;pie de página&gt;</a:t>
+            </a:r>
+            <a:endParaRPr b="0" lang="es-ES" sz="1400" strike="noStrike" u="none">
+              <a:solidFill>
+                <a:srgbClr val="000000"/>
+              </a:solidFill>
+              <a:effectLst/>
+              <a:uFillTx/>
+              <a:latin typeface="Times New Roman"/>
+            </a:endParaRPr>
+          </a:p>
+        </p:txBody>
+      </p:sp>
+      <p:sp>
+        <p:nvSpPr>
+          <p:cNvPr id="4" name="PlaceHolder 5"/>
+          <p:cNvSpPr>
+            <a:spLocks noGrp="1"/>
+          </p:cNvSpPr>
+          <p:nvPr>
             <p:ph type="sldNum" idx="3"/>
           </p:nvPr>
         </p:nvSpPr>
         <p:spPr>
           <a:xfrm>
             <a:off x="8610480" y="6356520"/>
-            <a:ext cx="2741040" cy="362880"/>
+            <a:ext cx="2740320" cy="362160"/>
           </a:xfrm>
           <a:prstGeom prst="rect">
             <a:avLst/>
@@ -313,7 +512,7 @@
                 <a:tab algn="l" pos="0"/>
               </a:tabLst>
             </a:pPr>
-            <a:fld id="{DF088368-ED64-4AD6-8304-5C38C3FBBE66}" type="slidenum">
+            <a:fld id="{4C5789D1-01F7-41D0-92BD-0FD64C31151C}" type="slidenum">
               <a:rPr b="0" lang="en-GB" sz="1200" strike="noStrike" u="none">
                 <a:solidFill>
                   <a:schemeClr val="dk1">
@@ -343,8 +542,8 @@
 </file>
 
 <file path=ppt/slideLayouts/slideLayout10.xml><?xml version="1.0" encoding="utf-8"?>
-<p:sldLayout xmlns:a="http://schemas.openxmlformats.org/drawingml/2006/main" xmlns:p="http://schemas.openxmlformats.org/presentationml/2006/main" xmlns:r="http://schemas.openxmlformats.org/officeDocument/2006/relationships" xmlns:p14="http://schemas.microsoft.com/office/powerpoint/2010/main" xmlns:p15="http://schemas.microsoft.com/office/powerpoint/2012/main" xmlns:mc="http://schemas.openxmlformats.org/markup-compatibility/2006" type="twoObj" preserve="1">
-  <p:cSld name="Dos objetos">
+<p:sldLayout xmlns:a="http://schemas.openxmlformats.org/drawingml/2006/main" xmlns:p="http://schemas.openxmlformats.org/presentationml/2006/main" xmlns:r="http://schemas.openxmlformats.org/officeDocument/2006/relationships" xmlns:p14="http://schemas.microsoft.com/office/powerpoint/2010/main" xmlns:p15="http://schemas.microsoft.com/office/powerpoint/2012/main" xmlns:mc="http://schemas.openxmlformats.org/markup-compatibility/2006" type="blank" preserve="1">
+  <p:cSld name="Imagen con título">
     <p:bg>
       <p:bgPr>
         <a:solidFill>
@@ -368,7 +567,7 @@
       </p:grpSpPr>
       <p:sp>
         <p:nvSpPr>
-          <p:cNvPr id="45" name="PlaceHolder 1"/>
+          <p:cNvPr id="49" name="PlaceHolder 1"/>
           <p:cNvSpPr>
             <a:spLocks noGrp="1"/>
           </p:cNvSpPr>
@@ -378,8 +577,8 @@
         </p:nvSpPr>
         <p:spPr>
           <a:xfrm>
-            <a:off x="838080" y="365040"/>
-            <a:ext cx="10513440" cy="1323360"/>
+            <a:off x="839880" y="457200"/>
+            <a:ext cx="3929400" cy="1597320"/>
           </a:xfrm>
           <a:prstGeom prst="rect">
             <a:avLst/>
@@ -390,7 +589,7 @@
           </a:ln>
         </p:spPr>
         <p:txBody>
-          <a:bodyPr lIns="91440" rIns="91440" tIns="45720" bIns="45720" anchor="ctr">
+          <a:bodyPr lIns="91440" rIns="91440" tIns="45720" bIns="45720" anchor="b">
             <a:noAutofit/>
           </a:bodyPr>
           <a:p>
@@ -404,7 +603,7 @@
               </a:tabLst>
             </a:pPr>
             <a:r>
-              <a:rPr b="0" lang="es-ES" sz="4400" strike="noStrike" u="none">
+              <a:rPr b="0" lang="es-ES" sz="3200" strike="noStrike" u="none">
                 <a:solidFill>
                   <a:schemeClr val="dk1"/>
                 </a:solidFill>
@@ -414,7 +613,7 @@
               </a:rPr>
               <a:t>Haga clic para modificar el estilo de título del patrón</a:t>
             </a:r>
-            <a:endParaRPr b="0" lang="es-ES" sz="4400" strike="noStrike" u="none">
+            <a:endParaRPr b="0" lang="es-ES" sz="3200" strike="noStrike" u="none">
               <a:solidFill>
                 <a:srgbClr val="000000"/>
               </a:solidFill>
@@ -427,7 +626,7 @@
       </p:sp>
       <p:sp>
         <p:nvSpPr>
-          <p:cNvPr id="46" name="PlaceHolder 2"/>
+          <p:cNvPr id="50" name="PlaceHolder 2"/>
           <p:cNvSpPr>
             <a:spLocks noGrp="1"/>
           </p:cNvSpPr>
@@ -437,8 +636,8 @@
         </p:nvSpPr>
         <p:spPr>
           <a:xfrm>
-            <a:off x="838080" y="1825560"/>
-            <a:ext cx="5179320" cy="4349160"/>
+            <a:off x="5183280" y="987480"/>
+            <a:ext cx="6169320" cy="4870800"/>
           </a:xfrm>
           <a:prstGeom prst="rect">
             <a:avLst/>
@@ -449,25 +648,26 @@
           </a:ln>
         </p:spPr>
         <p:txBody>
-          <a:bodyPr lIns="91440" rIns="91440" tIns="45720" bIns="45720" anchor="t">
+          <a:bodyPr lIns="90000" rIns="90000" tIns="45000" bIns="45000" anchor="t">
             <a:noAutofit/>
           </a:bodyPr>
           <a:p>
-            <a:pPr marL="228600" indent="-228600" defTabSz="914400">
+            <a:pPr marL="432000" indent="-324000">
               <a:lnSpc>
                 <a:spcPct val="90000"/>
               </a:lnSpc>
               <a:spcBef>
-                <a:spcPts val="1001"/>
+                <a:spcPts val="1417"/>
               </a:spcBef>
               <a:buClr>
                 <a:srgbClr val="000000"/>
               </a:buClr>
-              <a:buFont typeface="Arial"/>
-              <a:buChar char="•"/>
-            </a:pPr>
-            <a:r>
-              <a:rPr b="0" lang="es-ES" sz="2800" strike="noStrike" u="none">
+              <a:buSzPct val="45000"/>
+              <a:buFont typeface="Wingdings" charset="2"/>
+              <a:buChar char=""/>
+            </a:pPr>
+            <a:r>
+              <a:rPr b="0" lang="es-ES" sz="3200" strike="noStrike" u="none">
                 <a:solidFill>
                   <a:schemeClr val="dk1"/>
                 </a:solidFill>
@@ -475,33 +675,34 @@
                 <a:uFillTx/>
                 <a:latin typeface="Calibri"/>
               </a:rPr>
-              <a:t>Haga clic para modificar los estilos de texto del patrón</a:t>
-            </a:r>
-            <a:endParaRPr b="0" lang="es-ES" sz="2800" strike="noStrike" u="none">
-              <a:solidFill>
-                <a:srgbClr val="000000"/>
-              </a:solidFill>
-              <a:effectLst/>
-              <a:uFillTx/>
-              <a:latin typeface="Arial"/>
-            </a:endParaRPr>
-          </a:p>
-          <a:p>
-            <a:pPr lvl="1" marL="685800" indent="-228600" defTabSz="914400">
+              <a:t>Pulse para editar el formato de texto del esquema</a:t>
+            </a:r>
+            <a:endParaRPr b="0" lang="es-ES" sz="3200" strike="noStrike" u="none">
+              <a:solidFill>
+                <a:srgbClr val="000000"/>
+              </a:solidFill>
+              <a:effectLst/>
+              <a:uFillTx/>
+              <a:latin typeface="Arial"/>
+            </a:endParaRPr>
+          </a:p>
+          <a:p>
+            <a:pPr lvl="1" marL="864000" indent="-324000">
               <a:lnSpc>
                 <a:spcPct val="90000"/>
               </a:lnSpc>
               <a:spcBef>
-                <a:spcPts val="499"/>
+                <a:spcPts val="1134"/>
               </a:spcBef>
               <a:buClr>
                 <a:srgbClr val="000000"/>
               </a:buClr>
-              <a:buFont typeface="Arial"/>
-              <a:buChar char="•"/>
-            </a:pPr>
-            <a:r>
-              <a:rPr b="0" lang="es-ES" sz="2400" strike="noStrike" u="none">
+              <a:buSzPct val="75000"/>
+              <a:buFont typeface="Symbol" charset="2"/>
+              <a:buChar char=""/>
+            </a:pPr>
+            <a:r>
+              <a:rPr b="0" lang="es-ES" sz="3200" strike="noStrike" u="none">
                 <a:solidFill>
                   <a:schemeClr val="dk1"/>
                 </a:solidFill>
@@ -509,33 +710,34 @@
                 <a:uFillTx/>
                 <a:latin typeface="Calibri"/>
               </a:rPr>
-              <a:t>Segundo nivel</a:t>
-            </a:r>
-            <a:endParaRPr b="0" lang="es-ES" sz="2400" strike="noStrike" u="none">
-              <a:solidFill>
-                <a:srgbClr val="000000"/>
-              </a:solidFill>
-              <a:effectLst/>
-              <a:uFillTx/>
-              <a:latin typeface="Arial"/>
-            </a:endParaRPr>
-          </a:p>
-          <a:p>
-            <a:pPr lvl="2" marL="1143000" indent="-228600" defTabSz="914400">
+              <a:t>Segundo nivel del esquema</a:t>
+            </a:r>
+            <a:endParaRPr b="0" lang="es-ES" sz="3200" strike="noStrike" u="none">
+              <a:solidFill>
+                <a:srgbClr val="000000"/>
+              </a:solidFill>
+              <a:effectLst/>
+              <a:uFillTx/>
+              <a:latin typeface="Arial"/>
+            </a:endParaRPr>
+          </a:p>
+          <a:p>
+            <a:pPr lvl="2" marL="1296000" indent="-288000">
               <a:lnSpc>
                 <a:spcPct val="90000"/>
               </a:lnSpc>
               <a:spcBef>
-                <a:spcPts val="499"/>
+                <a:spcPts val="850"/>
               </a:spcBef>
               <a:buClr>
                 <a:srgbClr val="000000"/>
               </a:buClr>
-              <a:buFont typeface="Arial"/>
-              <a:buChar char="•"/>
-            </a:pPr>
-            <a:r>
-              <a:rPr b="0" lang="es-ES" sz="2000" strike="noStrike" u="none">
+              <a:buSzPct val="45000"/>
+              <a:buFont typeface="Wingdings" charset="2"/>
+              <a:buChar char=""/>
+            </a:pPr>
+            <a:r>
+              <a:rPr b="0" lang="es-ES" sz="3200" strike="noStrike" u="none">
                 <a:solidFill>
                   <a:schemeClr val="dk1"/>
                 </a:solidFill>
@@ -543,33 +745,34 @@
                 <a:uFillTx/>
                 <a:latin typeface="Calibri"/>
               </a:rPr>
-              <a:t>Tercer nivel</a:t>
-            </a:r>
-            <a:endParaRPr b="0" lang="es-ES" sz="2000" strike="noStrike" u="none">
-              <a:solidFill>
-                <a:srgbClr val="000000"/>
-              </a:solidFill>
-              <a:effectLst/>
-              <a:uFillTx/>
-              <a:latin typeface="Arial"/>
-            </a:endParaRPr>
-          </a:p>
-          <a:p>
-            <a:pPr lvl="3" marL="1600200" indent="-228600" defTabSz="914400">
+              <a:t>Tercer nivel del esquema</a:t>
+            </a:r>
+            <a:endParaRPr b="0" lang="es-ES" sz="3200" strike="noStrike" u="none">
+              <a:solidFill>
+                <a:srgbClr val="000000"/>
+              </a:solidFill>
+              <a:effectLst/>
+              <a:uFillTx/>
+              <a:latin typeface="Arial"/>
+            </a:endParaRPr>
+          </a:p>
+          <a:p>
+            <a:pPr lvl="3" marL="1728000" indent="-216000">
               <a:lnSpc>
                 <a:spcPct val="90000"/>
               </a:lnSpc>
               <a:spcBef>
-                <a:spcPts val="499"/>
+                <a:spcPts val="567"/>
               </a:spcBef>
               <a:buClr>
                 <a:srgbClr val="000000"/>
               </a:buClr>
-              <a:buFont typeface="Arial"/>
-              <a:buChar char="•"/>
-            </a:pPr>
-            <a:r>
-              <a:rPr b="0" lang="es-ES" sz="1800" strike="noStrike" u="none">
+              <a:buSzPct val="75000"/>
+              <a:buFont typeface="Symbol" charset="2"/>
+              <a:buChar char=""/>
+            </a:pPr>
+            <a:r>
+              <a:rPr b="0" lang="es-ES" sz="3200" strike="noStrike" u="none">
                 <a:solidFill>
                   <a:schemeClr val="dk1"/>
                 </a:solidFill>
@@ -577,33 +780,34 @@
                 <a:uFillTx/>
                 <a:latin typeface="Calibri"/>
               </a:rPr>
-              <a:t>Cuarto nivel</a:t>
-            </a:r>
-            <a:endParaRPr b="0" lang="es-ES" sz="1800" strike="noStrike" u="none">
-              <a:solidFill>
-                <a:srgbClr val="000000"/>
-              </a:solidFill>
-              <a:effectLst/>
-              <a:uFillTx/>
-              <a:latin typeface="Arial"/>
-            </a:endParaRPr>
-          </a:p>
-          <a:p>
-            <a:pPr lvl="4" marL="2057400" indent="-228600" defTabSz="914400">
+              <a:t>Cuarto nivel del esquema</a:t>
+            </a:r>
+            <a:endParaRPr b="0" lang="es-ES" sz="3200" strike="noStrike" u="none">
+              <a:solidFill>
+                <a:srgbClr val="000000"/>
+              </a:solidFill>
+              <a:effectLst/>
+              <a:uFillTx/>
+              <a:latin typeface="Arial"/>
+            </a:endParaRPr>
+          </a:p>
+          <a:p>
+            <a:pPr lvl="4" marL="2160000" indent="-216000">
               <a:lnSpc>
                 <a:spcPct val="90000"/>
               </a:lnSpc>
               <a:spcBef>
-                <a:spcPts val="499"/>
+                <a:spcPts val="283"/>
               </a:spcBef>
               <a:buClr>
                 <a:srgbClr val="000000"/>
               </a:buClr>
-              <a:buFont typeface="Arial"/>
-              <a:buChar char="•"/>
-            </a:pPr>
-            <a:r>
-              <a:rPr b="0" lang="es-ES" sz="1800" strike="noStrike" u="none">
+              <a:buSzPct val="45000"/>
+              <a:buFont typeface="Wingdings" charset="2"/>
+              <a:buChar char=""/>
+            </a:pPr>
+            <a:r>
+              <a:rPr b="0" lang="es-ES" sz="3200" strike="noStrike" u="none">
                 <a:solidFill>
                   <a:schemeClr val="dk1"/>
                 </a:solidFill>
@@ -611,9 +815,79 @@
                 <a:uFillTx/>
                 <a:latin typeface="Calibri"/>
               </a:rPr>
-              <a:t>Quinto nivel</a:t>
-            </a:r>
-            <a:endParaRPr b="0" lang="es-ES" sz="1800" strike="noStrike" u="none">
+              <a:t>Quinto nivel del esquema</a:t>
+            </a:r>
+            <a:endParaRPr b="0" lang="es-ES" sz="3200" strike="noStrike" u="none">
+              <a:solidFill>
+                <a:srgbClr val="000000"/>
+              </a:solidFill>
+              <a:effectLst/>
+              <a:uFillTx/>
+              <a:latin typeface="Arial"/>
+            </a:endParaRPr>
+          </a:p>
+          <a:p>
+            <a:pPr lvl="5" marL="2592000" indent="-216000">
+              <a:lnSpc>
+                <a:spcPct val="90000"/>
+              </a:lnSpc>
+              <a:spcBef>
+                <a:spcPts val="283"/>
+              </a:spcBef>
+              <a:buClr>
+                <a:srgbClr val="000000"/>
+              </a:buClr>
+              <a:buSzPct val="45000"/>
+              <a:buFont typeface="Wingdings" charset="2"/>
+              <a:buChar char=""/>
+            </a:pPr>
+            <a:r>
+              <a:rPr b="0" lang="es-ES" sz="3200" strike="noStrike" u="none">
+                <a:solidFill>
+                  <a:schemeClr val="dk1"/>
+                </a:solidFill>
+                <a:effectLst/>
+                <a:uFillTx/>
+                <a:latin typeface="Calibri"/>
+              </a:rPr>
+              <a:t>Sexto nivel del esquema</a:t>
+            </a:r>
+            <a:endParaRPr b="0" lang="es-ES" sz="3200" strike="noStrike" u="none">
+              <a:solidFill>
+                <a:srgbClr val="000000"/>
+              </a:solidFill>
+              <a:effectLst/>
+              <a:uFillTx/>
+              <a:latin typeface="Arial"/>
+            </a:endParaRPr>
+          </a:p>
+          <a:p>
+            <a:pPr lvl="6" marL="3024000" indent="-216000">
+              <a:lnSpc>
+                <a:spcPct val="90000"/>
+              </a:lnSpc>
+              <a:spcBef>
+                <a:spcPts val="283"/>
+              </a:spcBef>
+              <a:buClr>
+                <a:srgbClr val="000000"/>
+              </a:buClr>
+              <a:buSzPct val="45000"/>
+              <a:buFont typeface="Wingdings" charset="2"/>
+              <a:buChar char=""/>
+            </a:pPr>
+            <a:r>
+              <a:rPr b="0" lang="es-ES" sz="3200" strike="noStrike" u="none">
+                <a:solidFill>
+                  <a:schemeClr val="dk1"/>
+                </a:solidFill>
+                <a:effectLst/>
+                <a:uFillTx/>
+                <a:latin typeface="Calibri"/>
+              </a:rPr>
+              <a:t>Séptimo nivel del esquema</a:t>
+            </a:r>
+            <a:endParaRPr b="0" lang="es-ES" sz="3200" strike="noStrike" u="none">
               <a:solidFill>
                 <a:srgbClr val="000000"/>
               </a:solidFill>
@@ -626,7 +900,7 @@
       </p:sp>
       <p:sp>
         <p:nvSpPr>
-          <p:cNvPr id="47" name="PlaceHolder 3"/>
+          <p:cNvPr id="51" name="PlaceHolder 3"/>
           <p:cNvSpPr>
             <a:spLocks noGrp="1"/>
           </p:cNvSpPr>
@@ -636,8 +910,8 @@
         </p:nvSpPr>
         <p:spPr>
           <a:xfrm>
-            <a:off x="6172200" y="1825560"/>
-            <a:ext cx="5179320" cy="4349160"/>
+            <a:off x="839880" y="2057400"/>
+            <a:ext cx="3929400" cy="3808800"/>
           </a:xfrm>
           <a:prstGeom prst="rect">
             <a:avLst/>
@@ -652,21 +926,20 @@
             <a:noAutofit/>
           </a:bodyPr>
           <a:p>
-            <a:pPr marL="228600" indent="-228600" defTabSz="914400">
+            <a:pPr indent="0" defTabSz="914400">
               <a:lnSpc>
                 <a:spcPct val="90000"/>
               </a:lnSpc>
               <a:spcBef>
                 <a:spcPts val="1001"/>
               </a:spcBef>
-              <a:buClr>
-                <a:srgbClr val="000000"/>
-              </a:buClr>
-              <a:buFont typeface="Arial"/>
-              <a:buChar char="•"/>
-            </a:pPr>
-            <a:r>
-              <a:rPr b="0" lang="es-ES" sz="2800" strike="noStrike" u="none">
+              <a:buNone/>
+              <a:tabLst>
+                <a:tab algn="l" pos="0"/>
+              </a:tabLst>
+            </a:pPr>
+            <a:r>
+              <a:rPr b="0" lang="es-ES" sz="1600" strike="noStrike" u="none">
                 <a:solidFill>
                   <a:schemeClr val="dk1"/>
                 </a:solidFill>
@@ -676,143 +949,7 @@
               </a:rPr>
               <a:t>Haga clic para modificar los estilos de texto del patrón</a:t>
             </a:r>
-            <a:endParaRPr b="0" lang="es-ES" sz="2800" strike="noStrike" u="none">
-              <a:solidFill>
-                <a:srgbClr val="000000"/>
-              </a:solidFill>
-              <a:effectLst/>
-              <a:uFillTx/>
-              <a:latin typeface="Arial"/>
-            </a:endParaRPr>
-          </a:p>
-          <a:p>
-            <a:pPr lvl="1" marL="685800" indent="-228600" defTabSz="914400">
-              <a:lnSpc>
-                <a:spcPct val="90000"/>
-              </a:lnSpc>
-              <a:spcBef>
-                <a:spcPts val="499"/>
-              </a:spcBef>
-              <a:buClr>
-                <a:srgbClr val="000000"/>
-              </a:buClr>
-              <a:buFont typeface="Arial"/>
-              <a:buChar char="•"/>
-            </a:pPr>
-            <a:r>
-              <a:rPr b="0" lang="es-ES" sz="2400" strike="noStrike" u="none">
-                <a:solidFill>
-                  <a:schemeClr val="dk1"/>
-                </a:solidFill>
-                <a:effectLst/>
-                <a:uFillTx/>
-                <a:latin typeface="Calibri"/>
-              </a:rPr>
-              <a:t>Segundo nivel</a:t>
-            </a:r>
-            <a:endParaRPr b="0" lang="es-ES" sz="2400" strike="noStrike" u="none">
-              <a:solidFill>
-                <a:srgbClr val="000000"/>
-              </a:solidFill>
-              <a:effectLst/>
-              <a:uFillTx/>
-              <a:latin typeface="Arial"/>
-            </a:endParaRPr>
-          </a:p>
-          <a:p>
-            <a:pPr lvl="2" marL="1143000" indent="-228600" defTabSz="914400">
-              <a:lnSpc>
-                <a:spcPct val="90000"/>
-              </a:lnSpc>
-              <a:spcBef>
-                <a:spcPts val="499"/>
-              </a:spcBef>
-              <a:buClr>
-                <a:srgbClr val="000000"/>
-              </a:buClr>
-              <a:buFont typeface="Arial"/>
-              <a:buChar char="•"/>
-            </a:pPr>
-            <a:r>
-              <a:rPr b="0" lang="es-ES" sz="2000" strike="noStrike" u="none">
-                <a:solidFill>
-                  <a:schemeClr val="dk1"/>
-                </a:solidFill>
-                <a:effectLst/>
-                <a:uFillTx/>
-                <a:latin typeface="Calibri"/>
-              </a:rPr>
-              <a:t>Tercer nivel</a:t>
-            </a:r>
-            <a:endParaRPr b="0" lang="es-ES" sz="2000" strike="noStrike" u="none">
-              <a:solidFill>
-                <a:srgbClr val="000000"/>
-              </a:solidFill>
-              <a:effectLst/>
-              <a:uFillTx/>
-              <a:latin typeface="Arial"/>
-            </a:endParaRPr>
-          </a:p>
-          <a:p>
-            <a:pPr lvl="3" marL="1600200" indent="-228600" defTabSz="914400">
-              <a:lnSpc>
-                <a:spcPct val="90000"/>
-              </a:lnSpc>
-              <a:spcBef>
-                <a:spcPts val="499"/>
-              </a:spcBef>
-              <a:buClr>
-                <a:srgbClr val="000000"/>
-              </a:buClr>
-              <a:buFont typeface="Arial"/>
-              <a:buChar char="•"/>
-            </a:pPr>
-            <a:r>
-              <a:rPr b="0" lang="es-ES" sz="1800" strike="noStrike" u="none">
-                <a:solidFill>
-                  <a:schemeClr val="dk1"/>
-                </a:solidFill>
-                <a:effectLst/>
-                <a:uFillTx/>
-                <a:latin typeface="Calibri"/>
-              </a:rPr>
-              <a:t>Cuarto nivel</a:t>
-            </a:r>
-            <a:endParaRPr b="0" lang="es-ES" sz="1800" strike="noStrike" u="none">
-              <a:solidFill>
-                <a:srgbClr val="000000"/>
-              </a:solidFill>
-              <a:effectLst/>
-              <a:uFillTx/>
-              <a:latin typeface="Arial"/>
-            </a:endParaRPr>
-          </a:p>
-          <a:p>
-            <a:pPr lvl="4" marL="2057400" indent="-228600" defTabSz="914400">
-              <a:lnSpc>
-                <a:spcPct val="90000"/>
-              </a:lnSpc>
-              <a:spcBef>
-                <a:spcPts val="499"/>
-              </a:spcBef>
-              <a:buClr>
-                <a:srgbClr val="000000"/>
-              </a:buClr>
-              <a:buFont typeface="Arial"/>
-              <a:buChar char="•"/>
-            </a:pPr>
-            <a:r>
-              <a:rPr b="0" lang="es-ES" sz="1800" strike="noStrike" u="none">
-                <a:solidFill>
-                  <a:schemeClr val="dk1"/>
-                </a:solidFill>
-                <a:effectLst/>
-                <a:uFillTx/>
-                <a:latin typeface="Calibri"/>
-              </a:rPr>
-              <a:t>Quinto nivel</a:t>
-            </a:r>
-            <a:endParaRPr b="0" lang="es-ES" sz="1800" strike="noStrike" u="none">
+            <a:endParaRPr b="0" lang="es-ES" sz="1600" strike="noStrike" u="none">
               <a:solidFill>
                 <a:srgbClr val="000000"/>
               </a:solidFill>
@@ -825,7 +962,7 @@
       </p:sp>
       <p:sp>
         <p:nvSpPr>
-          <p:cNvPr id="48" name="PlaceHolder 4"/>
+          <p:cNvPr id="52" name="PlaceHolder 4"/>
           <p:cNvSpPr>
             <a:spLocks noGrp="1"/>
           </p:cNvSpPr>
@@ -836,7 +973,7 @@
         <p:spPr>
           <a:xfrm>
             <a:off x="838080" y="6356520"/>
-            <a:ext cx="2741040" cy="362880"/>
+            <a:ext cx="2740320" cy="362160"/>
           </a:xfrm>
           <a:prstGeom prst="rect">
             <a:avLst/>
@@ -907,7 +1044,7 @@
       </p:sp>
       <p:sp>
         <p:nvSpPr>
-          <p:cNvPr id="49" name="PlaceHolder 5"/>
+          <p:cNvPr id="53" name="PlaceHolder 5"/>
           <p:cNvSpPr>
             <a:spLocks noGrp="1"/>
           </p:cNvSpPr>
@@ -918,7 +1055,7 @@
         <p:spPr>
           <a:xfrm>
             <a:off x="4038480" y="6356520"/>
-            <a:ext cx="4112640" cy="362880"/>
+            <a:ext cx="4111920" cy="362160"/>
           </a:xfrm>
           <a:prstGeom prst="rect">
             <a:avLst/>
@@ -985,7 +1122,7 @@
       </p:sp>
       <p:sp>
         <p:nvSpPr>
-          <p:cNvPr id="50" name="PlaceHolder 6"/>
+          <p:cNvPr id="54" name="PlaceHolder 6"/>
           <p:cNvSpPr>
             <a:spLocks noGrp="1"/>
           </p:cNvSpPr>
@@ -996,7 +1133,7 @@
         <p:spPr>
           <a:xfrm>
             <a:off x="8610480" y="6356520"/>
-            <a:ext cx="2741040" cy="362880"/>
+            <a:ext cx="2740320" cy="362160"/>
           </a:xfrm>
           <a:prstGeom prst="rect">
             <a:avLst/>
@@ -1041,7 +1178,7 @@
                 <a:tab algn="l" pos="0"/>
               </a:tabLst>
             </a:pPr>
-            <a:fld id="{6662B734-280C-4FDF-BF2D-F41D1734E14A}" type="slidenum">
+            <a:fld id="{17BE844D-5FBA-4442-B236-020C42AB9191}" type="slidenum">
               <a:rPr b="0" lang="en-GB" sz="1200" strike="noStrike" u="none">
                 <a:solidFill>
                   <a:schemeClr val="dk1">
@@ -1071,8 +1208,8 @@
 </file>
 
 <file path=ppt/slideLayouts/slideLayout11.xml><?xml version="1.0" encoding="utf-8"?>
-<p:sldLayout xmlns:a="http://schemas.openxmlformats.org/drawingml/2006/main" xmlns:p="http://schemas.openxmlformats.org/presentationml/2006/main" xmlns:r="http://schemas.openxmlformats.org/officeDocument/2006/relationships" xmlns:p14="http://schemas.microsoft.com/office/powerpoint/2010/main" xmlns:p15="http://schemas.microsoft.com/office/powerpoint/2012/main" xmlns:mc="http://schemas.openxmlformats.org/markup-compatibility/2006" type="blank" preserve="1">
-  <p:cSld name="Comparación">
+<p:sldLayout xmlns:a="http://schemas.openxmlformats.org/drawingml/2006/main" xmlns:p="http://schemas.openxmlformats.org/presentationml/2006/main" xmlns:r="http://schemas.openxmlformats.org/officeDocument/2006/relationships" xmlns:p14="http://schemas.microsoft.com/office/powerpoint/2010/main" xmlns:p15="http://schemas.microsoft.com/office/powerpoint/2012/main" xmlns:mc="http://schemas.openxmlformats.org/markup-compatibility/2006" type="title" preserve="1">
+  <p:cSld name="Diapositiva de título">
     <p:bg>
       <p:bgPr>
         <a:solidFill>
@@ -1096,7 +1233,7 @@
       </p:grpSpPr>
       <p:sp>
         <p:nvSpPr>
-          <p:cNvPr id="51" name="PlaceHolder 1"/>
+          <p:cNvPr id="55" name="PlaceHolder 1"/>
           <p:cNvSpPr>
             <a:spLocks noGrp="1"/>
           </p:cNvSpPr>
@@ -1106,8 +1243,8 @@
         </p:nvSpPr>
         <p:spPr>
           <a:xfrm>
-            <a:off x="839880" y="365040"/>
-            <a:ext cx="10513440" cy="1323360"/>
+            <a:off x="1523880" y="1122480"/>
+            <a:ext cx="9141120" cy="2384640"/>
           </a:xfrm>
           <a:prstGeom prst="rect">
             <a:avLst/>
@@ -1118,11 +1255,11 @@
           </a:ln>
         </p:spPr>
         <p:txBody>
-          <a:bodyPr lIns="91440" rIns="91440" tIns="45720" bIns="45720" anchor="ctr">
+          <a:bodyPr lIns="91440" rIns="91440" tIns="45720" bIns="45720" anchor="b">
             <a:noAutofit/>
           </a:bodyPr>
           <a:p>
-            <a:pPr indent="0" defTabSz="914400">
+            <a:pPr indent="0" algn="ctr" defTabSz="914400">
               <a:lnSpc>
                 <a:spcPct val="90000"/>
               </a:lnSpc>
@@ -1132,7 +1269,7 @@
               </a:tabLst>
             </a:pPr>
             <a:r>
-              <a:rPr b="0" lang="es-ES" sz="4400" strike="noStrike" u="none">
+              <a:rPr b="0" lang="es-ES" sz="6000" strike="noStrike" u="none">
                 <a:solidFill>
                   <a:schemeClr val="dk1"/>
                 </a:solidFill>
@@ -1142,7 +1279,7 @@
               </a:rPr>
               <a:t>Haga clic para modificar el estilo de título del patrón</a:t>
             </a:r>
-            <a:endParaRPr b="0" lang="es-ES" sz="4400" strike="noStrike" u="none">
+            <a:endParaRPr b="0" lang="es-ES" sz="6000" strike="noStrike" u="none">
               <a:solidFill>
                 <a:srgbClr val="000000"/>
               </a:solidFill>
@@ -1155,529 +1292,7 @@
       </p:sp>
       <p:sp>
         <p:nvSpPr>
-          <p:cNvPr id="52" name="PlaceHolder 2"/>
-          <p:cNvSpPr>
-            <a:spLocks noGrp="1"/>
-          </p:cNvSpPr>
-          <p:nvPr>
-            <p:ph type="body"/>
-          </p:nvPr>
-        </p:nvSpPr>
-        <p:spPr>
-          <a:xfrm>
-            <a:off x="839880" y="1681200"/>
-            <a:ext cx="5155560" cy="821880"/>
-          </a:xfrm>
-          <a:prstGeom prst="rect">
-            <a:avLst/>
-          </a:prstGeom>
-          <a:noFill/>
-          <a:ln w="0">
-            <a:noFill/>
-          </a:ln>
-        </p:spPr>
-        <p:txBody>
-          <a:bodyPr lIns="91440" rIns="91440" tIns="45720" bIns="45720" anchor="b">
-            <a:noAutofit/>
-          </a:bodyPr>
-          <a:p>
-            <a:pPr indent="0" defTabSz="914400">
-              <a:lnSpc>
-                <a:spcPct val="90000"/>
-              </a:lnSpc>
-              <a:spcBef>
-                <a:spcPts val="1001"/>
-              </a:spcBef>
-              <a:buNone/>
-              <a:tabLst>
-                <a:tab algn="l" pos="0"/>
-              </a:tabLst>
-            </a:pPr>
-            <a:r>
-              <a:rPr b="1" lang="es-ES" sz="2400" strike="noStrike" u="none">
-                <a:solidFill>
-                  <a:schemeClr val="dk1"/>
-                </a:solidFill>
-                <a:effectLst/>
-                <a:uFillTx/>
-                <a:latin typeface="Calibri"/>
-              </a:rPr>
-              <a:t>Haga clic para modificar los estilos de texto del patrón</a:t>
-            </a:r>
-            <a:endParaRPr b="0" lang="es-ES" sz="2400" strike="noStrike" u="none">
-              <a:solidFill>
-                <a:srgbClr val="000000"/>
-              </a:solidFill>
-              <a:effectLst/>
-              <a:uFillTx/>
-              <a:latin typeface="Arial"/>
-            </a:endParaRPr>
-          </a:p>
-        </p:txBody>
-      </p:sp>
-      <p:sp>
-        <p:nvSpPr>
-          <p:cNvPr id="53" name="PlaceHolder 3"/>
-          <p:cNvSpPr>
-            <a:spLocks noGrp="1"/>
-          </p:cNvSpPr>
-          <p:nvPr>
-            <p:ph type="body"/>
-          </p:nvPr>
-        </p:nvSpPr>
-        <p:spPr>
-          <a:xfrm>
-            <a:off x="839880" y="2505240"/>
-            <a:ext cx="5155560" cy="3682440"/>
-          </a:xfrm>
-          <a:prstGeom prst="rect">
-            <a:avLst/>
-          </a:prstGeom>
-          <a:noFill/>
-          <a:ln w="0">
-            <a:noFill/>
-          </a:ln>
-        </p:spPr>
-        <p:txBody>
-          <a:bodyPr lIns="91440" rIns="91440" tIns="45720" bIns="45720" anchor="t">
-            <a:noAutofit/>
-          </a:bodyPr>
-          <a:p>
-            <a:pPr marL="228600" indent="-228600" defTabSz="914400">
-              <a:lnSpc>
-                <a:spcPct val="90000"/>
-              </a:lnSpc>
-              <a:spcBef>
-                <a:spcPts val="1001"/>
-              </a:spcBef>
-              <a:buClr>
-                <a:srgbClr val="000000"/>
-              </a:buClr>
-              <a:buFont typeface="Arial"/>
-              <a:buChar char="•"/>
-            </a:pPr>
-            <a:r>
-              <a:rPr b="0" lang="es-ES" sz="2800" strike="noStrike" u="none">
-                <a:solidFill>
-                  <a:schemeClr val="dk1"/>
-                </a:solidFill>
-                <a:effectLst/>
-                <a:uFillTx/>
-                <a:latin typeface="Calibri"/>
-              </a:rPr>
-              <a:t>Haga clic para modificar los estilos de texto del patrón</a:t>
-            </a:r>
-            <a:endParaRPr b="0" lang="es-ES" sz="2800" strike="noStrike" u="none">
-              <a:solidFill>
-                <a:srgbClr val="000000"/>
-              </a:solidFill>
-              <a:effectLst/>
-              <a:uFillTx/>
-              <a:latin typeface="Arial"/>
-            </a:endParaRPr>
-          </a:p>
-          <a:p>
-            <a:pPr lvl="1" marL="685800" indent="-228600" defTabSz="914400">
-              <a:lnSpc>
-                <a:spcPct val="90000"/>
-              </a:lnSpc>
-              <a:spcBef>
-                <a:spcPts val="499"/>
-              </a:spcBef>
-              <a:buClr>
-                <a:srgbClr val="000000"/>
-              </a:buClr>
-              <a:buFont typeface="Arial"/>
-              <a:buChar char="•"/>
-            </a:pPr>
-            <a:r>
-              <a:rPr b="0" lang="es-ES" sz="2400" strike="noStrike" u="none">
-                <a:solidFill>
-                  <a:schemeClr val="dk1"/>
-                </a:solidFill>
-                <a:effectLst/>
-                <a:uFillTx/>
-                <a:latin typeface="Calibri"/>
-              </a:rPr>
-              <a:t>Segundo nivel</a:t>
-            </a:r>
-            <a:endParaRPr b="0" lang="es-ES" sz="2400" strike="noStrike" u="none">
-              <a:solidFill>
-                <a:srgbClr val="000000"/>
-              </a:solidFill>
-              <a:effectLst/>
-              <a:uFillTx/>
-              <a:latin typeface="Arial"/>
-            </a:endParaRPr>
-          </a:p>
-          <a:p>
-            <a:pPr lvl="2" marL="1143000" indent="-228600" defTabSz="914400">
-              <a:lnSpc>
-                <a:spcPct val="90000"/>
-              </a:lnSpc>
-              <a:spcBef>
-                <a:spcPts val="499"/>
-              </a:spcBef>
-              <a:buClr>
-                <a:srgbClr val="000000"/>
-              </a:buClr>
-              <a:buFont typeface="Arial"/>
-              <a:buChar char="•"/>
-            </a:pPr>
-            <a:r>
-              <a:rPr b="0" lang="es-ES" sz="2000" strike="noStrike" u="none">
-                <a:solidFill>
-                  <a:schemeClr val="dk1"/>
-                </a:solidFill>
-                <a:effectLst/>
-                <a:uFillTx/>
-                <a:latin typeface="Calibri"/>
-              </a:rPr>
-              <a:t>Tercer nivel</a:t>
-            </a:r>
-            <a:endParaRPr b="0" lang="es-ES" sz="2000" strike="noStrike" u="none">
-              <a:solidFill>
-                <a:srgbClr val="000000"/>
-              </a:solidFill>
-              <a:effectLst/>
-              <a:uFillTx/>
-              <a:latin typeface="Arial"/>
-            </a:endParaRPr>
-          </a:p>
-          <a:p>
-            <a:pPr lvl="3" marL="1600200" indent="-228600" defTabSz="914400">
-              <a:lnSpc>
-                <a:spcPct val="90000"/>
-              </a:lnSpc>
-              <a:spcBef>
-                <a:spcPts val="499"/>
-              </a:spcBef>
-              <a:buClr>
-                <a:srgbClr val="000000"/>
-              </a:buClr>
-              <a:buFont typeface="Arial"/>
-              <a:buChar char="•"/>
-            </a:pPr>
-            <a:r>
-              <a:rPr b="0" lang="es-ES" sz="1800" strike="noStrike" u="none">
-                <a:solidFill>
-                  <a:schemeClr val="dk1"/>
-                </a:solidFill>
-                <a:effectLst/>
-                <a:uFillTx/>
-                <a:latin typeface="Calibri"/>
-              </a:rPr>
-              <a:t>Cuarto nivel</a:t>
-            </a:r>
-            <a:endParaRPr b="0" lang="es-ES" sz="1800" strike="noStrike" u="none">
-              <a:solidFill>
-                <a:srgbClr val="000000"/>
-              </a:solidFill>
-              <a:effectLst/>
-              <a:uFillTx/>
-              <a:latin typeface="Arial"/>
-            </a:endParaRPr>
-          </a:p>
-          <a:p>
-            <a:pPr lvl="4" marL="2057400" indent="-228600" defTabSz="914400">
-              <a:lnSpc>
-                <a:spcPct val="90000"/>
-              </a:lnSpc>
-              <a:spcBef>
-                <a:spcPts val="499"/>
-              </a:spcBef>
-              <a:buClr>
-                <a:srgbClr val="000000"/>
-              </a:buClr>
-              <a:buFont typeface="Arial"/>
-              <a:buChar char="•"/>
-            </a:pPr>
-            <a:r>
-              <a:rPr b="0" lang="es-ES" sz="1800" strike="noStrike" u="none">
-                <a:solidFill>
-                  <a:schemeClr val="dk1"/>
-                </a:solidFill>
-                <a:effectLst/>
-                <a:uFillTx/>
-                <a:latin typeface="Calibri"/>
-              </a:rPr>
-              <a:t>Quinto nivel</a:t>
-            </a:r>
-            <a:endParaRPr b="0" lang="es-ES" sz="1800" strike="noStrike" u="none">
-              <a:solidFill>
-                <a:srgbClr val="000000"/>
-              </a:solidFill>
-              <a:effectLst/>
-              <a:uFillTx/>
-              <a:latin typeface="Arial"/>
-            </a:endParaRPr>
-          </a:p>
-        </p:txBody>
-      </p:sp>
-      <p:sp>
-        <p:nvSpPr>
-          <p:cNvPr id="54" name="PlaceHolder 4"/>
-          <p:cNvSpPr>
-            <a:spLocks noGrp="1"/>
-          </p:cNvSpPr>
-          <p:nvPr>
-            <p:ph type="body"/>
-          </p:nvPr>
-        </p:nvSpPr>
-        <p:spPr>
-          <a:xfrm>
-            <a:off x="6172200" y="1681200"/>
-            <a:ext cx="5181120" cy="821880"/>
-          </a:xfrm>
-          <a:prstGeom prst="rect">
-            <a:avLst/>
-          </a:prstGeom>
-          <a:noFill/>
-          <a:ln w="0">
-            <a:noFill/>
-          </a:ln>
-        </p:spPr>
-        <p:txBody>
-          <a:bodyPr lIns="91440" rIns="91440" tIns="45720" bIns="45720" anchor="b">
-            <a:noAutofit/>
-          </a:bodyPr>
-          <a:p>
-            <a:pPr indent="0" defTabSz="914400">
-              <a:lnSpc>
-                <a:spcPct val="90000"/>
-              </a:lnSpc>
-              <a:spcBef>
-                <a:spcPts val="1001"/>
-              </a:spcBef>
-              <a:buNone/>
-              <a:tabLst>
-                <a:tab algn="l" pos="0"/>
-              </a:tabLst>
-            </a:pPr>
-            <a:r>
-              <a:rPr b="1" lang="es-ES" sz="2400" strike="noStrike" u="none">
-                <a:solidFill>
-                  <a:schemeClr val="dk1"/>
-                </a:solidFill>
-                <a:effectLst/>
-                <a:uFillTx/>
-                <a:latin typeface="Calibri"/>
-              </a:rPr>
-              <a:t>Haga clic para modificar los estilos de texto del patrón</a:t>
-            </a:r>
-            <a:endParaRPr b="0" lang="es-ES" sz="2400" strike="noStrike" u="none">
-              <a:solidFill>
-                <a:srgbClr val="000000"/>
-              </a:solidFill>
-              <a:effectLst/>
-              <a:uFillTx/>
-              <a:latin typeface="Arial"/>
-            </a:endParaRPr>
-          </a:p>
-        </p:txBody>
-      </p:sp>
-      <p:sp>
-        <p:nvSpPr>
-          <p:cNvPr id="55" name="PlaceHolder 5"/>
-          <p:cNvSpPr>
-            <a:spLocks noGrp="1"/>
-          </p:cNvSpPr>
-          <p:nvPr>
-            <p:ph type="body"/>
-          </p:nvPr>
-        </p:nvSpPr>
-        <p:spPr>
-          <a:xfrm>
-            <a:off x="6172200" y="2505240"/>
-            <a:ext cx="5181120" cy="3682440"/>
-          </a:xfrm>
-          <a:prstGeom prst="rect">
-            <a:avLst/>
-          </a:prstGeom>
-          <a:noFill/>
-          <a:ln w="0">
-            <a:noFill/>
-          </a:ln>
-        </p:spPr>
-        <p:txBody>
-          <a:bodyPr lIns="91440" rIns="91440" tIns="45720" bIns="45720" anchor="t">
-            <a:noAutofit/>
-          </a:bodyPr>
-          <a:p>
-            <a:pPr marL="228600" indent="-228600" defTabSz="914400">
-              <a:lnSpc>
-                <a:spcPct val="90000"/>
-              </a:lnSpc>
-              <a:spcBef>
-                <a:spcPts val="1001"/>
-              </a:spcBef>
-              <a:buClr>
-                <a:srgbClr val="000000"/>
-              </a:buClr>
-              <a:buFont typeface="Arial"/>
-              <a:buChar char="•"/>
-            </a:pPr>
-            <a:r>
-              <a:rPr b="0" lang="es-ES" sz="2800" strike="noStrike" u="none">
-                <a:solidFill>
-                  <a:schemeClr val="dk1"/>
-                </a:solidFill>
-                <a:effectLst/>
-                <a:uFillTx/>
-                <a:latin typeface="Calibri"/>
-              </a:rPr>
-              <a:t>Haga clic para modificar los estilos de texto del patrón</a:t>
-            </a:r>
-            <a:endParaRPr b="0" lang="es-ES" sz="2800" strike="noStrike" u="none">
-              <a:solidFill>
-                <a:srgbClr val="000000"/>
-              </a:solidFill>
-              <a:effectLst/>
-              <a:uFillTx/>
-              <a:latin typeface="Arial"/>
-            </a:endParaRPr>
-          </a:p>
-          <a:p>
-            <a:pPr lvl="1" marL="685800" indent="-228600" defTabSz="914400">
-              <a:lnSpc>
-                <a:spcPct val="90000"/>
-              </a:lnSpc>
-              <a:spcBef>
-                <a:spcPts val="499"/>
-              </a:spcBef>
-              <a:buClr>
-                <a:srgbClr val="000000"/>
-              </a:buClr>
-              <a:buFont typeface="Arial"/>
-              <a:buChar char="•"/>
-            </a:pPr>
-            <a:r>
-              <a:rPr b="0" lang="es-ES" sz="2400" strike="noStrike" u="none">
-                <a:solidFill>
-                  <a:schemeClr val="dk1"/>
-                </a:solidFill>
-                <a:effectLst/>
-                <a:uFillTx/>
-                <a:latin typeface="Calibri"/>
-              </a:rPr>
-              <a:t>Segundo nivel</a:t>
-            </a:r>
-            <a:endParaRPr b="0" lang="es-ES" sz="2400" strike="noStrike" u="none">
-              <a:solidFill>
-                <a:srgbClr val="000000"/>
-              </a:solidFill>
-              <a:effectLst/>
-              <a:uFillTx/>
-              <a:latin typeface="Arial"/>
-            </a:endParaRPr>
-          </a:p>
-          <a:p>
-            <a:pPr lvl="2" marL="1143000" indent="-228600" defTabSz="914400">
-              <a:lnSpc>
-                <a:spcPct val="90000"/>
-              </a:lnSpc>
-              <a:spcBef>
-                <a:spcPts val="499"/>
-              </a:spcBef>
-              <a:buClr>
-                <a:srgbClr val="000000"/>
-              </a:buClr>
-              <a:buFont typeface="Arial"/>
-              <a:buChar char="•"/>
-            </a:pPr>
-            <a:r>
-              <a:rPr b="0" lang="es-ES" sz="2000" strike="noStrike" u="none">
-                <a:solidFill>
-                  <a:schemeClr val="dk1"/>
-                </a:solidFill>
-                <a:effectLst/>
-                <a:uFillTx/>
-                <a:latin typeface="Calibri"/>
-              </a:rPr>
-              <a:t>Tercer nivel</a:t>
-            </a:r>
-            <a:endParaRPr b="0" lang="es-ES" sz="2000" strike="noStrike" u="none">
-              <a:solidFill>
-                <a:srgbClr val="000000"/>
-              </a:solidFill>
-              <a:effectLst/>
-              <a:uFillTx/>
-              <a:latin typeface="Arial"/>
-            </a:endParaRPr>
-          </a:p>
-          <a:p>
-            <a:pPr lvl="3" marL="1600200" indent="-228600" defTabSz="914400">
-              <a:lnSpc>
-                <a:spcPct val="90000"/>
-              </a:lnSpc>
-              <a:spcBef>
-                <a:spcPts val="499"/>
-              </a:spcBef>
-              <a:buClr>
-                <a:srgbClr val="000000"/>
-              </a:buClr>
-              <a:buFont typeface="Arial"/>
-              <a:buChar char="•"/>
-            </a:pPr>
-            <a:r>
-              <a:rPr b="0" lang="es-ES" sz="1800" strike="noStrike" u="none">
-                <a:solidFill>
-                  <a:schemeClr val="dk1"/>
-                </a:solidFill>
-                <a:effectLst/>
-                <a:uFillTx/>
-                <a:latin typeface="Calibri"/>
-              </a:rPr>
-              <a:t>Cuarto nivel</a:t>
-            </a:r>
-            <a:endParaRPr b="0" lang="es-ES" sz="1800" strike="noStrike" u="none">
-              <a:solidFill>
-                <a:srgbClr val="000000"/>
-              </a:solidFill>
-              <a:effectLst/>
-              <a:uFillTx/>
-              <a:latin typeface="Arial"/>
-            </a:endParaRPr>
-          </a:p>
-          <a:p>
-            <a:pPr lvl="4" marL="2057400" indent="-228600" defTabSz="914400">
-              <a:lnSpc>
-                <a:spcPct val="90000"/>
-              </a:lnSpc>
-              <a:spcBef>
-                <a:spcPts val="499"/>
-              </a:spcBef>
-              <a:buClr>
-                <a:srgbClr val="000000"/>
-              </a:buClr>
-              <a:buFont typeface="Arial"/>
-              <a:buChar char="•"/>
-            </a:pPr>
-            <a:r>
-              <a:rPr b="0" lang="es-ES" sz="1800" strike="noStrike" u="none">
-                <a:solidFill>
-                  <a:schemeClr val="dk1"/>
-                </a:solidFill>
-                <a:effectLst/>
-                <a:uFillTx/>
-                <a:latin typeface="Calibri"/>
-              </a:rPr>
-              <a:t>Quinto nivel</a:t>
-            </a:r>
-            <a:endParaRPr b="0" lang="es-ES" sz="1800" strike="noStrike" u="none">
-              <a:solidFill>
-                <a:srgbClr val="000000"/>
-              </a:solidFill>
-              <a:effectLst/>
-              <a:uFillTx/>
-              <a:latin typeface="Arial"/>
-            </a:endParaRPr>
-          </a:p>
-        </p:txBody>
-      </p:sp>
-      <p:sp>
-        <p:nvSpPr>
-          <p:cNvPr id="56" name="PlaceHolder 6"/>
+          <p:cNvPr id="56" name="PlaceHolder 2"/>
           <p:cNvSpPr>
             <a:spLocks noGrp="1"/>
           </p:cNvSpPr>
@@ -1688,7 +1303,7 @@
         <p:spPr>
           <a:xfrm>
             <a:off x="838080" y="6356520"/>
-            <a:ext cx="2741040" cy="362880"/>
+            <a:ext cx="2740320" cy="362160"/>
           </a:xfrm>
           <a:prstGeom prst="rect">
             <a:avLst/>
@@ -1759,7 +1374,7 @@
       </p:sp>
       <p:sp>
         <p:nvSpPr>
-          <p:cNvPr id="57" name="PlaceHolder 7"/>
+          <p:cNvPr id="57" name="PlaceHolder 3"/>
           <p:cNvSpPr>
             <a:spLocks noGrp="1"/>
           </p:cNvSpPr>
@@ -1770,7 +1385,7 @@
         <p:spPr>
           <a:xfrm>
             <a:off x="4038480" y="6356520"/>
-            <a:ext cx="4112640" cy="362880"/>
+            <a:ext cx="4111920" cy="362160"/>
           </a:xfrm>
           <a:prstGeom prst="rect">
             <a:avLst/>
@@ -1837,7 +1452,7 @@
       </p:sp>
       <p:sp>
         <p:nvSpPr>
-          <p:cNvPr id="58" name="PlaceHolder 8"/>
+          <p:cNvPr id="58" name="PlaceHolder 4"/>
           <p:cNvSpPr>
             <a:spLocks noGrp="1"/>
           </p:cNvSpPr>
@@ -1848,7 +1463,7 @@
         <p:spPr>
           <a:xfrm>
             <a:off x="8610480" y="6356520"/>
-            <a:ext cx="2741040" cy="362880"/>
+            <a:ext cx="2740320" cy="362160"/>
           </a:xfrm>
           <a:prstGeom prst="rect">
             <a:avLst/>
@@ -1893,7 +1508,7 @@
                 <a:tab algn="l" pos="0"/>
               </a:tabLst>
             </a:pPr>
-            <a:fld id="{96F49FC8-98EA-4414-9F0F-FC27ABBA1635}" type="slidenum">
+            <a:fld id="{0649CFB8-0749-43DD-AB5C-73198F2B1C31}" type="slidenum">
               <a:rPr b="0" lang="en-GB" sz="1200" strike="noStrike" u="none">
                 <a:solidFill>
                   <a:schemeClr val="dk1">
@@ -1923,8 +1538,8 @@
 </file>
 
 <file path=ppt/slideLayouts/slideLayout2.xml><?xml version="1.0" encoding="utf-8"?>
-<p:sldLayout xmlns:a="http://schemas.openxmlformats.org/drawingml/2006/main" xmlns:p="http://schemas.openxmlformats.org/presentationml/2006/main" xmlns:r="http://schemas.openxmlformats.org/officeDocument/2006/relationships" xmlns:p14="http://schemas.microsoft.com/office/powerpoint/2010/main" xmlns:p15="http://schemas.microsoft.com/office/powerpoint/2012/main" xmlns:mc="http://schemas.openxmlformats.org/markup-compatibility/2006" type="blank" preserve="1">
-  <p:cSld name="En blanco">
+<p:sldLayout xmlns:a="http://schemas.openxmlformats.org/drawingml/2006/main" xmlns:p="http://schemas.openxmlformats.org/presentationml/2006/main" xmlns:r="http://schemas.openxmlformats.org/officeDocument/2006/relationships" xmlns:p14="http://schemas.microsoft.com/office/powerpoint/2010/main" xmlns:p15="http://schemas.microsoft.com/office/powerpoint/2012/main" xmlns:mc="http://schemas.openxmlformats.org/markup-compatibility/2006" type="vertTitleAndTx" preserve="1">
+  <p:cSld name="Título vertical y texto">
     <p:bg>
       <p:bgPr>
         <a:solidFill>
@@ -1948,7 +1563,265 @@
       </p:grpSpPr>
       <p:sp>
         <p:nvSpPr>
-          <p:cNvPr id="4" name="PlaceHolder 1"/>
+          <p:cNvPr id="5" name="PlaceHolder 1"/>
+          <p:cNvSpPr>
+            <a:spLocks noGrp="1"/>
+          </p:cNvSpPr>
+          <p:nvPr>
+            <p:ph type="title"/>
+          </p:nvPr>
+        </p:nvSpPr>
+        <p:spPr>
+          <a:xfrm>
+            <a:off x="8724960" y="365040"/>
+            <a:ext cx="2626200" cy="5808960"/>
+          </a:xfrm>
+          <a:prstGeom prst="rect">
+            <a:avLst/>
+          </a:prstGeom>
+          <a:noFill/>
+          <a:ln w="0">
+            <a:noFill/>
+          </a:ln>
+        </p:spPr>
+        <p:txBody>
+          <a:bodyPr lIns="91440" rIns="91440" tIns="45720" bIns="45720" anchor="ctr" vert="eaVert">
+            <a:noAutofit/>
+          </a:bodyPr>
+          <a:p>
+            <a:pPr indent="0" defTabSz="914400">
+              <a:lnSpc>
+                <a:spcPct val="90000"/>
+              </a:lnSpc>
+              <a:buNone/>
+              <a:tabLst>
+                <a:tab algn="l" pos="0"/>
+              </a:tabLst>
+            </a:pPr>
+            <a:r>
+              <a:rPr b="0" lang="es-ES" sz="4400" strike="noStrike" u="none">
+                <a:solidFill>
+                  <a:schemeClr val="dk1"/>
+                </a:solidFill>
+                <a:effectLst/>
+                <a:uFillTx/>
+                <a:latin typeface="Calibri Light"/>
+              </a:rPr>
+              <a:t>Haga clic para modificar el estilo de título del patrón</a:t>
+            </a:r>
+            <a:endParaRPr b="0" lang="es-ES" sz="4400" strike="noStrike" u="none">
+              <a:solidFill>
+                <a:srgbClr val="000000"/>
+              </a:solidFill>
+              <a:effectLst/>
+              <a:uFillTx/>
+              <a:latin typeface="Arial"/>
+            </a:endParaRPr>
+          </a:p>
+        </p:txBody>
+      </p:sp>
+      <p:sp>
+        <p:nvSpPr>
+          <p:cNvPr id="6" name="PlaceHolder 2"/>
+          <p:cNvSpPr>
+            <a:spLocks noGrp="1"/>
+          </p:cNvSpPr>
+          <p:nvPr>
+            <p:ph type="body"/>
+          </p:nvPr>
+        </p:nvSpPr>
+        <p:spPr>
+          <a:xfrm>
+            <a:off x="838080" y="365040"/>
+            <a:ext cx="7731360" cy="5808960"/>
+          </a:xfrm>
+          <a:prstGeom prst="rect">
+            <a:avLst/>
+          </a:prstGeom>
+          <a:noFill/>
+          <a:ln w="0">
+            <a:noFill/>
+          </a:ln>
+        </p:spPr>
+        <p:txBody>
+          <a:bodyPr lIns="91440" rIns="91440" tIns="45720" bIns="45720" anchor="t" vert="eaVert">
+            <a:noAutofit/>
+          </a:bodyPr>
+          <a:p>
+            <a:pPr marL="228600" indent="-228600" defTabSz="914400">
+              <a:lnSpc>
+                <a:spcPct val="90000"/>
+              </a:lnSpc>
+              <a:spcBef>
+                <a:spcPts val="1001"/>
+              </a:spcBef>
+              <a:buClr>
+                <a:srgbClr val="000000"/>
+              </a:buClr>
+              <a:buFont typeface="Arial"/>
+              <a:buChar char="•"/>
+            </a:pPr>
+            <a:r>
+              <a:rPr b="0" lang="es-ES" sz="2800" strike="noStrike" u="none">
+                <a:solidFill>
+                  <a:schemeClr val="dk1"/>
+                </a:solidFill>
+                <a:effectLst/>
+                <a:uFillTx/>
+                <a:latin typeface="Calibri"/>
+              </a:rPr>
+              <a:t>Haga clic para modificar los estilos de texto del patrón</a:t>
+            </a:r>
+            <a:endParaRPr b="0" lang="es-ES" sz="2800" strike="noStrike" u="none">
+              <a:solidFill>
+                <a:srgbClr val="000000"/>
+              </a:solidFill>
+              <a:effectLst/>
+              <a:uFillTx/>
+              <a:latin typeface="Arial"/>
+            </a:endParaRPr>
+          </a:p>
+          <a:p>
+            <a:pPr lvl="1" marL="685800" indent="-228600" defTabSz="914400">
+              <a:lnSpc>
+                <a:spcPct val="90000"/>
+              </a:lnSpc>
+              <a:spcBef>
+                <a:spcPts val="499"/>
+              </a:spcBef>
+              <a:buClr>
+                <a:srgbClr val="000000"/>
+              </a:buClr>
+              <a:buFont typeface="Arial"/>
+              <a:buChar char="•"/>
+            </a:pPr>
+            <a:r>
+              <a:rPr b="0" lang="es-ES" sz="2400" strike="noStrike" u="none">
+                <a:solidFill>
+                  <a:schemeClr val="dk1"/>
+                </a:solidFill>
+                <a:effectLst/>
+                <a:uFillTx/>
+                <a:latin typeface="Calibri"/>
+              </a:rPr>
+              <a:t>Segundo nivel</a:t>
+            </a:r>
+            <a:endParaRPr b="0" lang="es-ES" sz="2400" strike="noStrike" u="none">
+              <a:solidFill>
+                <a:srgbClr val="000000"/>
+              </a:solidFill>
+              <a:effectLst/>
+              <a:uFillTx/>
+              <a:latin typeface="Arial"/>
+            </a:endParaRPr>
+          </a:p>
+          <a:p>
+            <a:pPr lvl="2" marL="1143000" indent="-228600" defTabSz="914400">
+              <a:lnSpc>
+                <a:spcPct val="90000"/>
+              </a:lnSpc>
+              <a:spcBef>
+                <a:spcPts val="499"/>
+              </a:spcBef>
+              <a:buClr>
+                <a:srgbClr val="000000"/>
+              </a:buClr>
+              <a:buFont typeface="Arial"/>
+              <a:buChar char="•"/>
+            </a:pPr>
+            <a:r>
+              <a:rPr b="0" lang="es-ES" sz="2000" strike="noStrike" u="none">
+                <a:solidFill>
+                  <a:schemeClr val="dk1"/>
+                </a:solidFill>
+                <a:effectLst/>
+                <a:uFillTx/>
+                <a:latin typeface="Calibri"/>
+              </a:rPr>
+              <a:t>Tercer nivel</a:t>
+            </a:r>
+            <a:endParaRPr b="0" lang="es-ES" sz="2000" strike="noStrike" u="none">
+              <a:solidFill>
+                <a:srgbClr val="000000"/>
+              </a:solidFill>
+              <a:effectLst/>
+              <a:uFillTx/>
+              <a:latin typeface="Arial"/>
+            </a:endParaRPr>
+          </a:p>
+          <a:p>
+            <a:pPr lvl="3" marL="1600200" indent="-228600" defTabSz="914400">
+              <a:lnSpc>
+                <a:spcPct val="90000"/>
+              </a:lnSpc>
+              <a:spcBef>
+                <a:spcPts val="499"/>
+              </a:spcBef>
+              <a:buClr>
+                <a:srgbClr val="000000"/>
+              </a:buClr>
+              <a:buFont typeface="Arial"/>
+              <a:buChar char="•"/>
+            </a:pPr>
+            <a:r>
+              <a:rPr b="0" lang="es-ES" sz="1800" strike="noStrike" u="none">
+                <a:solidFill>
+                  <a:schemeClr val="dk1"/>
+                </a:solidFill>
+                <a:effectLst/>
+                <a:uFillTx/>
+                <a:latin typeface="Calibri"/>
+              </a:rPr>
+              <a:t>Cuarto nivel</a:t>
+            </a:r>
+            <a:endParaRPr b="0" lang="es-ES" sz="1800" strike="noStrike" u="none">
+              <a:solidFill>
+                <a:srgbClr val="000000"/>
+              </a:solidFill>
+              <a:effectLst/>
+              <a:uFillTx/>
+              <a:latin typeface="Arial"/>
+            </a:endParaRPr>
+          </a:p>
+          <a:p>
+            <a:pPr lvl="4" marL="2057400" indent="-228600" defTabSz="914400">
+              <a:lnSpc>
+                <a:spcPct val="90000"/>
+              </a:lnSpc>
+              <a:spcBef>
+                <a:spcPts val="499"/>
+              </a:spcBef>
+              <a:buClr>
+                <a:srgbClr val="000000"/>
+              </a:buClr>
+              <a:buFont typeface="Arial"/>
+              <a:buChar char="•"/>
+            </a:pPr>
+            <a:r>
+              <a:rPr b="0" lang="es-ES" sz="1800" strike="noStrike" u="none">
+                <a:solidFill>
+                  <a:schemeClr val="dk1"/>
+                </a:solidFill>
+                <a:effectLst/>
+                <a:uFillTx/>
+                <a:latin typeface="Calibri"/>
+              </a:rPr>
+              <a:t>Quinto nivel</a:t>
+            </a:r>
+            <a:endParaRPr b="0" lang="es-ES" sz="1800" strike="noStrike" u="none">
+              <a:solidFill>
+                <a:srgbClr val="000000"/>
+              </a:solidFill>
+              <a:effectLst/>
+              <a:uFillTx/>
+              <a:latin typeface="Arial"/>
+            </a:endParaRPr>
+          </a:p>
+        </p:txBody>
+      </p:sp>
+      <p:sp>
+        <p:nvSpPr>
+          <p:cNvPr id="7" name="PlaceHolder 3"/>
           <p:cNvSpPr>
             <a:spLocks noGrp="1"/>
           </p:cNvSpPr>
@@ -1959,7 +1832,7 @@
         <p:spPr>
           <a:xfrm>
             <a:off x="838080" y="6356520"/>
-            <a:ext cx="2741040" cy="362880"/>
+            <a:ext cx="2740320" cy="362160"/>
           </a:xfrm>
           <a:prstGeom prst="rect">
             <a:avLst/>
@@ -2030,7 +1903,7 @@
       </p:sp>
       <p:sp>
         <p:nvSpPr>
-          <p:cNvPr id="5" name="PlaceHolder 2"/>
+          <p:cNvPr id="8" name="PlaceHolder 4"/>
           <p:cNvSpPr>
             <a:spLocks noGrp="1"/>
           </p:cNvSpPr>
@@ -2041,7 +1914,7 @@
         <p:spPr>
           <a:xfrm>
             <a:off x="4038480" y="6356520"/>
-            <a:ext cx="4112640" cy="362880"/>
+            <a:ext cx="4111920" cy="362160"/>
           </a:xfrm>
           <a:prstGeom prst="rect">
             <a:avLst/>
@@ -2108,7 +1981,7 @@
       </p:sp>
       <p:sp>
         <p:nvSpPr>
-          <p:cNvPr id="6" name="PlaceHolder 3"/>
+          <p:cNvPr id="9" name="PlaceHolder 5"/>
           <p:cNvSpPr>
             <a:spLocks noGrp="1"/>
           </p:cNvSpPr>
@@ -2119,7 +1992,7 @@
         <p:spPr>
           <a:xfrm>
             <a:off x="8610480" y="6356520"/>
-            <a:ext cx="2741040" cy="362880"/>
+            <a:ext cx="2740320" cy="362160"/>
           </a:xfrm>
           <a:prstGeom prst="rect">
             <a:avLst/>
@@ -2164,7 +2037,7 @@
                 <a:tab algn="l" pos="0"/>
               </a:tabLst>
             </a:pPr>
-            <a:fld id="{2F113924-B8C6-4971-B611-2B9AAD9CEB88}" type="slidenum">
+            <a:fld id="{4044CAFF-8BA0-4124-9DB2-77624BB7BF98}" type="slidenum">
               <a:rPr b="0" lang="en-GB" sz="1200" strike="noStrike" u="none">
                 <a:solidFill>
                   <a:schemeClr val="dk1">
@@ -2184,339 +2057,6 @@
               <a:effectLst/>
               <a:uFillTx/>
               <a:latin typeface="Times New Roman"/>
-            </a:endParaRPr>
-          </a:p>
-        </p:txBody>
-      </p:sp>
-      <p:sp>
-        <p:nvSpPr>
-          <p:cNvPr id="7" name="PlaceHolder 4"/>
-          <p:cNvSpPr>
-            <a:spLocks noGrp="1"/>
-          </p:cNvSpPr>
-          <p:nvPr>
-            <p:ph type="title"/>
-          </p:nvPr>
-        </p:nvSpPr>
-        <p:spPr>
-          <a:xfrm>
-            <a:off x="609480" y="273600"/>
-            <a:ext cx="10971000" cy="1143360"/>
-          </a:xfrm>
-          <a:prstGeom prst="rect">
-            <a:avLst/>
-          </a:prstGeom>
-          <a:noFill/>
-          <a:ln w="0">
-            <a:noFill/>
-          </a:ln>
-        </p:spPr>
-        <p:txBody>
-          <a:bodyPr lIns="0" rIns="0" tIns="0" bIns="0" anchor="ctr">
-            <a:noAutofit/>
-          </a:bodyPr>
-          <a:p>
-            <a:pPr indent="0" algn="ctr">
-              <a:lnSpc>
-                <a:spcPct val="100000"/>
-              </a:lnSpc>
-              <a:buNone/>
-              <a:tabLst>
-                <a:tab algn="l" pos="0"/>
-              </a:tabLst>
-            </a:pPr>
-            <a:r>
-              <a:rPr b="0" lang="es-ES" sz="4400" strike="noStrike" u="none">
-                <a:solidFill>
-                  <a:srgbClr val="000000"/>
-                </a:solidFill>
-                <a:effectLst/>
-                <a:uFillTx/>
-                <a:latin typeface="Arial"/>
-              </a:rPr>
-              <a:t>Pulse para editar el formato del texto de título</a:t>
-            </a:r>
-            <a:endParaRPr b="0" lang="es-ES" sz="4400" strike="noStrike" u="none">
-              <a:solidFill>
-                <a:srgbClr val="000000"/>
-              </a:solidFill>
-              <a:effectLst/>
-              <a:uFillTx/>
-              <a:latin typeface="Arial"/>
-            </a:endParaRPr>
-          </a:p>
-        </p:txBody>
-      </p:sp>
-      <p:sp>
-        <p:nvSpPr>
-          <p:cNvPr id="8" name="PlaceHolder 5"/>
-          <p:cNvSpPr>
-            <a:spLocks noGrp="1"/>
-          </p:cNvSpPr>
-          <p:nvPr>
-            <p:ph type="body"/>
-          </p:nvPr>
-        </p:nvSpPr>
-        <p:spPr>
-          <a:xfrm>
-            <a:off x="609480" y="1604520"/>
-            <a:ext cx="10971000" cy="3975840"/>
-          </a:xfrm>
-          <a:prstGeom prst="rect">
-            <a:avLst/>
-          </a:prstGeom>
-          <a:noFill/>
-          <a:ln w="0">
-            <a:noFill/>
-          </a:ln>
-        </p:spPr>
-        <p:txBody>
-          <a:bodyPr lIns="0" rIns="0" tIns="0" bIns="0" anchor="t">
-            <a:normAutofit/>
-          </a:bodyPr>
-          <a:p>
-            <a:pPr marL="432000" indent="-324000">
-              <a:lnSpc>
-                <a:spcPct val="100000"/>
-              </a:lnSpc>
-              <a:spcBef>
-                <a:spcPts val="1417"/>
-              </a:spcBef>
-              <a:buClr>
-                <a:srgbClr val="000000"/>
-              </a:buClr>
-              <a:buSzPct val="45000"/>
-              <a:buFont typeface="Wingdings" charset="2"/>
-              <a:buChar char=""/>
-            </a:pPr>
-            <a:r>
-              <a:rPr b="0" lang="es-ES" sz="3200" strike="noStrike" u="none">
-                <a:solidFill>
-                  <a:srgbClr val="000000"/>
-                </a:solidFill>
-                <a:effectLst/>
-                <a:uFillTx/>
-                <a:latin typeface="Arial"/>
-              </a:rPr>
-              <a:t>Pulse para editar el formato de texto del esquema</a:t>
-            </a:r>
-            <a:endParaRPr b="0" lang="es-ES" sz="3200" strike="noStrike" u="none">
-              <a:solidFill>
-                <a:srgbClr val="000000"/>
-              </a:solidFill>
-              <a:effectLst/>
-              <a:uFillTx/>
-              <a:latin typeface="Arial"/>
-            </a:endParaRPr>
-          </a:p>
-          <a:p>
-            <a:pPr lvl="1" marL="864000" indent="-324000">
-              <a:lnSpc>
-                <a:spcPct val="100000"/>
-              </a:lnSpc>
-              <a:spcBef>
-                <a:spcPts val="1134"/>
-              </a:spcBef>
-              <a:buClr>
-                <a:srgbClr val="000000"/>
-              </a:buClr>
-              <a:buSzPct val="75000"/>
-              <a:buFont typeface="Symbol" charset="2"/>
-              <a:buChar char=""/>
-            </a:pPr>
-            <a:r>
-              <a:rPr b="0" lang="es-ES" sz="2800" strike="noStrike" u="none">
-                <a:solidFill>
-                  <a:srgbClr val="000000"/>
-                </a:solidFill>
-                <a:effectLst/>
-                <a:uFillTx/>
-                <a:latin typeface="Arial"/>
-              </a:rPr>
-              <a:t>Segundo nivel del esquema</a:t>
-            </a:r>
-            <a:endParaRPr b="0" lang="es-ES" sz="2800" strike="noStrike" u="none">
-              <a:solidFill>
-                <a:srgbClr val="000000"/>
-              </a:solidFill>
-              <a:effectLst/>
-              <a:uFillTx/>
-              <a:latin typeface="Arial"/>
-            </a:endParaRPr>
-          </a:p>
-          <a:p>
-            <a:pPr lvl="2" marL="1296000" indent="-288000">
-              <a:lnSpc>
-                <a:spcPct val="100000"/>
-              </a:lnSpc>
-              <a:spcBef>
-                <a:spcPts val="850"/>
-              </a:spcBef>
-              <a:buClr>
-                <a:srgbClr val="000000"/>
-              </a:buClr>
-              <a:buSzPct val="45000"/>
-              <a:buFont typeface="Wingdings" charset="2"/>
-              <a:buChar char=""/>
-            </a:pPr>
-            <a:r>
-              <a:rPr b="0" lang="es-ES" sz="2400" strike="noStrike" u="none">
-                <a:solidFill>
-                  <a:srgbClr val="000000"/>
-                </a:solidFill>
-                <a:effectLst/>
-                <a:uFillTx/>
-                <a:latin typeface="Arial"/>
-              </a:rPr>
-              <a:t>Tercer nivel del esquema</a:t>
-            </a:r>
-            <a:endParaRPr b="0" lang="es-ES" sz="2400" strike="noStrike" u="none">
-              <a:solidFill>
-                <a:srgbClr val="000000"/>
-              </a:solidFill>
-              <a:effectLst/>
-              <a:uFillTx/>
-              <a:latin typeface="Arial"/>
-            </a:endParaRPr>
-          </a:p>
-          <a:p>
-            <a:pPr lvl="3" marL="1728000" indent="-216000">
-              <a:lnSpc>
-                <a:spcPct val="100000"/>
-              </a:lnSpc>
-              <a:spcBef>
-                <a:spcPts val="567"/>
-              </a:spcBef>
-              <a:buClr>
-                <a:srgbClr val="000000"/>
-              </a:buClr>
-              <a:buSzPct val="75000"/>
-              <a:buFont typeface="Symbol" charset="2"/>
-              <a:buChar char=""/>
-            </a:pPr>
-            <a:r>
-              <a:rPr b="0" lang="es-ES" sz="2000" strike="noStrike" u="none">
-                <a:solidFill>
-                  <a:srgbClr val="000000"/>
-                </a:solidFill>
-                <a:effectLst/>
-                <a:uFillTx/>
-                <a:latin typeface="Arial"/>
-              </a:rPr>
-              <a:t>Cuarto nivel del esquema</a:t>
-            </a:r>
-            <a:endParaRPr b="0" lang="es-ES" sz="2000" strike="noStrike" u="none">
-              <a:solidFill>
-                <a:srgbClr val="000000"/>
-              </a:solidFill>
-              <a:effectLst/>
-              <a:uFillTx/>
-              <a:latin typeface="Arial"/>
-            </a:endParaRPr>
-          </a:p>
-          <a:p>
-            <a:pPr lvl="4" marL="2160000" indent="-216000">
-              <a:lnSpc>
-                <a:spcPct val="100000"/>
-              </a:lnSpc>
-              <a:spcBef>
-                <a:spcPts val="283"/>
-              </a:spcBef>
-              <a:buClr>
-                <a:srgbClr val="000000"/>
-              </a:buClr>
-              <a:buSzPct val="45000"/>
-              <a:buFont typeface="Wingdings" charset="2"/>
-              <a:buChar char=""/>
-            </a:pPr>
-            <a:r>
-              <a:rPr b="0" lang="es-ES" sz="2000" strike="noStrike" u="none">
-                <a:solidFill>
-                  <a:srgbClr val="000000"/>
-                </a:solidFill>
-                <a:effectLst/>
-                <a:uFillTx/>
-                <a:latin typeface="Arial"/>
-              </a:rPr>
-              <a:t>Quinto nivel del esquema</a:t>
-            </a:r>
-            <a:endParaRPr b="0" lang="es-ES" sz="2000" strike="noStrike" u="none">
-              <a:solidFill>
-                <a:srgbClr val="000000"/>
-              </a:solidFill>
-              <a:effectLst/>
-              <a:uFillTx/>
-              <a:latin typeface="Arial"/>
-            </a:endParaRPr>
-          </a:p>
-          <a:p>
-            <a:pPr lvl="5" marL="2592000" indent="-216000">
-              <a:lnSpc>
-                <a:spcPct val="100000"/>
-              </a:lnSpc>
-              <a:spcBef>
-                <a:spcPts val="283"/>
-              </a:spcBef>
-              <a:buClr>
-                <a:srgbClr val="000000"/>
-              </a:buClr>
-              <a:buSzPct val="45000"/>
-              <a:buFont typeface="Wingdings" charset="2"/>
-              <a:buChar char=""/>
-            </a:pPr>
-            <a:r>
-              <a:rPr b="0" lang="es-ES" sz="2000" strike="noStrike" u="none">
-                <a:solidFill>
-                  <a:srgbClr val="000000"/>
-                </a:solidFill>
-                <a:effectLst/>
-                <a:uFillTx/>
-                <a:latin typeface="Arial"/>
-              </a:rPr>
-              <a:t>Sexto nivel del esquema</a:t>
-            </a:r>
-            <a:endParaRPr b="0" lang="es-ES" sz="2000" strike="noStrike" u="none">
-              <a:solidFill>
-                <a:srgbClr val="000000"/>
-              </a:solidFill>
-              <a:effectLst/>
-              <a:uFillTx/>
-              <a:latin typeface="Arial"/>
-            </a:endParaRPr>
-          </a:p>
-          <a:p>
-            <a:pPr lvl="6" marL="3024000" indent="-216000">
-              <a:lnSpc>
-                <a:spcPct val="100000"/>
-              </a:lnSpc>
-              <a:spcBef>
-                <a:spcPts val="283"/>
-              </a:spcBef>
-              <a:buClr>
-                <a:srgbClr val="000000"/>
-              </a:buClr>
-              <a:buSzPct val="45000"/>
-              <a:buFont typeface="Wingdings" charset="2"/>
-              <a:buChar char=""/>
-            </a:pPr>
-            <a:r>
-              <a:rPr b="0" lang="es-ES" sz="2000" strike="noStrike" u="none">
-                <a:solidFill>
-                  <a:srgbClr val="000000"/>
-                </a:solidFill>
-                <a:effectLst/>
-                <a:uFillTx/>
-                <a:latin typeface="Arial"/>
-              </a:rPr>
-              <a:t>Séptimo nivel del esquema</a:t>
-            </a:r>
-            <a:endParaRPr b="0" lang="es-ES" sz="2000" strike="noStrike" u="none">
-              <a:solidFill>
-                <a:srgbClr val="000000"/>
-              </a:solidFill>
-              <a:effectLst/>
-              <a:uFillTx/>
-              <a:latin typeface="Arial"/>
             </a:endParaRPr>
           </a:p>
         </p:txBody>
@@ -2527,8 +2067,8 @@
 </file>
 
 <file path=ppt/slideLayouts/slideLayout3.xml><?xml version="1.0" encoding="utf-8"?>
-<p:sldLayout xmlns:a="http://schemas.openxmlformats.org/drawingml/2006/main" xmlns:p="http://schemas.openxmlformats.org/presentationml/2006/main" xmlns:r="http://schemas.openxmlformats.org/officeDocument/2006/relationships" xmlns:p14="http://schemas.microsoft.com/office/powerpoint/2010/main" xmlns:p15="http://schemas.microsoft.com/office/powerpoint/2012/main" xmlns:mc="http://schemas.openxmlformats.org/markup-compatibility/2006" type="blank" preserve="1">
-  <p:cSld name="Contenido con título">
+<p:sldLayout xmlns:a="http://schemas.openxmlformats.org/drawingml/2006/main" xmlns:p="http://schemas.openxmlformats.org/presentationml/2006/main" xmlns:r="http://schemas.openxmlformats.org/officeDocument/2006/relationships" xmlns:p14="http://schemas.microsoft.com/office/powerpoint/2010/main" xmlns:p15="http://schemas.microsoft.com/office/powerpoint/2012/main" xmlns:mc="http://schemas.openxmlformats.org/markup-compatibility/2006" type="obj" preserve="1">
+  <p:cSld name="Título y objetos">
     <p:bg>
       <p:bgPr>
         <a:solidFill>
@@ -2552,7 +2092,7 @@
       </p:grpSpPr>
       <p:sp>
         <p:nvSpPr>
-          <p:cNvPr id="9" name="PlaceHolder 1"/>
+          <p:cNvPr id="10" name="PlaceHolder 1"/>
           <p:cNvSpPr>
             <a:spLocks noGrp="1"/>
           </p:cNvSpPr>
@@ -2562,8 +2102,8 @@
         </p:nvSpPr>
         <p:spPr>
           <a:xfrm>
-            <a:off x="839880" y="457200"/>
-            <a:ext cx="3930120" cy="1598040"/>
+            <a:off x="838080" y="365040"/>
+            <a:ext cx="10512720" cy="1322640"/>
           </a:xfrm>
           <a:prstGeom prst="rect">
             <a:avLst/>
@@ -2574,7 +2114,7 @@
           </a:ln>
         </p:spPr>
         <p:txBody>
-          <a:bodyPr lIns="91440" rIns="91440" tIns="45720" bIns="45720" anchor="b">
+          <a:bodyPr lIns="91440" rIns="91440" tIns="45720" bIns="45720" anchor="ctr">
             <a:noAutofit/>
           </a:bodyPr>
           <a:p>
@@ -2588,7 +2128,7 @@
               </a:tabLst>
             </a:pPr>
             <a:r>
-              <a:rPr b="0" lang="es-ES" sz="3200" strike="noStrike" u="none">
+              <a:rPr b="0" lang="es-ES" sz="4400" strike="noStrike" u="none">
                 <a:solidFill>
                   <a:schemeClr val="dk1"/>
                 </a:solidFill>
@@ -2598,7 +2138,7 @@
               </a:rPr>
               <a:t>Haga clic para modificar el estilo de título del patrón</a:t>
             </a:r>
-            <a:endParaRPr b="0" lang="es-ES" sz="3200" strike="noStrike" u="none">
+            <a:endParaRPr b="0" lang="es-ES" sz="4400" strike="noStrike" u="none">
               <a:solidFill>
                 <a:srgbClr val="000000"/>
               </a:solidFill>
@@ -2611,7 +2151,7 @@
       </p:sp>
       <p:sp>
         <p:nvSpPr>
-          <p:cNvPr id="10" name="PlaceHolder 2"/>
+          <p:cNvPr id="11" name="PlaceHolder 2"/>
           <p:cNvSpPr>
             <a:spLocks noGrp="1"/>
           </p:cNvSpPr>
@@ -2621,8 +2161,8 @@
         </p:nvSpPr>
         <p:spPr>
           <a:xfrm>
-            <a:off x="5183280" y="987480"/>
-            <a:ext cx="6170040" cy="4871520"/>
+            <a:off x="838080" y="1825560"/>
+            <a:ext cx="10512720" cy="4348440"/>
           </a:xfrm>
           <a:prstGeom prst="rect">
             <a:avLst/>
@@ -2651,7 +2191,7 @@
               <a:buChar char="•"/>
             </a:pPr>
             <a:r>
-              <a:rPr b="0" lang="es-ES" sz="3200" strike="noStrike" u="none">
+              <a:rPr b="0" lang="es-ES" sz="2800" strike="noStrike" u="none">
                 <a:solidFill>
                   <a:schemeClr val="dk1"/>
                 </a:solidFill>
@@ -2661,7 +2201,7 @@
               </a:rPr>
               <a:t>Haga clic para modificar los estilos de texto del patrón</a:t>
             </a:r>
-            <a:endParaRPr b="0" lang="es-ES" sz="3200" strike="noStrike" u="none">
+            <a:endParaRPr b="0" lang="es-ES" sz="2800" strike="noStrike" u="none">
               <a:solidFill>
                 <a:srgbClr val="000000"/>
               </a:solidFill>
@@ -2685,7 +2225,7 @@
               <a:buChar char="•"/>
             </a:pPr>
             <a:r>
-              <a:rPr b="0" lang="es-ES" sz="2800" strike="noStrike" u="none">
+              <a:rPr b="0" lang="es-ES" sz="2400" strike="noStrike" u="none">
                 <a:solidFill>
                   <a:schemeClr val="dk1"/>
                 </a:solidFill>
@@ -2695,7 +2235,7 @@
               </a:rPr>
               <a:t>Segundo nivel</a:t>
             </a:r>
-            <a:endParaRPr b="0" lang="es-ES" sz="2800" strike="noStrike" u="none">
+            <a:endParaRPr b="0" lang="es-ES" sz="2400" strike="noStrike" u="none">
               <a:solidFill>
                 <a:srgbClr val="000000"/>
               </a:solidFill>
@@ -2719,7 +2259,7 @@
               <a:buChar char="•"/>
             </a:pPr>
             <a:r>
-              <a:rPr b="0" lang="es-ES" sz="2400" strike="noStrike" u="none">
+              <a:rPr b="0" lang="es-ES" sz="2000" strike="noStrike" u="none">
                 <a:solidFill>
                   <a:schemeClr val="dk1"/>
                 </a:solidFill>
@@ -2729,7 +2269,7 @@
               </a:rPr>
               <a:t>Tercer nivel</a:t>
             </a:r>
-            <a:endParaRPr b="0" lang="es-ES" sz="2400" strike="noStrike" u="none">
+            <a:endParaRPr b="0" lang="es-ES" sz="2000" strike="noStrike" u="none">
               <a:solidFill>
                 <a:srgbClr val="000000"/>
               </a:solidFill>
@@ -2753,7 +2293,7 @@
               <a:buChar char="•"/>
             </a:pPr>
             <a:r>
-              <a:rPr b="0" lang="es-ES" sz="2000" strike="noStrike" u="none">
+              <a:rPr b="0" lang="es-ES" sz="1800" strike="noStrike" u="none">
                 <a:solidFill>
                   <a:schemeClr val="dk1"/>
                 </a:solidFill>
@@ -2763,7 +2303,7 @@
               </a:rPr>
               <a:t>Cuarto nivel</a:t>
             </a:r>
-            <a:endParaRPr b="0" lang="es-ES" sz="2000" strike="noStrike" u="none">
+            <a:endParaRPr b="0" lang="es-ES" sz="1800" strike="noStrike" u="none">
               <a:solidFill>
                 <a:srgbClr val="000000"/>
               </a:solidFill>
@@ -2787,7 +2327,7 @@
               <a:buChar char="•"/>
             </a:pPr>
             <a:r>
-              <a:rPr b="0" lang="es-ES" sz="2000" strike="noStrike" u="none">
+              <a:rPr b="0" lang="es-ES" sz="1800" strike="noStrike" u="none">
                 <a:solidFill>
                   <a:schemeClr val="dk1"/>
                 </a:solidFill>
@@ -2797,7 +2337,7 @@
               </a:rPr>
               <a:t>Quinto nivel</a:t>
             </a:r>
-            <a:endParaRPr b="0" lang="es-ES" sz="2000" strike="noStrike" u="none">
+            <a:endParaRPr b="0" lang="es-ES" sz="1800" strike="noStrike" u="none">
               <a:solidFill>
                 <a:srgbClr val="000000"/>
               </a:solidFill>
@@ -2810,69 +2350,7 @@
       </p:sp>
       <p:sp>
         <p:nvSpPr>
-          <p:cNvPr id="11" name="PlaceHolder 3"/>
-          <p:cNvSpPr>
-            <a:spLocks noGrp="1"/>
-          </p:cNvSpPr>
-          <p:nvPr>
-            <p:ph type="body"/>
-          </p:nvPr>
-        </p:nvSpPr>
-        <p:spPr>
-          <a:xfrm>
-            <a:off x="839880" y="2057400"/>
-            <a:ext cx="3930120" cy="3809520"/>
-          </a:xfrm>
-          <a:prstGeom prst="rect">
-            <a:avLst/>
-          </a:prstGeom>
-          <a:noFill/>
-          <a:ln w="0">
-            <a:noFill/>
-          </a:ln>
-        </p:spPr>
-        <p:txBody>
-          <a:bodyPr lIns="91440" rIns="91440" tIns="45720" bIns="45720" anchor="t">
-            <a:noAutofit/>
-          </a:bodyPr>
-          <a:p>
-            <a:pPr indent="0" defTabSz="914400">
-              <a:lnSpc>
-                <a:spcPct val="90000"/>
-              </a:lnSpc>
-              <a:spcBef>
-                <a:spcPts val="1001"/>
-              </a:spcBef>
-              <a:buNone/>
-              <a:tabLst>
-                <a:tab algn="l" pos="0"/>
-              </a:tabLst>
-            </a:pPr>
-            <a:r>
-              <a:rPr b="0" lang="es-ES" sz="1600" strike="noStrike" u="none">
-                <a:solidFill>
-                  <a:schemeClr val="dk1"/>
-                </a:solidFill>
-                <a:effectLst/>
-                <a:uFillTx/>
-                <a:latin typeface="Calibri"/>
-              </a:rPr>
-              <a:t>Haga clic para modificar los estilos de texto del patrón</a:t>
-            </a:r>
-            <a:endParaRPr b="0" lang="es-ES" sz="1600" strike="noStrike" u="none">
-              <a:solidFill>
-                <a:srgbClr val="000000"/>
-              </a:solidFill>
-              <a:effectLst/>
-              <a:uFillTx/>
-              <a:latin typeface="Arial"/>
-            </a:endParaRPr>
-          </a:p>
-        </p:txBody>
-      </p:sp>
-      <p:sp>
-        <p:nvSpPr>
-          <p:cNvPr id="12" name="PlaceHolder 4"/>
+          <p:cNvPr id="12" name="PlaceHolder 3"/>
           <p:cNvSpPr>
             <a:spLocks noGrp="1"/>
           </p:cNvSpPr>
@@ -2883,7 +2361,7 @@
         <p:spPr>
           <a:xfrm>
             <a:off x="838080" y="6356520"/>
-            <a:ext cx="2741040" cy="362880"/>
+            <a:ext cx="2740320" cy="362160"/>
           </a:xfrm>
           <a:prstGeom prst="rect">
             <a:avLst/>
@@ -2954,7 +2432,7 @@
       </p:sp>
       <p:sp>
         <p:nvSpPr>
-          <p:cNvPr id="13" name="PlaceHolder 5"/>
+          <p:cNvPr id="13" name="PlaceHolder 4"/>
           <p:cNvSpPr>
             <a:spLocks noGrp="1"/>
           </p:cNvSpPr>
@@ -2965,7 +2443,7 @@
         <p:spPr>
           <a:xfrm>
             <a:off x="4038480" y="6356520"/>
-            <a:ext cx="4112640" cy="362880"/>
+            <a:ext cx="4111920" cy="362160"/>
           </a:xfrm>
           <a:prstGeom prst="rect">
             <a:avLst/>
@@ -3032,7 +2510,7 @@
       </p:sp>
       <p:sp>
         <p:nvSpPr>
-          <p:cNvPr id="14" name="PlaceHolder 6"/>
+          <p:cNvPr id="14" name="PlaceHolder 5"/>
           <p:cNvSpPr>
             <a:spLocks noGrp="1"/>
           </p:cNvSpPr>
@@ -3043,7 +2521,7 @@
         <p:spPr>
           <a:xfrm>
             <a:off x="8610480" y="6356520"/>
-            <a:ext cx="2741040" cy="362880"/>
+            <a:ext cx="2740320" cy="362160"/>
           </a:xfrm>
           <a:prstGeom prst="rect">
             <a:avLst/>
@@ -3088,7 +2566,7 @@
                 <a:tab algn="l" pos="0"/>
               </a:tabLst>
             </a:pPr>
-            <a:fld id="{F751533C-5E91-40E1-A00E-83DA72A07758}" type="slidenum">
+            <a:fld id="{F3F848DA-0BD8-4D93-895E-C0B512CD8B6D}" type="slidenum">
               <a:rPr b="0" lang="en-GB" sz="1200" strike="noStrike" u="none">
                 <a:solidFill>
                   <a:schemeClr val="dk1">
@@ -3119,7 +2597,7 @@
 
 <file path=ppt/slideLayouts/slideLayout4.xml><?xml version="1.0" encoding="utf-8"?>
 <p:sldLayout xmlns:a="http://schemas.openxmlformats.org/drawingml/2006/main" xmlns:p="http://schemas.openxmlformats.org/presentationml/2006/main" xmlns:r="http://schemas.openxmlformats.org/officeDocument/2006/relationships" xmlns:p14="http://schemas.microsoft.com/office/powerpoint/2010/main" xmlns:p15="http://schemas.microsoft.com/office/powerpoint/2012/main" xmlns:mc="http://schemas.openxmlformats.org/markup-compatibility/2006" type="blank" preserve="1">
-  <p:cSld name="Imagen con título">
+  <p:cSld name="Encabezado de sección">
     <p:bg>
       <p:bgPr>
         <a:solidFill>
@@ -3153,8 +2631,8 @@
         </p:nvSpPr>
         <p:spPr>
           <a:xfrm>
-            <a:off x="839880" y="457200"/>
-            <a:ext cx="3930120" cy="1598040"/>
+            <a:off x="831960" y="1709640"/>
+            <a:ext cx="10512720" cy="2849760"/>
           </a:xfrm>
           <a:prstGeom prst="rect">
             <a:avLst/>
@@ -3179,7 +2657,7 @@
               </a:tabLst>
             </a:pPr>
             <a:r>
-              <a:rPr b="0" lang="es-ES" sz="3200" strike="noStrike" u="none">
+              <a:rPr b="0" lang="es-ES" sz="6000" strike="noStrike" u="none">
                 <a:solidFill>
                   <a:schemeClr val="dk1"/>
                 </a:solidFill>
@@ -3189,7 +2667,7 @@
               </a:rPr>
               <a:t>Haga clic para modificar el estilo de título del patrón</a:t>
             </a:r>
-            <a:endParaRPr b="0" lang="es-ES" sz="3200" strike="noStrike" u="none">
+            <a:endParaRPr b="0" lang="es-ES" sz="6000" strike="noStrike" u="none">
               <a:solidFill>
                 <a:srgbClr val="000000"/>
               </a:solidFill>
@@ -3212,8 +2690,8 @@
         </p:nvSpPr>
         <p:spPr>
           <a:xfrm>
-            <a:off x="5183280" y="987480"/>
-            <a:ext cx="6170040" cy="4871520"/>
+            <a:off x="831960" y="4589640"/>
+            <a:ext cx="10512720" cy="1497240"/>
           </a:xfrm>
           <a:prstGeom prst="rect">
             <a:avLst/>
@@ -3224,246 +2702,36 @@
           </a:ln>
         </p:spPr>
         <p:txBody>
-          <a:bodyPr lIns="90000" rIns="90000" tIns="45000" bIns="45000" anchor="t">
+          <a:bodyPr lIns="91440" rIns="91440" tIns="45720" bIns="45720" anchor="t">
             <a:noAutofit/>
           </a:bodyPr>
           <a:p>
-            <a:pPr marL="432000" indent="-324000">
+            <a:pPr indent="0" defTabSz="914400">
               <a:lnSpc>
                 <a:spcPct val="90000"/>
               </a:lnSpc>
               <a:spcBef>
-                <a:spcPts val="1417"/>
+                <a:spcPts val="1001"/>
               </a:spcBef>
-              <a:buClr>
-                <a:srgbClr val="000000"/>
-              </a:buClr>
-              <a:buSzPct val="45000"/>
-              <a:buFont typeface="Wingdings" charset="2"/>
-              <a:buChar char=""/>
-            </a:pPr>
-            <a:r>
-              <a:rPr b="0" lang="es-ES" sz="3200" strike="noStrike" u="none">
-                <a:solidFill>
-                  <a:schemeClr val="dk1"/>
-                </a:solidFill>
-                <a:effectLst/>
-                <a:uFillTx/>
-                <a:latin typeface="Calibri"/>
-              </a:rPr>
-              <a:t>Pulse para editar el formato de texto del esquema</a:t>
-            </a:r>
-            <a:endParaRPr b="0" lang="es-ES" sz="3200" strike="noStrike" u="none">
-              <a:solidFill>
-                <a:srgbClr val="000000"/>
-              </a:solidFill>
-              <a:effectLst/>
-              <a:uFillTx/>
-              <a:latin typeface="Arial"/>
-            </a:endParaRPr>
-          </a:p>
-          <a:p>
-            <a:pPr lvl="1" marL="864000" indent="-324000">
-              <a:lnSpc>
-                <a:spcPct val="90000"/>
-              </a:lnSpc>
-              <a:spcBef>
-                <a:spcPts val="1134"/>
-              </a:spcBef>
-              <a:buClr>
-                <a:srgbClr val="000000"/>
-              </a:buClr>
-              <a:buSzPct val="75000"/>
-              <a:buFont typeface="Symbol" charset="2"/>
-              <a:buChar char=""/>
-            </a:pPr>
-            <a:r>
-              <a:rPr b="0" lang="es-ES" sz="3200" strike="noStrike" u="none">
-                <a:solidFill>
-                  <a:schemeClr val="dk1"/>
-                </a:solidFill>
-                <a:effectLst/>
-                <a:uFillTx/>
-                <a:latin typeface="Calibri"/>
-              </a:rPr>
-              <a:t>Segundo nivel del esquema</a:t>
-            </a:r>
-            <a:endParaRPr b="0" lang="es-ES" sz="3200" strike="noStrike" u="none">
-              <a:solidFill>
-                <a:srgbClr val="000000"/>
-              </a:solidFill>
-              <a:effectLst/>
-              <a:uFillTx/>
-              <a:latin typeface="Arial"/>
-            </a:endParaRPr>
-          </a:p>
-          <a:p>
-            <a:pPr lvl="2" marL="1296000" indent="-288000">
-              <a:lnSpc>
-                <a:spcPct val="90000"/>
-              </a:lnSpc>
-              <a:spcBef>
-                <a:spcPts val="850"/>
-              </a:spcBef>
-              <a:buClr>
-                <a:srgbClr val="000000"/>
-              </a:buClr>
-              <a:buSzPct val="45000"/>
-              <a:buFont typeface="Wingdings" charset="2"/>
-              <a:buChar char=""/>
-            </a:pPr>
-            <a:r>
-              <a:rPr b="0" lang="es-ES" sz="3200" strike="noStrike" u="none">
-                <a:solidFill>
-                  <a:schemeClr val="dk1"/>
-                </a:solidFill>
-                <a:effectLst/>
-                <a:uFillTx/>
-                <a:latin typeface="Calibri"/>
-              </a:rPr>
-              <a:t>Tercer nivel del esquema</a:t>
-            </a:r>
-            <a:endParaRPr b="0" lang="es-ES" sz="3200" strike="noStrike" u="none">
-              <a:solidFill>
-                <a:srgbClr val="000000"/>
-              </a:solidFill>
-              <a:effectLst/>
-              <a:uFillTx/>
-              <a:latin typeface="Arial"/>
-            </a:endParaRPr>
-          </a:p>
-          <a:p>
-            <a:pPr lvl="3" marL="1728000" indent="-216000">
-              <a:lnSpc>
-                <a:spcPct val="90000"/>
-              </a:lnSpc>
-              <a:spcBef>
-                <a:spcPts val="567"/>
-              </a:spcBef>
-              <a:buClr>
-                <a:srgbClr val="000000"/>
-              </a:buClr>
-              <a:buSzPct val="75000"/>
-              <a:buFont typeface="Symbol" charset="2"/>
-              <a:buChar char=""/>
-            </a:pPr>
-            <a:r>
-              <a:rPr b="0" lang="es-ES" sz="3200" strike="noStrike" u="none">
-                <a:solidFill>
-                  <a:schemeClr val="dk1"/>
-                </a:solidFill>
-                <a:effectLst/>
-                <a:uFillTx/>
-                <a:latin typeface="Calibri"/>
-              </a:rPr>
-              <a:t>Cuarto nivel del esquema</a:t>
-            </a:r>
-            <a:endParaRPr b="0" lang="es-ES" sz="3200" strike="noStrike" u="none">
-              <a:solidFill>
-                <a:srgbClr val="000000"/>
-              </a:solidFill>
-              <a:effectLst/>
-              <a:uFillTx/>
-              <a:latin typeface="Arial"/>
-            </a:endParaRPr>
-          </a:p>
-          <a:p>
-            <a:pPr lvl="4" marL="2160000" indent="-216000">
-              <a:lnSpc>
-                <a:spcPct val="90000"/>
-              </a:lnSpc>
-              <a:spcBef>
-                <a:spcPts val="283"/>
-              </a:spcBef>
-              <a:buClr>
-                <a:srgbClr val="000000"/>
-              </a:buClr>
-              <a:buSzPct val="45000"/>
-              <a:buFont typeface="Wingdings" charset="2"/>
-              <a:buChar char=""/>
-            </a:pPr>
-            <a:r>
-              <a:rPr b="0" lang="es-ES" sz="3200" strike="noStrike" u="none">
-                <a:solidFill>
-                  <a:schemeClr val="dk1"/>
-                </a:solidFill>
-                <a:effectLst/>
-                <a:uFillTx/>
-                <a:latin typeface="Calibri"/>
-              </a:rPr>
-              <a:t>Quinto nivel del esquema</a:t>
-            </a:r>
-            <a:endParaRPr b="0" lang="es-ES" sz="3200" strike="noStrike" u="none">
-              <a:solidFill>
-                <a:srgbClr val="000000"/>
-              </a:solidFill>
-              <a:effectLst/>
-              <a:uFillTx/>
-              <a:latin typeface="Arial"/>
-            </a:endParaRPr>
-          </a:p>
-          <a:p>
-            <a:pPr lvl="5" marL="2592000" indent="-216000">
-              <a:lnSpc>
-                <a:spcPct val="90000"/>
-              </a:lnSpc>
-              <a:spcBef>
-                <a:spcPts val="283"/>
-              </a:spcBef>
-              <a:buClr>
-                <a:srgbClr val="000000"/>
-              </a:buClr>
-              <a:buSzPct val="45000"/>
-              <a:buFont typeface="Wingdings" charset="2"/>
-              <a:buChar char=""/>
-            </a:pPr>
-            <a:r>
-              <a:rPr b="0" lang="es-ES" sz="3200" strike="noStrike" u="none">
-                <a:solidFill>
-                  <a:schemeClr val="dk1"/>
-                </a:solidFill>
-                <a:effectLst/>
-                <a:uFillTx/>
-                <a:latin typeface="Calibri"/>
-              </a:rPr>
-              <a:t>Sexto nivel del esquema</a:t>
-            </a:r>
-            <a:endParaRPr b="0" lang="es-ES" sz="3200" strike="noStrike" u="none">
-              <a:solidFill>
-                <a:srgbClr val="000000"/>
-              </a:solidFill>
-              <a:effectLst/>
-              <a:uFillTx/>
-              <a:latin typeface="Arial"/>
-            </a:endParaRPr>
-          </a:p>
-          <a:p>
-            <a:pPr lvl="6" marL="3024000" indent="-216000">
-              <a:lnSpc>
-                <a:spcPct val="90000"/>
-              </a:lnSpc>
-              <a:spcBef>
-                <a:spcPts val="283"/>
-              </a:spcBef>
-              <a:buClr>
-                <a:srgbClr val="000000"/>
-              </a:buClr>
-              <a:buSzPct val="45000"/>
-              <a:buFont typeface="Wingdings" charset="2"/>
-              <a:buChar char=""/>
-            </a:pPr>
-            <a:r>
-              <a:rPr b="0" lang="es-ES" sz="3200" strike="noStrike" u="none">
-                <a:solidFill>
-                  <a:schemeClr val="dk1"/>
-                </a:solidFill>
-                <a:effectLst/>
-                <a:uFillTx/>
-                <a:latin typeface="Calibri"/>
-              </a:rPr>
-              <a:t>Séptimo nivel del esquema</a:t>
-            </a:r>
-            <a:endParaRPr b="0" lang="es-ES" sz="3200" strike="noStrike" u="none">
+              <a:buNone/>
+              <a:tabLst>
+                <a:tab algn="l" pos="0"/>
+              </a:tabLst>
+            </a:pPr>
+            <a:r>
+              <a:rPr b="0" lang="es-ES" sz="2400" strike="noStrike" u="none">
+                <a:solidFill>
+                  <a:schemeClr val="dk1">
+                    <a:tint val="75000"/>
+                  </a:schemeClr>
+                </a:solidFill>
+                <a:effectLst/>
+                <a:uFillTx/>
+                <a:latin typeface="Calibri"/>
+              </a:rPr>
+              <a:t>Haga clic para modificar los estilos de texto del patrón</a:t>
+            </a:r>
+            <a:endParaRPr b="0" lang="es-ES" sz="2400" strike="noStrike" u="none">
               <a:solidFill>
                 <a:srgbClr val="000000"/>
               </a:solidFill>
@@ -3481,13 +2749,13 @@
             <a:spLocks noGrp="1"/>
           </p:cNvSpPr>
           <p:nvPr>
-            <p:ph type="body"/>
+            <p:ph type="dt" idx="10"/>
           </p:nvPr>
         </p:nvSpPr>
         <p:spPr>
           <a:xfrm>
-            <a:off x="839880" y="2057400"/>
-            <a:ext cx="3930120" cy="3809520"/>
+            <a:off x="838080" y="6356520"/>
+            <a:ext cx="2740320" cy="362160"/>
           </a:xfrm>
           <a:prstGeom prst="rect">
             <a:avLst/>
@@ -3498,40 +2766,60 @@
           </a:ln>
         </p:spPr>
         <p:txBody>
-          <a:bodyPr lIns="91440" rIns="91440" tIns="45720" bIns="45720" anchor="t">
+          <a:bodyPr lIns="91440" rIns="91440" tIns="45720" bIns="45720" anchor="ctr">
             <a:noAutofit/>
           </a:bodyPr>
+          <a:lstStyle>
+            <a:lvl1pPr indent="0" defTabSz="914400">
+              <a:lnSpc>
+                <a:spcPct val="100000"/>
+              </a:lnSpc>
+              <a:buNone/>
+              <a:tabLst>
+                <a:tab algn="l" pos="0"/>
+              </a:tabLst>
+              <a:defRPr b="0" lang="en-GB" sz="1200" strike="noStrike" u="none">
+                <a:solidFill>
+                  <a:schemeClr val="dk1">
+                    <a:tint val="75000"/>
+                  </a:schemeClr>
+                </a:solidFill>
+                <a:effectLst/>
+                <a:uFillTx/>
+                <a:latin typeface="Calibri"/>
+              </a:defRPr>
+            </a:lvl1pPr>
+          </a:lstStyle>
           <a:p>
             <a:pPr indent="0" defTabSz="914400">
               <a:lnSpc>
-                <a:spcPct val="90000"/>
-              </a:lnSpc>
-              <a:spcBef>
-                <a:spcPts val="1001"/>
-              </a:spcBef>
-              <a:buNone/>
-              <a:tabLst>
-                <a:tab algn="l" pos="0"/>
-              </a:tabLst>
-            </a:pPr>
-            <a:r>
-              <a:rPr b="0" lang="es-ES" sz="1600" strike="noStrike" u="none">
-                <a:solidFill>
-                  <a:schemeClr val="dk1"/>
-                </a:solidFill>
-                <a:effectLst/>
-                <a:uFillTx/>
-                <a:latin typeface="Calibri"/>
-              </a:rPr>
-              <a:t>Haga clic para modificar los estilos de texto del patrón</a:t>
-            </a:r>
-            <a:endParaRPr b="0" lang="es-ES" sz="1600" strike="noStrike" u="none">
-              <a:solidFill>
-                <a:srgbClr val="000000"/>
-              </a:solidFill>
-              <a:effectLst/>
-              <a:uFillTx/>
-              <a:latin typeface="Arial"/>
+                <a:spcPct val="100000"/>
+              </a:lnSpc>
+              <a:buNone/>
+              <a:tabLst>
+                <a:tab algn="l" pos="0"/>
+              </a:tabLst>
+            </a:pPr>
+            <a:r>
+              <a:rPr b="0" lang="en-GB" sz="1200" strike="noStrike" u="none">
+                <a:solidFill>
+                  <a:schemeClr val="dk1">
+                    <a:tint val="75000"/>
+                  </a:schemeClr>
+                </a:solidFill>
+                <a:effectLst/>
+                <a:uFillTx/>
+                <a:latin typeface="Calibri"/>
+              </a:rPr>
+              <a:t>&lt;fecha/hora&gt;</a:t>
+            </a:r>
+            <a:endParaRPr b="0" lang="es-ES" sz="1200" strike="noStrike" u="none">
+              <a:solidFill>
+                <a:srgbClr val="000000"/>
+              </a:solidFill>
+              <a:effectLst/>
+              <a:uFillTx/>
+              <a:latin typeface="Times New Roman"/>
             </a:endParaRPr>
           </a:p>
         </p:txBody>
@@ -3543,13 +2831,13 @@
             <a:spLocks noGrp="1"/>
           </p:cNvSpPr>
           <p:nvPr>
-            <p:ph type="dt" idx="10"/>
+            <p:ph type="ftr" idx="11"/>
           </p:nvPr>
         </p:nvSpPr>
         <p:spPr>
           <a:xfrm>
-            <a:off x="838080" y="6356520"/>
-            <a:ext cx="2741040" cy="362880"/>
+            <a:off x="4038480" y="6356520"/>
+            <a:ext cx="4111920" cy="362160"/>
           </a:xfrm>
           <a:prstGeom prst="rect">
             <a:avLst/>
@@ -3564,50 +2852,46 @@
             <a:noAutofit/>
           </a:bodyPr>
           <a:lstStyle>
-            <a:lvl1pPr indent="0" defTabSz="914400">
-              <a:lnSpc>
-                <a:spcPct val="100000"/>
-              </a:lnSpc>
-              <a:buNone/>
-              <a:tabLst>
-                <a:tab algn="l" pos="0"/>
-              </a:tabLst>
-              <a:defRPr b="0" lang="en-GB" sz="1200" strike="noStrike" u="none">
-                <a:solidFill>
-                  <a:schemeClr val="dk1">
-                    <a:tint val="75000"/>
-                  </a:schemeClr>
-                </a:solidFill>
-                <a:effectLst/>
-                <a:uFillTx/>
-                <a:latin typeface="Calibri"/>
+            <a:lvl1pPr indent="0" algn="ctr">
+              <a:lnSpc>
+                <a:spcPct val="100000"/>
+              </a:lnSpc>
+              <a:buNone/>
+              <a:tabLst>
+                <a:tab algn="l" pos="0"/>
+              </a:tabLst>
+              <a:defRPr b="0" lang="es-ES" sz="1400" strike="noStrike" u="none">
+                <a:solidFill>
+                  <a:srgbClr val="000000"/>
+                </a:solidFill>
+                <a:effectLst/>
+                <a:uFillTx/>
+                <a:latin typeface="Times New Roman"/>
               </a:defRPr>
             </a:lvl1pPr>
           </a:lstStyle>
           <a:p>
-            <a:pPr indent="0" defTabSz="914400">
-              <a:lnSpc>
-                <a:spcPct val="100000"/>
-              </a:lnSpc>
-              <a:buNone/>
-              <a:tabLst>
-                <a:tab algn="l" pos="0"/>
-              </a:tabLst>
-            </a:pPr>
-            <a:r>
-              <a:rPr b="0" lang="en-GB" sz="1200" strike="noStrike" u="none">
-                <a:solidFill>
-                  <a:schemeClr val="dk1">
-                    <a:tint val="75000"/>
-                  </a:schemeClr>
-                </a:solidFill>
-                <a:effectLst/>
-                <a:uFillTx/>
-                <a:latin typeface="Calibri"/>
-              </a:rPr>
-              <a:t>&lt;fecha/hora&gt;</a:t>
-            </a:r>
-            <a:endParaRPr b="0" lang="es-ES" sz="1200" strike="noStrike" u="none">
+            <a:pPr indent="0" algn="ctr">
+              <a:lnSpc>
+                <a:spcPct val="100000"/>
+              </a:lnSpc>
+              <a:buNone/>
+              <a:tabLst>
+                <a:tab algn="l" pos="0"/>
+              </a:tabLst>
+            </a:pPr>
+            <a:r>
+              <a:rPr b="0" lang="es-ES" sz="1400" strike="noStrike" u="none">
+                <a:solidFill>
+                  <a:srgbClr val="000000"/>
+                </a:solidFill>
+                <a:effectLst/>
+                <a:uFillTx/>
+                <a:latin typeface="Times New Roman"/>
+              </a:rPr>
+              <a:t>&lt;pie de página&gt;</a:t>
+            </a:r>
+            <a:endParaRPr b="0" lang="es-ES" sz="1400" strike="noStrike" u="none">
               <a:solidFill>
                 <a:srgbClr val="000000"/>
               </a:solidFill>
@@ -3625,91 +2909,13 @@
             <a:spLocks noGrp="1"/>
           </p:cNvSpPr>
           <p:nvPr>
-            <p:ph type="ftr" idx="11"/>
-          </p:nvPr>
-        </p:nvSpPr>
-        <p:spPr>
-          <a:xfrm>
-            <a:off x="4038480" y="6356520"/>
-            <a:ext cx="4112640" cy="362880"/>
-          </a:xfrm>
-          <a:prstGeom prst="rect">
-            <a:avLst/>
-          </a:prstGeom>
-          <a:noFill/>
-          <a:ln w="0">
-            <a:noFill/>
-          </a:ln>
-        </p:spPr>
-        <p:txBody>
-          <a:bodyPr lIns="91440" rIns="91440" tIns="45720" bIns="45720" anchor="ctr">
-            <a:noAutofit/>
-          </a:bodyPr>
-          <a:lstStyle>
-            <a:lvl1pPr indent="0" algn="ctr">
-              <a:lnSpc>
-                <a:spcPct val="100000"/>
-              </a:lnSpc>
-              <a:buNone/>
-              <a:tabLst>
-                <a:tab algn="l" pos="0"/>
-              </a:tabLst>
-              <a:defRPr b="0" lang="es-ES" sz="1400" strike="noStrike" u="none">
-                <a:solidFill>
-                  <a:srgbClr val="000000"/>
-                </a:solidFill>
-                <a:effectLst/>
-                <a:uFillTx/>
-                <a:latin typeface="Times New Roman"/>
-              </a:defRPr>
-            </a:lvl1pPr>
-          </a:lstStyle>
-          <a:p>
-            <a:pPr indent="0" algn="ctr">
-              <a:lnSpc>
-                <a:spcPct val="100000"/>
-              </a:lnSpc>
-              <a:buNone/>
-              <a:tabLst>
-                <a:tab algn="l" pos="0"/>
-              </a:tabLst>
-            </a:pPr>
-            <a:r>
-              <a:rPr b="0" lang="es-ES" sz="1400" strike="noStrike" u="none">
-                <a:solidFill>
-                  <a:srgbClr val="000000"/>
-                </a:solidFill>
-                <a:effectLst/>
-                <a:uFillTx/>
-                <a:latin typeface="Times New Roman"/>
-              </a:rPr>
-              <a:t>&lt;pie de página&gt;</a:t>
-            </a:r>
-            <a:endParaRPr b="0" lang="es-ES" sz="1400" strike="noStrike" u="none">
-              <a:solidFill>
-                <a:srgbClr val="000000"/>
-              </a:solidFill>
-              <a:effectLst/>
-              <a:uFillTx/>
-              <a:latin typeface="Times New Roman"/>
-            </a:endParaRPr>
-          </a:p>
-        </p:txBody>
-      </p:sp>
-      <p:sp>
-        <p:nvSpPr>
-          <p:cNvPr id="20" name="PlaceHolder 6"/>
-          <p:cNvSpPr>
-            <a:spLocks noGrp="1"/>
-          </p:cNvSpPr>
-          <p:nvPr>
             <p:ph type="sldNum" idx="12"/>
           </p:nvPr>
         </p:nvSpPr>
         <p:spPr>
           <a:xfrm>
             <a:off x="8610480" y="6356520"/>
-            <a:ext cx="2741040" cy="362880"/>
+            <a:ext cx="2740320" cy="362160"/>
           </a:xfrm>
           <a:prstGeom prst="rect">
             <a:avLst/>
@@ -3754,7 +2960,7 @@
                 <a:tab algn="l" pos="0"/>
               </a:tabLst>
             </a:pPr>
-            <a:fld id="{F126CE7A-2E6D-47C2-AA65-F6CDEAC03627}" type="slidenum">
+            <a:fld id="{B0CCEC76-93D9-4132-B4F6-91501C00A8B0}" type="slidenum">
               <a:rPr b="0" lang="en-GB" sz="1200" strike="noStrike" u="none">
                 <a:solidFill>
                   <a:schemeClr val="dk1">
@@ -3784,8 +2990,8 @@
 </file>
 
 <file path=ppt/slideLayouts/slideLayout5.xml><?xml version="1.0" encoding="utf-8"?>
-<p:sldLayout xmlns:a="http://schemas.openxmlformats.org/drawingml/2006/main" xmlns:p="http://schemas.openxmlformats.org/presentationml/2006/main" xmlns:r="http://schemas.openxmlformats.org/officeDocument/2006/relationships" xmlns:p14="http://schemas.microsoft.com/office/powerpoint/2010/main" xmlns:p15="http://schemas.microsoft.com/office/powerpoint/2012/main" xmlns:mc="http://schemas.openxmlformats.org/markup-compatibility/2006" type="title" preserve="1">
-  <p:cSld name="Diapositiva de título">
+<p:sldLayout xmlns:a="http://schemas.openxmlformats.org/drawingml/2006/main" xmlns:p="http://schemas.openxmlformats.org/presentationml/2006/main" xmlns:r="http://schemas.openxmlformats.org/officeDocument/2006/relationships" xmlns:p14="http://schemas.microsoft.com/office/powerpoint/2010/main" xmlns:p15="http://schemas.microsoft.com/office/powerpoint/2012/main" xmlns:mc="http://schemas.openxmlformats.org/markup-compatibility/2006" type="twoObj" preserve="1">
+  <p:cSld name="Dos objetos">
     <p:bg>
       <p:bgPr>
         <a:solidFill>
@@ -3809,7 +3015,7 @@
       </p:grpSpPr>
       <p:sp>
         <p:nvSpPr>
-          <p:cNvPr id="21" name="PlaceHolder 1"/>
+          <p:cNvPr id="20" name="PlaceHolder 1"/>
           <p:cNvSpPr>
             <a:spLocks noGrp="1"/>
           </p:cNvSpPr>
@@ -3819,8 +3025,8 @@
         </p:nvSpPr>
         <p:spPr>
           <a:xfrm>
-            <a:off x="1523880" y="1122480"/>
-            <a:ext cx="9141840" cy="2385360"/>
+            <a:off x="838080" y="365040"/>
+            <a:ext cx="10512720" cy="1322640"/>
           </a:xfrm>
           <a:prstGeom prst="rect">
             <a:avLst/>
@@ -3831,11 +3037,11 @@
           </a:ln>
         </p:spPr>
         <p:txBody>
-          <a:bodyPr lIns="91440" rIns="91440" tIns="45720" bIns="45720" anchor="b">
+          <a:bodyPr lIns="91440" rIns="91440" tIns="45720" bIns="45720" anchor="ctr">
             <a:noAutofit/>
           </a:bodyPr>
           <a:p>
-            <a:pPr indent="0" algn="ctr" defTabSz="914400">
+            <a:pPr indent="0" defTabSz="914400">
               <a:lnSpc>
                 <a:spcPct val="90000"/>
               </a:lnSpc>
@@ -3845,7 +3051,7 @@
               </a:tabLst>
             </a:pPr>
             <a:r>
-              <a:rPr b="0" lang="es-ES" sz="6000" strike="noStrike" u="none">
+              <a:rPr b="0" lang="es-ES" sz="4400" strike="noStrike" u="none">
                 <a:solidFill>
                   <a:schemeClr val="dk1"/>
                 </a:solidFill>
@@ -3855,7 +3061,7 @@
               </a:rPr>
               <a:t>Haga clic para modificar el estilo de título del patrón</a:t>
             </a:r>
-            <a:endParaRPr b="0" lang="es-ES" sz="6000" strike="noStrike" u="none">
+            <a:endParaRPr b="0" lang="es-ES" sz="4400" strike="noStrike" u="none">
               <a:solidFill>
                 <a:srgbClr val="000000"/>
               </a:solidFill>
@@ -3868,7 +3074,405 @@
       </p:sp>
       <p:sp>
         <p:nvSpPr>
-          <p:cNvPr id="22" name="PlaceHolder 2"/>
+          <p:cNvPr id="21" name="PlaceHolder 2"/>
+          <p:cNvSpPr>
+            <a:spLocks noGrp="1"/>
+          </p:cNvSpPr>
+          <p:nvPr>
+            <p:ph type="body"/>
+          </p:nvPr>
+        </p:nvSpPr>
+        <p:spPr>
+          <a:xfrm>
+            <a:off x="838080" y="1825560"/>
+            <a:ext cx="5178600" cy="4348440"/>
+          </a:xfrm>
+          <a:prstGeom prst="rect">
+            <a:avLst/>
+          </a:prstGeom>
+          <a:noFill/>
+          <a:ln w="0">
+            <a:noFill/>
+          </a:ln>
+        </p:spPr>
+        <p:txBody>
+          <a:bodyPr lIns="91440" rIns="91440" tIns="45720" bIns="45720" anchor="t">
+            <a:noAutofit/>
+          </a:bodyPr>
+          <a:p>
+            <a:pPr marL="228600" indent="-228600" defTabSz="914400">
+              <a:lnSpc>
+                <a:spcPct val="90000"/>
+              </a:lnSpc>
+              <a:spcBef>
+                <a:spcPts val="1001"/>
+              </a:spcBef>
+              <a:buClr>
+                <a:srgbClr val="000000"/>
+              </a:buClr>
+              <a:buFont typeface="Arial"/>
+              <a:buChar char="•"/>
+            </a:pPr>
+            <a:r>
+              <a:rPr b="0" lang="es-ES" sz="2800" strike="noStrike" u="none">
+                <a:solidFill>
+                  <a:schemeClr val="dk1"/>
+                </a:solidFill>
+                <a:effectLst/>
+                <a:uFillTx/>
+                <a:latin typeface="Calibri"/>
+              </a:rPr>
+              <a:t>Haga clic para modificar los estilos de texto del patrón</a:t>
+            </a:r>
+            <a:endParaRPr b="0" lang="es-ES" sz="2800" strike="noStrike" u="none">
+              <a:solidFill>
+                <a:srgbClr val="000000"/>
+              </a:solidFill>
+              <a:effectLst/>
+              <a:uFillTx/>
+              <a:latin typeface="Arial"/>
+            </a:endParaRPr>
+          </a:p>
+          <a:p>
+            <a:pPr lvl="1" marL="685800" indent="-228600" defTabSz="914400">
+              <a:lnSpc>
+                <a:spcPct val="90000"/>
+              </a:lnSpc>
+              <a:spcBef>
+                <a:spcPts val="499"/>
+              </a:spcBef>
+              <a:buClr>
+                <a:srgbClr val="000000"/>
+              </a:buClr>
+              <a:buFont typeface="Arial"/>
+              <a:buChar char="•"/>
+            </a:pPr>
+            <a:r>
+              <a:rPr b="0" lang="es-ES" sz="2400" strike="noStrike" u="none">
+                <a:solidFill>
+                  <a:schemeClr val="dk1"/>
+                </a:solidFill>
+                <a:effectLst/>
+                <a:uFillTx/>
+                <a:latin typeface="Calibri"/>
+              </a:rPr>
+              <a:t>Segundo nivel</a:t>
+            </a:r>
+            <a:endParaRPr b="0" lang="es-ES" sz="2400" strike="noStrike" u="none">
+              <a:solidFill>
+                <a:srgbClr val="000000"/>
+              </a:solidFill>
+              <a:effectLst/>
+              <a:uFillTx/>
+              <a:latin typeface="Arial"/>
+            </a:endParaRPr>
+          </a:p>
+          <a:p>
+            <a:pPr lvl="2" marL="1143000" indent="-228600" defTabSz="914400">
+              <a:lnSpc>
+                <a:spcPct val="90000"/>
+              </a:lnSpc>
+              <a:spcBef>
+                <a:spcPts val="499"/>
+              </a:spcBef>
+              <a:buClr>
+                <a:srgbClr val="000000"/>
+              </a:buClr>
+              <a:buFont typeface="Arial"/>
+              <a:buChar char="•"/>
+            </a:pPr>
+            <a:r>
+              <a:rPr b="0" lang="es-ES" sz="2000" strike="noStrike" u="none">
+                <a:solidFill>
+                  <a:schemeClr val="dk1"/>
+                </a:solidFill>
+                <a:effectLst/>
+                <a:uFillTx/>
+                <a:latin typeface="Calibri"/>
+              </a:rPr>
+              <a:t>Tercer nivel</a:t>
+            </a:r>
+            <a:endParaRPr b="0" lang="es-ES" sz="2000" strike="noStrike" u="none">
+              <a:solidFill>
+                <a:srgbClr val="000000"/>
+              </a:solidFill>
+              <a:effectLst/>
+              <a:uFillTx/>
+              <a:latin typeface="Arial"/>
+            </a:endParaRPr>
+          </a:p>
+          <a:p>
+            <a:pPr lvl="3" marL="1600200" indent="-228600" defTabSz="914400">
+              <a:lnSpc>
+                <a:spcPct val="90000"/>
+              </a:lnSpc>
+              <a:spcBef>
+                <a:spcPts val="499"/>
+              </a:spcBef>
+              <a:buClr>
+                <a:srgbClr val="000000"/>
+              </a:buClr>
+              <a:buFont typeface="Arial"/>
+              <a:buChar char="•"/>
+            </a:pPr>
+            <a:r>
+              <a:rPr b="0" lang="es-ES" sz="1800" strike="noStrike" u="none">
+                <a:solidFill>
+                  <a:schemeClr val="dk1"/>
+                </a:solidFill>
+                <a:effectLst/>
+                <a:uFillTx/>
+                <a:latin typeface="Calibri"/>
+              </a:rPr>
+              <a:t>Cuarto nivel</a:t>
+            </a:r>
+            <a:endParaRPr b="0" lang="es-ES" sz="1800" strike="noStrike" u="none">
+              <a:solidFill>
+                <a:srgbClr val="000000"/>
+              </a:solidFill>
+              <a:effectLst/>
+              <a:uFillTx/>
+              <a:latin typeface="Arial"/>
+            </a:endParaRPr>
+          </a:p>
+          <a:p>
+            <a:pPr lvl="4" marL="2057400" indent="-228600" defTabSz="914400">
+              <a:lnSpc>
+                <a:spcPct val="90000"/>
+              </a:lnSpc>
+              <a:spcBef>
+                <a:spcPts val="499"/>
+              </a:spcBef>
+              <a:buClr>
+                <a:srgbClr val="000000"/>
+              </a:buClr>
+              <a:buFont typeface="Arial"/>
+              <a:buChar char="•"/>
+            </a:pPr>
+            <a:r>
+              <a:rPr b="0" lang="es-ES" sz="1800" strike="noStrike" u="none">
+                <a:solidFill>
+                  <a:schemeClr val="dk1"/>
+                </a:solidFill>
+                <a:effectLst/>
+                <a:uFillTx/>
+                <a:latin typeface="Calibri"/>
+              </a:rPr>
+              <a:t>Quinto nivel</a:t>
+            </a:r>
+            <a:endParaRPr b="0" lang="es-ES" sz="1800" strike="noStrike" u="none">
+              <a:solidFill>
+                <a:srgbClr val="000000"/>
+              </a:solidFill>
+              <a:effectLst/>
+              <a:uFillTx/>
+              <a:latin typeface="Arial"/>
+            </a:endParaRPr>
+          </a:p>
+        </p:txBody>
+      </p:sp>
+      <p:sp>
+        <p:nvSpPr>
+          <p:cNvPr id="22" name="PlaceHolder 3"/>
+          <p:cNvSpPr>
+            <a:spLocks noGrp="1"/>
+          </p:cNvSpPr>
+          <p:nvPr>
+            <p:ph type="body"/>
+          </p:nvPr>
+        </p:nvSpPr>
+        <p:spPr>
+          <a:xfrm>
+            <a:off x="6172200" y="1825560"/>
+            <a:ext cx="5178600" cy="4348440"/>
+          </a:xfrm>
+          <a:prstGeom prst="rect">
+            <a:avLst/>
+          </a:prstGeom>
+          <a:noFill/>
+          <a:ln w="0">
+            <a:noFill/>
+          </a:ln>
+        </p:spPr>
+        <p:txBody>
+          <a:bodyPr lIns="91440" rIns="91440" tIns="45720" bIns="45720" anchor="t">
+            <a:noAutofit/>
+          </a:bodyPr>
+          <a:p>
+            <a:pPr marL="228600" indent="-228600" defTabSz="914400">
+              <a:lnSpc>
+                <a:spcPct val="90000"/>
+              </a:lnSpc>
+              <a:spcBef>
+                <a:spcPts val="1001"/>
+              </a:spcBef>
+              <a:buClr>
+                <a:srgbClr val="000000"/>
+              </a:buClr>
+              <a:buFont typeface="Arial"/>
+              <a:buChar char="•"/>
+            </a:pPr>
+            <a:r>
+              <a:rPr b="0" lang="es-ES" sz="2800" strike="noStrike" u="none">
+                <a:solidFill>
+                  <a:schemeClr val="dk1"/>
+                </a:solidFill>
+                <a:effectLst/>
+                <a:uFillTx/>
+                <a:latin typeface="Calibri"/>
+              </a:rPr>
+              <a:t>Haga clic para modificar los estilos de texto del patrón</a:t>
+            </a:r>
+            <a:endParaRPr b="0" lang="es-ES" sz="2800" strike="noStrike" u="none">
+              <a:solidFill>
+                <a:srgbClr val="000000"/>
+              </a:solidFill>
+              <a:effectLst/>
+              <a:uFillTx/>
+              <a:latin typeface="Arial"/>
+            </a:endParaRPr>
+          </a:p>
+          <a:p>
+            <a:pPr lvl="1" marL="685800" indent="-228600" defTabSz="914400">
+              <a:lnSpc>
+                <a:spcPct val="90000"/>
+              </a:lnSpc>
+              <a:spcBef>
+                <a:spcPts val="499"/>
+              </a:spcBef>
+              <a:buClr>
+                <a:srgbClr val="000000"/>
+              </a:buClr>
+              <a:buFont typeface="Arial"/>
+              <a:buChar char="•"/>
+            </a:pPr>
+            <a:r>
+              <a:rPr b="0" lang="es-ES" sz="2400" strike="noStrike" u="none">
+                <a:solidFill>
+                  <a:schemeClr val="dk1"/>
+                </a:solidFill>
+                <a:effectLst/>
+                <a:uFillTx/>
+                <a:latin typeface="Calibri"/>
+              </a:rPr>
+              <a:t>Segundo nivel</a:t>
+            </a:r>
+            <a:endParaRPr b="0" lang="es-ES" sz="2400" strike="noStrike" u="none">
+              <a:solidFill>
+                <a:srgbClr val="000000"/>
+              </a:solidFill>
+              <a:effectLst/>
+              <a:uFillTx/>
+              <a:latin typeface="Arial"/>
+            </a:endParaRPr>
+          </a:p>
+          <a:p>
+            <a:pPr lvl="2" marL="1143000" indent="-228600" defTabSz="914400">
+              <a:lnSpc>
+                <a:spcPct val="90000"/>
+              </a:lnSpc>
+              <a:spcBef>
+                <a:spcPts val="499"/>
+              </a:spcBef>
+              <a:buClr>
+                <a:srgbClr val="000000"/>
+              </a:buClr>
+              <a:buFont typeface="Arial"/>
+              <a:buChar char="•"/>
+            </a:pPr>
+            <a:r>
+              <a:rPr b="0" lang="es-ES" sz="2000" strike="noStrike" u="none">
+                <a:solidFill>
+                  <a:schemeClr val="dk1"/>
+                </a:solidFill>
+                <a:effectLst/>
+                <a:uFillTx/>
+                <a:latin typeface="Calibri"/>
+              </a:rPr>
+              <a:t>Tercer nivel</a:t>
+            </a:r>
+            <a:endParaRPr b="0" lang="es-ES" sz="2000" strike="noStrike" u="none">
+              <a:solidFill>
+                <a:srgbClr val="000000"/>
+              </a:solidFill>
+              <a:effectLst/>
+              <a:uFillTx/>
+              <a:latin typeface="Arial"/>
+            </a:endParaRPr>
+          </a:p>
+          <a:p>
+            <a:pPr lvl="3" marL="1600200" indent="-228600" defTabSz="914400">
+              <a:lnSpc>
+                <a:spcPct val="90000"/>
+              </a:lnSpc>
+              <a:spcBef>
+                <a:spcPts val="499"/>
+              </a:spcBef>
+              <a:buClr>
+                <a:srgbClr val="000000"/>
+              </a:buClr>
+              <a:buFont typeface="Arial"/>
+              <a:buChar char="•"/>
+            </a:pPr>
+            <a:r>
+              <a:rPr b="0" lang="es-ES" sz="1800" strike="noStrike" u="none">
+                <a:solidFill>
+                  <a:schemeClr val="dk1"/>
+                </a:solidFill>
+                <a:effectLst/>
+                <a:uFillTx/>
+                <a:latin typeface="Calibri"/>
+              </a:rPr>
+              <a:t>Cuarto nivel</a:t>
+            </a:r>
+            <a:endParaRPr b="0" lang="es-ES" sz="1800" strike="noStrike" u="none">
+              <a:solidFill>
+                <a:srgbClr val="000000"/>
+              </a:solidFill>
+              <a:effectLst/>
+              <a:uFillTx/>
+              <a:latin typeface="Arial"/>
+            </a:endParaRPr>
+          </a:p>
+          <a:p>
+            <a:pPr lvl="4" marL="2057400" indent="-228600" defTabSz="914400">
+              <a:lnSpc>
+                <a:spcPct val="90000"/>
+              </a:lnSpc>
+              <a:spcBef>
+                <a:spcPts val="499"/>
+              </a:spcBef>
+              <a:buClr>
+                <a:srgbClr val="000000"/>
+              </a:buClr>
+              <a:buFont typeface="Arial"/>
+              <a:buChar char="•"/>
+            </a:pPr>
+            <a:r>
+              <a:rPr b="0" lang="es-ES" sz="1800" strike="noStrike" u="none">
+                <a:solidFill>
+                  <a:schemeClr val="dk1"/>
+                </a:solidFill>
+                <a:effectLst/>
+                <a:uFillTx/>
+                <a:latin typeface="Calibri"/>
+              </a:rPr>
+              <a:t>Quinto nivel</a:t>
+            </a:r>
+            <a:endParaRPr b="0" lang="es-ES" sz="1800" strike="noStrike" u="none">
+              <a:solidFill>
+                <a:srgbClr val="000000"/>
+              </a:solidFill>
+              <a:effectLst/>
+              <a:uFillTx/>
+              <a:latin typeface="Arial"/>
+            </a:endParaRPr>
+          </a:p>
+        </p:txBody>
+      </p:sp>
+      <p:sp>
+        <p:nvSpPr>
+          <p:cNvPr id="23" name="PlaceHolder 4"/>
           <p:cNvSpPr>
             <a:spLocks noGrp="1"/>
           </p:cNvSpPr>
@@ -3879,7 +3483,7 @@
         <p:spPr>
           <a:xfrm>
             <a:off x="838080" y="6356520"/>
-            <a:ext cx="2741040" cy="362880"/>
+            <a:ext cx="2740320" cy="362160"/>
           </a:xfrm>
           <a:prstGeom prst="rect">
             <a:avLst/>
@@ -3950,7 +3554,7 @@
       </p:sp>
       <p:sp>
         <p:nvSpPr>
-          <p:cNvPr id="23" name="PlaceHolder 3"/>
+          <p:cNvPr id="24" name="PlaceHolder 5"/>
           <p:cNvSpPr>
             <a:spLocks noGrp="1"/>
           </p:cNvSpPr>
@@ -3961,7 +3565,7 @@
         <p:spPr>
           <a:xfrm>
             <a:off x="4038480" y="6356520"/>
-            <a:ext cx="4112640" cy="362880"/>
+            <a:ext cx="4111920" cy="362160"/>
           </a:xfrm>
           <a:prstGeom prst="rect">
             <a:avLst/>
@@ -4028,7 +3632,7 @@
       </p:sp>
       <p:sp>
         <p:nvSpPr>
-          <p:cNvPr id="24" name="PlaceHolder 4"/>
+          <p:cNvPr id="25" name="PlaceHolder 6"/>
           <p:cNvSpPr>
             <a:spLocks noGrp="1"/>
           </p:cNvSpPr>
@@ -4039,7 +3643,7 @@
         <p:spPr>
           <a:xfrm>
             <a:off x="8610480" y="6356520"/>
-            <a:ext cx="2741040" cy="362880"/>
+            <a:ext cx="2740320" cy="362160"/>
           </a:xfrm>
           <a:prstGeom prst="rect">
             <a:avLst/>
@@ -4084,7 +3688,7 @@
                 <a:tab algn="l" pos="0"/>
               </a:tabLst>
             </a:pPr>
-            <a:fld id="{5396E0D0-5227-4702-B483-208B19C73D98}" type="slidenum">
+            <a:fld id="{7099DA42-503E-49D0-AE59-8BA87BA4E4E5}" type="slidenum">
               <a:rPr b="0" lang="en-GB" sz="1200" strike="noStrike" u="none">
                 <a:solidFill>
                   <a:schemeClr val="dk1">
@@ -4114,8 +3718,8 @@
 </file>
 
 <file path=ppt/slideLayouts/slideLayout6.xml><?xml version="1.0" encoding="utf-8"?>
-<p:sldLayout xmlns:a="http://schemas.openxmlformats.org/drawingml/2006/main" xmlns:p="http://schemas.openxmlformats.org/presentationml/2006/main" xmlns:r="http://schemas.openxmlformats.org/officeDocument/2006/relationships" xmlns:p14="http://schemas.microsoft.com/office/powerpoint/2010/main" xmlns:p15="http://schemas.microsoft.com/office/powerpoint/2012/main" xmlns:mc="http://schemas.openxmlformats.org/markup-compatibility/2006" type="vertTx" preserve="1">
-  <p:cSld name="Título y texto vertical">
+<p:sldLayout xmlns:a="http://schemas.openxmlformats.org/drawingml/2006/main" xmlns:p="http://schemas.openxmlformats.org/presentationml/2006/main" xmlns:r="http://schemas.openxmlformats.org/officeDocument/2006/relationships" xmlns:p14="http://schemas.microsoft.com/office/powerpoint/2010/main" xmlns:p15="http://schemas.microsoft.com/office/powerpoint/2012/main" xmlns:mc="http://schemas.openxmlformats.org/markup-compatibility/2006" type="blank" preserve="1">
+  <p:cSld name="Comparación">
     <p:bg>
       <p:bgPr>
         <a:solidFill>
@@ -4139,7 +3743,7 @@
       </p:grpSpPr>
       <p:sp>
         <p:nvSpPr>
-          <p:cNvPr id="25" name="PlaceHolder 1"/>
+          <p:cNvPr id="26" name="PlaceHolder 1"/>
           <p:cNvSpPr>
             <a:spLocks noGrp="1"/>
           </p:cNvSpPr>
@@ -4149,8 +3753,8 @@
         </p:nvSpPr>
         <p:spPr>
           <a:xfrm>
-            <a:off x="838080" y="365040"/>
-            <a:ext cx="10513440" cy="1323360"/>
+            <a:off x="839880" y="365040"/>
+            <a:ext cx="10512720" cy="1322640"/>
           </a:xfrm>
           <a:prstGeom prst="rect">
             <a:avLst/>
@@ -4198,7 +3802,7 @@
       </p:sp>
       <p:sp>
         <p:nvSpPr>
-          <p:cNvPr id="26" name="PlaceHolder 2"/>
+          <p:cNvPr id="27" name="PlaceHolder 2"/>
           <p:cNvSpPr>
             <a:spLocks noGrp="1"/>
           </p:cNvSpPr>
@@ -4208,8 +3812,8 @@
         </p:nvSpPr>
         <p:spPr>
           <a:xfrm>
-            <a:off x="838080" y="1825560"/>
-            <a:ext cx="10513440" cy="4349160"/>
+            <a:off x="839880" y="1681200"/>
+            <a:ext cx="5154840" cy="821160"/>
           </a:xfrm>
           <a:prstGeom prst="rect">
             <a:avLst/>
@@ -4220,7 +3824,69 @@
           </a:ln>
         </p:spPr>
         <p:txBody>
-          <a:bodyPr lIns="91440" rIns="91440" tIns="45720" bIns="45720" anchor="t" vert="eaVert">
+          <a:bodyPr lIns="91440" rIns="91440" tIns="45720" bIns="45720" anchor="b">
+            <a:noAutofit/>
+          </a:bodyPr>
+          <a:p>
+            <a:pPr indent="0" defTabSz="914400">
+              <a:lnSpc>
+                <a:spcPct val="90000"/>
+              </a:lnSpc>
+              <a:spcBef>
+                <a:spcPts val="1001"/>
+              </a:spcBef>
+              <a:buNone/>
+              <a:tabLst>
+                <a:tab algn="l" pos="0"/>
+              </a:tabLst>
+            </a:pPr>
+            <a:r>
+              <a:rPr b="1" lang="es-ES" sz="2400" strike="noStrike" u="none">
+                <a:solidFill>
+                  <a:schemeClr val="dk1"/>
+                </a:solidFill>
+                <a:effectLst/>
+                <a:uFillTx/>
+                <a:latin typeface="Calibri"/>
+              </a:rPr>
+              <a:t>Haga clic para modificar los estilos de texto del patrón</a:t>
+            </a:r>
+            <a:endParaRPr b="0" lang="es-ES" sz="2400" strike="noStrike" u="none">
+              <a:solidFill>
+                <a:srgbClr val="000000"/>
+              </a:solidFill>
+              <a:effectLst/>
+              <a:uFillTx/>
+              <a:latin typeface="Arial"/>
+            </a:endParaRPr>
+          </a:p>
+        </p:txBody>
+      </p:sp>
+      <p:sp>
+        <p:nvSpPr>
+          <p:cNvPr id="28" name="PlaceHolder 3"/>
+          <p:cNvSpPr>
+            <a:spLocks noGrp="1"/>
+          </p:cNvSpPr>
+          <p:nvPr>
+            <p:ph type="body"/>
+          </p:nvPr>
+        </p:nvSpPr>
+        <p:spPr>
+          <a:xfrm>
+            <a:off x="839880" y="2505240"/>
+            <a:ext cx="5154840" cy="3681720"/>
+          </a:xfrm>
+          <a:prstGeom prst="rect">
+            <a:avLst/>
+          </a:prstGeom>
+          <a:noFill/>
+          <a:ln w="0">
+            <a:noFill/>
+          </a:ln>
+        </p:spPr>
+        <p:txBody>
+          <a:bodyPr lIns="91440" rIns="91440" tIns="45720" bIns="45720" anchor="t">
             <a:noAutofit/>
           </a:bodyPr>
           <a:p>
@@ -4397,7 +4063,268 @@
       </p:sp>
       <p:sp>
         <p:nvSpPr>
-          <p:cNvPr id="27" name="PlaceHolder 3"/>
+          <p:cNvPr id="29" name="PlaceHolder 4"/>
+          <p:cNvSpPr>
+            <a:spLocks noGrp="1"/>
+          </p:cNvSpPr>
+          <p:nvPr>
+            <p:ph type="body"/>
+          </p:nvPr>
+        </p:nvSpPr>
+        <p:spPr>
+          <a:xfrm>
+            <a:off x="6172200" y="1681200"/>
+            <a:ext cx="5180400" cy="821160"/>
+          </a:xfrm>
+          <a:prstGeom prst="rect">
+            <a:avLst/>
+          </a:prstGeom>
+          <a:noFill/>
+          <a:ln w="0">
+            <a:noFill/>
+          </a:ln>
+        </p:spPr>
+        <p:txBody>
+          <a:bodyPr lIns="91440" rIns="91440" tIns="45720" bIns="45720" anchor="b">
+            <a:noAutofit/>
+          </a:bodyPr>
+          <a:p>
+            <a:pPr indent="0" defTabSz="914400">
+              <a:lnSpc>
+                <a:spcPct val="90000"/>
+              </a:lnSpc>
+              <a:spcBef>
+                <a:spcPts val="1001"/>
+              </a:spcBef>
+              <a:buNone/>
+              <a:tabLst>
+                <a:tab algn="l" pos="0"/>
+              </a:tabLst>
+            </a:pPr>
+            <a:r>
+              <a:rPr b="1" lang="es-ES" sz="2400" strike="noStrike" u="none">
+                <a:solidFill>
+                  <a:schemeClr val="dk1"/>
+                </a:solidFill>
+                <a:effectLst/>
+                <a:uFillTx/>
+                <a:latin typeface="Calibri"/>
+              </a:rPr>
+              <a:t>Haga clic para modificar los estilos de texto del patrón</a:t>
+            </a:r>
+            <a:endParaRPr b="0" lang="es-ES" sz="2400" strike="noStrike" u="none">
+              <a:solidFill>
+                <a:srgbClr val="000000"/>
+              </a:solidFill>
+              <a:effectLst/>
+              <a:uFillTx/>
+              <a:latin typeface="Arial"/>
+            </a:endParaRPr>
+          </a:p>
+        </p:txBody>
+      </p:sp>
+      <p:sp>
+        <p:nvSpPr>
+          <p:cNvPr id="30" name="PlaceHolder 5"/>
+          <p:cNvSpPr>
+            <a:spLocks noGrp="1"/>
+          </p:cNvSpPr>
+          <p:nvPr>
+            <p:ph type="body"/>
+          </p:nvPr>
+        </p:nvSpPr>
+        <p:spPr>
+          <a:xfrm>
+            <a:off x="6172200" y="2505240"/>
+            <a:ext cx="5180400" cy="3681720"/>
+          </a:xfrm>
+          <a:prstGeom prst="rect">
+            <a:avLst/>
+          </a:prstGeom>
+          <a:noFill/>
+          <a:ln w="0">
+            <a:noFill/>
+          </a:ln>
+        </p:spPr>
+        <p:txBody>
+          <a:bodyPr lIns="91440" rIns="91440" tIns="45720" bIns="45720" anchor="t">
+            <a:noAutofit/>
+          </a:bodyPr>
+          <a:p>
+            <a:pPr marL="228600" indent="-228600" defTabSz="914400">
+              <a:lnSpc>
+                <a:spcPct val="90000"/>
+              </a:lnSpc>
+              <a:spcBef>
+                <a:spcPts val="1001"/>
+              </a:spcBef>
+              <a:buClr>
+                <a:srgbClr val="000000"/>
+              </a:buClr>
+              <a:buFont typeface="Arial"/>
+              <a:buChar char="•"/>
+            </a:pPr>
+            <a:r>
+              <a:rPr b="0" lang="es-ES" sz="2800" strike="noStrike" u="none">
+                <a:solidFill>
+                  <a:schemeClr val="dk1"/>
+                </a:solidFill>
+                <a:effectLst/>
+                <a:uFillTx/>
+                <a:latin typeface="Calibri"/>
+              </a:rPr>
+              <a:t>Haga clic para modificar los estilos de texto del patrón</a:t>
+            </a:r>
+            <a:endParaRPr b="0" lang="es-ES" sz="2800" strike="noStrike" u="none">
+              <a:solidFill>
+                <a:srgbClr val="000000"/>
+              </a:solidFill>
+              <a:effectLst/>
+              <a:uFillTx/>
+              <a:latin typeface="Arial"/>
+            </a:endParaRPr>
+          </a:p>
+          <a:p>
+            <a:pPr lvl="1" marL="685800" indent="-228600" defTabSz="914400">
+              <a:lnSpc>
+                <a:spcPct val="90000"/>
+              </a:lnSpc>
+              <a:spcBef>
+                <a:spcPts val="499"/>
+              </a:spcBef>
+              <a:buClr>
+                <a:srgbClr val="000000"/>
+              </a:buClr>
+              <a:buFont typeface="Arial"/>
+              <a:buChar char="•"/>
+            </a:pPr>
+            <a:r>
+              <a:rPr b="0" lang="es-ES" sz="2400" strike="noStrike" u="none">
+                <a:solidFill>
+                  <a:schemeClr val="dk1"/>
+                </a:solidFill>
+                <a:effectLst/>
+                <a:uFillTx/>
+                <a:latin typeface="Calibri"/>
+              </a:rPr>
+              <a:t>Segundo nivel</a:t>
+            </a:r>
+            <a:endParaRPr b="0" lang="es-ES" sz="2400" strike="noStrike" u="none">
+              <a:solidFill>
+                <a:srgbClr val="000000"/>
+              </a:solidFill>
+              <a:effectLst/>
+              <a:uFillTx/>
+              <a:latin typeface="Arial"/>
+            </a:endParaRPr>
+          </a:p>
+          <a:p>
+            <a:pPr lvl="2" marL="1143000" indent="-228600" defTabSz="914400">
+              <a:lnSpc>
+                <a:spcPct val="90000"/>
+              </a:lnSpc>
+              <a:spcBef>
+                <a:spcPts val="499"/>
+              </a:spcBef>
+              <a:buClr>
+                <a:srgbClr val="000000"/>
+              </a:buClr>
+              <a:buFont typeface="Arial"/>
+              <a:buChar char="•"/>
+            </a:pPr>
+            <a:r>
+              <a:rPr b="0" lang="es-ES" sz="2000" strike="noStrike" u="none">
+                <a:solidFill>
+                  <a:schemeClr val="dk1"/>
+                </a:solidFill>
+                <a:effectLst/>
+                <a:uFillTx/>
+                <a:latin typeface="Calibri"/>
+              </a:rPr>
+              <a:t>Tercer nivel</a:t>
+            </a:r>
+            <a:endParaRPr b="0" lang="es-ES" sz="2000" strike="noStrike" u="none">
+              <a:solidFill>
+                <a:srgbClr val="000000"/>
+              </a:solidFill>
+              <a:effectLst/>
+              <a:uFillTx/>
+              <a:latin typeface="Arial"/>
+            </a:endParaRPr>
+          </a:p>
+          <a:p>
+            <a:pPr lvl="3" marL="1600200" indent="-228600" defTabSz="914400">
+              <a:lnSpc>
+                <a:spcPct val="90000"/>
+              </a:lnSpc>
+              <a:spcBef>
+                <a:spcPts val="499"/>
+              </a:spcBef>
+              <a:buClr>
+                <a:srgbClr val="000000"/>
+              </a:buClr>
+              <a:buFont typeface="Arial"/>
+              <a:buChar char="•"/>
+            </a:pPr>
+            <a:r>
+              <a:rPr b="0" lang="es-ES" sz="1800" strike="noStrike" u="none">
+                <a:solidFill>
+                  <a:schemeClr val="dk1"/>
+                </a:solidFill>
+                <a:effectLst/>
+                <a:uFillTx/>
+                <a:latin typeface="Calibri"/>
+              </a:rPr>
+              <a:t>Cuarto nivel</a:t>
+            </a:r>
+            <a:endParaRPr b="0" lang="es-ES" sz="1800" strike="noStrike" u="none">
+              <a:solidFill>
+                <a:srgbClr val="000000"/>
+              </a:solidFill>
+              <a:effectLst/>
+              <a:uFillTx/>
+              <a:latin typeface="Arial"/>
+            </a:endParaRPr>
+          </a:p>
+          <a:p>
+            <a:pPr lvl="4" marL="2057400" indent="-228600" defTabSz="914400">
+              <a:lnSpc>
+                <a:spcPct val="90000"/>
+              </a:lnSpc>
+              <a:spcBef>
+                <a:spcPts val="499"/>
+              </a:spcBef>
+              <a:buClr>
+                <a:srgbClr val="000000"/>
+              </a:buClr>
+              <a:buFont typeface="Arial"/>
+              <a:buChar char="•"/>
+            </a:pPr>
+            <a:r>
+              <a:rPr b="0" lang="es-ES" sz="1800" strike="noStrike" u="none">
+                <a:solidFill>
+                  <a:schemeClr val="dk1"/>
+                </a:solidFill>
+                <a:effectLst/>
+                <a:uFillTx/>
+                <a:latin typeface="Calibri"/>
+              </a:rPr>
+              <a:t>Quinto nivel</a:t>
+            </a:r>
+            <a:endParaRPr b="0" lang="es-ES" sz="1800" strike="noStrike" u="none">
+              <a:solidFill>
+                <a:srgbClr val="000000"/>
+              </a:solidFill>
+              <a:effectLst/>
+              <a:uFillTx/>
+              <a:latin typeface="Arial"/>
+            </a:endParaRPr>
+          </a:p>
+        </p:txBody>
+      </p:sp>
+      <p:sp>
+        <p:nvSpPr>
+          <p:cNvPr id="31" name="PlaceHolder 6"/>
           <p:cNvSpPr>
             <a:spLocks noGrp="1"/>
           </p:cNvSpPr>
@@ -4408,7 +4335,7 @@
         <p:spPr>
           <a:xfrm>
             <a:off x="838080" y="6356520"/>
-            <a:ext cx="2741040" cy="362880"/>
+            <a:ext cx="2740320" cy="362160"/>
           </a:xfrm>
           <a:prstGeom prst="rect">
             <a:avLst/>
@@ -4479,7 +4406,7 @@
       </p:sp>
       <p:sp>
         <p:nvSpPr>
-          <p:cNvPr id="28" name="PlaceHolder 4"/>
+          <p:cNvPr id="32" name="PlaceHolder 7"/>
           <p:cNvSpPr>
             <a:spLocks noGrp="1"/>
           </p:cNvSpPr>
@@ -4490,7 +4417,7 @@
         <p:spPr>
           <a:xfrm>
             <a:off x="4038480" y="6356520"/>
-            <a:ext cx="4112640" cy="362880"/>
+            <a:ext cx="4111920" cy="362160"/>
           </a:xfrm>
           <a:prstGeom prst="rect">
             <a:avLst/>
@@ -4557,7 +4484,7 @@
       </p:sp>
       <p:sp>
         <p:nvSpPr>
-          <p:cNvPr id="29" name="PlaceHolder 5"/>
+          <p:cNvPr id="33" name="PlaceHolder 8"/>
           <p:cNvSpPr>
             <a:spLocks noGrp="1"/>
           </p:cNvSpPr>
@@ -4568,7 +4495,7 @@
         <p:spPr>
           <a:xfrm>
             <a:off x="8610480" y="6356520"/>
-            <a:ext cx="2741040" cy="362880"/>
+            <a:ext cx="2740320" cy="362160"/>
           </a:xfrm>
           <a:prstGeom prst="rect">
             <a:avLst/>
@@ -4613,7 +4540,7 @@
                 <a:tab algn="l" pos="0"/>
               </a:tabLst>
             </a:pPr>
-            <a:fld id="{104F1B70-0E55-41E1-B978-CA6DB3E46AF2}" type="slidenum">
+            <a:fld id="{CF52F26A-07FD-4E7F-8693-E80786A599E7}" type="slidenum">
               <a:rPr b="0" lang="en-GB" sz="1200" strike="noStrike" u="none">
                 <a:solidFill>
                   <a:schemeClr val="dk1">
@@ -4643,8 +4570,8 @@
 </file>
 
 <file path=ppt/slideLayouts/slideLayout7.xml><?xml version="1.0" encoding="utf-8"?>
-<p:sldLayout xmlns:a="http://schemas.openxmlformats.org/drawingml/2006/main" xmlns:p="http://schemas.openxmlformats.org/presentationml/2006/main" xmlns:r="http://schemas.openxmlformats.org/officeDocument/2006/relationships" xmlns:p14="http://schemas.microsoft.com/office/powerpoint/2010/main" xmlns:p15="http://schemas.microsoft.com/office/powerpoint/2012/main" xmlns:mc="http://schemas.openxmlformats.org/markup-compatibility/2006" type="vertTitleAndTx" preserve="1">
-  <p:cSld name="Título vertical y texto">
+<p:sldLayout xmlns:a="http://schemas.openxmlformats.org/drawingml/2006/main" xmlns:p="http://schemas.openxmlformats.org/presentationml/2006/main" xmlns:r="http://schemas.openxmlformats.org/officeDocument/2006/relationships" xmlns:p14="http://schemas.microsoft.com/office/powerpoint/2010/main" xmlns:p15="http://schemas.microsoft.com/office/powerpoint/2012/main" xmlns:mc="http://schemas.openxmlformats.org/markup-compatibility/2006" type="titleOnly" preserve="1">
+  <p:cSld name="Solo el título">
     <p:bg>
       <p:bgPr>
         <a:solidFill>
@@ -4668,7 +4595,7 @@
       </p:grpSpPr>
       <p:sp>
         <p:nvSpPr>
-          <p:cNvPr id="30" name="PlaceHolder 1"/>
+          <p:cNvPr id="34" name="PlaceHolder 1"/>
           <p:cNvSpPr>
             <a:spLocks noGrp="1"/>
           </p:cNvSpPr>
@@ -4678,8 +4605,8 @@
         </p:nvSpPr>
         <p:spPr>
           <a:xfrm>
-            <a:off x="8724960" y="365040"/>
-            <a:ext cx="2626920" cy="5809680"/>
+            <a:off x="838080" y="365040"/>
+            <a:ext cx="10512720" cy="1322640"/>
           </a:xfrm>
           <a:prstGeom prst="rect">
             <a:avLst/>
@@ -4690,7 +4617,7 @@
           </a:ln>
         </p:spPr>
         <p:txBody>
-          <a:bodyPr lIns="91440" rIns="91440" tIns="45720" bIns="45720" anchor="ctr" vert="eaVert">
+          <a:bodyPr lIns="91440" rIns="91440" tIns="45720" bIns="45720" anchor="ctr">
             <a:noAutofit/>
           </a:bodyPr>
           <a:p>
@@ -4727,206 +4654,7 @@
       </p:sp>
       <p:sp>
         <p:nvSpPr>
-          <p:cNvPr id="31" name="PlaceHolder 2"/>
-          <p:cNvSpPr>
-            <a:spLocks noGrp="1"/>
-          </p:cNvSpPr>
-          <p:nvPr>
-            <p:ph type="body"/>
-          </p:nvPr>
-        </p:nvSpPr>
-        <p:spPr>
-          <a:xfrm>
-            <a:off x="838080" y="365040"/>
-            <a:ext cx="7732080" cy="5809680"/>
-          </a:xfrm>
-          <a:prstGeom prst="rect">
-            <a:avLst/>
-          </a:prstGeom>
-          <a:noFill/>
-          <a:ln w="0">
-            <a:noFill/>
-          </a:ln>
-        </p:spPr>
-        <p:txBody>
-          <a:bodyPr lIns="91440" rIns="91440" tIns="45720" bIns="45720" anchor="t" vert="eaVert">
-            <a:noAutofit/>
-          </a:bodyPr>
-          <a:p>
-            <a:pPr marL="228600" indent="-228600" defTabSz="914400">
-              <a:lnSpc>
-                <a:spcPct val="90000"/>
-              </a:lnSpc>
-              <a:spcBef>
-                <a:spcPts val="1001"/>
-              </a:spcBef>
-              <a:buClr>
-                <a:srgbClr val="000000"/>
-              </a:buClr>
-              <a:buFont typeface="Arial"/>
-              <a:buChar char="•"/>
-            </a:pPr>
-            <a:r>
-              <a:rPr b="0" lang="es-ES" sz="2800" strike="noStrike" u="none">
-                <a:solidFill>
-                  <a:schemeClr val="dk1"/>
-                </a:solidFill>
-                <a:effectLst/>
-                <a:uFillTx/>
-                <a:latin typeface="Calibri"/>
-              </a:rPr>
-              <a:t>Haga clic para modificar los estilos de texto del patrón</a:t>
-            </a:r>
-            <a:endParaRPr b="0" lang="es-ES" sz="2800" strike="noStrike" u="none">
-              <a:solidFill>
-                <a:srgbClr val="000000"/>
-              </a:solidFill>
-              <a:effectLst/>
-              <a:uFillTx/>
-              <a:latin typeface="Arial"/>
-            </a:endParaRPr>
-          </a:p>
-          <a:p>
-            <a:pPr lvl="1" marL="685800" indent="-228600" defTabSz="914400">
-              <a:lnSpc>
-                <a:spcPct val="90000"/>
-              </a:lnSpc>
-              <a:spcBef>
-                <a:spcPts val="499"/>
-              </a:spcBef>
-              <a:buClr>
-                <a:srgbClr val="000000"/>
-              </a:buClr>
-              <a:buFont typeface="Arial"/>
-              <a:buChar char="•"/>
-            </a:pPr>
-            <a:r>
-              <a:rPr b="0" lang="es-ES" sz="2400" strike="noStrike" u="none">
-                <a:solidFill>
-                  <a:schemeClr val="dk1"/>
-                </a:solidFill>
-                <a:effectLst/>
-                <a:uFillTx/>
-                <a:latin typeface="Calibri"/>
-              </a:rPr>
-              <a:t>Segundo nivel</a:t>
-            </a:r>
-            <a:endParaRPr b="0" lang="es-ES" sz="2400" strike="noStrike" u="none">
-              <a:solidFill>
-                <a:srgbClr val="000000"/>
-              </a:solidFill>
-              <a:effectLst/>
-              <a:uFillTx/>
-              <a:latin typeface="Arial"/>
-            </a:endParaRPr>
-          </a:p>
-          <a:p>
-            <a:pPr lvl="2" marL="1143000" indent="-228600" defTabSz="914400">
-              <a:lnSpc>
-                <a:spcPct val="90000"/>
-              </a:lnSpc>
-              <a:spcBef>
-                <a:spcPts val="499"/>
-              </a:spcBef>
-              <a:buClr>
-                <a:srgbClr val="000000"/>
-              </a:buClr>
-              <a:buFont typeface="Arial"/>
-              <a:buChar char="•"/>
-            </a:pPr>
-            <a:r>
-              <a:rPr b="0" lang="es-ES" sz="2000" strike="noStrike" u="none">
-                <a:solidFill>
-                  <a:schemeClr val="dk1"/>
-                </a:solidFill>
-                <a:effectLst/>
-                <a:uFillTx/>
-                <a:latin typeface="Calibri"/>
-              </a:rPr>
-              <a:t>Tercer nivel</a:t>
-            </a:r>
-            <a:endParaRPr b="0" lang="es-ES" sz="2000" strike="noStrike" u="none">
-              <a:solidFill>
-                <a:srgbClr val="000000"/>
-              </a:solidFill>
-              <a:effectLst/>
-              <a:uFillTx/>
-              <a:latin typeface="Arial"/>
-            </a:endParaRPr>
-          </a:p>
-          <a:p>
-            <a:pPr lvl="3" marL="1600200" indent="-228600" defTabSz="914400">
-              <a:lnSpc>
-                <a:spcPct val="90000"/>
-              </a:lnSpc>
-              <a:spcBef>
-                <a:spcPts val="499"/>
-              </a:spcBef>
-              <a:buClr>
-                <a:srgbClr val="000000"/>
-              </a:buClr>
-              <a:buFont typeface="Arial"/>
-              <a:buChar char="•"/>
-            </a:pPr>
-            <a:r>
-              <a:rPr b="0" lang="es-ES" sz="1800" strike="noStrike" u="none">
-                <a:solidFill>
-                  <a:schemeClr val="dk1"/>
-                </a:solidFill>
-                <a:effectLst/>
-                <a:uFillTx/>
-                <a:latin typeface="Calibri"/>
-              </a:rPr>
-              <a:t>Cuarto nivel</a:t>
-            </a:r>
-            <a:endParaRPr b="0" lang="es-ES" sz="1800" strike="noStrike" u="none">
-              <a:solidFill>
-                <a:srgbClr val="000000"/>
-              </a:solidFill>
-              <a:effectLst/>
-              <a:uFillTx/>
-              <a:latin typeface="Arial"/>
-            </a:endParaRPr>
-          </a:p>
-          <a:p>
-            <a:pPr lvl="4" marL="2057400" indent="-228600" defTabSz="914400">
-              <a:lnSpc>
-                <a:spcPct val="90000"/>
-              </a:lnSpc>
-              <a:spcBef>
-                <a:spcPts val="499"/>
-              </a:spcBef>
-              <a:buClr>
-                <a:srgbClr val="000000"/>
-              </a:buClr>
-              <a:buFont typeface="Arial"/>
-              <a:buChar char="•"/>
-            </a:pPr>
-            <a:r>
-              <a:rPr b="0" lang="es-ES" sz="1800" strike="noStrike" u="none">
-                <a:solidFill>
-                  <a:schemeClr val="dk1"/>
-                </a:solidFill>
-                <a:effectLst/>
-                <a:uFillTx/>
-                <a:latin typeface="Calibri"/>
-              </a:rPr>
-              <a:t>Quinto nivel</a:t>
-            </a:r>
-            <a:endParaRPr b="0" lang="es-ES" sz="1800" strike="noStrike" u="none">
-              <a:solidFill>
-                <a:srgbClr val="000000"/>
-              </a:solidFill>
-              <a:effectLst/>
-              <a:uFillTx/>
-              <a:latin typeface="Arial"/>
-            </a:endParaRPr>
-          </a:p>
-        </p:txBody>
-      </p:sp>
-      <p:sp>
-        <p:nvSpPr>
-          <p:cNvPr id="32" name="PlaceHolder 3"/>
+          <p:cNvPr id="35" name="PlaceHolder 2"/>
           <p:cNvSpPr>
             <a:spLocks noGrp="1"/>
           </p:cNvSpPr>
@@ -4937,7 +4665,7 @@
         <p:spPr>
           <a:xfrm>
             <a:off x="838080" y="6356520"/>
-            <a:ext cx="2741040" cy="362880"/>
+            <a:ext cx="2740320" cy="362160"/>
           </a:xfrm>
           <a:prstGeom prst="rect">
             <a:avLst/>
@@ -5008,7 +4736,7 @@
       </p:sp>
       <p:sp>
         <p:nvSpPr>
-          <p:cNvPr id="33" name="PlaceHolder 4"/>
+          <p:cNvPr id="36" name="PlaceHolder 3"/>
           <p:cNvSpPr>
             <a:spLocks noGrp="1"/>
           </p:cNvSpPr>
@@ -5019,7 +4747,7 @@
         <p:spPr>
           <a:xfrm>
             <a:off x="4038480" y="6356520"/>
-            <a:ext cx="4112640" cy="362880"/>
+            <a:ext cx="4111920" cy="362160"/>
           </a:xfrm>
           <a:prstGeom prst="rect">
             <a:avLst/>
@@ -5086,7 +4814,7 @@
       </p:sp>
       <p:sp>
         <p:nvSpPr>
-          <p:cNvPr id="34" name="PlaceHolder 5"/>
+          <p:cNvPr id="37" name="PlaceHolder 4"/>
           <p:cNvSpPr>
             <a:spLocks noGrp="1"/>
           </p:cNvSpPr>
@@ -5097,7 +4825,7 @@
         <p:spPr>
           <a:xfrm>
             <a:off x="8610480" y="6356520"/>
-            <a:ext cx="2741040" cy="362880"/>
+            <a:ext cx="2740320" cy="362160"/>
           </a:xfrm>
           <a:prstGeom prst="rect">
             <a:avLst/>
@@ -5142,7 +4870,7 @@
                 <a:tab algn="l" pos="0"/>
               </a:tabLst>
             </a:pPr>
-            <a:fld id="{BA410100-7A00-435B-82C9-47F280CAC41C}" type="slidenum">
+            <a:fld id="{9DD91F4F-13DE-479E-AFAC-9E4E7CBAFBD1}" type="slidenum">
               <a:rPr b="0" lang="en-GB" sz="1200" strike="noStrike" u="none">
                 <a:solidFill>
                   <a:schemeClr val="dk1">
@@ -5172,8 +4900,8 @@
 </file>
 
 <file path=ppt/slideLayouts/slideLayout8.xml><?xml version="1.0" encoding="utf-8"?>
-<p:sldLayout xmlns:a="http://schemas.openxmlformats.org/drawingml/2006/main" xmlns:p="http://schemas.openxmlformats.org/presentationml/2006/main" xmlns:r="http://schemas.openxmlformats.org/officeDocument/2006/relationships" xmlns:p14="http://schemas.microsoft.com/office/powerpoint/2010/main" xmlns:p15="http://schemas.microsoft.com/office/powerpoint/2012/main" xmlns:mc="http://schemas.openxmlformats.org/markup-compatibility/2006" type="obj" preserve="1">
-  <p:cSld name="Título y objetos">
+<p:sldLayout xmlns:a="http://schemas.openxmlformats.org/drawingml/2006/main" xmlns:p="http://schemas.openxmlformats.org/presentationml/2006/main" xmlns:r="http://schemas.openxmlformats.org/officeDocument/2006/relationships" xmlns:p14="http://schemas.microsoft.com/office/powerpoint/2010/main" xmlns:p15="http://schemas.microsoft.com/office/powerpoint/2012/main" xmlns:mc="http://schemas.openxmlformats.org/markup-compatibility/2006" type="blank" preserve="1">
+  <p:cSld name="En blanco">
     <p:bg>
       <p:bgPr>
         <a:solidFill>
@@ -5197,7 +4925,249 @@
       </p:grpSpPr>
       <p:sp>
         <p:nvSpPr>
-          <p:cNvPr id="35" name="PlaceHolder 1"/>
+          <p:cNvPr id="38" name="PlaceHolder 1"/>
+          <p:cNvSpPr>
+            <a:spLocks noGrp="1"/>
+          </p:cNvSpPr>
+          <p:nvPr>
+            <p:ph type="dt" idx="22"/>
+          </p:nvPr>
+        </p:nvSpPr>
+        <p:spPr>
+          <a:xfrm>
+            <a:off x="838080" y="6356520"/>
+            <a:ext cx="2740320" cy="362160"/>
+          </a:xfrm>
+          <a:prstGeom prst="rect">
+            <a:avLst/>
+          </a:prstGeom>
+          <a:noFill/>
+          <a:ln w="0">
+            <a:noFill/>
+          </a:ln>
+        </p:spPr>
+        <p:txBody>
+          <a:bodyPr lIns="91440" rIns="91440" tIns="45720" bIns="45720" anchor="ctr">
+            <a:noAutofit/>
+          </a:bodyPr>
+          <a:lstStyle>
+            <a:lvl1pPr indent="0" defTabSz="914400">
+              <a:lnSpc>
+                <a:spcPct val="100000"/>
+              </a:lnSpc>
+              <a:buNone/>
+              <a:tabLst>
+                <a:tab algn="l" pos="0"/>
+              </a:tabLst>
+              <a:defRPr b="0" lang="en-GB" sz="1200" strike="noStrike" u="none">
+                <a:solidFill>
+                  <a:schemeClr val="dk1">
+                    <a:tint val="75000"/>
+                  </a:schemeClr>
+                </a:solidFill>
+                <a:effectLst/>
+                <a:uFillTx/>
+                <a:latin typeface="Calibri"/>
+              </a:defRPr>
+            </a:lvl1pPr>
+          </a:lstStyle>
+          <a:p>
+            <a:pPr indent="0" defTabSz="914400">
+              <a:lnSpc>
+                <a:spcPct val="100000"/>
+              </a:lnSpc>
+              <a:buNone/>
+              <a:tabLst>
+                <a:tab algn="l" pos="0"/>
+              </a:tabLst>
+            </a:pPr>
+            <a:r>
+              <a:rPr b="0" lang="en-GB" sz="1200" strike="noStrike" u="none">
+                <a:solidFill>
+                  <a:schemeClr val="dk1">
+                    <a:tint val="75000"/>
+                  </a:schemeClr>
+                </a:solidFill>
+                <a:effectLst/>
+                <a:uFillTx/>
+                <a:latin typeface="Calibri"/>
+              </a:rPr>
+              <a:t>&lt;fecha/hora&gt;</a:t>
+            </a:r>
+            <a:endParaRPr b="0" lang="es-ES" sz="1200" strike="noStrike" u="none">
+              <a:solidFill>
+                <a:srgbClr val="000000"/>
+              </a:solidFill>
+              <a:effectLst/>
+              <a:uFillTx/>
+              <a:latin typeface="Times New Roman"/>
+            </a:endParaRPr>
+          </a:p>
+        </p:txBody>
+      </p:sp>
+      <p:sp>
+        <p:nvSpPr>
+          <p:cNvPr id="39" name="PlaceHolder 2"/>
+          <p:cNvSpPr>
+            <a:spLocks noGrp="1"/>
+          </p:cNvSpPr>
+          <p:nvPr>
+            <p:ph type="ftr" idx="23"/>
+          </p:nvPr>
+        </p:nvSpPr>
+        <p:spPr>
+          <a:xfrm>
+            <a:off x="4038480" y="6356520"/>
+            <a:ext cx="4111920" cy="362160"/>
+          </a:xfrm>
+          <a:prstGeom prst="rect">
+            <a:avLst/>
+          </a:prstGeom>
+          <a:noFill/>
+          <a:ln w="0">
+            <a:noFill/>
+          </a:ln>
+        </p:spPr>
+        <p:txBody>
+          <a:bodyPr lIns="91440" rIns="91440" tIns="45720" bIns="45720" anchor="ctr">
+            <a:noAutofit/>
+          </a:bodyPr>
+          <a:lstStyle>
+            <a:lvl1pPr indent="0" algn="ctr">
+              <a:lnSpc>
+                <a:spcPct val="100000"/>
+              </a:lnSpc>
+              <a:buNone/>
+              <a:tabLst>
+                <a:tab algn="l" pos="0"/>
+              </a:tabLst>
+              <a:defRPr b="0" lang="es-ES" sz="1400" strike="noStrike" u="none">
+                <a:solidFill>
+                  <a:srgbClr val="000000"/>
+                </a:solidFill>
+                <a:effectLst/>
+                <a:uFillTx/>
+                <a:latin typeface="Times New Roman"/>
+              </a:defRPr>
+            </a:lvl1pPr>
+          </a:lstStyle>
+          <a:p>
+            <a:pPr indent="0" algn="ctr">
+              <a:lnSpc>
+                <a:spcPct val="100000"/>
+              </a:lnSpc>
+              <a:buNone/>
+              <a:tabLst>
+                <a:tab algn="l" pos="0"/>
+              </a:tabLst>
+            </a:pPr>
+            <a:r>
+              <a:rPr b="0" lang="es-ES" sz="1400" strike="noStrike" u="none">
+                <a:solidFill>
+                  <a:srgbClr val="000000"/>
+                </a:solidFill>
+                <a:effectLst/>
+                <a:uFillTx/>
+                <a:latin typeface="Times New Roman"/>
+              </a:rPr>
+              <a:t>&lt;pie de página&gt;</a:t>
+            </a:r>
+            <a:endParaRPr b="0" lang="es-ES" sz="1400" strike="noStrike" u="none">
+              <a:solidFill>
+                <a:srgbClr val="000000"/>
+              </a:solidFill>
+              <a:effectLst/>
+              <a:uFillTx/>
+              <a:latin typeface="Times New Roman"/>
+            </a:endParaRPr>
+          </a:p>
+        </p:txBody>
+      </p:sp>
+      <p:sp>
+        <p:nvSpPr>
+          <p:cNvPr id="40" name="PlaceHolder 3"/>
+          <p:cNvSpPr>
+            <a:spLocks noGrp="1"/>
+          </p:cNvSpPr>
+          <p:nvPr>
+            <p:ph type="sldNum" idx="24"/>
+          </p:nvPr>
+        </p:nvSpPr>
+        <p:spPr>
+          <a:xfrm>
+            <a:off x="8610480" y="6356520"/>
+            <a:ext cx="2740320" cy="362160"/>
+          </a:xfrm>
+          <a:prstGeom prst="rect">
+            <a:avLst/>
+          </a:prstGeom>
+          <a:noFill/>
+          <a:ln w="0">
+            <a:noFill/>
+          </a:ln>
+        </p:spPr>
+        <p:txBody>
+          <a:bodyPr lIns="91440" rIns="91440" tIns="45720" bIns="45720" anchor="ctr">
+            <a:noAutofit/>
+          </a:bodyPr>
+          <a:lstStyle>
+            <a:lvl1pPr indent="0" algn="r" defTabSz="914400">
+              <a:lnSpc>
+                <a:spcPct val="100000"/>
+              </a:lnSpc>
+              <a:buNone/>
+              <a:tabLst>
+                <a:tab algn="l" pos="0"/>
+              </a:tabLst>
+              <a:defRPr b="0" lang="en-GB" sz="1200" strike="noStrike" u="none">
+                <a:solidFill>
+                  <a:schemeClr val="dk1">
+                    <a:tint val="75000"/>
+                  </a:schemeClr>
+                </a:solidFill>
+                <a:effectLst/>
+                <a:uFillTx/>
+                <a:latin typeface="Calibri"/>
+              </a:defRPr>
+            </a:lvl1pPr>
+          </a:lstStyle>
+          <a:p>
+            <a:pPr indent="0" algn="r" defTabSz="914400">
+              <a:lnSpc>
+                <a:spcPct val="100000"/>
+              </a:lnSpc>
+              <a:buNone/>
+              <a:tabLst>
+                <a:tab algn="l" pos="0"/>
+              </a:tabLst>
+            </a:pPr>
+            <a:fld id="{958D23CA-2A7C-4BE4-849F-978CEB2D5265}" type="slidenum">
+              <a:rPr b="0" lang="en-GB" sz="1200" strike="noStrike" u="none">
+                <a:solidFill>
+                  <a:schemeClr val="dk1">
+                    <a:tint val="75000"/>
+                  </a:schemeClr>
+                </a:solidFill>
+                <a:effectLst/>
+                <a:uFillTx/>
+                <a:latin typeface="Calibri"/>
+              </a:rPr>
+              <a:t>&lt;número&gt;</a:t>
+            </a:fld>
+            <a:endParaRPr b="0" lang="es-ES" sz="1200" strike="noStrike" u="none">
+              <a:solidFill>
+                <a:srgbClr val="000000"/>
+              </a:solidFill>
+              <a:effectLst/>
+              <a:uFillTx/>
+              <a:latin typeface="Times New Roman"/>
+            </a:endParaRPr>
+          </a:p>
+        </p:txBody>
+      </p:sp>
+      <p:sp>
+        <p:nvSpPr>
+          <p:cNvPr id="41" name="PlaceHolder 4"/>
           <p:cNvSpPr>
             <a:spLocks noGrp="1"/>
           </p:cNvSpPr>
@@ -5207,8 +5177,8 @@
         </p:nvSpPr>
         <p:spPr>
           <a:xfrm>
-            <a:off x="838080" y="365040"/>
-            <a:ext cx="10513440" cy="1323360"/>
+            <a:off x="609480" y="273600"/>
+            <a:ext cx="10970280" cy="1142640"/>
           </a:xfrm>
           <a:prstGeom prst="rect">
             <a:avLst/>
@@ -5219,13 +5189,13 @@
           </a:ln>
         </p:spPr>
         <p:txBody>
-          <a:bodyPr lIns="91440" rIns="91440" tIns="45720" bIns="45720" anchor="ctr">
+          <a:bodyPr lIns="0" rIns="0" tIns="0" bIns="0" anchor="ctr">
             <a:noAutofit/>
           </a:bodyPr>
           <a:p>
-            <a:pPr indent="0" defTabSz="914400">
-              <a:lnSpc>
-                <a:spcPct val="90000"/>
+            <a:pPr indent="0" algn="ctr">
+              <a:lnSpc>
+                <a:spcPct val="100000"/>
               </a:lnSpc>
               <a:buNone/>
               <a:tabLst>
@@ -5235,13 +5205,13 @@
             <a:r>
               <a:rPr b="0" lang="es-ES" sz="4400" strike="noStrike" u="none">
                 <a:solidFill>
-                  <a:schemeClr val="dk1"/>
-                </a:solidFill>
-                <a:effectLst/>
-                <a:uFillTx/>
-                <a:latin typeface="Calibri Light"/>
-              </a:rPr>
-              <a:t>Haga clic para modificar el estilo de título del patrón</a:t>
+                  <a:srgbClr val="000000"/>
+                </a:solidFill>
+                <a:effectLst/>
+                <a:uFillTx/>
+                <a:latin typeface="Arial"/>
+              </a:rPr>
+              <a:t>Pulse para editar el formato del texto de título</a:t>
             </a:r>
             <a:endParaRPr b="0" lang="es-ES" sz="4400" strike="noStrike" u="none">
               <a:solidFill>
@@ -5256,7 +5226,7 @@
       </p:sp>
       <p:sp>
         <p:nvSpPr>
-          <p:cNvPr id="36" name="PlaceHolder 2"/>
+          <p:cNvPr id="42" name="PlaceHolder 5"/>
           <p:cNvSpPr>
             <a:spLocks noGrp="1"/>
           </p:cNvSpPr>
@@ -5266,8 +5236,8 @@
         </p:nvSpPr>
         <p:spPr>
           <a:xfrm>
-            <a:off x="838080" y="1825560"/>
-            <a:ext cx="10513440" cy="4349160"/>
+            <a:off x="609480" y="1604520"/>
+            <a:ext cx="10970280" cy="3975120"/>
           </a:xfrm>
           <a:prstGeom prst="rect">
             <a:avLst/>
@@ -5278,419 +5248,252 @@
           </a:ln>
         </p:spPr>
         <p:txBody>
-          <a:bodyPr lIns="91440" rIns="91440" tIns="45720" bIns="45720" anchor="t">
-            <a:noAutofit/>
+          <a:bodyPr lIns="0" rIns="0" tIns="0" bIns="0" anchor="t">
+            <a:normAutofit/>
           </a:bodyPr>
           <a:p>
-            <a:pPr marL="228600" indent="-228600" defTabSz="914400">
-              <a:lnSpc>
-                <a:spcPct val="90000"/>
+            <a:pPr marL="432000" indent="-324000">
+              <a:lnSpc>
+                <a:spcPct val="100000"/>
               </a:lnSpc>
               <a:spcBef>
-                <a:spcPts val="1001"/>
+                <a:spcPts val="1417"/>
               </a:spcBef>
               <a:buClr>
                 <a:srgbClr val="000000"/>
               </a:buClr>
-              <a:buFont typeface="Arial"/>
-              <a:buChar char="•"/>
-            </a:pPr>
-            <a:r>
-              <a:rPr b="0" lang="es-ES" sz="2800" strike="noStrike" u="none">
-                <a:solidFill>
-                  <a:schemeClr val="dk1"/>
-                </a:solidFill>
-                <a:effectLst/>
-                <a:uFillTx/>
-                <a:latin typeface="Calibri"/>
-              </a:rPr>
-              <a:t>Haga clic para modificar los estilos de texto del patrón</a:t>
-            </a:r>
-            <a:endParaRPr b="0" lang="es-ES" sz="2800" strike="noStrike" u="none">
-              <a:solidFill>
-                <a:srgbClr val="000000"/>
-              </a:solidFill>
-              <a:effectLst/>
-              <a:uFillTx/>
-              <a:latin typeface="Arial"/>
-            </a:endParaRPr>
-          </a:p>
-          <a:p>
-            <a:pPr lvl="1" marL="685800" indent="-228600" defTabSz="914400">
-              <a:lnSpc>
-                <a:spcPct val="90000"/>
+              <a:buSzPct val="45000"/>
+              <a:buFont typeface="Wingdings" charset="2"/>
+              <a:buChar char=""/>
+            </a:pPr>
+            <a:r>
+              <a:rPr b="0" lang="es-ES" sz="3200" strike="noStrike" u="none">
+                <a:solidFill>
+                  <a:srgbClr val="000000"/>
+                </a:solidFill>
+                <a:effectLst/>
+                <a:uFillTx/>
+                <a:latin typeface="Arial"/>
+              </a:rPr>
+              <a:t>Pulse para editar el formato de texto del esquema</a:t>
+            </a:r>
+            <a:endParaRPr b="0" lang="es-ES" sz="3200" strike="noStrike" u="none">
+              <a:solidFill>
+                <a:srgbClr val="000000"/>
+              </a:solidFill>
+              <a:effectLst/>
+              <a:uFillTx/>
+              <a:latin typeface="Arial"/>
+            </a:endParaRPr>
+          </a:p>
+          <a:p>
+            <a:pPr lvl="1" marL="864000" indent="-324000">
+              <a:lnSpc>
+                <a:spcPct val="100000"/>
               </a:lnSpc>
               <a:spcBef>
-                <a:spcPts val="499"/>
+                <a:spcPts val="1134"/>
               </a:spcBef>
               <a:buClr>
                 <a:srgbClr val="000000"/>
               </a:buClr>
-              <a:buFont typeface="Arial"/>
-              <a:buChar char="•"/>
-            </a:pPr>
-            <a:r>
-              <a:rPr b="0" lang="es-ES" sz="2400" strike="noStrike" u="none">
-                <a:solidFill>
-                  <a:schemeClr val="dk1"/>
-                </a:solidFill>
-                <a:effectLst/>
-                <a:uFillTx/>
-                <a:latin typeface="Calibri"/>
-              </a:rPr>
-              <a:t>Segundo nivel</a:t>
-            </a:r>
-            <a:endParaRPr b="0" lang="es-ES" sz="2400" strike="noStrike" u="none">
-              <a:solidFill>
-                <a:srgbClr val="000000"/>
-              </a:solidFill>
-              <a:effectLst/>
-              <a:uFillTx/>
-              <a:latin typeface="Arial"/>
-            </a:endParaRPr>
-          </a:p>
-          <a:p>
-            <a:pPr lvl="2" marL="1143000" indent="-228600" defTabSz="914400">
-              <a:lnSpc>
-                <a:spcPct val="90000"/>
+              <a:buSzPct val="75000"/>
+              <a:buFont typeface="Symbol" charset="2"/>
+              <a:buChar char=""/>
+            </a:pPr>
+            <a:r>
+              <a:rPr b="0" lang="es-ES" sz="2800" strike="noStrike" u="none">
+                <a:solidFill>
+                  <a:srgbClr val="000000"/>
+                </a:solidFill>
+                <a:effectLst/>
+                <a:uFillTx/>
+                <a:latin typeface="Arial"/>
+              </a:rPr>
+              <a:t>Segundo nivel del esquema</a:t>
+            </a:r>
+            <a:endParaRPr b="0" lang="es-ES" sz="2800" strike="noStrike" u="none">
+              <a:solidFill>
+                <a:srgbClr val="000000"/>
+              </a:solidFill>
+              <a:effectLst/>
+              <a:uFillTx/>
+              <a:latin typeface="Arial"/>
+            </a:endParaRPr>
+          </a:p>
+          <a:p>
+            <a:pPr lvl="2" marL="1296000" indent="-288000">
+              <a:lnSpc>
+                <a:spcPct val="100000"/>
               </a:lnSpc>
               <a:spcBef>
-                <a:spcPts val="499"/>
+                <a:spcPts val="850"/>
               </a:spcBef>
               <a:buClr>
                 <a:srgbClr val="000000"/>
               </a:buClr>
-              <a:buFont typeface="Arial"/>
-              <a:buChar char="•"/>
-            </a:pPr>
-            <a:r>
-              <a:rPr b="0" lang="es-ES" sz="2000" strike="noStrike" u="none">
-                <a:solidFill>
-                  <a:schemeClr val="dk1"/>
-                </a:solidFill>
-                <a:effectLst/>
-                <a:uFillTx/>
-                <a:latin typeface="Calibri"/>
-              </a:rPr>
-              <a:t>Tercer nivel</a:t>
-            </a:r>
-            <a:endParaRPr b="0" lang="es-ES" sz="2000" strike="noStrike" u="none">
-              <a:solidFill>
-                <a:srgbClr val="000000"/>
-              </a:solidFill>
-              <a:effectLst/>
-              <a:uFillTx/>
-              <a:latin typeface="Arial"/>
-            </a:endParaRPr>
-          </a:p>
-          <a:p>
-            <a:pPr lvl="3" marL="1600200" indent="-228600" defTabSz="914400">
-              <a:lnSpc>
-                <a:spcPct val="90000"/>
+              <a:buSzPct val="45000"/>
+              <a:buFont typeface="Wingdings" charset="2"/>
+              <a:buChar char=""/>
+            </a:pPr>
+            <a:r>
+              <a:rPr b="0" lang="es-ES" sz="2400" strike="noStrike" u="none">
+                <a:solidFill>
+                  <a:srgbClr val="000000"/>
+                </a:solidFill>
+                <a:effectLst/>
+                <a:uFillTx/>
+                <a:latin typeface="Arial"/>
+              </a:rPr>
+              <a:t>Tercer nivel del esquema</a:t>
+            </a:r>
+            <a:endParaRPr b="0" lang="es-ES" sz="2400" strike="noStrike" u="none">
+              <a:solidFill>
+                <a:srgbClr val="000000"/>
+              </a:solidFill>
+              <a:effectLst/>
+              <a:uFillTx/>
+              <a:latin typeface="Arial"/>
+            </a:endParaRPr>
+          </a:p>
+          <a:p>
+            <a:pPr lvl="3" marL="1728000" indent="-216000">
+              <a:lnSpc>
+                <a:spcPct val="100000"/>
               </a:lnSpc>
               <a:spcBef>
-                <a:spcPts val="499"/>
+                <a:spcPts val="567"/>
               </a:spcBef>
               <a:buClr>
                 <a:srgbClr val="000000"/>
               </a:buClr>
-              <a:buFont typeface="Arial"/>
-              <a:buChar char="•"/>
-            </a:pPr>
-            <a:r>
-              <a:rPr b="0" lang="es-ES" sz="1800" strike="noStrike" u="none">
-                <a:solidFill>
-                  <a:schemeClr val="dk1"/>
-                </a:solidFill>
-                <a:effectLst/>
-                <a:uFillTx/>
-                <a:latin typeface="Calibri"/>
-              </a:rPr>
-              <a:t>Cuarto nivel</a:t>
-            </a:r>
-            <a:endParaRPr b="0" lang="es-ES" sz="1800" strike="noStrike" u="none">
-              <a:solidFill>
-                <a:srgbClr val="000000"/>
-              </a:solidFill>
-              <a:effectLst/>
-              <a:uFillTx/>
-              <a:latin typeface="Arial"/>
-            </a:endParaRPr>
-          </a:p>
-          <a:p>
-            <a:pPr lvl="4" marL="2057400" indent="-228600" defTabSz="914400">
-              <a:lnSpc>
-                <a:spcPct val="90000"/>
+              <a:buSzPct val="75000"/>
+              <a:buFont typeface="Symbol" charset="2"/>
+              <a:buChar char=""/>
+            </a:pPr>
+            <a:r>
+              <a:rPr b="0" lang="es-ES" sz="2000" strike="noStrike" u="none">
+                <a:solidFill>
+                  <a:srgbClr val="000000"/>
+                </a:solidFill>
+                <a:effectLst/>
+                <a:uFillTx/>
+                <a:latin typeface="Arial"/>
+              </a:rPr>
+              <a:t>Cuarto nivel del esquema</a:t>
+            </a:r>
+            <a:endParaRPr b="0" lang="es-ES" sz="2000" strike="noStrike" u="none">
+              <a:solidFill>
+                <a:srgbClr val="000000"/>
+              </a:solidFill>
+              <a:effectLst/>
+              <a:uFillTx/>
+              <a:latin typeface="Arial"/>
+            </a:endParaRPr>
+          </a:p>
+          <a:p>
+            <a:pPr lvl="4" marL="2160000" indent="-216000">
+              <a:lnSpc>
+                <a:spcPct val="100000"/>
               </a:lnSpc>
               <a:spcBef>
-                <a:spcPts val="499"/>
+                <a:spcPts val="283"/>
               </a:spcBef>
               <a:buClr>
                 <a:srgbClr val="000000"/>
               </a:buClr>
-              <a:buFont typeface="Arial"/>
-              <a:buChar char="•"/>
-            </a:pPr>
-            <a:r>
-              <a:rPr b="0" lang="es-ES" sz="1800" strike="noStrike" u="none">
-                <a:solidFill>
-                  <a:schemeClr val="dk1"/>
-                </a:solidFill>
-                <a:effectLst/>
-                <a:uFillTx/>
-                <a:latin typeface="Calibri"/>
-              </a:rPr>
-              <a:t>Quinto nivel</a:t>
-            </a:r>
-            <a:endParaRPr b="0" lang="es-ES" sz="1800" strike="noStrike" u="none">
-              <a:solidFill>
-                <a:srgbClr val="000000"/>
-              </a:solidFill>
-              <a:effectLst/>
-              <a:uFillTx/>
-              <a:latin typeface="Arial"/>
-            </a:endParaRPr>
-          </a:p>
-        </p:txBody>
-      </p:sp>
-      <p:sp>
-        <p:nvSpPr>
-          <p:cNvPr id="37" name="PlaceHolder 3"/>
-          <p:cNvSpPr>
-            <a:spLocks noGrp="1"/>
-          </p:cNvSpPr>
-          <p:nvPr>
-            <p:ph type="dt" idx="22"/>
-          </p:nvPr>
-        </p:nvSpPr>
-        <p:spPr>
-          <a:xfrm>
-            <a:off x="838080" y="6356520"/>
-            <a:ext cx="2741040" cy="362880"/>
-          </a:xfrm>
-          <a:prstGeom prst="rect">
-            <a:avLst/>
-          </a:prstGeom>
-          <a:noFill/>
-          <a:ln w="0">
-            <a:noFill/>
-          </a:ln>
-        </p:spPr>
-        <p:txBody>
-          <a:bodyPr lIns="91440" rIns="91440" tIns="45720" bIns="45720" anchor="ctr">
-            <a:noAutofit/>
-          </a:bodyPr>
-          <a:lstStyle>
-            <a:lvl1pPr indent="0" defTabSz="914400">
-              <a:lnSpc>
-                <a:spcPct val="100000"/>
-              </a:lnSpc>
-              <a:buNone/>
-              <a:tabLst>
-                <a:tab algn="l" pos="0"/>
-              </a:tabLst>
-              <a:defRPr b="0" lang="en-GB" sz="1200" strike="noStrike" u="none">
-                <a:solidFill>
-                  <a:schemeClr val="dk1">
-                    <a:tint val="75000"/>
-                  </a:schemeClr>
-                </a:solidFill>
-                <a:effectLst/>
-                <a:uFillTx/>
-                <a:latin typeface="Calibri"/>
-              </a:defRPr>
-            </a:lvl1pPr>
-          </a:lstStyle>
-          <a:p>
-            <a:pPr indent="0" defTabSz="914400">
-              <a:lnSpc>
-                <a:spcPct val="100000"/>
-              </a:lnSpc>
-              <a:buNone/>
-              <a:tabLst>
-                <a:tab algn="l" pos="0"/>
-              </a:tabLst>
-            </a:pPr>
-            <a:r>
-              <a:rPr b="0" lang="en-GB" sz="1200" strike="noStrike" u="none">
-                <a:solidFill>
-                  <a:schemeClr val="dk1">
-                    <a:tint val="75000"/>
-                  </a:schemeClr>
-                </a:solidFill>
-                <a:effectLst/>
-                <a:uFillTx/>
-                <a:latin typeface="Calibri"/>
-              </a:rPr>
-              <a:t>&lt;fecha/hora&gt;</a:t>
-            </a:r>
-            <a:endParaRPr b="0" lang="es-ES" sz="1200" strike="noStrike" u="none">
-              <a:solidFill>
-                <a:srgbClr val="000000"/>
-              </a:solidFill>
-              <a:effectLst/>
-              <a:uFillTx/>
-              <a:latin typeface="Times New Roman"/>
-            </a:endParaRPr>
-          </a:p>
-        </p:txBody>
-      </p:sp>
-      <p:sp>
-        <p:nvSpPr>
-          <p:cNvPr id="38" name="PlaceHolder 4"/>
-          <p:cNvSpPr>
-            <a:spLocks noGrp="1"/>
-          </p:cNvSpPr>
-          <p:nvPr>
-            <p:ph type="ftr" idx="23"/>
-          </p:nvPr>
-        </p:nvSpPr>
-        <p:spPr>
-          <a:xfrm>
-            <a:off x="4038480" y="6356520"/>
-            <a:ext cx="4112640" cy="362880"/>
-          </a:xfrm>
-          <a:prstGeom prst="rect">
-            <a:avLst/>
-          </a:prstGeom>
-          <a:noFill/>
-          <a:ln w="0">
-            <a:noFill/>
-          </a:ln>
-        </p:spPr>
-        <p:txBody>
-          <a:bodyPr lIns="91440" rIns="91440" tIns="45720" bIns="45720" anchor="ctr">
-            <a:noAutofit/>
-          </a:bodyPr>
-          <a:lstStyle>
-            <a:lvl1pPr indent="0" algn="ctr">
-              <a:lnSpc>
-                <a:spcPct val="100000"/>
-              </a:lnSpc>
-              <a:buNone/>
-              <a:tabLst>
-                <a:tab algn="l" pos="0"/>
-              </a:tabLst>
-              <a:defRPr b="0" lang="es-ES" sz="1400" strike="noStrike" u="none">
+              <a:buSzPct val="45000"/>
+              <a:buFont typeface="Wingdings" charset="2"/>
+              <a:buChar char=""/>
+            </a:pPr>
+            <a:r>
+              <a:rPr b="0" lang="es-ES" sz="2000" strike="noStrike" u="none">
                 <a:solidFill>
                   <a:srgbClr val="000000"/>
                 </a:solidFill>
                 <a:effectLst/>
                 <a:uFillTx/>
-                <a:latin typeface="Times New Roman"/>
-              </a:defRPr>
-            </a:lvl1pPr>
-          </a:lstStyle>
-          <a:p>
-            <a:pPr indent="0" algn="ctr">
-              <a:lnSpc>
-                <a:spcPct val="100000"/>
-              </a:lnSpc>
-              <a:buNone/>
-              <a:tabLst>
-                <a:tab algn="l" pos="0"/>
-              </a:tabLst>
-            </a:pPr>
-            <a:r>
-              <a:rPr b="0" lang="es-ES" sz="1400" strike="noStrike" u="none">
+                <a:latin typeface="Arial"/>
+              </a:rPr>
+              <a:t>Quinto nivel del esquema</a:t>
+            </a:r>
+            <a:endParaRPr b="0" lang="es-ES" sz="2000" strike="noStrike" u="none">
+              <a:solidFill>
+                <a:srgbClr val="000000"/>
+              </a:solidFill>
+              <a:effectLst/>
+              <a:uFillTx/>
+              <a:latin typeface="Arial"/>
+            </a:endParaRPr>
+          </a:p>
+          <a:p>
+            <a:pPr lvl="5" marL="2592000" indent="-216000">
+              <a:lnSpc>
+                <a:spcPct val="100000"/>
+              </a:lnSpc>
+              <a:spcBef>
+                <a:spcPts val="283"/>
+              </a:spcBef>
+              <a:buClr>
+                <a:srgbClr val="000000"/>
+              </a:buClr>
+              <a:buSzPct val="45000"/>
+              <a:buFont typeface="Wingdings" charset="2"/>
+              <a:buChar char=""/>
+            </a:pPr>
+            <a:r>
+              <a:rPr b="0" lang="es-ES" sz="2000" strike="noStrike" u="none">
                 <a:solidFill>
                   <a:srgbClr val="000000"/>
                 </a:solidFill>
                 <a:effectLst/>
                 <a:uFillTx/>
-                <a:latin typeface="Times New Roman"/>
-              </a:rPr>
-              <a:t>&lt;pie de página&gt;</a:t>
-            </a:r>
-            <a:endParaRPr b="0" lang="es-ES" sz="1400" strike="noStrike" u="none">
-              <a:solidFill>
-                <a:srgbClr val="000000"/>
-              </a:solidFill>
-              <a:effectLst/>
-              <a:uFillTx/>
-              <a:latin typeface="Times New Roman"/>
-            </a:endParaRPr>
-          </a:p>
-        </p:txBody>
-      </p:sp>
-      <p:sp>
-        <p:nvSpPr>
-          <p:cNvPr id="39" name="PlaceHolder 5"/>
-          <p:cNvSpPr>
-            <a:spLocks noGrp="1"/>
-          </p:cNvSpPr>
-          <p:nvPr>
-            <p:ph type="sldNum" idx="24"/>
-          </p:nvPr>
-        </p:nvSpPr>
-        <p:spPr>
-          <a:xfrm>
-            <a:off x="8610480" y="6356520"/>
-            <a:ext cx="2741040" cy="362880"/>
-          </a:xfrm>
-          <a:prstGeom prst="rect">
-            <a:avLst/>
-          </a:prstGeom>
-          <a:noFill/>
-          <a:ln w="0">
-            <a:noFill/>
-          </a:ln>
-        </p:spPr>
-        <p:txBody>
-          <a:bodyPr lIns="91440" rIns="91440" tIns="45720" bIns="45720" anchor="ctr">
-            <a:noAutofit/>
-          </a:bodyPr>
-          <a:lstStyle>
-            <a:lvl1pPr indent="0" algn="r" defTabSz="914400">
-              <a:lnSpc>
-                <a:spcPct val="100000"/>
-              </a:lnSpc>
-              <a:buNone/>
-              <a:tabLst>
-                <a:tab algn="l" pos="0"/>
-              </a:tabLst>
-              <a:defRPr b="0" lang="en-GB" sz="1200" strike="noStrike" u="none">
-                <a:solidFill>
-                  <a:schemeClr val="dk1">
-                    <a:tint val="75000"/>
-                  </a:schemeClr>
-                </a:solidFill>
-                <a:effectLst/>
-                <a:uFillTx/>
-                <a:latin typeface="Calibri"/>
-              </a:defRPr>
-            </a:lvl1pPr>
-          </a:lstStyle>
-          <a:p>
-            <a:pPr indent="0" algn="r" defTabSz="914400">
-              <a:lnSpc>
-                <a:spcPct val="100000"/>
-              </a:lnSpc>
-              <a:buNone/>
-              <a:tabLst>
-                <a:tab algn="l" pos="0"/>
-              </a:tabLst>
-            </a:pPr>
-            <a:fld id="{F5CD131D-A592-4718-85D8-1011320ADAD7}" type="slidenum">
-              <a:rPr b="0" lang="en-GB" sz="1200" strike="noStrike" u="none">
-                <a:solidFill>
-                  <a:schemeClr val="dk1">
-                    <a:tint val="75000"/>
-                  </a:schemeClr>
-                </a:solidFill>
-                <a:effectLst/>
-                <a:uFillTx/>
-                <a:latin typeface="Calibri"/>
-              </a:rPr>
-              <a:t>&lt;número&gt;</a:t>
-            </a:fld>
-            <a:endParaRPr b="0" lang="es-ES" sz="1200" strike="noStrike" u="none">
-              <a:solidFill>
-                <a:srgbClr val="000000"/>
-              </a:solidFill>
-              <a:effectLst/>
-              <a:uFillTx/>
-              <a:latin typeface="Times New Roman"/>
+                <a:latin typeface="Arial"/>
+              </a:rPr>
+              <a:t>Sexto nivel del esquema</a:t>
+            </a:r>
+            <a:endParaRPr b="0" lang="es-ES" sz="2000" strike="noStrike" u="none">
+              <a:solidFill>
+                <a:srgbClr val="000000"/>
+              </a:solidFill>
+              <a:effectLst/>
+              <a:uFillTx/>
+              <a:latin typeface="Arial"/>
+            </a:endParaRPr>
+          </a:p>
+          <a:p>
+            <a:pPr lvl="6" marL="3024000" indent="-216000">
+              <a:lnSpc>
+                <a:spcPct val="100000"/>
+              </a:lnSpc>
+              <a:spcBef>
+                <a:spcPts val="283"/>
+              </a:spcBef>
+              <a:buClr>
+                <a:srgbClr val="000000"/>
+              </a:buClr>
+              <a:buSzPct val="45000"/>
+              <a:buFont typeface="Wingdings" charset="2"/>
+              <a:buChar char=""/>
+            </a:pPr>
+            <a:r>
+              <a:rPr b="0" lang="es-ES" sz="2000" strike="noStrike" u="none">
+                <a:solidFill>
+                  <a:srgbClr val="000000"/>
+                </a:solidFill>
+                <a:effectLst/>
+                <a:uFillTx/>
+                <a:latin typeface="Arial"/>
+              </a:rPr>
+              <a:t>Séptimo nivel del esquema</a:t>
+            </a:r>
+            <a:endParaRPr b="0" lang="es-ES" sz="2000" strike="noStrike" u="none">
+              <a:solidFill>
+                <a:srgbClr val="000000"/>
+              </a:solidFill>
+              <a:effectLst/>
+              <a:uFillTx/>
+              <a:latin typeface="Arial"/>
             </a:endParaRPr>
           </a:p>
         </p:txBody>
@@ -5702,7 +5505,7 @@
 
 <file path=ppt/slideLayouts/slideLayout9.xml><?xml version="1.0" encoding="utf-8"?>
 <p:sldLayout xmlns:a="http://schemas.openxmlformats.org/drawingml/2006/main" xmlns:p="http://schemas.openxmlformats.org/presentationml/2006/main" xmlns:r="http://schemas.openxmlformats.org/officeDocument/2006/relationships" xmlns:p14="http://schemas.microsoft.com/office/powerpoint/2010/main" xmlns:p15="http://schemas.microsoft.com/office/powerpoint/2012/main" xmlns:mc="http://schemas.openxmlformats.org/markup-compatibility/2006" type="blank" preserve="1">
-  <p:cSld name="Encabezado de sección">
+  <p:cSld name="Contenido con título">
     <p:bg>
       <p:bgPr>
         <a:solidFill>
@@ -5726,7 +5529,7 @@
       </p:grpSpPr>
       <p:sp>
         <p:nvSpPr>
-          <p:cNvPr id="40" name="PlaceHolder 1"/>
+          <p:cNvPr id="43" name="PlaceHolder 1"/>
           <p:cNvSpPr>
             <a:spLocks noGrp="1"/>
           </p:cNvSpPr>
@@ -5736,8 +5539,8 @@
         </p:nvSpPr>
         <p:spPr>
           <a:xfrm>
-            <a:off x="831960" y="1709640"/>
-            <a:ext cx="10513440" cy="2850480"/>
+            <a:off x="839880" y="457200"/>
+            <a:ext cx="3929400" cy="1597320"/>
           </a:xfrm>
           <a:prstGeom prst="rect">
             <a:avLst/>
@@ -5762,7 +5565,7 @@
               </a:tabLst>
             </a:pPr>
             <a:r>
-              <a:rPr b="0" lang="es-ES" sz="6000" strike="noStrike" u="none">
+              <a:rPr b="0" lang="es-ES" sz="3200" strike="noStrike" u="none">
                 <a:solidFill>
                   <a:schemeClr val="dk1"/>
                 </a:solidFill>
@@ -5772,7 +5575,7 @@
               </a:rPr>
               <a:t>Haga clic para modificar el estilo de título del patrón</a:t>
             </a:r>
-            <a:endParaRPr b="0" lang="es-ES" sz="6000" strike="noStrike" u="none">
+            <a:endParaRPr b="0" lang="es-ES" sz="3200" strike="noStrike" u="none">
               <a:solidFill>
                 <a:srgbClr val="000000"/>
               </a:solidFill>
@@ -5785,7 +5588,7 @@
       </p:sp>
       <p:sp>
         <p:nvSpPr>
-          <p:cNvPr id="41" name="PlaceHolder 2"/>
+          <p:cNvPr id="44" name="PlaceHolder 2"/>
           <p:cNvSpPr>
             <a:spLocks noGrp="1"/>
           </p:cNvSpPr>
@@ -5795,8 +5598,8 @@
         </p:nvSpPr>
         <p:spPr>
           <a:xfrm>
-            <a:off x="831960" y="4589640"/>
-            <a:ext cx="10513440" cy="1497960"/>
+            <a:off x="5183280" y="987480"/>
+            <a:ext cx="6169320" cy="4870800"/>
           </a:xfrm>
           <a:prstGeom prst="rect">
             <a:avLst/>
@@ -5811,32 +5614,167 @@
             <a:noAutofit/>
           </a:bodyPr>
           <a:p>
-            <a:pPr indent="0" defTabSz="914400">
+            <a:pPr marL="228600" indent="-228600" defTabSz="914400">
               <a:lnSpc>
                 <a:spcPct val="90000"/>
               </a:lnSpc>
               <a:spcBef>
                 <a:spcPts val="1001"/>
               </a:spcBef>
-              <a:buNone/>
-              <a:tabLst>
-                <a:tab algn="l" pos="0"/>
-              </a:tabLst>
+              <a:buClr>
+                <a:srgbClr val="000000"/>
+              </a:buClr>
+              <a:buFont typeface="Arial"/>
+              <a:buChar char="•"/>
+            </a:pPr>
+            <a:r>
+              <a:rPr b="0" lang="es-ES" sz="3200" strike="noStrike" u="none">
+                <a:solidFill>
+                  <a:schemeClr val="dk1"/>
+                </a:solidFill>
+                <a:effectLst/>
+                <a:uFillTx/>
+                <a:latin typeface="Calibri"/>
+              </a:rPr>
+              <a:t>Haga clic para modificar los estilos de texto del patrón</a:t>
+            </a:r>
+            <a:endParaRPr b="0" lang="es-ES" sz="3200" strike="noStrike" u="none">
+              <a:solidFill>
+                <a:srgbClr val="000000"/>
+              </a:solidFill>
+              <a:effectLst/>
+              <a:uFillTx/>
+              <a:latin typeface="Arial"/>
+            </a:endParaRPr>
+          </a:p>
+          <a:p>
+            <a:pPr lvl="1" marL="685800" indent="-228600" defTabSz="914400">
+              <a:lnSpc>
+                <a:spcPct val="90000"/>
+              </a:lnSpc>
+              <a:spcBef>
+                <a:spcPts val="499"/>
+              </a:spcBef>
+              <a:buClr>
+                <a:srgbClr val="000000"/>
+              </a:buClr>
+              <a:buFont typeface="Arial"/>
+              <a:buChar char="•"/>
+            </a:pPr>
+            <a:r>
+              <a:rPr b="0" lang="es-ES" sz="2800" strike="noStrike" u="none">
+                <a:solidFill>
+                  <a:schemeClr val="dk1"/>
+                </a:solidFill>
+                <a:effectLst/>
+                <a:uFillTx/>
+                <a:latin typeface="Calibri"/>
+              </a:rPr>
+              <a:t>Segundo nivel</a:t>
+            </a:r>
+            <a:endParaRPr b="0" lang="es-ES" sz="2800" strike="noStrike" u="none">
+              <a:solidFill>
+                <a:srgbClr val="000000"/>
+              </a:solidFill>
+              <a:effectLst/>
+              <a:uFillTx/>
+              <a:latin typeface="Arial"/>
+            </a:endParaRPr>
+          </a:p>
+          <a:p>
+            <a:pPr lvl="2" marL="1143000" indent="-228600" defTabSz="914400">
+              <a:lnSpc>
+                <a:spcPct val="90000"/>
+              </a:lnSpc>
+              <a:spcBef>
+                <a:spcPts val="499"/>
+              </a:spcBef>
+              <a:buClr>
+                <a:srgbClr val="000000"/>
+              </a:buClr>
+              <a:buFont typeface="Arial"/>
+              <a:buChar char="•"/>
             </a:pPr>
             <a:r>
               <a:rPr b="0" lang="es-ES" sz="2400" strike="noStrike" u="none">
                 <a:solidFill>
-                  <a:schemeClr val="dk1">
-                    <a:tint val="75000"/>
-                  </a:schemeClr>
-                </a:solidFill>
-                <a:effectLst/>
-                <a:uFillTx/>
-                <a:latin typeface="Calibri"/>
-              </a:rPr>
-              <a:t>Haga clic para modificar los estilos de texto del patrón</a:t>
+                  <a:schemeClr val="dk1"/>
+                </a:solidFill>
+                <a:effectLst/>
+                <a:uFillTx/>
+                <a:latin typeface="Calibri"/>
+              </a:rPr>
+              <a:t>Tercer nivel</a:t>
             </a:r>
             <a:endParaRPr b="0" lang="es-ES" sz="2400" strike="noStrike" u="none">
+              <a:solidFill>
+                <a:srgbClr val="000000"/>
+              </a:solidFill>
+              <a:effectLst/>
+              <a:uFillTx/>
+              <a:latin typeface="Arial"/>
+            </a:endParaRPr>
+          </a:p>
+          <a:p>
+            <a:pPr lvl="3" marL="1600200" indent="-228600" defTabSz="914400">
+              <a:lnSpc>
+                <a:spcPct val="90000"/>
+              </a:lnSpc>
+              <a:spcBef>
+                <a:spcPts val="499"/>
+              </a:spcBef>
+              <a:buClr>
+                <a:srgbClr val="000000"/>
+              </a:buClr>
+              <a:buFont typeface="Arial"/>
+              <a:buChar char="•"/>
+            </a:pPr>
+            <a:r>
+              <a:rPr b="0" lang="es-ES" sz="2000" strike="noStrike" u="none">
+                <a:solidFill>
+                  <a:schemeClr val="dk1"/>
+                </a:solidFill>
+                <a:effectLst/>
+                <a:uFillTx/>
+                <a:latin typeface="Calibri"/>
+              </a:rPr>
+              <a:t>Cuarto nivel</a:t>
+            </a:r>
+            <a:endParaRPr b="0" lang="es-ES" sz="2000" strike="noStrike" u="none">
+              <a:solidFill>
+                <a:srgbClr val="000000"/>
+              </a:solidFill>
+              <a:effectLst/>
+              <a:uFillTx/>
+              <a:latin typeface="Arial"/>
+            </a:endParaRPr>
+          </a:p>
+          <a:p>
+            <a:pPr lvl="4" marL="2057400" indent="-228600" defTabSz="914400">
+              <a:lnSpc>
+                <a:spcPct val="90000"/>
+              </a:lnSpc>
+              <a:spcBef>
+                <a:spcPts val="499"/>
+              </a:spcBef>
+              <a:buClr>
+                <a:srgbClr val="000000"/>
+              </a:buClr>
+              <a:buFont typeface="Arial"/>
+              <a:buChar char="•"/>
+            </a:pPr>
+            <a:r>
+              <a:rPr b="0" lang="es-ES" sz="2000" strike="noStrike" u="none">
+                <a:solidFill>
+                  <a:schemeClr val="dk1"/>
+                </a:solidFill>
+                <a:effectLst/>
+                <a:uFillTx/>
+                <a:latin typeface="Calibri"/>
+              </a:rPr>
+              <a:t>Quinto nivel</a:t>
+            </a:r>
+            <a:endParaRPr b="0" lang="es-ES" sz="2000" strike="noStrike" u="none">
               <a:solidFill>
                 <a:srgbClr val="000000"/>
               </a:solidFill>
@@ -5849,7 +5787,69 @@
       </p:sp>
       <p:sp>
         <p:nvSpPr>
-          <p:cNvPr id="42" name="PlaceHolder 3"/>
+          <p:cNvPr id="45" name="PlaceHolder 3"/>
+          <p:cNvSpPr>
+            <a:spLocks noGrp="1"/>
+          </p:cNvSpPr>
+          <p:nvPr>
+            <p:ph type="body"/>
+          </p:nvPr>
+        </p:nvSpPr>
+        <p:spPr>
+          <a:xfrm>
+            <a:off x="839880" y="2057400"/>
+            <a:ext cx="3929400" cy="3808800"/>
+          </a:xfrm>
+          <a:prstGeom prst="rect">
+            <a:avLst/>
+          </a:prstGeom>
+          <a:noFill/>
+          <a:ln w="0">
+            <a:noFill/>
+          </a:ln>
+        </p:spPr>
+        <p:txBody>
+          <a:bodyPr lIns="91440" rIns="91440" tIns="45720" bIns="45720" anchor="t">
+            <a:noAutofit/>
+          </a:bodyPr>
+          <a:p>
+            <a:pPr indent="0" defTabSz="914400">
+              <a:lnSpc>
+                <a:spcPct val="90000"/>
+              </a:lnSpc>
+              <a:spcBef>
+                <a:spcPts val="1001"/>
+              </a:spcBef>
+              <a:buNone/>
+              <a:tabLst>
+                <a:tab algn="l" pos="0"/>
+              </a:tabLst>
+            </a:pPr>
+            <a:r>
+              <a:rPr b="0" lang="es-ES" sz="1600" strike="noStrike" u="none">
+                <a:solidFill>
+                  <a:schemeClr val="dk1"/>
+                </a:solidFill>
+                <a:effectLst/>
+                <a:uFillTx/>
+                <a:latin typeface="Calibri"/>
+              </a:rPr>
+              <a:t>Haga clic para modificar los estilos de texto del patrón</a:t>
+            </a:r>
+            <a:endParaRPr b="0" lang="es-ES" sz="1600" strike="noStrike" u="none">
+              <a:solidFill>
+                <a:srgbClr val="000000"/>
+              </a:solidFill>
+              <a:effectLst/>
+              <a:uFillTx/>
+              <a:latin typeface="Arial"/>
+            </a:endParaRPr>
+          </a:p>
+        </p:txBody>
+      </p:sp>
+      <p:sp>
+        <p:nvSpPr>
+          <p:cNvPr id="46" name="PlaceHolder 4"/>
           <p:cNvSpPr>
             <a:spLocks noGrp="1"/>
           </p:cNvSpPr>
@@ -5860,7 +5860,7 @@
         <p:spPr>
           <a:xfrm>
             <a:off x="838080" y="6356520"/>
-            <a:ext cx="2741040" cy="362880"/>
+            <a:ext cx="2740320" cy="362160"/>
           </a:xfrm>
           <a:prstGeom prst="rect">
             <a:avLst/>
@@ -5931,7 +5931,7 @@
       </p:sp>
       <p:sp>
         <p:nvSpPr>
-          <p:cNvPr id="43" name="PlaceHolder 4"/>
+          <p:cNvPr id="47" name="PlaceHolder 5"/>
           <p:cNvSpPr>
             <a:spLocks noGrp="1"/>
           </p:cNvSpPr>
@@ -5942,7 +5942,7 @@
         <p:spPr>
           <a:xfrm>
             <a:off x="4038480" y="6356520"/>
-            <a:ext cx="4112640" cy="362880"/>
+            <a:ext cx="4111920" cy="362160"/>
           </a:xfrm>
           <a:prstGeom prst="rect">
             <a:avLst/>
@@ -6009,7 +6009,7 @@
       </p:sp>
       <p:sp>
         <p:nvSpPr>
-          <p:cNvPr id="44" name="PlaceHolder 5"/>
+          <p:cNvPr id="48" name="PlaceHolder 6"/>
           <p:cNvSpPr>
             <a:spLocks noGrp="1"/>
           </p:cNvSpPr>
@@ -6020,7 +6020,7 @@
         <p:spPr>
           <a:xfrm>
             <a:off x="8610480" y="6356520"/>
-            <a:ext cx="2741040" cy="362880"/>
+            <a:ext cx="2740320" cy="362160"/>
           </a:xfrm>
           <a:prstGeom prst="rect">
             <a:avLst/>
@@ -6065,7 +6065,7 @@
                 <a:tab algn="l" pos="0"/>
               </a:tabLst>
             </a:pPr>
-            <a:fld id="{A8170D86-5B66-4A2D-9E8B-EF78EF50125F}" type="slidenum">
+            <a:fld id="{8450CC28-B4F5-4C58-8240-7314E8056B21}" type="slidenum">
               <a:rPr b="0" lang="en-GB" sz="1200" strike="noStrike" u="none">
                 <a:solidFill>
                   <a:schemeClr val="dk1">
@@ -6155,8 +6155,8 @@
         </p:nvSpPr>
         <p:spPr>
           <a:xfrm>
-            <a:off x="837360" y="2700000"/>
-            <a:ext cx="1560600" cy="645840"/>
+            <a:off x="1620000" y="2520360"/>
+            <a:ext cx="1559880" cy="645120"/>
           </a:xfrm>
           <a:prstGeom prst="round2DiagRect">
             <a:avLst>
@@ -6225,8 +6225,8 @@
         </p:nvSpPr>
         <p:spPr>
           <a:xfrm>
-            <a:off x="2759400" y="1260000"/>
-            <a:ext cx="1560600" cy="645840"/>
+            <a:off x="3542040" y="1620360"/>
+            <a:ext cx="1559880" cy="645120"/>
           </a:xfrm>
           <a:prstGeom prst="round2DiagRect">
             <a:avLst>
@@ -6295,8 +6295,8 @@
         </p:nvSpPr>
         <p:spPr>
           <a:xfrm>
-            <a:off x="5040360" y="2700360"/>
-            <a:ext cx="1560600" cy="645840"/>
+            <a:off x="5823000" y="2700000"/>
+            <a:ext cx="1559880" cy="645120"/>
           </a:xfrm>
           <a:prstGeom prst="round2DiagRect">
             <a:avLst>
@@ -6365,8 +6365,8 @@
         </p:nvSpPr>
         <p:spPr>
           <a:xfrm>
-            <a:off x="2759400" y="3420000"/>
-            <a:ext cx="1560600" cy="645840"/>
+            <a:off x="3542040" y="3420000"/>
+            <a:ext cx="1559880" cy="645120"/>
           </a:xfrm>
           <a:prstGeom prst="round2DiagRect">
             <a:avLst>
@@ -6436,7 +6436,7 @@
         <p:spPr>
           <a:xfrm>
             <a:off x="105480" y="175320"/>
-            <a:ext cx="2773080" cy="363960"/>
+            <a:ext cx="2772360" cy="363960"/>
           </a:xfrm>
           <a:prstGeom prst="rect">
             <a:avLst/>
@@ -6495,8 +6495,8 @@
         </p:nvCxnSpPr>
         <p:spPr>
           <a:xfrm flipV="1">
-            <a:off x="1617480" y="1582920"/>
-            <a:ext cx="1142280" cy="1117440"/>
+            <a:off x="2399760" y="1942920"/>
+            <a:ext cx="1142640" cy="577800"/>
           </a:xfrm>
           <a:prstGeom prst="straightConnector1">
             <a:avLst/>
@@ -6520,8 +6520,8 @@
         </p:nvCxnSpPr>
         <p:spPr>
           <a:xfrm flipV="1">
-            <a:off x="4320000" y="2049480"/>
-            <a:ext cx="720720" cy="1693800"/>
+            <a:off x="5101920" y="2017440"/>
+            <a:ext cx="718560" cy="1725480"/>
           </a:xfrm>
           <a:prstGeom prst="straightConnector1">
             <a:avLst/>
@@ -6545,8 +6545,8 @@
         </p:nvCxnSpPr>
         <p:spPr>
           <a:xfrm flipV="1">
-            <a:off x="4320000" y="3023280"/>
-            <a:ext cx="720720" cy="720000"/>
+            <a:off x="5101920" y="3022560"/>
+            <a:ext cx="721440" cy="720360"/>
           </a:xfrm>
           <a:prstGeom prst="straightConnector1">
             <a:avLst/>
@@ -6570,8 +6570,8 @@
         </p:nvCxnSpPr>
         <p:spPr>
           <a:xfrm>
-            <a:off x="1617480" y="3345840"/>
-            <a:ext cx="1142280" cy="397440"/>
+            <a:off x="2399760" y="3165480"/>
+            <a:ext cx="1142640" cy="577440"/>
           </a:xfrm>
           <a:prstGeom prst="straightConnector1">
             <a:avLst/>
@@ -6592,8 +6592,8 @@
         </p:nvSpPr>
         <p:spPr>
           <a:xfrm>
-            <a:off x="5040000" y="5040720"/>
-            <a:ext cx="1560600" cy="645840"/>
+            <a:off x="5820120" y="4754880"/>
+            <a:ext cx="1559880" cy="645120"/>
           </a:xfrm>
           <a:prstGeom prst="round2DiagRect">
             <a:avLst>
@@ -6662,8 +6662,8 @@
         </p:nvSpPr>
         <p:spPr>
           <a:xfrm>
-            <a:off x="5040360" y="3706560"/>
-            <a:ext cx="1560600" cy="645840"/>
+            <a:off x="5820120" y="3742560"/>
+            <a:ext cx="1559880" cy="645120"/>
           </a:xfrm>
           <a:prstGeom prst="round2DiagRect">
             <a:avLst>
@@ -6732,8 +6732,8 @@
         </p:nvSpPr>
         <p:spPr>
           <a:xfrm>
-            <a:off x="5040360" y="1726560"/>
-            <a:ext cx="1560600" cy="645840"/>
+            <a:off x="5820120" y="1694880"/>
+            <a:ext cx="1559880" cy="645120"/>
           </a:xfrm>
           <a:prstGeom prst="round2DiagRect">
             <a:avLst>
@@ -6794,16 +6794,66 @@
           </a:p>
         </p:txBody>
       </p:sp>
+      <p:cxnSp>
+        <p:nvCxnSpPr>
+          <p:cNvPr id="71" name="Conector recto de flecha 10"/>
+          <p:cNvCxnSpPr>
+            <a:stCxn id="62" idx="3"/>
+            <a:endCxn id="69" idx="1"/>
+          </p:cNvCxnSpPr>
+          <p:nvPr/>
+        </p:nvCxnSpPr>
+        <p:spPr>
+          <a:xfrm>
+            <a:off x="5101920" y="3742560"/>
+            <a:ext cx="718560" cy="1335240"/>
+          </a:xfrm>
+          <a:prstGeom prst="straightConnector1">
+            <a:avLst/>
+          </a:prstGeom>
+          <a:ln w="0">
+            <a:solidFill>
+              <a:srgbClr val="4472c4"/>
+            </a:solidFill>
+            <a:tailEnd len="med" type="triangle" w="med"/>
+          </a:ln>
+        </p:spPr>
+      </p:cxnSp>
+      <p:cxnSp>
+        <p:nvCxnSpPr>
+          <p:cNvPr id="72" name="Conector recto de flecha 11"/>
+          <p:cNvCxnSpPr>
+            <a:stCxn id="62" idx="3"/>
+            <a:endCxn id="70" idx="1"/>
+          </p:cNvCxnSpPr>
+          <p:nvPr/>
+        </p:nvCxnSpPr>
+        <p:spPr>
+          <a:xfrm>
+            <a:off x="5101920" y="3742560"/>
+            <a:ext cx="718560" cy="322920"/>
+          </a:xfrm>
+          <a:prstGeom prst="straightConnector1">
+            <a:avLst/>
+          </a:prstGeom>
+          <a:ln w="0">
+            <a:solidFill>
+              <a:srgbClr val="4472c4"/>
+            </a:solidFill>
+            <a:tailEnd len="med" type="triangle" w="med"/>
+          </a:ln>
+        </p:spPr>
+      </p:cxnSp>
       <p:sp>
         <p:nvSpPr>
-          <p:cNvPr id="71" name="5 Redondear rectángulo de esquina diagonal 5"/>
+          <p:cNvPr id="73" name="5 Redondear rectángulo de esquina diagonal 7"/>
           <p:cNvSpPr/>
           <p:nvPr/>
         </p:nvSpPr>
         <p:spPr>
           <a:xfrm>
-            <a:off x="7079400" y="2700360"/>
-            <a:ext cx="1560600" cy="645840"/>
+            <a:off x="7862400" y="4754880"/>
+            <a:ext cx="1559880" cy="645120"/>
           </a:xfrm>
           <a:prstGeom prst="round2DiagRect">
             <a:avLst>
@@ -6851,7 +6901,7 @@
                 <a:uFillTx/>
                 <a:latin typeface="Calibri"/>
               </a:rPr>
-              <a:t>Ver sesión</a:t>
+              <a:t>Visualizar actividad</a:t>
             </a:r>
             <a:endParaRPr b="0" lang="es-ES" sz="1400" strike="noStrike" u="none">
               <a:solidFill>
@@ -6866,567 +6916,17 @@
       </p:sp>
       <p:cxnSp>
         <p:nvCxnSpPr>
-          <p:cNvPr id="72" name="Conector recto de flecha 9"/>
+          <p:cNvPr id="74" name="Conector recto de flecha 1"/>
           <p:cNvCxnSpPr>
-            <a:stCxn id="61" idx="3"/>
-            <a:endCxn id="71" idx="1"/>
+            <a:stCxn id="69" idx="3"/>
+            <a:endCxn id="73" idx="1"/>
           </p:cNvCxnSpPr>
           <p:nvPr/>
         </p:nvCxnSpPr>
         <p:spPr>
           <a:xfrm>
-            <a:off x="6600960" y="3023280"/>
-            <a:ext cx="478800" cy="360"/>
-          </a:xfrm>
-          <a:prstGeom prst="straightConnector1">
-            <a:avLst/>
-          </a:prstGeom>
-          <a:ln w="0">
-            <a:solidFill>
-              <a:srgbClr val="4472c4"/>
-            </a:solidFill>
-            <a:tailEnd len="med" type="triangle" w="med"/>
-          </a:ln>
-        </p:spPr>
-      </p:cxnSp>
-      <p:cxnSp>
-        <p:nvCxnSpPr>
-          <p:cNvPr id="73" name="Conector recto de flecha 10"/>
-          <p:cNvCxnSpPr>
-            <a:stCxn id="62" idx="3"/>
-            <a:endCxn id="69" idx="1"/>
-          </p:cNvCxnSpPr>
-          <p:nvPr/>
-        </p:nvCxnSpPr>
-        <p:spPr>
-          <a:xfrm>
-            <a:off x="4320000" y="3742920"/>
-            <a:ext cx="720360" cy="1621080"/>
-          </a:xfrm>
-          <a:prstGeom prst="straightConnector1">
-            <a:avLst/>
-          </a:prstGeom>
-          <a:ln w="0">
-            <a:solidFill>
-              <a:srgbClr val="4472c4"/>
-            </a:solidFill>
-            <a:tailEnd len="med" type="triangle" w="med"/>
-          </a:ln>
-        </p:spPr>
-      </p:cxnSp>
-      <p:cxnSp>
-        <p:nvCxnSpPr>
-          <p:cNvPr id="74" name="Conector recto de flecha 11"/>
-          <p:cNvCxnSpPr>
-            <a:stCxn id="62" idx="3"/>
-            <a:endCxn id="70" idx="1"/>
-          </p:cNvCxnSpPr>
-          <p:nvPr/>
-        </p:nvCxnSpPr>
-        <p:spPr>
-          <a:xfrm>
-            <a:off x="4320000" y="3742920"/>
-            <a:ext cx="720720" cy="286920"/>
-          </a:xfrm>
-          <a:prstGeom prst="straightConnector1">
-            <a:avLst/>
-          </a:prstGeom>
-          <a:ln w="0">
-            <a:solidFill>
-              <a:srgbClr val="4472c4"/>
-            </a:solidFill>
-            <a:tailEnd len="med" type="triangle" w="med"/>
-          </a:ln>
-        </p:spPr>
-      </p:cxnSp>
-      <p:sp>
-        <p:nvSpPr>
-          <p:cNvPr id="75" name="5 Redondear rectángulo de esquina diagonal 6"/>
-          <p:cNvSpPr/>
-          <p:nvPr/>
-        </p:nvSpPr>
-        <p:spPr>
-          <a:xfrm>
-            <a:off x="7079400" y="3706560"/>
-            <a:ext cx="1560600" cy="645840"/>
-          </a:xfrm>
-          <a:prstGeom prst="round2DiagRect">
-            <a:avLst>
-              <a:gd name="adj1" fmla="val 16667"/>
-              <a:gd name="adj2" fmla="val 0"/>
-            </a:avLst>
-          </a:prstGeom>
-          <a:solidFill>
-            <a:srgbClr val="ffffff"/>
-          </a:solidFill>
-          <a:ln w="28575">
-            <a:solidFill>
-              <a:srgbClr val="000000"/>
-            </a:solidFill>
-          </a:ln>
-        </p:spPr>
-        <p:style>
-          <a:lnRef idx="2">
-            <a:schemeClr val="dk1"/>
-          </a:lnRef>
-          <a:fillRef idx="1">
-            <a:schemeClr val="lt1"/>
-          </a:fillRef>
-          <a:effectRef idx="0">
-            <a:schemeClr val="dk1"/>
-          </a:effectRef>
-          <a:fontRef idx="minor"/>
-        </p:style>
-        <p:txBody>
-          <a:bodyPr lIns="90000" rIns="90000" tIns="45000" bIns="45000" anchor="ctr">
-            <a:noAutofit/>
-          </a:bodyPr>
-          <a:p>
-            <a:pPr algn="ctr" defTabSz="914400">
-              <a:lnSpc>
-                <a:spcPct val="100000"/>
-              </a:lnSpc>
-            </a:pPr>
-            <a:r>
-              <a:rPr b="0" lang="es-ES" sz="1400" strike="noStrike" u="none">
-                <a:solidFill>
-                  <a:srgbClr val="000000"/>
-                </a:solidFill>
-                <a:effectLst/>
-                <a:uFillTx/>
-                <a:latin typeface="Calibri"/>
-              </a:rPr>
-              <a:t>Añadir mapa</a:t>
-            </a:r>
-            <a:endParaRPr b="0" lang="es-ES" sz="1400" strike="noStrike" u="none">
-              <a:solidFill>
-                <a:srgbClr val="000000"/>
-              </a:solidFill>
-              <a:effectLst/>
-              <a:uFillTx/>
-              <a:latin typeface="Arial"/>
-            </a:endParaRPr>
-          </a:p>
-        </p:txBody>
-      </p:sp>
-      <p:cxnSp>
-        <p:nvCxnSpPr>
-          <p:cNvPr id="76" name="Conector recto de flecha 13"/>
-          <p:cNvCxnSpPr>
-            <a:stCxn id="77" idx="3"/>
-            <a:endCxn id="78" idx="1"/>
-          </p:cNvCxnSpPr>
-          <p:nvPr/>
-        </p:nvCxnSpPr>
-        <p:spPr>
-          <a:xfrm>
-            <a:off x="8640000" y="5903280"/>
-            <a:ext cx="419760" cy="360"/>
-          </a:xfrm>
-          <a:prstGeom prst="straightConnector1">
-            <a:avLst/>
-          </a:prstGeom>
-          <a:ln w="0">
-            <a:solidFill>
-              <a:srgbClr val="4472c4"/>
-            </a:solidFill>
-            <a:tailEnd len="med" type="triangle" w="med"/>
-          </a:ln>
-        </p:spPr>
-      </p:cxnSp>
-      <p:cxnSp>
-        <p:nvCxnSpPr>
-          <p:cNvPr id="79" name="Conector recto de flecha 15"/>
-          <p:cNvCxnSpPr>
-            <a:stCxn id="69" idx="3"/>
-            <a:endCxn id="80" idx="1"/>
-          </p:cNvCxnSpPr>
-          <p:nvPr/>
-        </p:nvCxnSpPr>
-        <p:spPr>
-          <a:xfrm flipV="1">
-            <a:off x="6600600" y="5003280"/>
-            <a:ext cx="479160" cy="360720"/>
-          </a:xfrm>
-          <a:prstGeom prst="straightConnector1">
-            <a:avLst/>
-          </a:prstGeom>
-          <a:ln w="0">
-            <a:solidFill>
-              <a:srgbClr val="4472c4"/>
-            </a:solidFill>
-            <a:tailEnd len="med" type="triangle" w="med"/>
-          </a:ln>
-        </p:spPr>
-      </p:cxnSp>
-      <p:cxnSp>
-        <p:nvCxnSpPr>
-          <p:cNvPr id="81" name="Conector recto de flecha 16"/>
-          <p:cNvCxnSpPr>
-            <a:stCxn id="70" idx="3"/>
-            <a:endCxn id="75" idx="1"/>
-          </p:cNvCxnSpPr>
-          <p:nvPr/>
-        </p:nvCxnSpPr>
-        <p:spPr>
-          <a:xfrm>
-            <a:off x="6600960" y="4029480"/>
-            <a:ext cx="478800" cy="360"/>
-          </a:xfrm>
-          <a:prstGeom prst="straightConnector1">
-            <a:avLst/>
-          </a:prstGeom>
-          <a:ln w="0">
-            <a:solidFill>
-              <a:srgbClr val="4472c4"/>
-            </a:solidFill>
-            <a:tailEnd len="med" type="triangle" w="med"/>
-          </a:ln>
-        </p:spPr>
-      </p:cxnSp>
-      <p:sp>
-        <p:nvSpPr>
-          <p:cNvPr id="77" name="5 Redondear rectángulo de esquina diagonal 7"/>
-          <p:cNvSpPr/>
-          <p:nvPr/>
-        </p:nvSpPr>
-        <p:spPr>
-          <a:xfrm>
-            <a:off x="7079400" y="5580360"/>
-            <a:ext cx="1560600" cy="645840"/>
-          </a:xfrm>
-          <a:prstGeom prst="round2DiagRect">
-            <a:avLst>
-              <a:gd name="adj1" fmla="val 16667"/>
-              <a:gd name="adj2" fmla="val 0"/>
-            </a:avLst>
-          </a:prstGeom>
-          <a:solidFill>
-            <a:srgbClr val="ffffff"/>
-          </a:solidFill>
-          <a:ln w="28575">
-            <a:solidFill>
-              <a:srgbClr val="000000"/>
-            </a:solidFill>
-          </a:ln>
-        </p:spPr>
-        <p:style>
-          <a:lnRef idx="2">
-            <a:schemeClr val="dk1"/>
-          </a:lnRef>
-          <a:fillRef idx="1">
-            <a:schemeClr val="lt1"/>
-          </a:fillRef>
-          <a:effectRef idx="0">
-            <a:schemeClr val="dk1"/>
-          </a:effectRef>
-          <a:fontRef idx="minor"/>
-        </p:style>
-        <p:txBody>
-          <a:bodyPr lIns="90000" rIns="90000" tIns="45000" bIns="45000" anchor="ctr">
-            <a:noAutofit/>
-          </a:bodyPr>
-          <a:p>
-            <a:pPr algn="ctr" defTabSz="914400">
-              <a:lnSpc>
-                <a:spcPct val="100000"/>
-              </a:lnSpc>
-            </a:pPr>
-            <a:r>
-              <a:rPr b="0" lang="es-ES" sz="1400" strike="noStrike" u="none">
-                <a:solidFill>
-                  <a:srgbClr val="000000"/>
-                </a:solidFill>
-                <a:effectLst/>
-                <a:uFillTx/>
-                <a:latin typeface="Calibri"/>
-              </a:rPr>
-              <a:t>Visualizar actividad</a:t>
-            </a:r>
-            <a:endParaRPr b="0" lang="es-ES" sz="1400" strike="noStrike" u="none">
-              <a:solidFill>
-                <a:srgbClr val="000000"/>
-              </a:solidFill>
-              <a:effectLst/>
-              <a:uFillTx/>
-              <a:latin typeface="Arial"/>
-            </a:endParaRPr>
-          </a:p>
-        </p:txBody>
-      </p:sp>
-      <p:sp>
-        <p:nvSpPr>
-          <p:cNvPr id="80" name="5 Redondear rectángulo de esquina diagonal 8"/>
-          <p:cNvSpPr/>
-          <p:nvPr/>
-        </p:nvSpPr>
-        <p:spPr>
-          <a:xfrm>
-            <a:off x="7079400" y="4680360"/>
-            <a:ext cx="1560600" cy="645840"/>
-          </a:xfrm>
-          <a:prstGeom prst="round2DiagRect">
-            <a:avLst>
-              <a:gd name="adj1" fmla="val 16667"/>
-              <a:gd name="adj2" fmla="val 0"/>
-            </a:avLst>
-          </a:prstGeom>
-          <a:solidFill>
-            <a:srgbClr val="ffffff"/>
-          </a:solidFill>
-          <a:ln w="28575">
-            <a:solidFill>
-              <a:srgbClr val="000000"/>
-            </a:solidFill>
-          </a:ln>
-        </p:spPr>
-        <p:style>
-          <a:lnRef idx="2">
-            <a:schemeClr val="dk1"/>
-          </a:lnRef>
-          <a:fillRef idx="1">
-            <a:schemeClr val="lt1"/>
-          </a:fillRef>
-          <a:effectRef idx="0">
-            <a:schemeClr val="dk1"/>
-          </a:effectRef>
-          <a:fontRef idx="minor"/>
-        </p:style>
-        <p:txBody>
-          <a:bodyPr lIns="90000" rIns="90000" tIns="45000" bIns="45000" anchor="ctr">
-            <a:noAutofit/>
-          </a:bodyPr>
-          <a:p>
-            <a:pPr algn="ctr" defTabSz="914400">
-              <a:lnSpc>
-                <a:spcPct val="100000"/>
-              </a:lnSpc>
-            </a:pPr>
-            <a:r>
-              <a:rPr b="0" lang="es-ES" sz="1400" strike="noStrike" u="none">
-                <a:solidFill>
-                  <a:srgbClr val="000000"/>
-                </a:solidFill>
-                <a:effectLst/>
-                <a:uFillTx/>
-                <a:latin typeface="Calibri"/>
-              </a:rPr>
-              <a:t>Importar GPX</a:t>
-            </a:r>
-            <a:endParaRPr b="0" lang="es-ES" sz="1400" strike="noStrike" u="none">
-              <a:solidFill>
-                <a:srgbClr val="000000"/>
-              </a:solidFill>
-              <a:effectLst/>
-              <a:uFillTx/>
-              <a:latin typeface="Arial"/>
-            </a:endParaRPr>
-          </a:p>
-        </p:txBody>
-      </p:sp>
-      <p:sp>
-        <p:nvSpPr>
-          <p:cNvPr id="78" name="5 Redondear rectángulo de esquina diagonal 12"/>
-          <p:cNvSpPr/>
-          <p:nvPr/>
-        </p:nvSpPr>
-        <p:spPr>
-          <a:xfrm>
-            <a:off x="9059400" y="5580360"/>
-            <a:ext cx="1560600" cy="645840"/>
-          </a:xfrm>
-          <a:prstGeom prst="round2DiagRect">
-            <a:avLst>
-              <a:gd name="adj1" fmla="val 16667"/>
-              <a:gd name="adj2" fmla="val 0"/>
-            </a:avLst>
-          </a:prstGeom>
-          <a:solidFill>
-            <a:srgbClr val="ffffff"/>
-          </a:solidFill>
-          <a:ln w="28575">
-            <a:solidFill>
-              <a:srgbClr val="000000"/>
-            </a:solidFill>
-          </a:ln>
-        </p:spPr>
-        <p:style>
-          <a:lnRef idx="2">
-            <a:schemeClr val="dk1"/>
-          </a:lnRef>
-          <a:fillRef idx="1">
-            <a:schemeClr val="lt1"/>
-          </a:fillRef>
-          <a:effectRef idx="0">
-            <a:schemeClr val="dk1"/>
-          </a:effectRef>
-          <a:fontRef idx="minor"/>
-        </p:style>
-        <p:txBody>
-          <a:bodyPr lIns="90000" rIns="90000" tIns="45000" bIns="45000" anchor="ctr">
-            <a:noAutofit/>
-          </a:bodyPr>
-          <a:p>
-            <a:pPr algn="ctr" defTabSz="914400">
-              <a:lnSpc>
-                <a:spcPct val="100000"/>
-              </a:lnSpc>
-            </a:pPr>
-            <a:r>
-              <a:rPr b="0" lang="es-ES" sz="1400" strike="noStrike" u="none">
-                <a:solidFill>
-                  <a:srgbClr val="000000"/>
-                </a:solidFill>
-                <a:effectLst/>
-                <a:uFillTx/>
-                <a:latin typeface="Calibri"/>
-              </a:rPr>
-              <a:t>Añadir anotación</a:t>
-            </a:r>
-            <a:endParaRPr b="0" lang="es-ES" sz="1400" strike="noStrike" u="none">
-              <a:solidFill>
-                <a:srgbClr val="000000"/>
-              </a:solidFill>
-              <a:effectLst/>
-              <a:uFillTx/>
-              <a:latin typeface="Arial"/>
-            </a:endParaRPr>
-          </a:p>
-        </p:txBody>
-      </p:sp>
-      <p:cxnSp>
-        <p:nvCxnSpPr>
-          <p:cNvPr id="82" name="Conector recto de flecha 1"/>
-          <p:cNvCxnSpPr>
-            <a:stCxn id="69" idx="3"/>
-            <a:endCxn id="77" idx="1"/>
-          </p:cNvCxnSpPr>
-          <p:nvPr/>
-        </p:nvCxnSpPr>
-        <p:spPr>
-          <a:xfrm>
-            <a:off x="6600600" y="5363640"/>
-            <a:ext cx="479160" cy="540000"/>
-          </a:xfrm>
-          <a:prstGeom prst="straightConnector1">
-            <a:avLst/>
-          </a:prstGeom>
-          <a:ln w="0">
-            <a:solidFill>
-              <a:srgbClr val="4472c4"/>
-            </a:solidFill>
-            <a:tailEnd len="med" type="triangle" w="med"/>
-          </a:ln>
-        </p:spPr>
-      </p:cxnSp>
-      <p:sp>
-        <p:nvSpPr>
-          <p:cNvPr id="83" name="5 Redondear rectángulo de esquina diagonal 2"/>
-          <p:cNvSpPr/>
-          <p:nvPr/>
-        </p:nvSpPr>
-        <p:spPr>
-          <a:xfrm>
-            <a:off x="2759400" y="2196720"/>
-            <a:ext cx="1560600" cy="645840"/>
-          </a:xfrm>
-          <a:prstGeom prst="round2DiagRect">
-            <a:avLst>
-              <a:gd name="adj1" fmla="val 16667"/>
-              <a:gd name="adj2" fmla="val 0"/>
-            </a:avLst>
-          </a:prstGeom>
-          <a:solidFill>
-            <a:srgbClr val="ffffff"/>
-          </a:solidFill>
-          <a:ln w="28575">
-            <a:solidFill>
-              <a:srgbClr val="000000"/>
-            </a:solidFill>
-          </a:ln>
-        </p:spPr>
-        <p:style>
-          <a:lnRef idx="2">
-            <a:schemeClr val="dk1"/>
-          </a:lnRef>
-          <a:fillRef idx="1">
-            <a:schemeClr val="lt1"/>
-          </a:fillRef>
-          <a:effectRef idx="0">
-            <a:schemeClr val="dk1"/>
-          </a:effectRef>
-          <a:fontRef idx="minor"/>
-        </p:style>
-        <p:txBody>
-          <a:bodyPr lIns="90000" rIns="90000" tIns="45000" bIns="45000" anchor="ctr">
-            <a:noAutofit/>
-          </a:bodyPr>
-          <a:p>
-            <a:pPr algn="ctr" defTabSz="914400">
-              <a:lnSpc>
-                <a:spcPct val="100000"/>
-              </a:lnSpc>
-            </a:pPr>
-            <a:r>
-              <a:rPr b="0" lang="es-ES" sz="1400" strike="noStrike" u="none">
-                <a:solidFill>
-                  <a:srgbClr val="000000"/>
-                </a:solidFill>
-                <a:effectLst/>
-                <a:uFillTx/>
-                <a:latin typeface="Calibri"/>
-              </a:rPr>
-              <a:t>Confirmar registro</a:t>
-            </a:r>
-            <a:endParaRPr b="0" lang="es-ES" sz="1400" strike="noStrike" u="none">
-              <a:solidFill>
-                <a:srgbClr val="000000"/>
-              </a:solidFill>
-              <a:effectLst/>
-              <a:uFillTx/>
-              <a:latin typeface="Arial"/>
-            </a:endParaRPr>
-          </a:p>
-        </p:txBody>
-      </p:sp>
-      <p:cxnSp>
-        <p:nvCxnSpPr>
-          <p:cNvPr id="84" name="Conector recto de flecha 3"/>
-          <p:cNvCxnSpPr>
-            <a:stCxn id="60" idx="2"/>
-            <a:endCxn id="83" idx="0"/>
-          </p:cNvCxnSpPr>
-          <p:nvPr/>
-        </p:nvCxnSpPr>
-        <p:spPr>
-          <a:xfrm>
-            <a:off x="3539520" y="1905840"/>
-            <a:ext cx="360" cy="291240"/>
-          </a:xfrm>
-          <a:prstGeom prst="straightConnector1">
-            <a:avLst/>
-          </a:prstGeom>
-          <a:ln w="0">
-            <a:solidFill>
-              <a:srgbClr val="4472c4"/>
-            </a:solidFill>
-            <a:tailEnd len="med" type="triangle" w="med"/>
-          </a:ln>
-        </p:spPr>
-      </p:cxnSp>
-      <p:cxnSp>
-        <p:nvCxnSpPr>
-          <p:cNvPr id="85" name="Conector recto de flecha 7"/>
-          <p:cNvCxnSpPr>
-            <a:stCxn id="83" idx="1"/>
-            <a:endCxn id="59" idx="3"/>
-          </p:cNvCxnSpPr>
-          <p:nvPr/>
-        </p:nvCxnSpPr>
-        <p:spPr>
-          <a:xfrm flipH="1">
-            <a:off x="2397960" y="2519640"/>
-            <a:ext cx="361800" cy="503640"/>
+            <a:off x="7380000" y="5077440"/>
+            <a:ext cx="482760" cy="360"/>
           </a:xfrm>
           <a:prstGeom prst="straightConnector1">
             <a:avLst/>
